--- a/python_course/chapter_08_tuples_and_sets/tuples_and_sets.pptx
+++ b/python_course/chapter_08_tuples_and_sets/tuples_and_sets.pptx
@@ -12,10 +12,6 @@
     <p:sldId id="260" r:id="rId11"/>
     <p:sldId id="261" r:id="rId12"/>
     <p:sldId id="262" r:id="rId13"/>
-    <p:sldId id="263" r:id="rId14"/>
-    <p:sldId id="264" r:id="rId15"/>
-    <p:sldId id="265" r:id="rId16"/>
-    <p:sldId id="266" r:id="rId17"/>
   </p:sldIdLst>
   <p:sldSz cx="12191695" cy="6858000" type="screen4x3"/>
   <p:notesSz cx="6858000" cy="9144000"/>
@@ -3149,8 +3145,8 @@
         </p:nvSpPr>
         <p:spPr>
           <a:xfrm>
-            <a:off x="914400" y="1828800"/>
-            <a:ext cx="10360152" cy="1371600"/>
+            <a:off x="914400" y="2286000"/>
+            <a:ext cx="10360152" cy="1097280"/>
           </a:xfrm>
           <a:prstGeom prst="rect">
             <a:avLst/>
@@ -3164,14 +3160,14 @@
           <a:lstStyle/>
           <a:p>
             <a:pPr algn="ctr">
-              <a:defRPr sz="5400" b="1">
+              <a:defRPr sz="4800" b="1">
                 <a:solidFill>
                   <a:srgbClr val="003366"/>
                 </a:solidFill>
               </a:defRPr>
             </a:pPr>
             <a:r>
-              <a:t>Chapter 8</a:t>
+              <a:t>Chapter 8: Tuples and Sets</a:t>
             </a:r>
           </a:p>
         </p:txBody>
@@ -3185,7 +3181,7 @@
         <p:spPr>
           <a:xfrm>
             <a:off x="914400" y="3657600"/>
-            <a:ext cx="10360152" cy="548640"/>
+            <a:ext cx="10360152" cy="731520"/>
           </a:xfrm>
           <a:prstGeom prst="rect">
             <a:avLst/>
@@ -3206,42 +3202,7 @@
               </a:defRPr>
             </a:pPr>
             <a:r>
-              <a:t>Tuples and Sets - More Data Structures</a:t>
-            </a:r>
-          </a:p>
-        </p:txBody>
-      </p:sp>
-      <p:sp>
-        <p:nvSpPr>
-          <p:cNvPr id="5" name="TextBox 4"/>
-          <p:cNvSpPr txBox="1"/>
-          <p:nvPr/>
-        </p:nvSpPr>
-        <p:spPr>
-          <a:xfrm>
-            <a:off x="914400" y="4297680"/>
-            <a:ext cx="10360152" cy="548640"/>
-          </a:xfrm>
-          <a:prstGeom prst="rect">
-            <a:avLst/>
-          </a:prstGeom>
-          <a:noFill/>
-        </p:spPr>
-        <p:txBody>
-          <a:bodyPr wrap="none">
-            <a:spAutoFit/>
-          </a:bodyPr>
-          <a:lstStyle/>
-          <a:p>
-            <a:pPr algn="ctr">
-              <a:defRPr sz="2800">
-                <a:solidFill>
-                  <a:srgbClr val="4682B4"/>
-                </a:solidFill>
-              </a:defRPr>
-            </a:pPr>
-            <a:r>
-              <a:t>Specialized Tools for Special Jobs</a:t>
+              <a:t>Immutable Sequences and Unique Collections</a:t>
             </a:r>
           </a:p>
         </p:txBody>
@@ -3254,7 +3215,7 @@
 </p:sld>
 </file>
 
-<file path=ppt/slides/slide10.xml><?xml version="1.0" encoding="utf-8"?>
+<file path=ppt/slides/slide2.xml><?xml version="1.0" encoding="utf-8"?>
 <p:sld xmlns:a="http://schemas.openxmlformats.org/drawingml/2006/main" xmlns:p="http://schemas.openxmlformats.org/presentationml/2006/main" xmlns:r="http://schemas.openxmlformats.org/officeDocument/2006/relationships">
   <p:cSld>
     <p:spTree>
@@ -3358,8 +3319,8 @@
         </p:nvSpPr>
         <p:spPr>
           <a:xfrm>
-            <a:off x="457200" y="365760"/>
-            <a:ext cx="10972800" cy="731520"/>
+            <a:off x="457200" y="320040"/>
+            <a:ext cx="10972800" cy="640080"/>
           </a:xfrm>
           <a:prstGeom prst="rect">
             <a:avLst/>
@@ -3373,71 +3334,28 @@
           <a:lstStyle/>
           <a:p>
             <a:pPr>
-              <a:defRPr sz="4000" b="1">
+              <a:defRPr sz="3600" b="1">
                 <a:solidFill>
                   <a:srgbClr val="003366"/>
                 </a:solidFill>
               </a:defRPr>
             </a:pPr>
             <a:r>
-              <a:t>When to Use Sets?</a:t>
-            </a:r>
-          </a:p>
-        </p:txBody>
-      </p:sp>
-      <p:sp>
-        <p:nvSpPr>
-          <p:cNvPr id="5" name="Rectangle 4"/>
-          <p:cNvSpPr/>
+              <a:t>Tuples: Immutable Sequences</a:t>
+            </a:r>
+          </a:p>
+        </p:txBody>
+      </p:sp>
+      <p:sp>
+        <p:nvSpPr>
+          <p:cNvPr id="5" name="TextBox 4"/>
+          <p:cNvSpPr txBox="1"/>
           <p:nvPr/>
         </p:nvSpPr>
         <p:spPr>
           <a:xfrm>
-            <a:off x="457200" y="1005840"/>
-            <a:ext cx="1828800" cy="45720"/>
-          </a:xfrm>
-          <a:prstGeom prst="rect">
-            <a:avLst/>
-          </a:prstGeom>
-          <a:solidFill>
-            <a:srgbClr val="0066CC"/>
-          </a:solidFill>
-          <a:ln>
-            <a:noFill/>
-          </a:ln>
-        </p:spPr>
-        <p:style>
-          <a:lnRef idx="1">
-            <a:schemeClr val="accent1"/>
-          </a:lnRef>
-          <a:fillRef idx="3">
-            <a:schemeClr val="accent1"/>
-          </a:fillRef>
-          <a:effectRef idx="2">
-            <a:schemeClr val="accent1"/>
-          </a:effectRef>
-          <a:fontRef idx="minor">
-            <a:schemeClr val="lt1"/>
-          </a:fontRef>
-        </p:style>
-        <p:txBody>
-          <a:bodyPr rtlCol="0" anchor="ctr"/>
-          <a:lstStyle/>
-          <a:p>
-            <a:pPr algn="ctr"/>
-          </a:p>
-        </p:txBody>
-      </p:sp>
-      <p:sp>
-        <p:nvSpPr>
-          <p:cNvPr id="6" name="TextBox 5"/>
-          <p:cNvSpPr txBox="1"/>
-          <p:nvPr/>
-        </p:nvSpPr>
-        <p:spPr>
-          <a:xfrm>
-            <a:off x="640080" y="1371600"/>
-            <a:ext cx="10789920" cy="4572000"/>
+            <a:off x="640080" y="1188720"/>
+            <a:ext cx="10789920" cy="5303520"/>
           </a:xfrm>
           <a:prstGeom prst="rect">
             <a:avLst/>
@@ -3452,136 +3370,241 @@
           <a:p>
             <a:pPr>
               <a:spcAft>
-                <a:spcPts val="800"/>
-              </a:spcAft>
-              <a:defRPr sz="2000" b="1">
-                <a:solidFill>
-                  <a:srgbClr val="333333"/>
-                </a:solidFill>
-              </a:defRPr>
-            </a:pPr>
-            <a:r>
-              <a:t>✓ Remove Duplicates</a:t>
-            </a:r>
-          </a:p>
-          <a:p>
-            <a:pPr>
-              <a:spcAft>
-                <a:spcPts val="800"/>
-              </a:spcAft>
-              <a:defRPr sz="2000" b="1">
-                <a:solidFill>
-                  <a:srgbClr val="333333"/>
-                </a:solidFill>
-              </a:defRPr>
-            </a:pPr>
-            <a:r>
-              <a:t>Clean up lists with repeated items</a:t>
-            </a:r>
-          </a:p>
-          <a:p>
-            <a:pPr>
-              <a:spcAft>
-                <a:spcPts val="800"/>
-              </a:spcAft>
-              <a:defRPr sz="2000" b="1">
-                <a:solidFill>
-                  <a:srgbClr val="333333"/>
-                </a:solidFill>
-              </a:defRPr>
-            </a:pPr>
-            <a:r>
-              <a:t>✓ Fast Membership Testing</a:t>
-            </a:r>
-          </a:p>
-          <a:p>
-            <a:pPr>
-              <a:spcAft>
-                <a:spcPts val="800"/>
-              </a:spcAft>
-              <a:defRPr sz="2000" b="1">
-                <a:solidFill>
-                  <a:srgbClr val="333333"/>
-                </a:solidFill>
-              </a:defRPr>
-            </a:pPr>
-            <a:r>
-              <a:t>Check if item exists (faster than lists)</a:t>
-            </a:r>
-          </a:p>
-          <a:p>
-            <a:pPr>
-              <a:spcAft>
-                <a:spcPts val="800"/>
-              </a:spcAft>
-              <a:defRPr sz="2000" b="1">
-                <a:solidFill>
-                  <a:srgbClr val="333333"/>
-                </a:solidFill>
-              </a:defRPr>
-            </a:pPr>
-            <a:r>
-              <a:t>✓ Set Operations</a:t>
-            </a:r>
-          </a:p>
-          <a:p>
-            <a:pPr>
-              <a:spcAft>
-                <a:spcPts val="800"/>
-              </a:spcAft>
-              <a:defRPr sz="2000" b="1">
-                <a:solidFill>
-                  <a:srgbClr val="333333"/>
-                </a:solidFill>
-              </a:defRPr>
-            </a:pPr>
-            <a:r>
-              <a:t>Find common or unique elements</a:t>
-            </a:r>
-          </a:p>
-          <a:p>
-            <a:pPr>
-              <a:spcAft>
-                <a:spcPts val="800"/>
-              </a:spcAft>
-              <a:defRPr sz="2000" b="1">
-                <a:solidFill>
-                  <a:srgbClr val="333333"/>
-                </a:solidFill>
-              </a:defRPr>
-            </a:pPr>
-            <a:r>
-              <a:t>✓ Unique Collections</a:t>
-            </a:r>
-          </a:p>
-          <a:p>
-            <a:pPr>
-              <a:spcAft>
-                <a:spcPts val="800"/>
-              </a:spcAft>
-              <a:defRPr sz="2000" b="1">
-                <a:solidFill>
-                  <a:srgbClr val="333333"/>
-                </a:solidFill>
-              </a:defRPr>
-            </a:pPr>
-            <a:r>
-              <a:t>Store items that must be unique</a:t>
-            </a:r>
-          </a:p>
-          <a:p>
-            <a:pPr>
-              <a:spcAft>
-                <a:spcPts val="800"/>
-              </a:spcAft>
-              <a:defRPr sz="2000" b="1">
-                <a:solidFill>
-                  <a:srgbClr val="333333"/>
-                </a:solidFill>
-              </a:defRPr>
-            </a:pPr>
-            <a:r>
-              <a:t>Remember:Sets are unordered - you can't access by index!</a:t>
+                <a:spcPts val="600"/>
+              </a:spcAft>
+              <a:defRPr sz="1600">
+                <a:solidFill>
+                  <a:srgbClr val="333333"/>
+                </a:solidFill>
+              </a:defRPr>
+            </a:pPr>
+            <a:r>
+              <a:t>What Are Tuples?</a:t>
+            </a:r>
+          </a:p>
+          <a:p>
+            <a:pPr lvl="1">
+              <a:spcAft>
+                <a:spcPts val="400"/>
+              </a:spcAft>
+              <a:defRPr sz="1600">
+                <a:solidFill>
+                  <a:srgbClr val="333333"/>
+                </a:solidFill>
+              </a:defRPr>
+            </a:pPr>
+            <a:r>
+              <a:t>• Ordered collections</a:t>
+            </a:r>
+          </a:p>
+          <a:p>
+            <a:pPr lvl="1">
+              <a:spcAft>
+                <a:spcPts val="400"/>
+              </a:spcAft>
+              <a:defRPr sz="1600">
+                <a:solidFill>
+                  <a:srgbClr val="333333"/>
+                </a:solidFill>
+              </a:defRPr>
+            </a:pPr>
+            <a:r>
+              <a:t>• Immutable (cannot be changed)</a:t>
+            </a:r>
+          </a:p>
+          <a:p>
+            <a:pPr lvl="1">
+              <a:spcAft>
+                <a:spcPts val="400"/>
+              </a:spcAft>
+              <a:defRPr sz="1600">
+                <a:solidFill>
+                  <a:srgbClr val="333333"/>
+                </a:solidFill>
+              </a:defRPr>
+            </a:pPr>
+            <a:r>
+              <a:t>• Can contain any types</a:t>
+            </a:r>
+          </a:p>
+          <a:p>
+            <a:pPr lvl="1">
+              <a:spcAft>
+                <a:spcPts val="400"/>
+              </a:spcAft>
+              <a:defRPr sz="1600">
+                <a:solidFill>
+                  <a:srgbClr val="333333"/>
+                </a:solidFill>
+              </a:defRPr>
+            </a:pPr>
+            <a:r>
+              <a:t>• Indexed like lists</a:t>
+            </a:r>
+          </a:p>
+          <a:p>
+            <a:pPr>
+              <a:spcAft>
+                <a:spcPts val="600"/>
+              </a:spcAft>
+              <a:defRPr b="1" sz="2000">
+                <a:solidFill>
+                  <a:srgbClr val="333333"/>
+                </a:solidFill>
+              </a:defRPr>
+            </a:pPr>
+            <a:r>
+              <a:t>Creating:</a:t>
+            </a:r>
+          </a:p>
+          <a:p>
+            <a:pPr>
+              <a:spcAft>
+                <a:spcPts val="600"/>
+              </a:spcAft>
+              <a:defRPr sz="1600">
+                <a:solidFill>
+                  <a:srgbClr val="333333"/>
+                </a:solidFill>
+              </a:defRPr>
+            </a:pPr>
+            <a:r>
+              <a:t>point = (10, 20)</a:t>
+            </a:r>
+          </a:p>
+          <a:p>
+            <a:pPr>
+              <a:spcAft>
+                <a:spcPts val="600"/>
+              </a:spcAft>
+              <a:defRPr sz="1600">
+                <a:solidFill>
+                  <a:srgbClr val="333333"/>
+                </a:solidFill>
+              </a:defRPr>
+            </a:pPr>
+            <a:r>
+              <a:t>person = ("Alice", 25, "NYC")</a:t>
+            </a:r>
+          </a:p>
+          <a:p>
+            <a:pPr>
+              <a:spcAft>
+                <a:spcPts val="600"/>
+              </a:spcAft>
+              <a:defRPr sz="1600">
+                <a:solidFill>
+                  <a:srgbClr val="333333"/>
+                </a:solidFill>
+              </a:defRPr>
+            </a:pPr>
+            <a:r>
+              <a:t>single = (42,)  # Note comma!</a:t>
+            </a:r>
+          </a:p>
+          <a:p>
+            <a:pPr>
+              <a:spcAft>
+                <a:spcPts val="600"/>
+              </a:spcAft>
+              <a:defRPr sz="1600">
+                <a:solidFill>
+                  <a:srgbClr val="333333"/>
+                </a:solidFill>
+              </a:defRPr>
+            </a:pPr>
+            <a:r>
+              <a:t>empty = ()</a:t>
+            </a:r>
+          </a:p>
+          <a:p>
+            <a:pPr>
+              <a:spcAft>
+                <a:spcPts val="600"/>
+              </a:spcAft>
+              <a:defRPr sz="1600">
+                <a:solidFill>
+                  <a:srgbClr val="333333"/>
+                </a:solidFill>
+              </a:defRPr>
+            </a:pPr>
+            <a:r>
+              <a:t>Why Use Tuples?</a:t>
+            </a:r>
+          </a:p>
+          <a:p>
+            <a:pPr lvl="1">
+              <a:spcAft>
+                <a:spcPts val="400"/>
+              </a:spcAft>
+              <a:defRPr sz="1600">
+                <a:solidFill>
+                  <a:srgbClr val="333333"/>
+                </a:solidFill>
+              </a:defRPr>
+            </a:pPr>
+            <a:r>
+              <a:t>• Protect data from changes</a:t>
+            </a:r>
+          </a:p>
+          <a:p>
+            <a:pPr lvl="1">
+              <a:spcAft>
+                <a:spcPts val="400"/>
+              </a:spcAft>
+              <a:defRPr sz="1600">
+                <a:solidFill>
+                  <a:srgbClr val="333333"/>
+                </a:solidFill>
+              </a:defRPr>
+            </a:pPr>
+            <a:r>
+              <a:t>• Use as dictionary keys</a:t>
+            </a:r>
+          </a:p>
+          <a:p>
+            <a:pPr lvl="1">
+              <a:spcAft>
+                <a:spcPts val="400"/>
+              </a:spcAft>
+              <a:defRPr sz="1600">
+                <a:solidFill>
+                  <a:srgbClr val="333333"/>
+                </a:solidFill>
+              </a:defRPr>
+            </a:pPr>
+            <a:r>
+              <a:t>• Return multiple values</a:t>
+            </a:r>
+          </a:p>
+          <a:p>
+            <a:pPr lvl="1">
+              <a:spcAft>
+                <a:spcPts val="400"/>
+              </a:spcAft>
+              <a:defRPr sz="1600">
+                <a:solidFill>
+                  <a:srgbClr val="333333"/>
+                </a:solidFill>
+              </a:defRPr>
+            </a:pPr>
+            <a:r>
+              <a:t>• Faster than lists</a:t>
+            </a:r>
+          </a:p>
+          <a:p>
+            <a:pPr lvl="1">
+              <a:spcAft>
+                <a:spcPts val="400"/>
+              </a:spcAft>
+              <a:defRPr sz="1600">
+                <a:solidFill>
+                  <a:srgbClr val="333333"/>
+                </a:solidFill>
+              </a:defRPr>
+            </a:pPr>
+            <a:r>
+              <a:t>• Less memory</a:t>
             </a:r>
           </a:p>
         </p:txBody>
@@ -3594,173 +3617,7 @@
 </p:sld>
 </file>
 
-<file path=ppt/slides/slide11.xml><?xml version="1.0" encoding="utf-8"?>
-<p:sld xmlns:a="http://schemas.openxmlformats.org/drawingml/2006/main" xmlns:p="http://schemas.openxmlformats.org/presentationml/2006/main" xmlns:r="http://schemas.openxmlformats.org/officeDocument/2006/relationships">
-  <p:cSld>
-    <p:spTree>
-      <p:nvGrpSpPr>
-        <p:cNvPr id="1" name=""/>
-        <p:cNvGrpSpPr/>
-        <p:nvPr/>
-      </p:nvGrpSpPr>
-      <p:grpSpPr/>
-      <p:sp>
-        <p:nvSpPr>
-          <p:cNvPr id="2" name="Rectangle 1"/>
-          <p:cNvSpPr/>
-          <p:nvPr/>
-        </p:nvSpPr>
-        <p:spPr>
-          <a:xfrm>
-            <a:off x="0" y="0"/>
-            <a:ext cx="12191695" cy="6858000"/>
-          </a:xfrm>
-          <a:prstGeom prst="rect">
-            <a:avLst/>
-          </a:prstGeom>
-          <a:solidFill>
-            <a:srgbClr val="F0F8FF"/>
-          </a:solidFill>
-          <a:ln>
-            <a:noFill/>
-          </a:ln>
-        </p:spPr>
-        <p:style>
-          <a:lnRef idx="1">
-            <a:schemeClr val="accent1"/>
-          </a:lnRef>
-          <a:fillRef idx="3">
-            <a:schemeClr val="accent1"/>
-          </a:fillRef>
-          <a:effectRef idx="2">
-            <a:schemeClr val="accent1"/>
-          </a:effectRef>
-          <a:fontRef idx="minor">
-            <a:schemeClr val="lt1"/>
-          </a:fontRef>
-        </p:style>
-        <p:txBody>
-          <a:bodyPr rtlCol="0" anchor="ctr"/>
-          <a:lstStyle/>
-          <a:p>
-            <a:pPr algn="ctr"/>
-          </a:p>
-        </p:txBody>
-      </p:sp>
-      <p:sp>
-        <p:nvSpPr>
-          <p:cNvPr id="3" name="TextBox 2"/>
-          <p:cNvSpPr txBox="1"/>
-          <p:nvPr/>
-        </p:nvSpPr>
-        <p:spPr>
-          <a:xfrm>
-            <a:off x="914400" y="1828800"/>
-            <a:ext cx="10360152" cy="1371600"/>
-          </a:xfrm>
-          <a:prstGeom prst="rect">
-            <a:avLst/>
-          </a:prstGeom>
-          <a:noFill/>
-        </p:spPr>
-        <p:txBody>
-          <a:bodyPr wrap="none">
-            <a:spAutoFit/>
-          </a:bodyPr>
-          <a:lstStyle/>
-          <a:p>
-            <a:pPr algn="ctr">
-              <a:defRPr sz="5400" b="1">
-                <a:solidFill>
-                  <a:srgbClr val="003366"/>
-                </a:solidFill>
-              </a:defRPr>
-            </a:pPr>
-            <a:r>
-              <a:t>Ready to Code!</a:t>
-            </a:r>
-          </a:p>
-        </p:txBody>
-      </p:sp>
-      <p:sp>
-        <p:nvSpPr>
-          <p:cNvPr id="4" name="TextBox 3"/>
-          <p:cNvSpPr txBox="1"/>
-          <p:nvPr/>
-        </p:nvSpPr>
-        <p:spPr>
-          <a:xfrm>
-            <a:off x="914400" y="3657600"/>
-            <a:ext cx="10360152" cy="548640"/>
-          </a:xfrm>
-          <a:prstGeom prst="rect">
-            <a:avLst/>
-          </a:prstGeom>
-          <a:noFill/>
-        </p:spPr>
-        <p:txBody>
-          <a:bodyPr wrap="none">
-            <a:spAutoFit/>
-          </a:bodyPr>
-          <a:lstStyle/>
-          <a:p>
-            <a:pPr algn="ctr">
-              <a:defRPr sz="2800">
-                <a:solidFill>
-                  <a:srgbClr val="4682B4"/>
-                </a:solidFill>
-              </a:defRPr>
-            </a:pPr>
-            <a:r>
-              <a:t>Open the practice notebook to master tuples and sets</a:t>
-            </a:r>
-          </a:p>
-        </p:txBody>
-      </p:sp>
-      <p:sp>
-        <p:nvSpPr>
-          <p:cNvPr id="5" name="TextBox 4"/>
-          <p:cNvSpPr txBox="1"/>
-          <p:nvPr/>
-        </p:nvSpPr>
-        <p:spPr>
-          <a:xfrm>
-            <a:off x="914400" y="4297680"/>
-            <a:ext cx="10360152" cy="548640"/>
-          </a:xfrm>
-          <a:prstGeom prst="rect">
-            <a:avLst/>
-          </a:prstGeom>
-          <a:noFill/>
-        </p:spPr>
-        <p:txBody>
-          <a:bodyPr wrap="none">
-            <a:spAutoFit/>
-          </a:bodyPr>
-          <a:lstStyle/>
-          <a:p>
-            <a:pPr algn="ctr">
-              <a:defRPr sz="2800">
-                <a:solidFill>
-                  <a:srgbClr val="4682B4"/>
-                </a:solidFill>
-              </a:defRPr>
-            </a:pPr>
-            <a:r>
-              <a:t>Tuples for protection, Sets for uniqueness!</a:t>
-            </a:r>
-          </a:p>
-        </p:txBody>
-      </p:sp>
-    </p:spTree>
-  </p:cSld>
-  <p:clrMapOvr>
-    <a:masterClrMapping/>
-  </p:clrMapOvr>
-</p:sld>
-</file>
-
-<file path=ppt/slides/slide2.xml><?xml version="1.0" encoding="utf-8"?>
+<file path=ppt/slides/slide3.xml><?xml version="1.0" encoding="utf-8"?>
 <p:sld xmlns:a="http://schemas.openxmlformats.org/drawingml/2006/main" xmlns:p="http://schemas.openxmlformats.org/presentationml/2006/main" xmlns:r="http://schemas.openxmlformats.org/officeDocument/2006/relationships">
   <p:cSld>
     <p:spTree>
@@ -3864,8 +3721,8 @@
         </p:nvSpPr>
         <p:spPr>
           <a:xfrm>
-            <a:off x="457200" y="365760"/>
-            <a:ext cx="10972800" cy="731520"/>
+            <a:off x="457200" y="320040"/>
+            <a:ext cx="10972800" cy="640080"/>
           </a:xfrm>
           <a:prstGeom prst="rect">
             <a:avLst/>
@@ -3879,71 +3736,28 @@
           <a:lstStyle/>
           <a:p>
             <a:pPr>
-              <a:defRPr sz="4000" b="1">
+              <a:defRPr sz="3600" b="1">
                 <a:solidFill>
                   <a:srgbClr val="003366"/>
                 </a:solidFill>
               </a:defRPr>
             </a:pPr>
             <a:r>
-              <a:t>What Are Tuples?</a:t>
-            </a:r>
-          </a:p>
-        </p:txBody>
-      </p:sp>
-      <p:sp>
-        <p:nvSpPr>
-          <p:cNvPr id="5" name="Rectangle 4"/>
-          <p:cNvSpPr/>
+              <a:t>Working with Tuples</a:t>
+            </a:r>
+          </a:p>
+        </p:txBody>
+      </p:sp>
+      <p:sp>
+        <p:nvSpPr>
+          <p:cNvPr id="5" name="TextBox 4"/>
+          <p:cNvSpPr txBox="1"/>
           <p:nvPr/>
         </p:nvSpPr>
         <p:spPr>
           <a:xfrm>
-            <a:off x="457200" y="1005840"/>
-            <a:ext cx="1828800" cy="45720"/>
-          </a:xfrm>
-          <a:prstGeom prst="rect">
-            <a:avLst/>
-          </a:prstGeom>
-          <a:solidFill>
-            <a:srgbClr val="0066CC"/>
-          </a:solidFill>
-          <a:ln>
-            <a:noFill/>
-          </a:ln>
-        </p:spPr>
-        <p:style>
-          <a:lnRef idx="1">
-            <a:schemeClr val="accent1"/>
-          </a:lnRef>
-          <a:fillRef idx="3">
-            <a:schemeClr val="accent1"/>
-          </a:fillRef>
-          <a:effectRef idx="2">
-            <a:schemeClr val="accent1"/>
-          </a:effectRef>
-          <a:fontRef idx="minor">
-            <a:schemeClr val="lt1"/>
-          </a:fontRef>
-        </p:style>
-        <p:txBody>
-          <a:bodyPr rtlCol="0" anchor="ctr"/>
-          <a:lstStyle/>
-          <a:p>
-            <a:pPr algn="ctr"/>
-          </a:p>
-        </p:txBody>
-      </p:sp>
-      <p:sp>
-        <p:nvSpPr>
-          <p:cNvPr id="6" name="TextBox 5"/>
-          <p:cNvSpPr txBox="1"/>
-          <p:nvPr/>
-        </p:nvSpPr>
-        <p:spPr>
-          <a:xfrm>
-            <a:off x="640080" y="1371600"/>
-            <a:ext cx="10789920" cy="4572000"/>
+            <a:off x="640080" y="1188720"/>
+            <a:ext cx="10789920" cy="5303520"/>
           </a:xfrm>
           <a:prstGeom prst="rect">
             <a:avLst/>
@@ -3958,121 +3772,271 @@
           <a:p>
             <a:pPr>
               <a:spcAft>
-                <a:spcPts val="800"/>
-              </a:spcAft>
-              <a:defRPr sz="2000" b="1">
-                <a:solidFill>
-                  <a:srgbClr val="333333"/>
-                </a:solidFill>
-              </a:defRPr>
-            </a:pPr>
-            <a:r>
-              <a:t>Tuples are like lists, butimmutable(cannot be changed)</a:t>
-            </a:r>
-          </a:p>
-          <a:p>
-            <a:pPr>
-              <a:spcAft>
-                <a:spcPts val="800"/>
-              </a:spcAft>
-              <a:defRPr sz="2000" b="1">
-                <a:solidFill>
-                  <a:srgbClr val="333333"/>
-                </a:solidFill>
-              </a:defRPr>
-            </a:pPr>
-            <a:r>
-              <a:t>Lists</a:t>
-            </a:r>
-          </a:p>
-          <a:p>
-            <a:pPr>
-              <a:spcAft>
-                <a:spcPts val="800"/>
-              </a:spcAft>
-              <a:defRPr sz="2000" b="1">
-                <a:solidFill>
-                  <a:srgbClr val="333333"/>
-                </a:solidFill>
-              </a:defRPr>
-            </a:pPr>
-            <a:r>
-              <a:t>Tuples</a:t>
-            </a:r>
-          </a:p>
-          <a:p>
-            <a:pPr>
-              <a:spcAft>
-                <a:spcPts val="800"/>
-              </a:spcAft>
-              <a:defRPr sz="2000" b="1">
-                <a:solidFill>
-                  <a:srgbClr val="333333"/>
-                </a:solidFill>
-              </a:defRPr>
-            </a:pPr>
-            <a:r>
-              <a:t>Key Difference:Use parentheses ( ) for tuples, brackets [ ] for lists</a:t>
-            </a:r>
-          </a:p>
-          <a:p>
-            <a:pPr>
-              <a:spcAft>
-                <a:spcPts val="800"/>
-              </a:spcAft>
-              <a:defRPr sz="2000" b="1">
-                <a:solidFill>
-                  <a:srgbClr val="333333"/>
-                </a:solidFill>
-              </a:defRPr>
-            </a:pPr>
-            <a:r>
-              <a:t>Why Use Tuples?</a:t>
-            </a:r>
-          </a:p>
-          <a:p>
-            <a:pPr lvl="1">
-              <a:spcAft>
-                <a:spcPts val="800"/>
-              </a:spcAft>
-              <a:defRPr sz="1800">
-                <a:solidFill>
-                  <a:srgbClr val="333333"/>
-                </a:solidFill>
-              </a:defRPr>
-            </a:pPr>
-            <a:r>
-              <a:t>• ✓ Protect data from accidental changes</a:t>
-            </a:r>
-          </a:p>
-          <a:p>
-            <a:pPr lvl="1">
-              <a:spcAft>
-                <a:spcPts val="800"/>
-              </a:spcAft>
-              <a:defRPr sz="1800">
-                <a:solidFill>
-                  <a:srgbClr val="333333"/>
-                </a:solidFill>
-              </a:defRPr>
-            </a:pPr>
-            <a:r>
-              <a:t>• ✓ Faster than lists</a:t>
-            </a:r>
-          </a:p>
-          <a:p>
-            <a:pPr lvl="1">
-              <a:spcAft>
-                <a:spcPts val="800"/>
-              </a:spcAft>
-              <a:defRPr sz="1800">
-                <a:solidFill>
-                  <a:srgbClr val="333333"/>
-                </a:solidFill>
-              </a:defRPr>
-            </a:pPr>
-            <a:r>
-              <a:t>• ✓ Can be used as dictionary keys</a:t>
+                <a:spcPts val="600"/>
+              </a:spcAft>
+              <a:defRPr b="1" sz="2000">
+                <a:solidFill>
+                  <a:srgbClr val="333333"/>
+                </a:solidFill>
+              </a:defRPr>
+            </a:pPr>
+            <a:r>
+              <a:t>Accessing:</a:t>
+            </a:r>
+          </a:p>
+          <a:p>
+            <a:pPr>
+              <a:spcAft>
+                <a:spcPts val="600"/>
+              </a:spcAft>
+              <a:defRPr sz="1600">
+                <a:solidFill>
+                  <a:srgbClr val="333333"/>
+                </a:solidFill>
+              </a:defRPr>
+            </a:pPr>
+            <a:r>
+              <a:t>point = (10, 20, 30)</a:t>
+            </a:r>
+          </a:p>
+          <a:p>
+            <a:pPr>
+              <a:spcAft>
+                <a:spcPts val="600"/>
+              </a:spcAft>
+              <a:defRPr sz="1600">
+                <a:solidFill>
+                  <a:srgbClr val="333333"/>
+                </a:solidFill>
+              </a:defRPr>
+            </a:pPr>
+            <a:r>
+              <a:t>point[0]  # 10</a:t>
+            </a:r>
+          </a:p>
+          <a:p>
+            <a:pPr>
+              <a:spcAft>
+                <a:spcPts val="600"/>
+              </a:spcAft>
+              <a:defRPr sz="1600">
+                <a:solidFill>
+                  <a:srgbClr val="333333"/>
+                </a:solidFill>
+              </a:defRPr>
+            </a:pPr>
+            <a:r>
+              <a:t>point[-1]  # 30</a:t>
+            </a:r>
+          </a:p>
+          <a:p>
+            <a:pPr>
+              <a:spcAft>
+                <a:spcPts val="600"/>
+              </a:spcAft>
+              <a:defRPr b="1" sz="2000">
+                <a:solidFill>
+                  <a:srgbClr val="333333"/>
+                </a:solidFill>
+              </a:defRPr>
+            </a:pPr>
+            <a:r>
+              <a:t>point[0:2]  # (10, 20)</a:t>
+            </a:r>
+          </a:p>
+          <a:p>
+            <a:pPr>
+              <a:spcAft>
+                <a:spcPts val="600"/>
+              </a:spcAft>
+              <a:defRPr b="1" sz="2000">
+                <a:solidFill>
+                  <a:srgbClr val="333333"/>
+                </a:solidFill>
+              </a:defRPr>
+            </a:pPr>
+            <a:r>
+              <a:t>Unpacking:</a:t>
+            </a:r>
+          </a:p>
+          <a:p>
+            <a:pPr>
+              <a:spcAft>
+                <a:spcPts val="600"/>
+              </a:spcAft>
+              <a:defRPr sz="1600">
+                <a:solidFill>
+                  <a:srgbClr val="333333"/>
+                </a:solidFill>
+              </a:defRPr>
+            </a:pPr>
+            <a:r>
+              <a:t>x, y, z = point</a:t>
+            </a:r>
+          </a:p>
+          <a:p>
+            <a:pPr>
+              <a:spcAft>
+                <a:spcPts val="600"/>
+              </a:spcAft>
+              <a:defRPr sz="1600">
+                <a:solidFill>
+                  <a:srgbClr val="333333"/>
+                </a:solidFill>
+              </a:defRPr>
+            </a:pPr>
+            <a:r>
+              <a:t>first, *rest = (1, 2, 3, 4)</a:t>
+            </a:r>
+          </a:p>
+          <a:p>
+            <a:pPr>
+              <a:spcAft>
+                <a:spcPts val="600"/>
+              </a:spcAft>
+              <a:defRPr b="1" sz="2000">
+                <a:solidFill>
+                  <a:srgbClr val="333333"/>
+                </a:solidFill>
+              </a:defRPr>
+            </a:pPr>
+            <a:r>
+              <a:t>Operations:</a:t>
+            </a:r>
+          </a:p>
+          <a:p>
+            <a:pPr>
+              <a:spcAft>
+                <a:spcPts val="600"/>
+              </a:spcAft>
+              <a:defRPr sz="1600">
+                <a:solidFill>
+                  <a:srgbClr val="333333"/>
+                </a:solidFill>
+              </a:defRPr>
+            </a:pPr>
+            <a:r>
+              <a:t>len(point)  # 3</a:t>
+            </a:r>
+          </a:p>
+          <a:p>
+            <a:pPr>
+              <a:spcAft>
+                <a:spcPts val="600"/>
+              </a:spcAft>
+              <a:defRPr sz="1600">
+                <a:solidFill>
+                  <a:srgbClr val="333333"/>
+                </a:solidFill>
+              </a:defRPr>
+            </a:pPr>
+            <a:r>
+              <a:t>20 in point  # True</a:t>
+            </a:r>
+          </a:p>
+          <a:p>
+            <a:pPr>
+              <a:spcAft>
+                <a:spcPts val="600"/>
+              </a:spcAft>
+              <a:defRPr sz="1600">
+                <a:solidFill>
+                  <a:srgbClr val="333333"/>
+                </a:solidFill>
+              </a:defRPr>
+            </a:pPr>
+            <a:r>
+              <a:t>(1, 2) + (3, 4)  # (1, 2, 3, 4)</a:t>
+            </a:r>
+          </a:p>
+          <a:p>
+            <a:pPr>
+              <a:spcAft>
+                <a:spcPts val="600"/>
+              </a:spcAft>
+              <a:defRPr sz="1600">
+                <a:solidFill>
+                  <a:srgbClr val="333333"/>
+                </a:solidFill>
+              </a:defRPr>
+            </a:pPr>
+            <a:r>
+              <a:t>(1, 2) * 3  # (1, 2, 1, 2, 1, 2)</a:t>
+            </a:r>
+          </a:p>
+          <a:p>
+            <a:pPr>
+              <a:spcAft>
+                <a:spcPts val="600"/>
+              </a:spcAft>
+              <a:defRPr b="1" sz="2000">
+                <a:solidFill>
+                  <a:srgbClr val="333333"/>
+                </a:solidFill>
+              </a:defRPr>
+            </a:pPr>
+            <a:r>
+              <a:t>Methods:</a:t>
+            </a:r>
+          </a:p>
+          <a:p>
+            <a:pPr>
+              <a:spcAft>
+                <a:spcPts val="600"/>
+              </a:spcAft>
+              <a:defRPr sz="1600">
+                <a:solidFill>
+                  <a:srgbClr val="333333"/>
+                </a:solidFill>
+              </a:defRPr>
+            </a:pPr>
+            <a:r>
+              <a:t>point.count(10)</a:t>
+            </a:r>
+          </a:p>
+          <a:p>
+            <a:pPr>
+              <a:spcAft>
+                <a:spcPts val="600"/>
+              </a:spcAft>
+              <a:defRPr sz="1600">
+                <a:solidFill>
+                  <a:srgbClr val="333333"/>
+                </a:solidFill>
+              </a:defRPr>
+            </a:pPr>
+            <a:r>
+              <a:t>point.index(20)</a:t>
+            </a:r>
+          </a:p>
+          <a:p>
+            <a:pPr>
+              <a:spcAft>
+                <a:spcPts val="600"/>
+              </a:spcAft>
+              <a:defRPr b="1" sz="2000">
+                <a:solidFill>
+                  <a:srgbClr val="333333"/>
+                </a:solidFill>
+              </a:defRPr>
+            </a:pPr>
+            <a:r>
+              <a:t>Cannot Modify:</a:t>
+            </a:r>
+          </a:p>
+          <a:p>
+            <a:pPr>
+              <a:spcAft>
+                <a:spcPts val="600"/>
+              </a:spcAft>
+              <a:defRPr sz="1600">
+                <a:solidFill>
+                  <a:srgbClr val="333333"/>
+                </a:solidFill>
+              </a:defRPr>
+            </a:pPr>
+            <a:r>
+              <a:t>point[0] = 15  # ERROR!</a:t>
             </a:r>
           </a:p>
         </p:txBody>
@@ -4085,7 +4049,7 @@
 </p:sld>
 </file>
 
-<file path=ppt/slides/slide3.xml><?xml version="1.0" encoding="utf-8"?>
+<file path=ppt/slides/slide4.xml><?xml version="1.0" encoding="utf-8"?>
 <p:sld xmlns:a="http://schemas.openxmlformats.org/drawingml/2006/main" xmlns:p="http://schemas.openxmlformats.org/presentationml/2006/main" xmlns:r="http://schemas.openxmlformats.org/officeDocument/2006/relationships">
   <p:cSld>
     <p:spTree>
@@ -4189,8 +4153,8 @@
         </p:nvSpPr>
         <p:spPr>
           <a:xfrm>
-            <a:off x="457200" y="365760"/>
-            <a:ext cx="10972800" cy="731520"/>
+            <a:off x="457200" y="320040"/>
+            <a:ext cx="10972800" cy="640080"/>
           </a:xfrm>
           <a:prstGeom prst="rect">
             <a:avLst/>
@@ -4204,71 +4168,28 @@
           <a:lstStyle/>
           <a:p>
             <a:pPr>
-              <a:defRPr sz="4000" b="1">
+              <a:defRPr sz="3600" b="1">
                 <a:solidFill>
                   <a:srgbClr val="003366"/>
                 </a:solidFill>
               </a:defRPr>
             </a:pPr>
             <a:r>
-              <a:t>Creating and Accessing Tuples</a:t>
-            </a:r>
-          </a:p>
-        </p:txBody>
-      </p:sp>
-      <p:sp>
-        <p:nvSpPr>
-          <p:cNvPr id="5" name="Rectangle 4"/>
-          <p:cNvSpPr/>
+              <a:t>Sets: Unique Collections</a:t>
+            </a:r>
+          </a:p>
+        </p:txBody>
+      </p:sp>
+      <p:sp>
+        <p:nvSpPr>
+          <p:cNvPr id="5" name="TextBox 4"/>
+          <p:cNvSpPr txBox="1"/>
           <p:nvPr/>
         </p:nvSpPr>
         <p:spPr>
           <a:xfrm>
-            <a:off x="457200" y="1005840"/>
-            <a:ext cx="1828800" cy="45720"/>
-          </a:xfrm>
-          <a:prstGeom prst="rect">
-            <a:avLst/>
-          </a:prstGeom>
-          <a:solidFill>
-            <a:srgbClr val="0066CC"/>
-          </a:solidFill>
-          <a:ln>
-            <a:noFill/>
-          </a:ln>
-        </p:spPr>
-        <p:style>
-          <a:lnRef idx="1">
-            <a:schemeClr val="accent1"/>
-          </a:lnRef>
-          <a:fillRef idx="3">
-            <a:schemeClr val="accent1"/>
-          </a:fillRef>
-          <a:effectRef idx="2">
-            <a:schemeClr val="accent1"/>
-          </a:effectRef>
-          <a:fontRef idx="minor">
-            <a:schemeClr val="lt1"/>
-          </a:fontRef>
-        </p:style>
-        <p:txBody>
-          <a:bodyPr rtlCol="0" anchor="ctr"/>
-          <a:lstStyle/>
-          <a:p>
-            <a:pPr algn="ctr"/>
-          </a:p>
-        </p:txBody>
-      </p:sp>
-      <p:sp>
-        <p:nvSpPr>
-          <p:cNvPr id="6" name="TextBox 5"/>
-          <p:cNvSpPr txBox="1"/>
-          <p:nvPr/>
-        </p:nvSpPr>
-        <p:spPr>
-          <a:xfrm>
-            <a:off x="640080" y="1371600"/>
-            <a:ext cx="10789920" cy="4572000"/>
+            <a:off x="640080" y="1188720"/>
+            <a:ext cx="10789920" cy="5303520"/>
           </a:xfrm>
           <a:prstGeom prst="rect">
             <a:avLst/>
@@ -4283,31 +4204,211 @@
           <a:p>
             <a:pPr>
               <a:spcAft>
-                <a:spcPts val="800"/>
-              </a:spcAft>
-              <a:defRPr sz="2000" b="1">
-                <a:solidFill>
-                  <a:srgbClr val="333333"/>
-                </a:solidFill>
-              </a:defRPr>
-            </a:pPr>
-            <a:r>
-              <a:t>Creating Tuples:</a:t>
-            </a:r>
-          </a:p>
-          <a:p>
-            <a:pPr>
-              <a:spcAft>
-                <a:spcPts val="800"/>
-              </a:spcAft>
-              <a:defRPr sz="2000" b="1">
-                <a:solidFill>
-                  <a:srgbClr val="333333"/>
-                </a:solidFill>
-              </a:defRPr>
-            </a:pPr>
-            <a:r>
-              <a:t>Accessing Elements (Like Lists):</a:t>
+                <a:spcPts val="600"/>
+              </a:spcAft>
+              <a:defRPr sz="1600">
+                <a:solidFill>
+                  <a:srgbClr val="333333"/>
+                </a:solidFill>
+              </a:defRPr>
+            </a:pPr>
+            <a:r>
+              <a:t>What Are Sets?</a:t>
+            </a:r>
+          </a:p>
+          <a:p>
+            <a:pPr lvl="1">
+              <a:spcAft>
+                <a:spcPts val="400"/>
+              </a:spcAft>
+              <a:defRPr sz="1600">
+                <a:solidFill>
+                  <a:srgbClr val="333333"/>
+                </a:solidFill>
+              </a:defRPr>
+            </a:pPr>
+            <a:r>
+              <a:t>• Unordered collections</a:t>
+            </a:r>
+          </a:p>
+          <a:p>
+            <a:pPr lvl="1">
+              <a:spcAft>
+                <a:spcPts val="400"/>
+              </a:spcAft>
+              <a:defRPr sz="1600">
+                <a:solidFill>
+                  <a:srgbClr val="333333"/>
+                </a:solidFill>
+              </a:defRPr>
+            </a:pPr>
+            <a:r>
+              <a:t>• No duplicates</a:t>
+            </a:r>
+          </a:p>
+          <a:p>
+            <a:pPr lvl="1">
+              <a:spcAft>
+                <a:spcPts val="400"/>
+              </a:spcAft>
+              <a:defRPr sz="1600">
+                <a:solidFill>
+                  <a:srgbClr val="333333"/>
+                </a:solidFill>
+              </a:defRPr>
+            </a:pPr>
+            <a:r>
+              <a:t>• Mutable</a:t>
+            </a:r>
+          </a:p>
+          <a:p>
+            <a:pPr lvl="1">
+              <a:spcAft>
+                <a:spcPts val="400"/>
+              </a:spcAft>
+              <a:defRPr sz="1600">
+                <a:solidFill>
+                  <a:srgbClr val="333333"/>
+                </a:solidFill>
+              </a:defRPr>
+            </a:pPr>
+            <a:r>
+              <a:t>• No indexing</a:t>
+            </a:r>
+          </a:p>
+          <a:p>
+            <a:pPr>
+              <a:spcAft>
+                <a:spcPts val="600"/>
+              </a:spcAft>
+              <a:defRPr b="1" sz="2000">
+                <a:solidFill>
+                  <a:srgbClr val="333333"/>
+                </a:solidFill>
+              </a:defRPr>
+            </a:pPr>
+            <a:r>
+              <a:t>Creating:</a:t>
+            </a:r>
+          </a:p>
+          <a:p>
+            <a:pPr>
+              <a:spcAft>
+                <a:spcPts val="600"/>
+              </a:spcAft>
+              <a:defRPr sz="1600">
+                <a:solidFill>
+                  <a:srgbClr val="333333"/>
+                </a:solidFill>
+              </a:defRPr>
+            </a:pPr>
+            <a:r>
+              <a:t>numbers = {1, 2, 3, 4, 5}</a:t>
+            </a:r>
+          </a:p>
+          <a:p>
+            <a:pPr>
+              <a:spcAft>
+                <a:spcPts val="600"/>
+              </a:spcAft>
+              <a:defRPr sz="1600">
+                <a:solidFill>
+                  <a:srgbClr val="333333"/>
+                </a:solidFill>
+              </a:defRPr>
+            </a:pPr>
+            <a:r>
+              <a:t>empty = set()  # NOT {}</a:t>
+            </a:r>
+          </a:p>
+          <a:p>
+            <a:pPr>
+              <a:spcAft>
+                <a:spcPts val="600"/>
+              </a:spcAft>
+              <a:defRPr sz="1600">
+                <a:solidFill>
+                  <a:srgbClr val="333333"/>
+                </a:solidFill>
+              </a:defRPr>
+            </a:pPr>
+            <a:r>
+              <a:t>from_list = set([1, 2, 2, 3])  # {1, 2, 3}</a:t>
+            </a:r>
+          </a:p>
+          <a:p>
+            <a:pPr>
+              <a:spcAft>
+                <a:spcPts val="600"/>
+              </a:spcAft>
+              <a:defRPr sz="1600">
+                <a:solidFill>
+                  <a:srgbClr val="333333"/>
+                </a:solidFill>
+              </a:defRPr>
+            </a:pPr>
+            <a:r>
+              <a:t>Why Use Sets?</a:t>
+            </a:r>
+          </a:p>
+          <a:p>
+            <a:pPr lvl="1">
+              <a:spcAft>
+                <a:spcPts val="400"/>
+              </a:spcAft>
+              <a:defRPr sz="1600">
+                <a:solidFill>
+                  <a:srgbClr val="333333"/>
+                </a:solidFill>
+              </a:defRPr>
+            </a:pPr>
+            <a:r>
+              <a:t>• Remove duplicates</a:t>
+            </a:r>
+          </a:p>
+          <a:p>
+            <a:pPr lvl="1">
+              <a:spcAft>
+                <a:spcPts val="400"/>
+              </a:spcAft>
+              <a:defRPr sz="1600">
+                <a:solidFill>
+                  <a:srgbClr val="333333"/>
+                </a:solidFill>
+              </a:defRPr>
+            </a:pPr>
+            <a:r>
+              <a:t>• Fast membership testing</a:t>
+            </a:r>
+          </a:p>
+          <a:p>
+            <a:pPr lvl="1">
+              <a:spcAft>
+                <a:spcPts val="400"/>
+              </a:spcAft>
+              <a:defRPr sz="1600">
+                <a:solidFill>
+                  <a:srgbClr val="333333"/>
+                </a:solidFill>
+              </a:defRPr>
+            </a:pPr>
+            <a:r>
+              <a:t>• Mathematical set operations</a:t>
+            </a:r>
+          </a:p>
+          <a:p>
+            <a:pPr lvl="1">
+              <a:spcAft>
+                <a:spcPts val="400"/>
+              </a:spcAft>
+              <a:defRPr sz="1600">
+                <a:solidFill>
+                  <a:srgbClr val="333333"/>
+                </a:solidFill>
+              </a:defRPr>
+            </a:pPr>
+            <a:r>
+              <a:t>• Track unique items</a:t>
             </a:r>
           </a:p>
         </p:txBody>
@@ -4320,7 +4421,7 @@
 </p:sld>
 </file>
 
-<file path=ppt/slides/slide4.xml><?xml version="1.0" encoding="utf-8"?>
+<file path=ppt/slides/slide5.xml><?xml version="1.0" encoding="utf-8"?>
 <p:sld xmlns:a="http://schemas.openxmlformats.org/drawingml/2006/main" xmlns:p="http://schemas.openxmlformats.org/presentationml/2006/main" xmlns:r="http://schemas.openxmlformats.org/officeDocument/2006/relationships">
   <p:cSld>
     <p:spTree>
@@ -4424,8 +4525,8 @@
         </p:nvSpPr>
         <p:spPr>
           <a:xfrm>
-            <a:off x="457200" y="365760"/>
-            <a:ext cx="10972800" cy="731520"/>
+            <a:off x="457200" y="320040"/>
+            <a:ext cx="10972800" cy="640080"/>
           </a:xfrm>
           <a:prstGeom prst="rect">
             <a:avLst/>
@@ -4439,71 +4540,28 @@
           <a:lstStyle/>
           <a:p>
             <a:pPr>
-              <a:defRPr sz="4000" b="1">
+              <a:defRPr sz="3600" b="1">
                 <a:solidFill>
                   <a:srgbClr val="003366"/>
                 </a:solidFill>
               </a:defRPr>
             </a:pPr>
             <a:r>
-              <a:t>Tuple Unpacking</a:t>
-            </a:r>
-          </a:p>
-        </p:txBody>
-      </p:sp>
-      <p:sp>
-        <p:nvSpPr>
-          <p:cNvPr id="5" name="Rectangle 4"/>
-          <p:cNvSpPr/>
+              <a:t>Set Operations</a:t>
+            </a:r>
+          </a:p>
+        </p:txBody>
+      </p:sp>
+      <p:sp>
+        <p:nvSpPr>
+          <p:cNvPr id="5" name="TextBox 4"/>
+          <p:cNvSpPr txBox="1"/>
           <p:nvPr/>
         </p:nvSpPr>
         <p:spPr>
           <a:xfrm>
-            <a:off x="457200" y="1005840"/>
-            <a:ext cx="1828800" cy="45720"/>
-          </a:xfrm>
-          <a:prstGeom prst="rect">
-            <a:avLst/>
-          </a:prstGeom>
-          <a:solidFill>
-            <a:srgbClr val="0066CC"/>
-          </a:solidFill>
-          <a:ln>
-            <a:noFill/>
-          </a:ln>
-        </p:spPr>
-        <p:style>
-          <a:lnRef idx="1">
-            <a:schemeClr val="accent1"/>
-          </a:lnRef>
-          <a:fillRef idx="3">
-            <a:schemeClr val="accent1"/>
-          </a:fillRef>
-          <a:effectRef idx="2">
-            <a:schemeClr val="accent1"/>
-          </a:effectRef>
-          <a:fontRef idx="minor">
-            <a:schemeClr val="lt1"/>
-          </a:fontRef>
-        </p:style>
-        <p:txBody>
-          <a:bodyPr rtlCol="0" anchor="ctr"/>
-          <a:lstStyle/>
-          <a:p>
-            <a:pPr algn="ctr"/>
-          </a:p>
-        </p:txBody>
-      </p:sp>
-      <p:sp>
-        <p:nvSpPr>
-          <p:cNvPr id="6" name="TextBox 5"/>
-          <p:cNvSpPr txBox="1"/>
-          <p:nvPr/>
-        </p:nvSpPr>
-        <p:spPr>
-          <a:xfrm>
-            <a:off x="640080" y="1371600"/>
-            <a:ext cx="10789920" cy="4572000"/>
+            <a:off x="640080" y="1188720"/>
+            <a:ext cx="10789920" cy="5303520"/>
           </a:xfrm>
           <a:prstGeom prst="rect">
             <a:avLst/>
@@ -4518,46 +4576,226 @@
           <a:p>
             <a:pPr>
               <a:spcAft>
-                <a:spcPts val="800"/>
-              </a:spcAft>
-              <a:defRPr sz="2000" b="1">
-                <a:solidFill>
-                  <a:srgbClr val="333333"/>
-                </a:solidFill>
-              </a:defRPr>
-            </a:pPr>
-            <a:r>
-              <a:t>Easily assign tuple values to multiple variables at once!</a:t>
-            </a:r>
-          </a:p>
-          <a:p>
-            <a:pPr>
-              <a:spcAft>
-                <a:spcPts val="800"/>
-              </a:spcAft>
-              <a:defRPr sz="2000" b="1">
-                <a:solidFill>
-                  <a:srgbClr val="333333"/>
-                </a:solidFill>
-              </a:defRPr>
-            </a:pPr>
-            <a:r>
-              <a:t>Basic Unpacking:</a:t>
-            </a:r>
-          </a:p>
-          <a:p>
-            <a:pPr>
-              <a:spcAft>
-                <a:spcPts val="800"/>
-              </a:spcAft>
-              <a:defRPr sz="2000" b="1">
-                <a:solidFill>
-                  <a:srgbClr val="333333"/>
-                </a:solidFill>
-              </a:defRPr>
-            </a:pPr>
-            <a:r>
-              <a:t>Swapping Variables:</a:t>
+                <a:spcPts val="600"/>
+              </a:spcAft>
+              <a:defRPr b="1" sz="2000">
+                <a:solidFill>
+                  <a:srgbClr val="333333"/>
+                </a:solidFill>
+              </a:defRPr>
+            </a:pPr>
+            <a:r>
+              <a:t>Basic Operations:</a:t>
+            </a:r>
+          </a:p>
+          <a:p>
+            <a:pPr>
+              <a:spcAft>
+                <a:spcPts val="600"/>
+              </a:spcAft>
+              <a:defRPr sz="1600">
+                <a:solidFill>
+                  <a:srgbClr val="333333"/>
+                </a:solidFill>
+              </a:defRPr>
+            </a:pPr>
+            <a:r>
+              <a:t>numbers = {1, 2, 3}</a:t>
+            </a:r>
+          </a:p>
+          <a:p>
+            <a:pPr>
+              <a:spcAft>
+                <a:spcPts val="600"/>
+              </a:spcAft>
+              <a:defRPr sz="1600">
+                <a:solidFill>
+                  <a:srgbClr val="333333"/>
+                </a:solidFill>
+              </a:defRPr>
+            </a:pPr>
+            <a:r>
+              <a:t>numbers.add(4)</a:t>
+            </a:r>
+          </a:p>
+          <a:p>
+            <a:pPr>
+              <a:spcAft>
+                <a:spcPts val="600"/>
+              </a:spcAft>
+              <a:defRPr sz="1600">
+                <a:solidFill>
+                  <a:srgbClr val="333333"/>
+                </a:solidFill>
+              </a:defRPr>
+            </a:pPr>
+            <a:r>
+              <a:t>numbers.remove(2)  # Error if not found</a:t>
+            </a:r>
+          </a:p>
+          <a:p>
+            <a:pPr>
+              <a:spcAft>
+                <a:spcPts val="600"/>
+              </a:spcAft>
+              <a:defRPr sz="1600">
+                <a:solidFill>
+                  <a:srgbClr val="333333"/>
+                </a:solidFill>
+              </a:defRPr>
+            </a:pPr>
+            <a:r>
+              <a:t>numbers.discard(2)  # No error</a:t>
+            </a:r>
+          </a:p>
+          <a:p>
+            <a:pPr>
+              <a:spcAft>
+                <a:spcPts val="600"/>
+              </a:spcAft>
+              <a:defRPr sz="1600">
+                <a:solidFill>
+                  <a:srgbClr val="333333"/>
+                </a:solidFill>
+              </a:defRPr>
+            </a:pPr>
+            <a:r>
+              <a:t>numbers.pop()  # Remove arbitrary</a:t>
+            </a:r>
+          </a:p>
+          <a:p>
+            <a:pPr>
+              <a:spcAft>
+                <a:spcPts val="600"/>
+              </a:spcAft>
+              <a:defRPr b="1" sz="2000">
+                <a:solidFill>
+                  <a:srgbClr val="333333"/>
+                </a:solidFill>
+              </a:defRPr>
+            </a:pPr>
+            <a:r>
+              <a:t>Membership:</a:t>
+            </a:r>
+          </a:p>
+          <a:p>
+            <a:pPr>
+              <a:spcAft>
+                <a:spcPts val="600"/>
+              </a:spcAft>
+              <a:defRPr sz="1600">
+                <a:solidFill>
+                  <a:srgbClr val="333333"/>
+                </a:solidFill>
+              </a:defRPr>
+            </a:pPr>
+            <a:r>
+              <a:t>3 in numbers  # O(1) - very fast!</a:t>
+            </a:r>
+          </a:p>
+          <a:p>
+            <a:pPr>
+              <a:spcAft>
+                <a:spcPts val="600"/>
+              </a:spcAft>
+              <a:defRPr b="1" sz="2000">
+                <a:solidFill>
+                  <a:srgbClr val="333333"/>
+                </a:solidFill>
+              </a:defRPr>
+            </a:pPr>
+            <a:r>
+              <a:t>Set Math:</a:t>
+            </a:r>
+          </a:p>
+          <a:p>
+            <a:pPr>
+              <a:spcAft>
+                <a:spcPts val="600"/>
+              </a:spcAft>
+              <a:defRPr sz="1600">
+                <a:solidFill>
+                  <a:srgbClr val="333333"/>
+                </a:solidFill>
+              </a:defRPr>
+            </a:pPr>
+            <a:r>
+              <a:t>a = {1, 2, 3}</a:t>
+            </a:r>
+          </a:p>
+          <a:p>
+            <a:pPr>
+              <a:spcAft>
+                <a:spcPts val="600"/>
+              </a:spcAft>
+              <a:defRPr sz="1600">
+                <a:solidFill>
+                  <a:srgbClr val="333333"/>
+                </a:solidFill>
+              </a:defRPr>
+            </a:pPr>
+            <a:r>
+              <a:t>b = {3, 4, 5}</a:t>
+            </a:r>
+          </a:p>
+          <a:p>
+            <a:pPr>
+              <a:spcAft>
+                <a:spcPts val="600"/>
+              </a:spcAft>
+              <a:defRPr b="1" sz="2000">
+                <a:solidFill>
+                  <a:srgbClr val="333333"/>
+                </a:solidFill>
+              </a:defRPr>
+            </a:pPr>
+            <a:r>
+              <a:t>a | b  # Union: {1, 2, 3, 4, 5}</a:t>
+            </a:r>
+          </a:p>
+          <a:p>
+            <a:pPr>
+              <a:spcAft>
+                <a:spcPts val="600"/>
+              </a:spcAft>
+              <a:defRPr b="1" sz="2000">
+                <a:solidFill>
+                  <a:srgbClr val="333333"/>
+                </a:solidFill>
+              </a:defRPr>
+            </a:pPr>
+            <a:r>
+              <a:t>a &amp; b  # Intersection: {3}</a:t>
+            </a:r>
+          </a:p>
+          <a:p>
+            <a:pPr>
+              <a:spcAft>
+                <a:spcPts val="600"/>
+              </a:spcAft>
+              <a:defRPr b="1" sz="2000">
+                <a:solidFill>
+                  <a:srgbClr val="333333"/>
+                </a:solidFill>
+              </a:defRPr>
+            </a:pPr>
+            <a:r>
+              <a:t>a - b  # Difference: {1, 2}</a:t>
+            </a:r>
+          </a:p>
+          <a:p>
+            <a:pPr>
+              <a:spcAft>
+                <a:spcPts val="600"/>
+              </a:spcAft>
+              <a:defRPr b="1" sz="2000">
+                <a:solidFill>
+                  <a:srgbClr val="333333"/>
+                </a:solidFill>
+              </a:defRPr>
+            </a:pPr>
+            <a:r>
+              <a:t>a ^ b  # Symmetric diff: {1, 2, 4, 5}</a:t>
             </a:r>
           </a:p>
         </p:txBody>
@@ -4570,7 +4808,7 @@
 </p:sld>
 </file>
 
-<file path=ppt/slides/slide5.xml><?xml version="1.0" encoding="utf-8"?>
+<file path=ppt/slides/slide6.xml><?xml version="1.0" encoding="utf-8"?>
 <p:sld xmlns:a="http://schemas.openxmlformats.org/drawingml/2006/main" xmlns:p="http://schemas.openxmlformats.org/presentationml/2006/main" xmlns:r="http://schemas.openxmlformats.org/officeDocument/2006/relationships">
   <p:cSld>
     <p:spTree>
@@ -4674,8 +4912,8 @@
         </p:nvSpPr>
         <p:spPr>
           <a:xfrm>
-            <a:off x="457200" y="365760"/>
-            <a:ext cx="10972800" cy="731520"/>
+            <a:off x="457200" y="320040"/>
+            <a:ext cx="10972800" cy="640080"/>
           </a:xfrm>
           <a:prstGeom prst="rect">
             <a:avLst/>
@@ -4689,71 +4927,28 @@
           <a:lstStyle/>
           <a:p>
             <a:pPr>
-              <a:defRPr sz="4000" b="1">
+              <a:defRPr sz="3600" b="1">
                 <a:solidFill>
                   <a:srgbClr val="003366"/>
                 </a:solidFill>
               </a:defRPr>
             </a:pPr>
             <a:r>
-              <a:t>Tuples vs Lists: When to Use Each?</a:t>
-            </a:r>
-          </a:p>
-        </p:txBody>
-      </p:sp>
-      <p:sp>
-        <p:nvSpPr>
-          <p:cNvPr id="5" name="Rectangle 4"/>
-          <p:cNvSpPr/>
+              <a:t>When to Use Each</a:t>
+            </a:r>
+          </a:p>
+        </p:txBody>
+      </p:sp>
+      <p:sp>
+        <p:nvSpPr>
+          <p:cNvPr id="5" name="TextBox 4"/>
+          <p:cNvSpPr txBox="1"/>
           <p:nvPr/>
         </p:nvSpPr>
         <p:spPr>
           <a:xfrm>
-            <a:off x="457200" y="1005840"/>
-            <a:ext cx="1828800" cy="45720"/>
-          </a:xfrm>
-          <a:prstGeom prst="rect">
-            <a:avLst/>
-          </a:prstGeom>
-          <a:solidFill>
-            <a:srgbClr val="0066CC"/>
-          </a:solidFill>
-          <a:ln>
-            <a:noFill/>
-          </a:ln>
-        </p:spPr>
-        <p:style>
-          <a:lnRef idx="1">
-            <a:schemeClr val="accent1"/>
-          </a:lnRef>
-          <a:fillRef idx="3">
-            <a:schemeClr val="accent1"/>
-          </a:fillRef>
-          <a:effectRef idx="2">
-            <a:schemeClr val="accent1"/>
-          </a:effectRef>
-          <a:fontRef idx="minor">
-            <a:schemeClr val="lt1"/>
-          </a:fontRef>
-        </p:style>
-        <p:txBody>
-          <a:bodyPr rtlCol="0" anchor="ctr"/>
-          <a:lstStyle/>
-          <a:p>
-            <a:pPr algn="ctr"/>
-          </a:p>
-        </p:txBody>
-      </p:sp>
-      <p:sp>
-        <p:nvSpPr>
-          <p:cNvPr id="6" name="TextBox 5"/>
-          <p:cNvSpPr txBox="1"/>
-          <p:nvPr/>
-        </p:nvSpPr>
-        <p:spPr>
-          <a:xfrm>
-            <a:off x="640080" y="1371600"/>
-            <a:ext cx="10789920" cy="4572000"/>
+            <a:off x="640080" y="1188720"/>
+            <a:ext cx="10789920" cy="5303520"/>
           </a:xfrm>
           <a:prstGeom prst="rect">
             <a:avLst/>
@@ -4768,151 +4963,271 @@
           <a:p>
             <a:pPr>
               <a:spcAft>
-                <a:spcPts val="800"/>
-              </a:spcAft>
-              <a:defRPr sz="2000" b="1">
-                <a:solidFill>
-                  <a:srgbClr val="333333"/>
-                </a:solidFill>
-              </a:defRPr>
-            </a:pPr>
-            <a:r>
-              <a:t>Use Tuples When:</a:t>
-            </a:r>
-          </a:p>
-          <a:p>
-            <a:pPr>
-              <a:spcAft>
-                <a:spcPts val="800"/>
-              </a:spcAft>
-              <a:defRPr sz="2000" b="1">
-                <a:solidFill>
-                  <a:srgbClr val="333333"/>
-                </a:solidFill>
-              </a:defRPr>
-            </a:pPr>
-            <a:r>
-              <a:t>Use Lists When:</a:t>
+                <a:spcPts val="600"/>
+              </a:spcAft>
+              <a:defRPr b="1" sz="2000">
+                <a:solidFill>
+                  <a:srgbClr val="333333"/>
+                </a:solidFill>
+              </a:defRPr>
+            </a:pPr>
+            <a:r>
+              <a:t>Use Tuple When:</a:t>
             </a:r>
           </a:p>
           <a:p>
             <a:pPr lvl="1">
               <a:spcAft>
-                <a:spcPts val="800"/>
-              </a:spcAft>
-              <a:defRPr sz="1800">
-                <a:solidFill>
-                  <a:srgbClr val="333333"/>
-                </a:solidFill>
-              </a:defRPr>
-            </a:pPr>
-            <a:r>
-              <a:t>• 📍Data shouldn't change(coordinates, RGB colors)</a:t>
+                <a:spcPts val="400"/>
+              </a:spcAft>
+              <a:defRPr sz="1600">
+                <a:solidFill>
+                  <a:srgbClr val="333333"/>
+                </a:solidFill>
+              </a:defRPr>
+            </a:pPr>
+            <a:r>
+              <a:t>• Data shouldn't change</a:t>
             </a:r>
           </a:p>
           <a:p>
             <a:pPr lvl="1">
               <a:spcAft>
-                <a:spcPts val="800"/>
-              </a:spcAft>
-              <a:defRPr sz="1800">
-                <a:solidFill>
-                  <a:srgbClr val="333333"/>
-                </a:solidFill>
-              </a:defRPr>
-            </a:pPr>
-            <a:r>
-              <a:t>• 🔑Need dictionary keys(lists can't be keys)</a:t>
+                <a:spcPts val="400"/>
+              </a:spcAft>
+              <a:defRPr sz="1600">
+                <a:solidFill>
+                  <a:srgbClr val="333333"/>
+                </a:solidFill>
+              </a:defRPr>
+            </a:pPr>
+            <a:r>
+              <a:t>• Need hashable type</a:t>
             </a:r>
           </a:p>
           <a:p>
             <a:pPr lvl="1">
               <a:spcAft>
-                <a:spcPts val="800"/>
-              </a:spcAft>
-              <a:defRPr sz="1800">
-                <a:solidFill>
-                  <a:srgbClr val="333333"/>
-                </a:solidFill>
-              </a:defRPr>
-            </a:pPr>
-            <a:r>
-              <a:t>• ⚡Want better performance(tuples are faster)</a:t>
+                <a:spcPts val="400"/>
+              </a:spcAft>
+              <a:defRPr sz="1600">
+                <a:solidFill>
+                  <a:srgbClr val="333333"/>
+                </a:solidFill>
+              </a:defRPr>
+            </a:pPr>
+            <a:r>
+              <a:t>• Return multiple values</a:t>
             </a:r>
           </a:p>
           <a:p>
             <a:pPr lvl="1">
               <a:spcAft>
-                <a:spcPts val="800"/>
-              </a:spcAft>
-              <a:defRPr sz="1800">
-                <a:solidFill>
-                  <a:srgbClr val="333333"/>
-                </a:solidFill>
-              </a:defRPr>
-            </a:pPr>
-            <a:r>
-              <a:t>• 📦Returning multiple valuesfrom functions</a:t>
+                <a:spcPts val="400"/>
+              </a:spcAft>
+              <a:defRPr sz="1600">
+                <a:solidFill>
+                  <a:srgbClr val="333333"/>
+                </a:solidFill>
+              </a:defRPr>
+            </a:pPr>
+            <a:r>
+              <a:t>• Represent fixed structure</a:t>
+            </a:r>
+          </a:p>
+          <a:p>
+            <a:pPr>
+              <a:spcAft>
+                <a:spcPts val="600"/>
+              </a:spcAft>
+              <a:defRPr b="1" sz="2000">
+                <a:solidFill>
+                  <a:srgbClr val="333333"/>
+                </a:solidFill>
+              </a:defRPr>
+            </a:pPr>
+            <a:r>
+              <a:t>Examples:</a:t>
+            </a:r>
+          </a:p>
+          <a:p>
+            <a:pPr>
+              <a:spcAft>
+                <a:spcPts val="600"/>
+              </a:spcAft>
+              <a:defRPr sz="1600">
+                <a:solidFill>
+                  <a:srgbClr val="333333"/>
+                </a:solidFill>
+              </a:defRPr>
+            </a:pPr>
+            <a:r>
+              <a:t>coordinates = (x, y)</a:t>
+            </a:r>
+          </a:p>
+          <a:p>
+            <a:pPr>
+              <a:spcAft>
+                <a:spcPts val="600"/>
+              </a:spcAft>
+              <a:defRPr sz="1600">
+                <a:solidFill>
+                  <a:srgbClr val="333333"/>
+                </a:solidFill>
+              </a:defRPr>
+            </a:pPr>
+            <a:r>
+              <a:t>rgb_color = (255, 0, 128)</a:t>
+            </a:r>
+          </a:p>
+          <a:p>
+            <a:pPr>
+              <a:spcAft>
+                <a:spcPts val="600"/>
+              </a:spcAft>
+              <a:defRPr sz="1600">
+                <a:solidFill>
+                  <a:srgbClr val="333333"/>
+                </a:solidFill>
+              </a:defRPr>
+            </a:pPr>
+            <a:r>
+              <a:t>date = (2025, 1, 24)</a:t>
+            </a:r>
+          </a:p>
+          <a:p>
+            <a:pPr>
+              <a:spcAft>
+                <a:spcPts val="600"/>
+              </a:spcAft>
+              <a:defRPr b="1" sz="2000">
+                <a:solidFill>
+                  <a:srgbClr val="333333"/>
+                </a:solidFill>
+              </a:defRPr>
+            </a:pPr>
+            <a:r>
+              <a:t>Use Set When:</a:t>
             </a:r>
           </a:p>
           <a:p>
             <a:pPr lvl="1">
               <a:spcAft>
-                <a:spcPts val="800"/>
-              </a:spcAft>
-              <a:defRPr sz="1800">
-                <a:solidFill>
-                  <a:srgbClr val="333333"/>
-                </a:solidFill>
-              </a:defRPr>
-            </a:pPr>
-            <a:r>
-              <a:t>• ✏️Data needs to change(shopping cart, to-do list)</a:t>
+                <a:spcPts val="400"/>
+              </a:spcAft>
+              <a:defRPr sz="1600">
+                <a:solidFill>
+                  <a:srgbClr val="333333"/>
+                </a:solidFill>
+              </a:defRPr>
+            </a:pPr>
+            <a:r>
+              <a:t>• Need unique elements</a:t>
             </a:r>
           </a:p>
           <a:p>
             <a:pPr lvl="1">
               <a:spcAft>
-                <a:spcPts val="800"/>
-              </a:spcAft>
-              <a:defRPr sz="1800">
-                <a:solidFill>
-                  <a:srgbClr val="333333"/>
-                </a:solidFill>
-              </a:defRPr>
-            </a:pPr>
-            <a:r>
-              <a:t>• ➕Adding/removing items(append, remove, pop)</a:t>
+                <a:spcPts val="400"/>
+              </a:spcAft>
+              <a:defRPr sz="1600">
+                <a:solidFill>
+                  <a:srgbClr val="333333"/>
+                </a:solidFill>
+              </a:defRPr>
+            </a:pPr>
+            <a:r>
+              <a:t>• Fast membership tests</a:t>
             </a:r>
           </a:p>
           <a:p>
             <a:pPr lvl="1">
               <a:spcAft>
-                <a:spcPts val="800"/>
-              </a:spcAft>
-              <a:defRPr sz="1800">
-                <a:solidFill>
-                  <a:srgbClr val="333333"/>
-                </a:solidFill>
-              </a:defRPr>
-            </a:pPr>
-            <a:r>
-              <a:t>• 🔄Sorting or reversing(list.sort(), list.reverse())</a:t>
+                <a:spcPts val="400"/>
+              </a:spcAft>
+              <a:defRPr sz="1600">
+                <a:solidFill>
+                  <a:srgbClr val="333333"/>
+                </a:solidFill>
+              </a:defRPr>
+            </a:pPr>
+            <a:r>
+              <a:t>• Set operations needed</a:t>
             </a:r>
           </a:p>
           <a:p>
             <a:pPr lvl="1">
               <a:spcAft>
-                <a:spcPts val="800"/>
-              </a:spcAft>
-              <a:defRPr sz="1800">
-                <a:solidFill>
-                  <a:srgbClr val="333333"/>
-                </a:solidFill>
-              </a:defRPr>
-            </a:pPr>
-            <a:r>
-              <a:t>• 📊Collection of similar items(scores, names, prices)</a:t>
+                <a:spcPts val="400"/>
+              </a:spcAft>
+              <a:defRPr sz="1600">
+                <a:solidFill>
+                  <a:srgbClr val="333333"/>
+                </a:solidFill>
+              </a:defRPr>
+            </a:pPr>
+            <a:r>
+              <a:t>• Order doesn't matter</a:t>
+            </a:r>
+          </a:p>
+          <a:p>
+            <a:pPr>
+              <a:spcAft>
+                <a:spcPts val="600"/>
+              </a:spcAft>
+              <a:defRPr b="1" sz="2000">
+                <a:solidFill>
+                  <a:srgbClr val="333333"/>
+                </a:solidFill>
+              </a:defRPr>
+            </a:pPr>
+            <a:r>
+              <a:t>Examples:</a:t>
+            </a:r>
+          </a:p>
+          <a:p>
+            <a:pPr>
+              <a:spcAft>
+                <a:spcPts val="600"/>
+              </a:spcAft>
+              <a:defRPr sz="1600">
+                <a:solidFill>
+                  <a:srgbClr val="333333"/>
+                </a:solidFill>
+              </a:defRPr>
+            </a:pPr>
+            <a:r>
+              <a:t>unique_ids = {101, 102, 103}</a:t>
+            </a:r>
+          </a:p>
+          <a:p>
+            <a:pPr>
+              <a:spcAft>
+                <a:spcPts val="600"/>
+              </a:spcAft>
+              <a:defRPr sz="1600">
+                <a:solidFill>
+                  <a:srgbClr val="333333"/>
+                </a:solidFill>
+              </a:defRPr>
+            </a:pPr>
+            <a:r>
+              <a:t>tags = {"python", "coding"}</a:t>
+            </a:r>
+          </a:p>
+          <a:p>
+            <a:pPr>
+              <a:spcAft>
+                <a:spcPts val="600"/>
+              </a:spcAft>
+              <a:defRPr sz="1600">
+                <a:solidFill>
+                  <a:srgbClr val="333333"/>
+                </a:solidFill>
+              </a:defRPr>
+            </a:pPr>
+            <a:r>
+              <a:t>visited_pages = set()</a:t>
             </a:r>
           </a:p>
         </p:txBody>
@@ -4925,7 +5240,7 @@
 </p:sld>
 </file>
 
-<file path=ppt/slides/slide6.xml><?xml version="1.0" encoding="utf-8"?>
+<file path=ppt/slides/slide7.xml><?xml version="1.0" encoding="utf-8"?>
 <p:sld xmlns:a="http://schemas.openxmlformats.org/drawingml/2006/main" xmlns:p="http://schemas.openxmlformats.org/presentationml/2006/main" xmlns:r="http://schemas.openxmlformats.org/officeDocument/2006/relationships">
   <p:cSld>
     <p:spTree>
@@ -5029,8 +5344,8 @@
         </p:nvSpPr>
         <p:spPr>
           <a:xfrm>
-            <a:off x="457200" y="365760"/>
-            <a:ext cx="10972800" cy="731520"/>
+            <a:off x="457200" y="320040"/>
+            <a:ext cx="10972800" cy="640080"/>
           </a:xfrm>
           <a:prstGeom prst="rect">
             <a:avLst/>
@@ -5044,71 +5359,28 @@
           <a:lstStyle/>
           <a:p>
             <a:pPr>
-              <a:defRPr sz="4000" b="1">
+              <a:defRPr sz="3600" b="1">
                 <a:solidFill>
                   <a:srgbClr val="003366"/>
                 </a:solidFill>
               </a:defRPr>
             </a:pPr>
             <a:r>
-              <a:t>What Are Sets?</a:t>
-            </a:r>
-          </a:p>
-        </p:txBody>
-      </p:sp>
-      <p:sp>
-        <p:nvSpPr>
-          <p:cNvPr id="5" name="Rectangle 4"/>
-          <p:cNvSpPr/>
+              <a:t>Practical Examples</a:t>
+            </a:r>
+          </a:p>
+        </p:txBody>
+      </p:sp>
+      <p:sp>
+        <p:nvSpPr>
+          <p:cNvPr id="5" name="TextBox 4"/>
+          <p:cNvSpPr txBox="1"/>
           <p:nvPr/>
         </p:nvSpPr>
         <p:spPr>
           <a:xfrm>
-            <a:off x="457200" y="1005840"/>
-            <a:ext cx="1828800" cy="45720"/>
-          </a:xfrm>
-          <a:prstGeom prst="rect">
-            <a:avLst/>
-          </a:prstGeom>
-          <a:solidFill>
-            <a:srgbClr val="0066CC"/>
-          </a:solidFill>
-          <a:ln>
-            <a:noFill/>
-          </a:ln>
-        </p:spPr>
-        <p:style>
-          <a:lnRef idx="1">
-            <a:schemeClr val="accent1"/>
-          </a:lnRef>
-          <a:fillRef idx="3">
-            <a:schemeClr val="accent1"/>
-          </a:fillRef>
-          <a:effectRef idx="2">
-            <a:schemeClr val="accent1"/>
-          </a:effectRef>
-          <a:fontRef idx="minor">
-            <a:schemeClr val="lt1"/>
-          </a:fontRef>
-        </p:style>
-        <p:txBody>
-          <a:bodyPr rtlCol="0" anchor="ctr"/>
-          <a:lstStyle/>
-          <a:p>
-            <a:pPr algn="ctr"/>
-          </a:p>
-        </p:txBody>
-      </p:sp>
-      <p:sp>
-        <p:nvSpPr>
-          <p:cNvPr id="6" name="TextBox 5"/>
-          <p:cNvSpPr txBox="1"/>
-          <p:nvPr/>
-        </p:nvSpPr>
-        <p:spPr>
-          <a:xfrm>
-            <a:off x="640080" y="1371600"/>
-            <a:ext cx="10789920" cy="4572000"/>
+            <a:off x="640080" y="1188720"/>
+            <a:ext cx="10789920" cy="5303520"/>
           </a:xfrm>
           <a:prstGeom prst="rect">
             <a:avLst/>
@@ -5123,856 +5395,226 @@
           <a:p>
             <a:pPr>
               <a:spcAft>
-                <a:spcPts val="800"/>
-              </a:spcAft>
-              <a:defRPr sz="2000" b="1">
-                <a:solidFill>
-                  <a:srgbClr val="333333"/>
-                </a:solidFill>
-              </a:defRPr>
-            </a:pPr>
-            <a:r>
-              <a:t>Sets are collections ofunique elements(no duplicates!)</a:t>
-            </a:r>
-          </a:p>
-          <a:p>
-            <a:pPr>
-              <a:spcAft>
-                <a:spcPts val="800"/>
-              </a:spcAft>
-              <a:defRPr sz="2000" b="1">
-                <a:solidFill>
-                  <a:srgbClr val="333333"/>
-                </a:solidFill>
-              </a:defRPr>
-            </a:pPr>
-            <a:r>
-              <a:t>Key Features:</a:t>
-            </a:r>
-          </a:p>
-          <a:p>
-            <a:pPr>
-              <a:spcAft>
-                <a:spcPts val="800"/>
-              </a:spcAft>
-              <a:defRPr sz="2000" b="1">
-                <a:solidFill>
-                  <a:srgbClr val="333333"/>
-                </a:solidFill>
-              </a:defRPr>
-            </a:pPr>
-            <a:r>
-              <a:t>✓ No duplicate values</a:t>
-            </a:r>
-          </a:p>
-          <a:p>
-            <a:pPr>
-              <a:spcAft>
-                <a:spcPts val="800"/>
-              </a:spcAft>
-              <a:defRPr sz="2000" b="1">
-                <a:solidFill>
-                  <a:srgbClr val="333333"/>
-                </a:solidFill>
-              </a:defRPr>
-            </a:pPr>
-            <a:r>
-              <a:t>✓ Unordered (no indexing)</a:t>
-            </a:r>
-          </a:p>
-          <a:p>
-            <a:pPr>
-              <a:spcAft>
-                <a:spcPts val="800"/>
-              </a:spcAft>
-              <a:defRPr sz="2000" b="1">
-                <a:solidFill>
-                  <a:srgbClr val="333333"/>
-                </a:solidFill>
-              </a:defRPr>
-            </a:pPr>
-            <a:r>
-              <a:t>✓ Fast membership testing</a:t>
-            </a:r>
-          </a:p>
-          <a:p>
-            <a:pPr>
-              <a:spcAft>
-                <a:spcPts val="800"/>
-              </a:spcAft>
-              <a:defRPr sz="2000" b="1">
-                <a:solidFill>
-                  <a:srgbClr val="333333"/>
-                </a:solidFill>
-              </a:defRPr>
-            </a:pPr>
-            <a:r>
-              <a:t>✓ Mathematical set operations</a:t>
-            </a:r>
-          </a:p>
-          <a:p>
-            <a:pPr>
-              <a:spcAft>
-                <a:spcPts val="800"/>
-              </a:spcAft>
-              <a:defRPr sz="2000" b="1">
-                <a:solidFill>
-                  <a:srgbClr val="333333"/>
-                </a:solidFill>
-              </a:defRPr>
-            </a:pPr>
-            <a:r>
-              <a:t>Example:</a:t>
-            </a:r>
-          </a:p>
-        </p:txBody>
-      </p:sp>
-    </p:spTree>
-  </p:cSld>
-  <p:clrMapOvr>
-    <a:masterClrMapping/>
-  </p:clrMapOvr>
-</p:sld>
-</file>
-
-<file path=ppt/slides/slide7.xml><?xml version="1.0" encoding="utf-8"?>
-<p:sld xmlns:a="http://schemas.openxmlformats.org/drawingml/2006/main" xmlns:p="http://schemas.openxmlformats.org/presentationml/2006/main" xmlns:r="http://schemas.openxmlformats.org/officeDocument/2006/relationships">
-  <p:cSld>
-    <p:spTree>
-      <p:nvGrpSpPr>
-        <p:cNvPr id="1" name=""/>
-        <p:cNvGrpSpPr/>
-        <p:nvPr/>
-      </p:nvGrpSpPr>
-      <p:grpSpPr/>
-      <p:sp>
-        <p:nvSpPr>
-          <p:cNvPr id="2" name="Rectangle 1"/>
-          <p:cNvSpPr/>
-          <p:nvPr/>
-        </p:nvSpPr>
-        <p:spPr>
-          <a:xfrm>
-            <a:off x="0" y="0"/>
-            <a:ext cx="12191695" cy="6858000"/>
-          </a:xfrm>
-          <a:prstGeom prst="rect">
-            <a:avLst/>
-          </a:prstGeom>
-          <a:solidFill>
-            <a:srgbClr val="FFFFFF"/>
-          </a:solidFill>
-          <a:ln>
-            <a:noFill/>
-          </a:ln>
-        </p:spPr>
-        <p:style>
-          <a:lnRef idx="1">
-            <a:schemeClr val="accent1"/>
-          </a:lnRef>
-          <a:fillRef idx="3">
-            <a:schemeClr val="accent1"/>
-          </a:fillRef>
-          <a:effectRef idx="2">
-            <a:schemeClr val="accent1"/>
-          </a:effectRef>
-          <a:fontRef idx="minor">
-            <a:schemeClr val="lt1"/>
-          </a:fontRef>
-        </p:style>
-        <p:txBody>
-          <a:bodyPr rtlCol="0" anchor="ctr"/>
-          <a:lstStyle/>
-          <a:p>
-            <a:pPr algn="ctr"/>
-          </a:p>
-        </p:txBody>
-      </p:sp>
-      <p:sp>
-        <p:nvSpPr>
-          <p:cNvPr id="3" name="Rectangle 2"/>
-          <p:cNvSpPr/>
-          <p:nvPr/>
-        </p:nvSpPr>
-        <p:spPr>
-          <a:xfrm>
-            <a:off x="0" y="0"/>
-            <a:ext cx="12191695" cy="137160"/>
-          </a:xfrm>
-          <a:prstGeom prst="rect">
-            <a:avLst/>
-          </a:prstGeom>
-          <a:solidFill>
-            <a:srgbClr val="0066CC"/>
-          </a:solidFill>
-          <a:ln>
-            <a:noFill/>
-          </a:ln>
-        </p:spPr>
-        <p:style>
-          <a:lnRef idx="1">
-            <a:schemeClr val="accent1"/>
-          </a:lnRef>
-          <a:fillRef idx="3">
-            <a:schemeClr val="accent1"/>
-          </a:fillRef>
-          <a:effectRef idx="2">
-            <a:schemeClr val="accent1"/>
-          </a:effectRef>
-          <a:fontRef idx="minor">
-            <a:schemeClr val="lt1"/>
-          </a:fontRef>
-        </p:style>
-        <p:txBody>
-          <a:bodyPr rtlCol="0" anchor="ctr"/>
-          <a:lstStyle/>
-          <a:p>
-            <a:pPr algn="ctr"/>
-          </a:p>
-        </p:txBody>
-      </p:sp>
-      <p:sp>
-        <p:nvSpPr>
-          <p:cNvPr id="4" name="TextBox 3"/>
-          <p:cNvSpPr txBox="1"/>
-          <p:nvPr/>
-        </p:nvSpPr>
-        <p:spPr>
-          <a:xfrm>
-            <a:off x="457200" y="365760"/>
-            <a:ext cx="10972800" cy="731520"/>
-          </a:xfrm>
-          <a:prstGeom prst="rect">
-            <a:avLst/>
-          </a:prstGeom>
-          <a:noFill/>
-        </p:spPr>
-        <p:txBody>
-          <a:bodyPr wrap="none">
-            <a:spAutoFit/>
-          </a:bodyPr>
-          <a:lstStyle/>
-          <a:p>
-            <a:pPr>
-              <a:defRPr sz="4000" b="1">
-                <a:solidFill>
-                  <a:srgbClr val="003366"/>
-                </a:solidFill>
-              </a:defRPr>
-            </a:pPr>
-            <a:r>
-              <a:t>Creating and Using Sets</a:t>
-            </a:r>
-          </a:p>
-        </p:txBody>
-      </p:sp>
-      <p:sp>
-        <p:nvSpPr>
-          <p:cNvPr id="5" name="Rectangle 4"/>
-          <p:cNvSpPr/>
-          <p:nvPr/>
-        </p:nvSpPr>
-        <p:spPr>
-          <a:xfrm>
-            <a:off x="457200" y="1005840"/>
-            <a:ext cx="1828800" cy="45720"/>
-          </a:xfrm>
-          <a:prstGeom prst="rect">
-            <a:avLst/>
-          </a:prstGeom>
-          <a:solidFill>
-            <a:srgbClr val="0066CC"/>
-          </a:solidFill>
-          <a:ln>
-            <a:noFill/>
-          </a:ln>
-        </p:spPr>
-        <p:style>
-          <a:lnRef idx="1">
-            <a:schemeClr val="accent1"/>
-          </a:lnRef>
-          <a:fillRef idx="3">
-            <a:schemeClr val="accent1"/>
-          </a:fillRef>
-          <a:effectRef idx="2">
-            <a:schemeClr val="accent1"/>
-          </a:effectRef>
-          <a:fontRef idx="minor">
-            <a:schemeClr val="lt1"/>
-          </a:fontRef>
-        </p:style>
-        <p:txBody>
-          <a:bodyPr rtlCol="0" anchor="ctr"/>
-          <a:lstStyle/>
-          <a:p>
-            <a:pPr algn="ctr"/>
-          </a:p>
-        </p:txBody>
-      </p:sp>
-      <p:sp>
-        <p:nvSpPr>
-          <p:cNvPr id="6" name="TextBox 5"/>
-          <p:cNvSpPr txBox="1"/>
-          <p:nvPr/>
-        </p:nvSpPr>
-        <p:spPr>
-          <a:xfrm>
-            <a:off x="640080" y="1371600"/>
-            <a:ext cx="10789920" cy="4572000"/>
-          </a:xfrm>
-          <a:prstGeom prst="rect">
-            <a:avLst/>
-          </a:prstGeom>
-          <a:noFill/>
-        </p:spPr>
-        <p:txBody>
-          <a:bodyPr wrap="square">
-            <a:spAutoFit/>
-          </a:bodyPr>
-          <a:lstStyle/>
-          <a:p>
-            <a:pPr>
-              <a:spcAft>
-                <a:spcPts val="800"/>
-              </a:spcAft>
-              <a:defRPr sz="2000" b="1">
-                <a:solidFill>
-                  <a:srgbClr val="333333"/>
-                </a:solidFill>
-              </a:defRPr>
-            </a:pPr>
-            <a:r>
-              <a:t>Creating Sets:</a:t>
-            </a:r>
-          </a:p>
-          <a:p>
-            <a:pPr>
-              <a:spcAft>
-                <a:spcPts val="800"/>
-              </a:spcAft>
-              <a:defRPr sz="2000" b="1">
-                <a:solidFill>
-                  <a:srgbClr val="333333"/>
-                </a:solidFill>
-              </a:defRPr>
-            </a:pPr>
-            <a:r>
-              <a:t>Adding and Removing:</a:t>
-            </a:r>
-          </a:p>
-        </p:txBody>
-      </p:sp>
-    </p:spTree>
-  </p:cSld>
-  <p:clrMapOvr>
-    <a:masterClrMapping/>
-  </p:clrMapOvr>
-</p:sld>
-</file>
-
-<file path=ppt/slides/slide8.xml><?xml version="1.0" encoding="utf-8"?>
-<p:sld xmlns:a="http://schemas.openxmlformats.org/drawingml/2006/main" xmlns:p="http://schemas.openxmlformats.org/presentationml/2006/main" xmlns:r="http://schemas.openxmlformats.org/officeDocument/2006/relationships">
-  <p:cSld>
-    <p:spTree>
-      <p:nvGrpSpPr>
-        <p:cNvPr id="1" name=""/>
-        <p:cNvGrpSpPr/>
-        <p:nvPr/>
-      </p:nvGrpSpPr>
-      <p:grpSpPr/>
-      <p:sp>
-        <p:nvSpPr>
-          <p:cNvPr id="2" name="Rectangle 1"/>
-          <p:cNvSpPr/>
-          <p:nvPr/>
-        </p:nvSpPr>
-        <p:spPr>
-          <a:xfrm>
-            <a:off x="0" y="0"/>
-            <a:ext cx="12191695" cy="6858000"/>
-          </a:xfrm>
-          <a:prstGeom prst="rect">
-            <a:avLst/>
-          </a:prstGeom>
-          <a:solidFill>
-            <a:srgbClr val="FFFFFF"/>
-          </a:solidFill>
-          <a:ln>
-            <a:noFill/>
-          </a:ln>
-        </p:spPr>
-        <p:style>
-          <a:lnRef idx="1">
-            <a:schemeClr val="accent1"/>
-          </a:lnRef>
-          <a:fillRef idx="3">
-            <a:schemeClr val="accent1"/>
-          </a:fillRef>
-          <a:effectRef idx="2">
-            <a:schemeClr val="accent1"/>
-          </a:effectRef>
-          <a:fontRef idx="minor">
-            <a:schemeClr val="lt1"/>
-          </a:fontRef>
-        </p:style>
-        <p:txBody>
-          <a:bodyPr rtlCol="0" anchor="ctr"/>
-          <a:lstStyle/>
-          <a:p>
-            <a:pPr algn="ctr"/>
-          </a:p>
-        </p:txBody>
-      </p:sp>
-      <p:sp>
-        <p:nvSpPr>
-          <p:cNvPr id="3" name="Rectangle 2"/>
-          <p:cNvSpPr/>
-          <p:nvPr/>
-        </p:nvSpPr>
-        <p:spPr>
-          <a:xfrm>
-            <a:off x="0" y="0"/>
-            <a:ext cx="12191695" cy="137160"/>
-          </a:xfrm>
-          <a:prstGeom prst="rect">
-            <a:avLst/>
-          </a:prstGeom>
-          <a:solidFill>
-            <a:srgbClr val="0066CC"/>
-          </a:solidFill>
-          <a:ln>
-            <a:noFill/>
-          </a:ln>
-        </p:spPr>
-        <p:style>
-          <a:lnRef idx="1">
-            <a:schemeClr val="accent1"/>
-          </a:lnRef>
-          <a:fillRef idx="3">
-            <a:schemeClr val="accent1"/>
-          </a:fillRef>
-          <a:effectRef idx="2">
-            <a:schemeClr val="accent1"/>
-          </a:effectRef>
-          <a:fontRef idx="minor">
-            <a:schemeClr val="lt1"/>
-          </a:fontRef>
-        </p:style>
-        <p:txBody>
-          <a:bodyPr rtlCol="0" anchor="ctr"/>
-          <a:lstStyle/>
-          <a:p>
-            <a:pPr algn="ctr"/>
-          </a:p>
-        </p:txBody>
-      </p:sp>
-      <p:sp>
-        <p:nvSpPr>
-          <p:cNvPr id="4" name="TextBox 3"/>
-          <p:cNvSpPr txBox="1"/>
-          <p:nvPr/>
-        </p:nvSpPr>
-        <p:spPr>
-          <a:xfrm>
-            <a:off x="457200" y="365760"/>
-            <a:ext cx="10972800" cy="731520"/>
-          </a:xfrm>
-          <a:prstGeom prst="rect">
-            <a:avLst/>
-          </a:prstGeom>
-          <a:noFill/>
-        </p:spPr>
-        <p:txBody>
-          <a:bodyPr wrap="none">
-            <a:spAutoFit/>
-          </a:bodyPr>
-          <a:lstStyle/>
-          <a:p>
-            <a:pPr>
-              <a:defRPr sz="4000" b="1">
-                <a:solidFill>
-                  <a:srgbClr val="003366"/>
-                </a:solidFill>
-              </a:defRPr>
-            </a:pPr>
-            <a:r>
-              <a:t>Set Operations</a:t>
-            </a:r>
-          </a:p>
-        </p:txBody>
-      </p:sp>
-      <p:sp>
-        <p:nvSpPr>
-          <p:cNvPr id="5" name="Rectangle 4"/>
-          <p:cNvSpPr/>
-          <p:nvPr/>
-        </p:nvSpPr>
-        <p:spPr>
-          <a:xfrm>
-            <a:off x="457200" y="1005840"/>
-            <a:ext cx="1828800" cy="45720"/>
-          </a:xfrm>
-          <a:prstGeom prst="rect">
-            <a:avLst/>
-          </a:prstGeom>
-          <a:solidFill>
-            <a:srgbClr val="0066CC"/>
-          </a:solidFill>
-          <a:ln>
-            <a:noFill/>
-          </a:ln>
-        </p:spPr>
-        <p:style>
-          <a:lnRef idx="1">
-            <a:schemeClr val="accent1"/>
-          </a:lnRef>
-          <a:fillRef idx="3">
-            <a:schemeClr val="accent1"/>
-          </a:fillRef>
-          <a:effectRef idx="2">
-            <a:schemeClr val="accent1"/>
-          </a:effectRef>
-          <a:fontRef idx="minor">
-            <a:schemeClr val="lt1"/>
-          </a:fontRef>
-        </p:style>
-        <p:txBody>
-          <a:bodyPr rtlCol="0" anchor="ctr"/>
-          <a:lstStyle/>
-          <a:p>
-            <a:pPr algn="ctr"/>
-          </a:p>
-        </p:txBody>
-      </p:sp>
-      <p:sp>
-        <p:nvSpPr>
-          <p:cNvPr id="6" name="TextBox 5"/>
-          <p:cNvSpPr txBox="1"/>
-          <p:nvPr/>
-        </p:nvSpPr>
-        <p:spPr>
-          <a:xfrm>
-            <a:off x="640080" y="1371600"/>
-            <a:ext cx="10789920" cy="4572000"/>
-          </a:xfrm>
-          <a:prstGeom prst="rect">
-            <a:avLst/>
-          </a:prstGeom>
-          <a:noFill/>
-        </p:spPr>
-        <p:txBody>
-          <a:bodyPr wrap="square">
-            <a:spAutoFit/>
-          </a:bodyPr>
-          <a:lstStyle/>
-          <a:p>
-            <a:pPr>
-              <a:spcAft>
-                <a:spcPts val="800"/>
-              </a:spcAft>
-              <a:defRPr sz="2000" b="1">
-                <a:solidFill>
-                  <a:srgbClr val="333333"/>
-                </a:solidFill>
-              </a:defRPr>
-            </a:pPr>
-            <a:r>
-              <a:t>Union (|) - Combine All Elements:</a:t>
-            </a:r>
-          </a:p>
-          <a:p>
-            <a:pPr>
-              <a:spcAft>
-                <a:spcPts val="800"/>
-              </a:spcAft>
-              <a:defRPr sz="2000" b="1">
-                <a:solidFill>
-                  <a:srgbClr val="333333"/>
-                </a:solidFill>
-              </a:defRPr>
-            </a:pPr>
-            <a:r>
-              <a:t>Intersection (&amp;) - Common Elements:</a:t>
-            </a:r>
-          </a:p>
-          <a:p>
-            <a:pPr>
-              <a:spcAft>
-                <a:spcPts val="800"/>
-              </a:spcAft>
-              <a:defRPr sz="2000" b="1">
-                <a:solidFill>
-                  <a:srgbClr val="333333"/>
-                </a:solidFill>
-              </a:defRPr>
-            </a:pPr>
-            <a:r>
-              <a:t>Difference (-) - Elements Only in First:</a:t>
-            </a:r>
-          </a:p>
-        </p:txBody>
-      </p:sp>
-    </p:spTree>
-  </p:cSld>
-  <p:clrMapOvr>
-    <a:masterClrMapping/>
-  </p:clrMapOvr>
-</p:sld>
-</file>
-
-<file path=ppt/slides/slide9.xml><?xml version="1.0" encoding="utf-8"?>
-<p:sld xmlns:a="http://schemas.openxmlformats.org/drawingml/2006/main" xmlns:p="http://schemas.openxmlformats.org/presentationml/2006/main" xmlns:r="http://schemas.openxmlformats.org/officeDocument/2006/relationships">
-  <p:cSld>
-    <p:spTree>
-      <p:nvGrpSpPr>
-        <p:cNvPr id="1" name=""/>
-        <p:cNvGrpSpPr/>
-        <p:nvPr/>
-      </p:nvGrpSpPr>
-      <p:grpSpPr/>
-      <p:sp>
-        <p:nvSpPr>
-          <p:cNvPr id="2" name="Rectangle 1"/>
-          <p:cNvSpPr/>
-          <p:nvPr/>
-        </p:nvSpPr>
-        <p:spPr>
-          <a:xfrm>
-            <a:off x="0" y="0"/>
-            <a:ext cx="12191695" cy="6858000"/>
-          </a:xfrm>
-          <a:prstGeom prst="rect">
-            <a:avLst/>
-          </a:prstGeom>
-          <a:solidFill>
-            <a:srgbClr val="FFFFFF"/>
-          </a:solidFill>
-          <a:ln>
-            <a:noFill/>
-          </a:ln>
-        </p:spPr>
-        <p:style>
-          <a:lnRef idx="1">
-            <a:schemeClr val="accent1"/>
-          </a:lnRef>
-          <a:fillRef idx="3">
-            <a:schemeClr val="accent1"/>
-          </a:fillRef>
-          <a:effectRef idx="2">
-            <a:schemeClr val="accent1"/>
-          </a:effectRef>
-          <a:fontRef idx="minor">
-            <a:schemeClr val="lt1"/>
-          </a:fontRef>
-        </p:style>
-        <p:txBody>
-          <a:bodyPr rtlCol="0" anchor="ctr"/>
-          <a:lstStyle/>
-          <a:p>
-            <a:pPr algn="ctr"/>
-          </a:p>
-        </p:txBody>
-      </p:sp>
-      <p:sp>
-        <p:nvSpPr>
-          <p:cNvPr id="3" name="Rectangle 2"/>
-          <p:cNvSpPr/>
-          <p:nvPr/>
-        </p:nvSpPr>
-        <p:spPr>
-          <a:xfrm>
-            <a:off x="0" y="0"/>
-            <a:ext cx="12191695" cy="137160"/>
-          </a:xfrm>
-          <a:prstGeom prst="rect">
-            <a:avLst/>
-          </a:prstGeom>
-          <a:solidFill>
-            <a:srgbClr val="0066CC"/>
-          </a:solidFill>
-          <a:ln>
-            <a:noFill/>
-          </a:ln>
-        </p:spPr>
-        <p:style>
-          <a:lnRef idx="1">
-            <a:schemeClr val="accent1"/>
-          </a:lnRef>
-          <a:fillRef idx="3">
-            <a:schemeClr val="accent1"/>
-          </a:fillRef>
-          <a:effectRef idx="2">
-            <a:schemeClr val="accent1"/>
-          </a:effectRef>
-          <a:fontRef idx="minor">
-            <a:schemeClr val="lt1"/>
-          </a:fontRef>
-        </p:style>
-        <p:txBody>
-          <a:bodyPr rtlCol="0" anchor="ctr"/>
-          <a:lstStyle/>
-          <a:p>
-            <a:pPr algn="ctr"/>
-          </a:p>
-        </p:txBody>
-      </p:sp>
-      <p:sp>
-        <p:nvSpPr>
-          <p:cNvPr id="4" name="TextBox 3"/>
-          <p:cNvSpPr txBox="1"/>
-          <p:nvPr/>
-        </p:nvSpPr>
-        <p:spPr>
-          <a:xfrm>
-            <a:off x="457200" y="365760"/>
-            <a:ext cx="10972800" cy="731520"/>
-          </a:xfrm>
-          <a:prstGeom prst="rect">
-            <a:avLst/>
-          </a:prstGeom>
-          <a:noFill/>
-        </p:spPr>
-        <p:txBody>
-          <a:bodyPr wrap="none">
-            <a:spAutoFit/>
-          </a:bodyPr>
-          <a:lstStyle/>
-          <a:p>
-            <a:pPr>
-              <a:defRPr sz="4000" b="1">
-                <a:solidFill>
-                  <a:srgbClr val="003366"/>
-                </a:solidFill>
-              </a:defRPr>
-            </a:pPr>
-            <a:r>
-              <a:t>Practical Use: Removing Duplicates</a:t>
-            </a:r>
-          </a:p>
-        </p:txBody>
-      </p:sp>
-      <p:sp>
-        <p:nvSpPr>
-          <p:cNvPr id="5" name="Rectangle 4"/>
-          <p:cNvSpPr/>
-          <p:nvPr/>
-        </p:nvSpPr>
-        <p:spPr>
-          <a:xfrm>
-            <a:off x="457200" y="1005840"/>
-            <a:ext cx="1828800" cy="45720"/>
-          </a:xfrm>
-          <a:prstGeom prst="rect">
-            <a:avLst/>
-          </a:prstGeom>
-          <a:solidFill>
-            <a:srgbClr val="0066CC"/>
-          </a:solidFill>
-          <a:ln>
-            <a:noFill/>
-          </a:ln>
-        </p:spPr>
-        <p:style>
-          <a:lnRef idx="1">
-            <a:schemeClr val="accent1"/>
-          </a:lnRef>
-          <a:fillRef idx="3">
-            <a:schemeClr val="accent1"/>
-          </a:fillRef>
-          <a:effectRef idx="2">
-            <a:schemeClr val="accent1"/>
-          </a:effectRef>
-          <a:fontRef idx="minor">
-            <a:schemeClr val="lt1"/>
-          </a:fontRef>
-        </p:style>
-        <p:txBody>
-          <a:bodyPr rtlCol="0" anchor="ctr"/>
-          <a:lstStyle/>
-          <a:p>
-            <a:pPr algn="ctr"/>
-          </a:p>
-        </p:txBody>
-      </p:sp>
-      <p:sp>
-        <p:nvSpPr>
-          <p:cNvPr id="6" name="TextBox 5"/>
-          <p:cNvSpPr txBox="1"/>
-          <p:nvPr/>
-        </p:nvSpPr>
-        <p:spPr>
-          <a:xfrm>
-            <a:off x="640080" y="1371600"/>
-            <a:ext cx="10789920" cy="4572000"/>
-          </a:xfrm>
-          <a:prstGeom prst="rect">
-            <a:avLst/>
-          </a:prstGeom>
-          <a:noFill/>
-        </p:spPr>
-        <p:txBody>
-          <a:bodyPr wrap="square">
-            <a:spAutoFit/>
-          </a:bodyPr>
-          <a:lstStyle/>
-          <a:p>
-            <a:pPr>
-              <a:spcAft>
-                <a:spcPts val="800"/>
-              </a:spcAft>
-              <a:defRPr sz="2000" b="1">
-                <a:solidFill>
-                  <a:srgbClr val="333333"/>
-                </a:solidFill>
-              </a:defRPr>
-            </a:pPr>
-            <a:r>
-              <a:t>Sets are perfect for removing duplicates from lists!</a:t>
-            </a:r>
-          </a:p>
-          <a:p>
-            <a:pPr>
-              <a:spcAft>
-                <a:spcPts val="800"/>
-              </a:spcAft>
-              <a:defRPr sz="2000" b="1">
-                <a:solidFill>
-                  <a:srgbClr val="333333"/>
-                </a:solidFill>
-              </a:defRPr>
-            </a:pPr>
-            <a:r>
-              <a:t>The Problem:</a:t>
-            </a:r>
-          </a:p>
-          <a:p>
-            <a:pPr>
-              <a:spcAft>
-                <a:spcPts val="800"/>
-              </a:spcAft>
-              <a:defRPr sz="2000" b="1">
-                <a:solidFill>
-                  <a:srgbClr val="333333"/>
-                </a:solidFill>
-              </a:defRPr>
-            </a:pPr>
-            <a:r>
-              <a:t>The Solution:</a:t>
-            </a:r>
-          </a:p>
-          <a:p>
-            <a:pPr>
-              <a:spcAft>
-                <a:spcPts val="800"/>
-              </a:spcAft>
-              <a:defRPr sz="2000" b="1">
-                <a:solidFill>
-                  <a:srgbClr val="333333"/>
-                </a:solidFill>
-              </a:defRPr>
-            </a:pPr>
-            <a:r>
-              <a:t>Sets automatically eliminate duplicates - super handy!</a:t>
+                <a:spcPts val="600"/>
+              </a:spcAft>
+              <a:defRPr b="1" sz="2000">
+                <a:solidFill>
+                  <a:srgbClr val="333333"/>
+                </a:solidFill>
+              </a:defRPr>
+            </a:pPr>
+            <a:r>
+              <a:t>Remove Duplicates:</a:t>
+            </a:r>
+          </a:p>
+          <a:p>
+            <a:pPr>
+              <a:spcAft>
+                <a:spcPts val="600"/>
+              </a:spcAft>
+              <a:defRPr sz="1600">
+                <a:solidFill>
+                  <a:srgbClr val="333333"/>
+                </a:solidFill>
+              </a:defRPr>
+            </a:pPr>
+            <a:r>
+              <a:t>numbers = [1, 2, 2, 3, 3, 3]</a:t>
+            </a:r>
+          </a:p>
+          <a:p>
+            <a:pPr>
+              <a:spcAft>
+                <a:spcPts val="600"/>
+              </a:spcAft>
+              <a:defRPr sz="1600">
+                <a:solidFill>
+                  <a:srgbClr val="333333"/>
+                </a:solidFill>
+              </a:defRPr>
+            </a:pPr>
+            <a:r>
+              <a:t>unique = list(set(numbers))</a:t>
+            </a:r>
+          </a:p>
+          <a:p>
+            <a:pPr>
+              <a:spcAft>
+                <a:spcPts val="600"/>
+              </a:spcAft>
+              <a:defRPr b="1" sz="2000">
+                <a:solidFill>
+                  <a:srgbClr val="333333"/>
+                </a:solidFill>
+              </a:defRPr>
+            </a:pPr>
+            <a:r>
+              <a:t>Find Common Elements:</a:t>
+            </a:r>
+          </a:p>
+          <a:p>
+            <a:pPr>
+              <a:spcAft>
+                <a:spcPts val="600"/>
+              </a:spcAft>
+              <a:defRPr sz="1600">
+                <a:solidFill>
+                  <a:srgbClr val="333333"/>
+                </a:solidFill>
+              </a:defRPr>
+            </a:pPr>
+            <a:r>
+              <a:t>list1 = [1, 2, 3, 4]</a:t>
+            </a:r>
+          </a:p>
+          <a:p>
+            <a:pPr>
+              <a:spcAft>
+                <a:spcPts val="600"/>
+              </a:spcAft>
+              <a:defRPr sz="1600">
+                <a:solidFill>
+                  <a:srgbClr val="333333"/>
+                </a:solidFill>
+              </a:defRPr>
+            </a:pPr>
+            <a:r>
+              <a:t>list2 = [3, 4, 5, 6]</a:t>
+            </a:r>
+          </a:p>
+          <a:p>
+            <a:pPr>
+              <a:spcAft>
+                <a:spcPts val="600"/>
+              </a:spcAft>
+              <a:defRPr sz="1600">
+                <a:solidFill>
+                  <a:srgbClr val="333333"/>
+                </a:solidFill>
+              </a:defRPr>
+            </a:pPr>
+            <a:r>
+              <a:t>common = set(list1) &amp; set(list2)</a:t>
+            </a:r>
+          </a:p>
+          <a:p>
+            <a:pPr>
+              <a:spcAft>
+                <a:spcPts val="600"/>
+              </a:spcAft>
+              <a:defRPr b="1" sz="2000">
+                <a:solidFill>
+                  <a:srgbClr val="333333"/>
+                </a:solidFill>
+              </a:defRPr>
+            </a:pPr>
+            <a:r>
+              <a:t>Multiple Return Values:</a:t>
+            </a:r>
+          </a:p>
+          <a:p>
+            <a:pPr>
+              <a:spcAft>
+                <a:spcPts val="600"/>
+              </a:spcAft>
+              <a:defRPr b="1" sz="2000">
+                <a:solidFill>
+                  <a:srgbClr val="333333"/>
+                </a:solidFill>
+              </a:defRPr>
+            </a:pPr>
+            <a:r>
+              <a:t>def get_stats(data):</a:t>
+            </a:r>
+          </a:p>
+          <a:p>
+            <a:pPr>
+              <a:spcAft>
+                <a:spcPts val="600"/>
+              </a:spcAft>
+              <a:defRPr sz="1600">
+                <a:solidFill>
+                  <a:srgbClr val="333333"/>
+                </a:solidFill>
+              </a:defRPr>
+            </a:pPr>
+            <a:r>
+              <a:t>    return min(data), max(data), len(data)</a:t>
+            </a:r>
+          </a:p>
+          <a:p>
+            <a:pPr>
+              <a:spcAft>
+                <a:spcPts val="600"/>
+              </a:spcAft>
+              <a:defRPr sz="1600">
+                <a:solidFill>
+                  <a:srgbClr val="333333"/>
+                </a:solidFill>
+              </a:defRPr>
+            </a:pPr>
+            <a:r>
+              <a:t>min_val, max_val, count = get_stats([1,2,3])</a:t>
+            </a:r>
+          </a:p>
+          <a:p>
+            <a:pPr>
+              <a:spcAft>
+                <a:spcPts val="600"/>
+              </a:spcAft>
+              <a:defRPr b="1" sz="2000">
+                <a:solidFill>
+                  <a:srgbClr val="333333"/>
+                </a:solidFill>
+              </a:defRPr>
+            </a:pPr>
+            <a:r>
+              <a:t>Coordinate Pairs:</a:t>
+            </a:r>
+          </a:p>
+          <a:p>
+            <a:pPr>
+              <a:spcAft>
+                <a:spcPts val="600"/>
+              </a:spcAft>
+              <a:defRPr sz="1600">
+                <a:solidFill>
+                  <a:srgbClr val="333333"/>
+                </a:solidFill>
+              </a:defRPr>
+            </a:pPr>
+            <a:r>
+              <a:t>positions = {(0, 0), (1, 1), (2, 2)}</a:t>
+            </a:r>
+          </a:p>
+          <a:p>
+            <a:pPr>
+              <a:spcAft>
+                <a:spcPts val="600"/>
+              </a:spcAft>
+              <a:defRPr b="1" sz="2000">
+                <a:solidFill>
+                  <a:srgbClr val="333333"/>
+                </a:solidFill>
+              </a:defRPr>
+            </a:pPr>
+            <a:r>
+              <a:t>if (x, y) in positions:</a:t>
+            </a:r>
+          </a:p>
+          <a:p>
+            <a:pPr>
+              <a:spcAft>
+                <a:spcPts val="600"/>
+              </a:spcAft>
+              <a:defRPr sz="1600">
+                <a:solidFill>
+                  <a:srgbClr val="333333"/>
+                </a:solidFill>
+              </a:defRPr>
+            </a:pPr>
+            <a:r>
+              <a:t>    print("Occupied")</a:t>
             </a:r>
           </a:p>
         </p:txBody>

--- a/python_course/chapter_08_tuples_and_sets/tuples_and_sets.pptx
+++ b/python_course/chapter_08_tuples_and_sets/tuples_and_sets.pptx
@@ -12,6 +12,8 @@
     <p:sldId id="260" r:id="rId11"/>
     <p:sldId id="261" r:id="rId12"/>
     <p:sldId id="262" r:id="rId13"/>
+    <p:sldId id="263" r:id="rId14"/>
+    <p:sldId id="264" r:id="rId15"/>
   </p:sldIdLst>
   <p:sldSz cx="12191695" cy="6858000" type="screen4x3"/>
   <p:notesSz cx="6858000" cy="9144000"/>
@@ -3109,7 +3111,7 @@
             <a:avLst/>
           </a:prstGeom>
           <a:solidFill>
-            <a:srgbClr val="F0F8FF"/>
+            <a:srgbClr val="14468C"/>
           </a:solidFill>
           <a:ln>
             <a:noFill/>
@@ -3139,14 +3141,100 @@
       </p:sp>
       <p:sp>
         <p:nvSpPr>
-          <p:cNvPr id="3" name="TextBox 2"/>
+          <p:cNvPr id="3" name="Rectangle 2"/>
+          <p:cNvSpPr/>
+          <p:nvPr/>
+        </p:nvSpPr>
+        <p:spPr>
+          <a:xfrm>
+            <a:off x="0" y="0"/>
+            <a:ext cx="12191695" cy="1828800"/>
+          </a:xfrm>
+          <a:prstGeom prst="rect">
+            <a:avLst/>
+          </a:prstGeom>
+          <a:solidFill>
+            <a:srgbClr val="0078D7"/>
+          </a:solidFill>
+          <a:ln>
+            <a:noFill/>
+          </a:ln>
+        </p:spPr>
+        <p:style>
+          <a:lnRef idx="1">
+            <a:schemeClr val="accent1"/>
+          </a:lnRef>
+          <a:fillRef idx="3">
+            <a:schemeClr val="accent1"/>
+          </a:fillRef>
+          <a:effectRef idx="2">
+            <a:schemeClr val="accent1"/>
+          </a:effectRef>
+          <a:fontRef idx="minor">
+            <a:schemeClr val="lt1"/>
+          </a:fontRef>
+        </p:style>
+        <p:txBody>
+          <a:bodyPr rtlCol="0" anchor="ctr"/>
+          <a:lstStyle/>
+          <a:p>
+            <a:pPr algn="ctr"/>
+          </a:p>
+        </p:txBody>
+      </p:sp>
+      <p:sp>
+        <p:nvSpPr>
+          <p:cNvPr id="4" name="Rectangle 3"/>
+          <p:cNvSpPr/>
+          <p:nvPr/>
+        </p:nvSpPr>
+        <p:spPr>
+          <a:xfrm>
+            <a:off x="0" y="1828800"/>
+            <a:ext cx="274320" cy="5029200"/>
+          </a:xfrm>
+          <a:prstGeom prst="rect">
+            <a:avLst/>
+          </a:prstGeom>
+          <a:solidFill>
+            <a:srgbClr val="FFBB33"/>
+          </a:solidFill>
+          <a:ln>
+            <a:noFill/>
+          </a:ln>
+        </p:spPr>
+        <p:style>
+          <a:lnRef idx="1">
+            <a:schemeClr val="accent1"/>
+          </a:lnRef>
+          <a:fillRef idx="3">
+            <a:schemeClr val="accent1"/>
+          </a:fillRef>
+          <a:effectRef idx="2">
+            <a:schemeClr val="accent1"/>
+          </a:effectRef>
+          <a:fontRef idx="minor">
+            <a:schemeClr val="lt1"/>
+          </a:fontRef>
+        </p:style>
+        <p:txBody>
+          <a:bodyPr rtlCol="0" anchor="ctr"/>
+          <a:lstStyle/>
+          <a:p>
+            <a:pPr algn="ctr"/>
+          </a:p>
+        </p:txBody>
+      </p:sp>
+      <p:sp>
+        <p:nvSpPr>
+          <p:cNvPr id="5" name="TextBox 4"/>
           <p:cNvSpPr txBox="1"/>
           <p:nvPr/>
         </p:nvSpPr>
         <p:spPr>
           <a:xfrm>
-            <a:off x="914400" y="2286000"/>
-            <a:ext cx="10360152" cy="1097280"/>
+            <a:off x="1371600" y="2560320"/>
+            <a:ext cx="10058400" cy="1371600"/>
           </a:xfrm>
           <a:prstGeom prst="rect">
             <a:avLst/>
@@ -3160,9 +3248,9 @@
           <a:lstStyle/>
           <a:p>
             <a:pPr algn="ctr">
-              <a:defRPr sz="4800" b="1">
-                <a:solidFill>
-                  <a:srgbClr val="003366"/>
+              <a:defRPr sz="5200" b="1">
+                <a:solidFill>
+                  <a:srgbClr val="FFFFFF"/>
                 </a:solidFill>
               </a:defRPr>
             </a:pPr>
@@ -3174,14 +3262,57 @@
       </p:sp>
       <p:sp>
         <p:nvSpPr>
-          <p:cNvPr id="4" name="TextBox 3"/>
+          <p:cNvPr id="6" name="Rectangle 5"/>
+          <p:cNvSpPr/>
+          <p:nvPr/>
+        </p:nvSpPr>
+        <p:spPr>
+          <a:xfrm>
+            <a:off x="2743200" y="4114800"/>
+            <a:ext cx="6702552" cy="1097280"/>
+          </a:xfrm>
+          <a:prstGeom prst="rect">
+            <a:avLst/>
+          </a:prstGeom>
+          <a:solidFill>
+            <a:srgbClr val="0066CC"/>
+          </a:solidFill>
+          <a:ln>
+            <a:noFill/>
+          </a:ln>
+        </p:spPr>
+        <p:style>
+          <a:lnRef idx="1">
+            <a:schemeClr val="accent1"/>
+          </a:lnRef>
+          <a:fillRef idx="3">
+            <a:schemeClr val="accent1"/>
+          </a:fillRef>
+          <a:effectRef idx="2">
+            <a:schemeClr val="accent1"/>
+          </a:effectRef>
+          <a:fontRef idx="minor">
+            <a:schemeClr val="lt1"/>
+          </a:fontRef>
+        </p:style>
+        <p:txBody>
+          <a:bodyPr rtlCol="0" anchor="ctr"/>
+          <a:lstStyle/>
+          <a:p>
+            <a:pPr algn="ctr"/>
+          </a:p>
+        </p:txBody>
+      </p:sp>
+      <p:sp>
+        <p:nvSpPr>
+          <p:cNvPr id="7" name="TextBox 6"/>
           <p:cNvSpPr txBox="1"/>
           <p:nvPr/>
         </p:nvSpPr>
         <p:spPr>
           <a:xfrm>
-            <a:off x="914400" y="3657600"/>
-            <a:ext cx="10360152" cy="731520"/>
+            <a:off x="2926080" y="4297680"/>
+            <a:ext cx="6336792" cy="731520"/>
           </a:xfrm>
           <a:prstGeom prst="rect">
             <a:avLst/>
@@ -3197,7 +3328,7 @@
             <a:pPr algn="ctr">
               <a:defRPr sz="2800">
                 <a:solidFill>
-                  <a:srgbClr val="4682B4"/>
+                  <a:srgbClr val="FFFFFF"/>
                 </a:solidFill>
               </a:defRPr>
             </a:pPr>
@@ -3240,7 +3371,7 @@
             <a:avLst/>
           </a:prstGeom>
           <a:solidFill>
-            <a:srgbClr val="FFFFFF"/>
+            <a:srgbClr val="FAFAFA"/>
           </a:solidFill>
           <a:ln>
             <a:noFill/>
@@ -3277,7 +3408,7 @@
         <p:spPr>
           <a:xfrm>
             <a:off x="0" y="0"/>
-            <a:ext cx="12191695" cy="137160"/>
+            <a:ext cx="12191695" cy="1097280"/>
           </a:xfrm>
           <a:prstGeom prst="rect">
             <a:avLst/>
@@ -3313,13 +3444,56 @@
       </p:sp>
       <p:sp>
         <p:nvSpPr>
-          <p:cNvPr id="4" name="TextBox 3"/>
+          <p:cNvPr id="4" name="Rectangle 3"/>
+          <p:cNvSpPr/>
+          <p:nvPr/>
+        </p:nvSpPr>
+        <p:spPr>
+          <a:xfrm>
+            <a:off x="0" y="1097280"/>
+            <a:ext cx="137160" cy="5760720"/>
+          </a:xfrm>
+          <a:prstGeom prst="rect">
+            <a:avLst/>
+          </a:prstGeom>
+          <a:solidFill>
+            <a:srgbClr val="FFBB33"/>
+          </a:solidFill>
+          <a:ln>
+            <a:noFill/>
+          </a:ln>
+        </p:spPr>
+        <p:style>
+          <a:lnRef idx="1">
+            <a:schemeClr val="accent1"/>
+          </a:lnRef>
+          <a:fillRef idx="3">
+            <a:schemeClr val="accent1"/>
+          </a:fillRef>
+          <a:effectRef idx="2">
+            <a:schemeClr val="accent1"/>
+          </a:effectRef>
+          <a:fontRef idx="minor">
+            <a:schemeClr val="lt1"/>
+          </a:fontRef>
+        </p:style>
+        <p:txBody>
+          <a:bodyPr rtlCol="0" anchor="ctr"/>
+          <a:lstStyle/>
+          <a:p>
+            <a:pPr algn="ctr"/>
+          </a:p>
+        </p:txBody>
+      </p:sp>
+      <p:sp>
+        <p:nvSpPr>
+          <p:cNvPr id="5" name="TextBox 4"/>
           <p:cNvSpPr txBox="1"/>
           <p:nvPr/>
         </p:nvSpPr>
         <p:spPr>
           <a:xfrm>
-            <a:off x="457200" y="320040"/>
+            <a:off x="365760" y="274320"/>
             <a:ext cx="10972800" cy="640080"/>
           </a:xfrm>
           <a:prstGeom prst="rect">
@@ -3336,7 +3510,7 @@
             <a:pPr>
               <a:defRPr sz="3600" b="1">
                 <a:solidFill>
-                  <a:srgbClr val="003366"/>
+                  <a:srgbClr val="FFFFFF"/>
                 </a:solidFill>
               </a:defRPr>
             </a:pPr>
@@ -3348,14 +3522,14 @@
       </p:sp>
       <p:sp>
         <p:nvSpPr>
-          <p:cNvPr id="5" name="TextBox 4"/>
+          <p:cNvPr id="6" name="TextBox 5"/>
           <p:cNvSpPr txBox="1"/>
           <p:nvPr/>
         </p:nvSpPr>
         <p:spPr>
           <a:xfrm>
-            <a:off x="640080" y="1188720"/>
-            <a:ext cx="10789920" cy="5303520"/>
+            <a:off x="457200" y="1371600"/>
+            <a:ext cx="11247120" cy="320040"/>
           </a:xfrm>
           <a:prstGeom prst="rect">
             <a:avLst/>
@@ -3363,15 +3537,47 @@
           <a:noFill/>
         </p:spPr>
         <p:txBody>
-          <a:bodyPr wrap="square">
+          <a:bodyPr wrap="none">
             <a:spAutoFit/>
           </a:bodyPr>
           <a:lstStyle/>
           <a:p>
             <a:pPr>
-              <a:spcAft>
-                <a:spcPts val="600"/>
-              </a:spcAft>
+              <a:defRPr sz="1700">
+                <a:solidFill>
+                  <a:srgbClr val="333333"/>
+                </a:solidFill>
+              </a:defRPr>
+            </a:pPr>
+            <a:r>
+              <a:t>What Are Tuples?</a:t>
+            </a:r>
+          </a:p>
+        </p:txBody>
+      </p:sp>
+      <p:sp>
+        <p:nvSpPr>
+          <p:cNvPr id="7" name="TextBox 6"/>
+          <p:cNvSpPr txBox="1"/>
+          <p:nvPr/>
+        </p:nvSpPr>
+        <p:spPr>
+          <a:xfrm>
+            <a:off x="457200" y="1645920"/>
+            <a:ext cx="11247120" cy="320040"/>
+          </a:xfrm>
+          <a:prstGeom prst="rect">
+            <a:avLst/>
+          </a:prstGeom>
+          <a:noFill/>
+        </p:spPr>
+        <p:txBody>
+          <a:bodyPr wrap="none">
+            <a:spAutoFit/>
+          </a:bodyPr>
+          <a:lstStyle/>
+          <a:p>
+            <a:pPr lvl="1">
               <a:defRPr sz="1600">
                 <a:solidFill>
                   <a:srgbClr val="333333"/>
@@ -3379,14 +3585,34 @@
               </a:defRPr>
             </a:pPr>
             <a:r>
-              <a:t>What Are Tuples?</a:t>
-            </a:r>
-          </a:p>
+              <a:t>• Ordered collections</a:t>
+            </a:r>
+          </a:p>
+        </p:txBody>
+      </p:sp>
+      <p:sp>
+        <p:nvSpPr>
+          <p:cNvPr id="8" name="TextBox 7"/>
+          <p:cNvSpPr txBox="1"/>
+          <p:nvPr/>
+        </p:nvSpPr>
+        <p:spPr>
+          <a:xfrm>
+            <a:off x="457200" y="1920240"/>
+            <a:ext cx="11247120" cy="320040"/>
+          </a:xfrm>
+          <a:prstGeom prst="rect">
+            <a:avLst/>
+          </a:prstGeom>
+          <a:noFill/>
+        </p:spPr>
+        <p:txBody>
+          <a:bodyPr wrap="none">
+            <a:spAutoFit/>
+          </a:bodyPr>
+          <a:lstStyle/>
           <a:p>
             <a:pPr lvl="1">
-              <a:spcAft>
-                <a:spcPts val="400"/>
-              </a:spcAft>
               <a:defRPr sz="1600">
                 <a:solidFill>
                   <a:srgbClr val="333333"/>
@@ -3394,14 +3620,34 @@
               </a:defRPr>
             </a:pPr>
             <a:r>
-              <a:t>• Ordered collections</a:t>
-            </a:r>
-          </a:p>
+              <a:t>• Immutable (cannot be changed)</a:t>
+            </a:r>
+          </a:p>
+        </p:txBody>
+      </p:sp>
+      <p:sp>
+        <p:nvSpPr>
+          <p:cNvPr id="9" name="TextBox 8"/>
+          <p:cNvSpPr txBox="1"/>
+          <p:nvPr/>
+        </p:nvSpPr>
+        <p:spPr>
+          <a:xfrm>
+            <a:off x="457200" y="2194560"/>
+            <a:ext cx="11247120" cy="320040"/>
+          </a:xfrm>
+          <a:prstGeom prst="rect">
+            <a:avLst/>
+          </a:prstGeom>
+          <a:noFill/>
+        </p:spPr>
+        <p:txBody>
+          <a:bodyPr wrap="none">
+            <a:spAutoFit/>
+          </a:bodyPr>
+          <a:lstStyle/>
           <a:p>
             <a:pPr lvl="1">
-              <a:spcAft>
-                <a:spcPts val="400"/>
-              </a:spcAft>
               <a:defRPr sz="1600">
                 <a:solidFill>
                   <a:srgbClr val="333333"/>
@@ -3409,14 +3655,34 @@
               </a:defRPr>
             </a:pPr>
             <a:r>
-              <a:t>• Immutable (cannot be changed)</a:t>
-            </a:r>
-          </a:p>
+              <a:t>• Can contain any types</a:t>
+            </a:r>
+          </a:p>
+        </p:txBody>
+      </p:sp>
+      <p:sp>
+        <p:nvSpPr>
+          <p:cNvPr id="10" name="TextBox 9"/>
+          <p:cNvSpPr txBox="1"/>
+          <p:nvPr/>
+        </p:nvSpPr>
+        <p:spPr>
+          <a:xfrm>
+            <a:off x="457200" y="2468879"/>
+            <a:ext cx="11247120" cy="320040"/>
+          </a:xfrm>
+          <a:prstGeom prst="rect">
+            <a:avLst/>
+          </a:prstGeom>
+          <a:noFill/>
+        </p:spPr>
+        <p:txBody>
+          <a:bodyPr wrap="none">
+            <a:spAutoFit/>
+          </a:bodyPr>
+          <a:lstStyle/>
           <a:p>
             <a:pPr lvl="1">
-              <a:spcAft>
-                <a:spcPts val="400"/>
-              </a:spcAft>
               <a:defRPr sz="1600">
                 <a:solidFill>
                   <a:srgbClr val="333333"/>
@@ -3424,74 +3690,320 @@
               </a:defRPr>
             </a:pPr>
             <a:r>
-              <a:t>• Can contain any types</a:t>
-            </a:r>
-          </a:p>
-          <a:p>
-            <a:pPr lvl="1">
-              <a:spcAft>
-                <a:spcPts val="400"/>
-              </a:spcAft>
-              <a:defRPr sz="1600">
-                <a:solidFill>
-                  <a:srgbClr val="333333"/>
+              <a:t>• Indexed like lists</a:t>
+            </a:r>
+          </a:p>
+        </p:txBody>
+      </p:sp>
+      <p:sp>
+        <p:nvSpPr>
+          <p:cNvPr id="11" name="Rectangle 10"/>
+          <p:cNvSpPr/>
+          <p:nvPr/>
+        </p:nvSpPr>
+        <p:spPr>
+          <a:xfrm>
+            <a:off x="365760" y="2697479"/>
+            <a:ext cx="11430000" cy="365760"/>
+          </a:xfrm>
+          <a:prstGeom prst="rect">
+            <a:avLst/>
+          </a:prstGeom>
+          <a:solidFill>
+            <a:srgbClr val="0078D7"/>
+          </a:solidFill>
+          <a:ln>
+            <a:noFill/>
+          </a:ln>
+        </p:spPr>
+        <p:style>
+          <a:lnRef idx="1">
+            <a:schemeClr val="accent1"/>
+          </a:lnRef>
+          <a:fillRef idx="3">
+            <a:schemeClr val="accent1"/>
+          </a:fillRef>
+          <a:effectRef idx="2">
+            <a:schemeClr val="accent1"/>
+          </a:effectRef>
+          <a:fontRef idx="minor">
+            <a:schemeClr val="lt1"/>
+          </a:fontRef>
+        </p:style>
+        <p:txBody>
+          <a:bodyPr rtlCol="0" anchor="ctr"/>
+          <a:lstStyle/>
+          <a:p>
+            <a:pPr algn="ctr"/>
+          </a:p>
+        </p:txBody>
+      </p:sp>
+      <p:sp>
+        <p:nvSpPr>
+          <p:cNvPr id="12" name="TextBox 11"/>
+          <p:cNvSpPr txBox="1"/>
+          <p:nvPr/>
+        </p:nvSpPr>
+        <p:spPr>
+          <a:xfrm>
+            <a:off x="548640" y="2743199"/>
+            <a:ext cx="10972800" cy="274320"/>
+          </a:xfrm>
+          <a:prstGeom prst="rect">
+            <a:avLst/>
+          </a:prstGeom>
+          <a:noFill/>
+        </p:spPr>
+        <p:txBody>
+          <a:bodyPr wrap="none">
+            <a:spAutoFit/>
+          </a:bodyPr>
+          <a:lstStyle/>
+          <a:p>
+            <a:pPr>
+              <a:defRPr sz="2000" b="1">
+                <a:solidFill>
+                  <a:srgbClr val="FFFFFF"/>
                 </a:solidFill>
               </a:defRPr>
             </a:pPr>
             <a:r>
-              <a:t>• Indexed like lists</a:t>
-            </a:r>
-          </a:p>
+              <a:t>Creating:</a:t>
+            </a:r>
+          </a:p>
+        </p:txBody>
+      </p:sp>
+      <p:sp>
+        <p:nvSpPr>
+          <p:cNvPr id="13" name="Rectangle 12"/>
+          <p:cNvSpPr/>
+          <p:nvPr/>
+        </p:nvSpPr>
+        <p:spPr>
+          <a:xfrm>
+            <a:off x="640080" y="3154679"/>
+            <a:ext cx="10789920" cy="1097280"/>
+          </a:xfrm>
+          <a:prstGeom prst="rect">
+            <a:avLst/>
+          </a:prstGeom>
+          <a:solidFill>
+            <a:srgbClr val="282C34"/>
+          </a:solidFill>
+          <a:ln>
+            <a:noFill/>
+          </a:ln>
+        </p:spPr>
+        <p:style>
+          <a:lnRef idx="1">
+            <a:schemeClr val="accent1"/>
+          </a:lnRef>
+          <a:fillRef idx="3">
+            <a:schemeClr val="accent1"/>
+          </a:fillRef>
+          <a:effectRef idx="2">
+            <a:schemeClr val="accent1"/>
+          </a:effectRef>
+          <a:fontRef idx="minor">
+            <a:schemeClr val="lt1"/>
+          </a:fontRef>
+        </p:style>
+        <p:txBody>
+          <a:bodyPr rtlCol="0" anchor="ctr"/>
+          <a:lstStyle/>
+          <a:p>
+            <a:pPr algn="ctr"/>
+          </a:p>
+        </p:txBody>
+      </p:sp>
+      <p:sp>
+        <p:nvSpPr>
+          <p:cNvPr id="14" name="Rectangle 13"/>
+          <p:cNvSpPr/>
+          <p:nvPr/>
+        </p:nvSpPr>
+        <p:spPr>
+          <a:xfrm>
+            <a:off x="640080" y="3154679"/>
+            <a:ext cx="73152" cy="1097280"/>
+          </a:xfrm>
+          <a:prstGeom prst="rect">
+            <a:avLst/>
+          </a:prstGeom>
+          <a:solidFill>
+            <a:srgbClr val="61AFEF"/>
+          </a:solidFill>
+          <a:ln>
+            <a:noFill/>
+          </a:ln>
+        </p:spPr>
+        <p:style>
+          <a:lnRef idx="1">
+            <a:schemeClr val="accent1"/>
+          </a:lnRef>
+          <a:fillRef idx="3">
+            <a:schemeClr val="accent1"/>
+          </a:fillRef>
+          <a:effectRef idx="2">
+            <a:schemeClr val="accent1"/>
+          </a:effectRef>
+          <a:fontRef idx="minor">
+            <a:schemeClr val="lt1"/>
+          </a:fontRef>
+        </p:style>
+        <p:txBody>
+          <a:bodyPr rtlCol="0" anchor="ctr"/>
+          <a:lstStyle/>
+          <a:p>
+            <a:pPr algn="ctr"/>
+          </a:p>
+        </p:txBody>
+      </p:sp>
+      <p:sp>
+        <p:nvSpPr>
+          <p:cNvPr id="15" name="TextBox 14"/>
+          <p:cNvSpPr txBox="1"/>
+          <p:nvPr/>
+        </p:nvSpPr>
+        <p:spPr>
+          <a:xfrm>
+            <a:off x="914400" y="3200399"/>
+            <a:ext cx="10241280" cy="1005839"/>
+          </a:xfrm>
+          <a:prstGeom prst="rect">
+            <a:avLst/>
+          </a:prstGeom>
+          <a:noFill/>
+        </p:spPr>
+        <p:txBody>
+          <a:bodyPr wrap="none">
+            <a:spAutoFit/>
+          </a:bodyPr>
+          <a:lstStyle/>
           <a:p>
             <a:pPr>
               <a:spcAft>
-                <a:spcPts val="600"/>
+                <a:spcPts val="200"/>
               </a:spcAft>
-              <a:defRPr b="1" sz="2000">
-                <a:solidFill>
-                  <a:srgbClr val="333333"/>
-                </a:solidFill>
+              <a:defRPr sz="1400">
+                <a:solidFill>
+                  <a:srgbClr val="ABB2BF"/>
+                </a:solidFill>
+                <a:latin typeface="Consolas"/>
               </a:defRPr>
             </a:pPr>
             <a:r>
-              <a:t>Creating:</a:t>
+              <a:t>point = (10, 20)</a:t>
             </a:r>
           </a:p>
           <a:p>
             <a:pPr>
               <a:spcAft>
-                <a:spcPts val="600"/>
+                <a:spcPts val="200"/>
               </a:spcAft>
-              <a:defRPr sz="1600">
-                <a:solidFill>
-                  <a:srgbClr val="333333"/>
-                </a:solidFill>
+              <a:defRPr sz="1400">
+                <a:solidFill>
+                  <a:srgbClr val="ABB2BF"/>
+                </a:solidFill>
+                <a:latin typeface="Consolas"/>
               </a:defRPr>
             </a:pPr>
             <a:r>
-              <a:t>point = (10, 20)</a:t>
+              <a:t>person = ("Alice", 25, "NYC")</a:t>
             </a:r>
           </a:p>
           <a:p>
             <a:pPr>
               <a:spcAft>
-                <a:spcPts val="600"/>
+                <a:spcPts val="200"/>
               </a:spcAft>
-              <a:defRPr sz="1600">
-                <a:solidFill>
-                  <a:srgbClr val="333333"/>
-                </a:solidFill>
+              <a:defRPr sz="1400">
+                <a:solidFill>
+                  <a:srgbClr val="ABB2BF"/>
+                </a:solidFill>
+                <a:latin typeface="Consolas"/>
               </a:defRPr>
             </a:pPr>
             <a:r>
-              <a:t>person = ("Alice", 25, "NYC")</a:t>
+              <a:t>single = (42,)  # Note comma!</a:t>
             </a:r>
           </a:p>
           <a:p>
             <a:pPr>
               <a:spcAft>
-                <a:spcPts val="600"/>
+                <a:spcPts val="200"/>
               </a:spcAft>
+              <a:defRPr sz="1400">
+                <a:solidFill>
+                  <a:srgbClr val="ABB2BF"/>
+                </a:solidFill>
+                <a:latin typeface="Consolas"/>
+              </a:defRPr>
+            </a:pPr>
+            <a:r>
+              <a:t>empty = ()</a:t>
+            </a:r>
+          </a:p>
+        </p:txBody>
+      </p:sp>
+      <p:sp>
+        <p:nvSpPr>
+          <p:cNvPr id="16" name="TextBox 15"/>
+          <p:cNvSpPr txBox="1"/>
+          <p:nvPr/>
+        </p:nvSpPr>
+        <p:spPr>
+          <a:xfrm>
+            <a:off x="457200" y="4434840"/>
+            <a:ext cx="11247120" cy="320040"/>
+          </a:xfrm>
+          <a:prstGeom prst="rect">
+            <a:avLst/>
+          </a:prstGeom>
+          <a:noFill/>
+        </p:spPr>
+        <p:txBody>
+          <a:bodyPr wrap="none">
+            <a:spAutoFit/>
+          </a:bodyPr>
+          <a:lstStyle/>
+          <a:p>
+            <a:pPr>
+              <a:defRPr sz="1700">
+                <a:solidFill>
+                  <a:srgbClr val="333333"/>
+                </a:solidFill>
+              </a:defRPr>
+            </a:pPr>
+            <a:r>
+              <a:t>Why Use Tuples?</a:t>
+            </a:r>
+          </a:p>
+        </p:txBody>
+      </p:sp>
+      <p:sp>
+        <p:nvSpPr>
+          <p:cNvPr id="17" name="TextBox 16"/>
+          <p:cNvSpPr txBox="1"/>
+          <p:nvPr/>
+        </p:nvSpPr>
+        <p:spPr>
+          <a:xfrm>
+            <a:off x="457200" y="4709159"/>
+            <a:ext cx="11247120" cy="320040"/>
+          </a:xfrm>
+          <a:prstGeom prst="rect">
+            <a:avLst/>
+          </a:prstGeom>
+          <a:noFill/>
+        </p:spPr>
+        <p:txBody>
+          <a:bodyPr wrap="none">
+            <a:spAutoFit/>
+          </a:bodyPr>
+          <a:lstStyle/>
+          <a:p>
+            <a:pPr lvl="1">
               <a:defRPr sz="1600">
                 <a:solidFill>
                   <a:srgbClr val="333333"/>
@@ -3499,14 +4011,34 @@
               </a:defRPr>
             </a:pPr>
             <a:r>
-              <a:t>single = (42,)  # Note comma!</a:t>
-            </a:r>
-          </a:p>
-          <a:p>
-            <a:pPr>
-              <a:spcAft>
-                <a:spcPts val="600"/>
-              </a:spcAft>
+              <a:t>• Protect data from changes</a:t>
+            </a:r>
+          </a:p>
+        </p:txBody>
+      </p:sp>
+      <p:sp>
+        <p:nvSpPr>
+          <p:cNvPr id="18" name="TextBox 17"/>
+          <p:cNvSpPr txBox="1"/>
+          <p:nvPr/>
+        </p:nvSpPr>
+        <p:spPr>
+          <a:xfrm>
+            <a:off x="457200" y="4983479"/>
+            <a:ext cx="11247120" cy="320040"/>
+          </a:xfrm>
+          <a:prstGeom prst="rect">
+            <a:avLst/>
+          </a:prstGeom>
+          <a:noFill/>
+        </p:spPr>
+        <p:txBody>
+          <a:bodyPr wrap="none">
+            <a:spAutoFit/>
+          </a:bodyPr>
+          <a:lstStyle/>
+          <a:p>
+            <a:pPr lvl="1">
               <a:defRPr sz="1600">
                 <a:solidFill>
                   <a:srgbClr val="333333"/>
@@ -3514,14 +4046,34 @@
               </a:defRPr>
             </a:pPr>
             <a:r>
-              <a:t>empty = ()</a:t>
-            </a:r>
-          </a:p>
-          <a:p>
-            <a:pPr>
-              <a:spcAft>
-                <a:spcPts val="600"/>
-              </a:spcAft>
+              <a:t>• Use as dictionary keys</a:t>
+            </a:r>
+          </a:p>
+        </p:txBody>
+      </p:sp>
+      <p:sp>
+        <p:nvSpPr>
+          <p:cNvPr id="19" name="TextBox 18"/>
+          <p:cNvSpPr txBox="1"/>
+          <p:nvPr/>
+        </p:nvSpPr>
+        <p:spPr>
+          <a:xfrm>
+            <a:off x="457200" y="5257799"/>
+            <a:ext cx="11247120" cy="320040"/>
+          </a:xfrm>
+          <a:prstGeom prst="rect">
+            <a:avLst/>
+          </a:prstGeom>
+          <a:noFill/>
+        </p:spPr>
+        <p:txBody>
+          <a:bodyPr wrap="none">
+            <a:spAutoFit/>
+          </a:bodyPr>
+          <a:lstStyle/>
+          <a:p>
+            <a:pPr lvl="1">
               <a:defRPr sz="1600">
                 <a:solidFill>
                   <a:srgbClr val="333333"/>
@@ -3529,14 +4081,34 @@
               </a:defRPr>
             </a:pPr>
             <a:r>
-              <a:t>Why Use Tuples?</a:t>
-            </a:r>
-          </a:p>
+              <a:t>• Return multiple values</a:t>
+            </a:r>
+          </a:p>
+        </p:txBody>
+      </p:sp>
+      <p:sp>
+        <p:nvSpPr>
+          <p:cNvPr id="20" name="TextBox 19"/>
+          <p:cNvSpPr txBox="1"/>
+          <p:nvPr/>
+        </p:nvSpPr>
+        <p:spPr>
+          <a:xfrm>
+            <a:off x="457200" y="5532119"/>
+            <a:ext cx="11247120" cy="320040"/>
+          </a:xfrm>
+          <a:prstGeom prst="rect">
+            <a:avLst/>
+          </a:prstGeom>
+          <a:noFill/>
+        </p:spPr>
+        <p:txBody>
+          <a:bodyPr wrap="none">
+            <a:spAutoFit/>
+          </a:bodyPr>
+          <a:lstStyle/>
           <a:p>
             <a:pPr lvl="1">
-              <a:spcAft>
-                <a:spcPts val="400"/>
-              </a:spcAft>
               <a:defRPr sz="1600">
                 <a:solidFill>
                   <a:srgbClr val="333333"/>
@@ -3544,59 +4116,34 @@
               </a:defRPr>
             </a:pPr>
             <a:r>
-              <a:t>• Protect data from changes</a:t>
-            </a:r>
-          </a:p>
+              <a:t>• Faster than lists</a:t>
+            </a:r>
+          </a:p>
+        </p:txBody>
+      </p:sp>
+      <p:sp>
+        <p:nvSpPr>
+          <p:cNvPr id="21" name="TextBox 20"/>
+          <p:cNvSpPr txBox="1"/>
+          <p:nvPr/>
+        </p:nvSpPr>
+        <p:spPr>
+          <a:xfrm>
+            <a:off x="457200" y="5806439"/>
+            <a:ext cx="11247120" cy="320040"/>
+          </a:xfrm>
+          <a:prstGeom prst="rect">
+            <a:avLst/>
+          </a:prstGeom>
+          <a:noFill/>
+        </p:spPr>
+        <p:txBody>
+          <a:bodyPr wrap="none">
+            <a:spAutoFit/>
+          </a:bodyPr>
+          <a:lstStyle/>
           <a:p>
             <a:pPr lvl="1">
-              <a:spcAft>
-                <a:spcPts val="400"/>
-              </a:spcAft>
-              <a:defRPr sz="1600">
-                <a:solidFill>
-                  <a:srgbClr val="333333"/>
-                </a:solidFill>
-              </a:defRPr>
-            </a:pPr>
-            <a:r>
-              <a:t>• Use as dictionary keys</a:t>
-            </a:r>
-          </a:p>
-          <a:p>
-            <a:pPr lvl="1">
-              <a:spcAft>
-                <a:spcPts val="400"/>
-              </a:spcAft>
-              <a:defRPr sz="1600">
-                <a:solidFill>
-                  <a:srgbClr val="333333"/>
-                </a:solidFill>
-              </a:defRPr>
-            </a:pPr>
-            <a:r>
-              <a:t>• Return multiple values</a:t>
-            </a:r>
-          </a:p>
-          <a:p>
-            <a:pPr lvl="1">
-              <a:spcAft>
-                <a:spcPts val="400"/>
-              </a:spcAft>
-              <a:defRPr sz="1600">
-                <a:solidFill>
-                  <a:srgbClr val="333333"/>
-                </a:solidFill>
-              </a:defRPr>
-            </a:pPr>
-            <a:r>
-              <a:t>• Faster than lists</a:t>
-            </a:r>
-          </a:p>
-          <a:p>
-            <a:pPr lvl="1">
-              <a:spcAft>
-                <a:spcPts val="400"/>
-              </a:spcAft>
               <a:defRPr sz="1600">
                 <a:solidFill>
                   <a:srgbClr val="333333"/>
@@ -3642,7 +4189,7 @@
             <a:avLst/>
           </a:prstGeom>
           <a:solidFill>
-            <a:srgbClr val="FFFFFF"/>
+            <a:srgbClr val="FAFAFA"/>
           </a:solidFill>
           <a:ln>
             <a:noFill/>
@@ -3679,7 +4226,7 @@
         <p:spPr>
           <a:xfrm>
             <a:off x="0" y="0"/>
-            <a:ext cx="12191695" cy="137160"/>
+            <a:ext cx="12191695" cy="1097280"/>
           </a:xfrm>
           <a:prstGeom prst="rect">
             <a:avLst/>
@@ -3715,13 +4262,56 @@
       </p:sp>
       <p:sp>
         <p:nvSpPr>
-          <p:cNvPr id="4" name="TextBox 3"/>
+          <p:cNvPr id="4" name="Rectangle 3"/>
+          <p:cNvSpPr/>
+          <p:nvPr/>
+        </p:nvSpPr>
+        <p:spPr>
+          <a:xfrm>
+            <a:off x="0" y="1097280"/>
+            <a:ext cx="137160" cy="5760720"/>
+          </a:xfrm>
+          <a:prstGeom prst="rect">
+            <a:avLst/>
+          </a:prstGeom>
+          <a:solidFill>
+            <a:srgbClr val="FFBB33"/>
+          </a:solidFill>
+          <a:ln>
+            <a:noFill/>
+          </a:ln>
+        </p:spPr>
+        <p:style>
+          <a:lnRef idx="1">
+            <a:schemeClr val="accent1"/>
+          </a:lnRef>
+          <a:fillRef idx="3">
+            <a:schemeClr val="accent1"/>
+          </a:fillRef>
+          <a:effectRef idx="2">
+            <a:schemeClr val="accent1"/>
+          </a:effectRef>
+          <a:fontRef idx="minor">
+            <a:schemeClr val="lt1"/>
+          </a:fontRef>
+        </p:style>
+        <p:txBody>
+          <a:bodyPr rtlCol="0" anchor="ctr"/>
+          <a:lstStyle/>
+          <a:p>
+            <a:pPr algn="ctr"/>
+          </a:p>
+        </p:txBody>
+      </p:sp>
+      <p:sp>
+        <p:nvSpPr>
+          <p:cNvPr id="5" name="TextBox 4"/>
           <p:cNvSpPr txBox="1"/>
           <p:nvPr/>
         </p:nvSpPr>
         <p:spPr>
           <a:xfrm>
-            <a:off x="457200" y="320040"/>
+            <a:off x="365760" y="274320"/>
             <a:ext cx="10972800" cy="640080"/>
           </a:xfrm>
           <a:prstGeom prst="rect">
@@ -3738,7 +4328,7 @@
             <a:pPr>
               <a:defRPr sz="3600" b="1">
                 <a:solidFill>
-                  <a:srgbClr val="003366"/>
+                  <a:srgbClr val="FFFFFF"/>
                 </a:solidFill>
               </a:defRPr>
             </a:pPr>
@@ -3750,14 +4340,57 @@
       </p:sp>
       <p:sp>
         <p:nvSpPr>
-          <p:cNvPr id="5" name="TextBox 4"/>
+          <p:cNvPr id="6" name="Rectangle 5"/>
+          <p:cNvSpPr/>
+          <p:nvPr/>
+        </p:nvSpPr>
+        <p:spPr>
+          <a:xfrm>
+            <a:off x="365760" y="1325880"/>
+            <a:ext cx="11430000" cy="365760"/>
+          </a:xfrm>
+          <a:prstGeom prst="rect">
+            <a:avLst/>
+          </a:prstGeom>
+          <a:solidFill>
+            <a:srgbClr val="0078D7"/>
+          </a:solidFill>
+          <a:ln>
+            <a:noFill/>
+          </a:ln>
+        </p:spPr>
+        <p:style>
+          <a:lnRef idx="1">
+            <a:schemeClr val="accent1"/>
+          </a:lnRef>
+          <a:fillRef idx="3">
+            <a:schemeClr val="accent1"/>
+          </a:fillRef>
+          <a:effectRef idx="2">
+            <a:schemeClr val="accent1"/>
+          </a:effectRef>
+          <a:fontRef idx="minor">
+            <a:schemeClr val="lt1"/>
+          </a:fontRef>
+        </p:style>
+        <p:txBody>
+          <a:bodyPr rtlCol="0" anchor="ctr"/>
+          <a:lstStyle/>
+          <a:p>
+            <a:pPr algn="ctr"/>
+          </a:p>
+        </p:txBody>
+      </p:sp>
+      <p:sp>
+        <p:nvSpPr>
+          <p:cNvPr id="7" name="TextBox 6"/>
           <p:cNvSpPr txBox="1"/>
           <p:nvPr/>
         </p:nvSpPr>
         <p:spPr>
           <a:xfrm>
-            <a:off x="640080" y="1188720"/>
-            <a:ext cx="10789920" cy="5303520"/>
+            <a:off x="548640" y="1371600"/>
+            <a:ext cx="10972800" cy="274320"/>
           </a:xfrm>
           <a:prstGeom prst="rect">
             <a:avLst/>
@@ -3765,18 +4398,15 @@
           <a:noFill/>
         </p:spPr>
         <p:txBody>
-          <a:bodyPr wrap="square">
+          <a:bodyPr wrap="none">
             <a:spAutoFit/>
           </a:bodyPr>
           <a:lstStyle/>
           <a:p>
             <a:pPr>
-              <a:spcAft>
-                <a:spcPts val="600"/>
-              </a:spcAft>
-              <a:defRPr b="1" sz="2000">
-                <a:solidFill>
-                  <a:srgbClr val="333333"/>
+              <a:defRPr sz="2000" b="1">
+                <a:solidFill>
+                  <a:srgbClr val="FFFFFF"/>
                 </a:solidFill>
               </a:defRPr>
             </a:pPr>
@@ -3784,259 +4414,792 @@
               <a:t>Accessing:</a:t>
             </a:r>
           </a:p>
+        </p:txBody>
+      </p:sp>
+      <p:sp>
+        <p:nvSpPr>
+          <p:cNvPr id="8" name="Rectangle 7"/>
+          <p:cNvSpPr/>
+          <p:nvPr/>
+        </p:nvSpPr>
+        <p:spPr>
+          <a:xfrm>
+            <a:off x="640080" y="1783080"/>
+            <a:ext cx="10789920" cy="411480"/>
+          </a:xfrm>
+          <a:prstGeom prst="rect">
+            <a:avLst/>
+          </a:prstGeom>
+          <a:solidFill>
+            <a:srgbClr val="282C34"/>
+          </a:solidFill>
+          <a:ln>
+            <a:noFill/>
+          </a:ln>
+        </p:spPr>
+        <p:style>
+          <a:lnRef idx="1">
+            <a:schemeClr val="accent1"/>
+          </a:lnRef>
+          <a:fillRef idx="3">
+            <a:schemeClr val="accent1"/>
+          </a:fillRef>
+          <a:effectRef idx="2">
+            <a:schemeClr val="accent1"/>
+          </a:effectRef>
+          <a:fontRef idx="minor">
+            <a:schemeClr val="lt1"/>
+          </a:fontRef>
+        </p:style>
+        <p:txBody>
+          <a:bodyPr rtlCol="0" anchor="ctr"/>
+          <a:lstStyle/>
+          <a:p>
+            <a:pPr algn="ctr"/>
+          </a:p>
+        </p:txBody>
+      </p:sp>
+      <p:sp>
+        <p:nvSpPr>
+          <p:cNvPr id="9" name="Rectangle 8"/>
+          <p:cNvSpPr/>
+          <p:nvPr/>
+        </p:nvSpPr>
+        <p:spPr>
+          <a:xfrm>
+            <a:off x="640080" y="1783080"/>
+            <a:ext cx="73152" cy="411480"/>
+          </a:xfrm>
+          <a:prstGeom prst="rect">
+            <a:avLst/>
+          </a:prstGeom>
+          <a:solidFill>
+            <a:srgbClr val="61AFEF"/>
+          </a:solidFill>
+          <a:ln>
+            <a:noFill/>
+          </a:ln>
+        </p:spPr>
+        <p:style>
+          <a:lnRef idx="1">
+            <a:schemeClr val="accent1"/>
+          </a:lnRef>
+          <a:fillRef idx="3">
+            <a:schemeClr val="accent1"/>
+          </a:fillRef>
+          <a:effectRef idx="2">
+            <a:schemeClr val="accent1"/>
+          </a:effectRef>
+          <a:fontRef idx="minor">
+            <a:schemeClr val="lt1"/>
+          </a:fontRef>
+        </p:style>
+        <p:txBody>
+          <a:bodyPr rtlCol="0" anchor="ctr"/>
+          <a:lstStyle/>
+          <a:p>
+            <a:pPr algn="ctr"/>
+          </a:p>
+        </p:txBody>
+      </p:sp>
+      <p:sp>
+        <p:nvSpPr>
+          <p:cNvPr id="10" name="TextBox 9"/>
+          <p:cNvSpPr txBox="1"/>
+          <p:nvPr/>
+        </p:nvSpPr>
+        <p:spPr>
+          <a:xfrm>
+            <a:off x="914400" y="1828800"/>
+            <a:ext cx="10241280" cy="320040"/>
+          </a:xfrm>
+          <a:prstGeom prst="rect">
+            <a:avLst/>
+          </a:prstGeom>
+          <a:noFill/>
+        </p:spPr>
+        <p:txBody>
+          <a:bodyPr wrap="none">
+            <a:spAutoFit/>
+          </a:bodyPr>
+          <a:lstStyle/>
           <a:p>
             <a:pPr>
               <a:spcAft>
-                <a:spcPts val="600"/>
+                <a:spcPts val="200"/>
               </a:spcAft>
-              <a:defRPr sz="1600">
+              <a:defRPr sz="1400">
+                <a:solidFill>
+                  <a:srgbClr val="ABB2BF"/>
+                </a:solidFill>
+                <a:latin typeface="Consolas"/>
+              </a:defRPr>
+            </a:pPr>
+            <a:r>
+              <a:t>point = (10, 20, 30)</a:t>
+            </a:r>
+          </a:p>
+        </p:txBody>
+      </p:sp>
+      <p:sp>
+        <p:nvSpPr>
+          <p:cNvPr id="11" name="TextBox 10"/>
+          <p:cNvSpPr txBox="1"/>
+          <p:nvPr/>
+        </p:nvSpPr>
+        <p:spPr>
+          <a:xfrm>
+            <a:off x="457200" y="2377440"/>
+            <a:ext cx="11247120" cy="320040"/>
+          </a:xfrm>
+          <a:prstGeom prst="rect">
+            <a:avLst/>
+          </a:prstGeom>
+          <a:noFill/>
+        </p:spPr>
+        <p:txBody>
+          <a:bodyPr wrap="none">
+            <a:spAutoFit/>
+          </a:bodyPr>
+          <a:lstStyle/>
+          <a:p>
+            <a:pPr>
+              <a:defRPr sz="1700">
                 <a:solidFill>
                   <a:srgbClr val="333333"/>
                 </a:solidFill>
               </a:defRPr>
             </a:pPr>
             <a:r>
-              <a:t>point = (10, 20, 30)</a:t>
-            </a:r>
-          </a:p>
+              <a:t>point[0]  # 10</a:t>
+            </a:r>
+          </a:p>
+        </p:txBody>
+      </p:sp>
+      <p:sp>
+        <p:nvSpPr>
+          <p:cNvPr id="12" name="TextBox 11"/>
+          <p:cNvSpPr txBox="1"/>
+          <p:nvPr/>
+        </p:nvSpPr>
+        <p:spPr>
+          <a:xfrm>
+            <a:off x="457200" y="2651760"/>
+            <a:ext cx="11247120" cy="320040"/>
+          </a:xfrm>
+          <a:prstGeom prst="rect">
+            <a:avLst/>
+          </a:prstGeom>
+          <a:noFill/>
+        </p:spPr>
+        <p:txBody>
+          <a:bodyPr wrap="none">
+            <a:spAutoFit/>
+          </a:bodyPr>
+          <a:lstStyle/>
+          <a:p>
+            <a:pPr>
+              <a:defRPr sz="1700">
+                <a:solidFill>
+                  <a:srgbClr val="333333"/>
+                </a:solidFill>
+              </a:defRPr>
+            </a:pPr>
+            <a:r>
+              <a:t>point[-1]  # 30</a:t>
+            </a:r>
+          </a:p>
+        </p:txBody>
+      </p:sp>
+      <p:sp>
+        <p:nvSpPr>
+          <p:cNvPr id="13" name="Rectangle 12"/>
+          <p:cNvSpPr/>
+          <p:nvPr/>
+        </p:nvSpPr>
+        <p:spPr>
+          <a:xfrm>
+            <a:off x="365760" y="2880360"/>
+            <a:ext cx="11430000" cy="365760"/>
+          </a:xfrm>
+          <a:prstGeom prst="rect">
+            <a:avLst/>
+          </a:prstGeom>
+          <a:solidFill>
+            <a:srgbClr val="0078D7"/>
+          </a:solidFill>
+          <a:ln>
+            <a:noFill/>
+          </a:ln>
+        </p:spPr>
+        <p:style>
+          <a:lnRef idx="1">
+            <a:schemeClr val="accent1"/>
+          </a:lnRef>
+          <a:fillRef idx="3">
+            <a:schemeClr val="accent1"/>
+          </a:fillRef>
+          <a:effectRef idx="2">
+            <a:schemeClr val="accent1"/>
+          </a:effectRef>
+          <a:fontRef idx="minor">
+            <a:schemeClr val="lt1"/>
+          </a:fontRef>
+        </p:style>
+        <p:txBody>
+          <a:bodyPr rtlCol="0" anchor="ctr"/>
+          <a:lstStyle/>
+          <a:p>
+            <a:pPr algn="ctr"/>
+          </a:p>
+        </p:txBody>
+      </p:sp>
+      <p:sp>
+        <p:nvSpPr>
+          <p:cNvPr id="14" name="TextBox 13"/>
+          <p:cNvSpPr txBox="1"/>
+          <p:nvPr/>
+        </p:nvSpPr>
+        <p:spPr>
+          <a:xfrm>
+            <a:off x="548640" y="2926079"/>
+            <a:ext cx="10972800" cy="274320"/>
+          </a:xfrm>
+          <a:prstGeom prst="rect">
+            <a:avLst/>
+          </a:prstGeom>
+          <a:noFill/>
+        </p:spPr>
+        <p:txBody>
+          <a:bodyPr wrap="none">
+            <a:spAutoFit/>
+          </a:bodyPr>
+          <a:lstStyle/>
+          <a:p>
+            <a:pPr>
+              <a:defRPr sz="2000" b="1">
+                <a:solidFill>
+                  <a:srgbClr val="FFFFFF"/>
+                </a:solidFill>
+              </a:defRPr>
+            </a:pPr>
+            <a:r>
+              <a:t>point[0:2]  # (10, 20)</a:t>
+            </a:r>
+          </a:p>
+        </p:txBody>
+      </p:sp>
+      <p:sp>
+        <p:nvSpPr>
+          <p:cNvPr id="15" name="Rectangle 14"/>
+          <p:cNvSpPr/>
+          <p:nvPr/>
+        </p:nvSpPr>
+        <p:spPr>
+          <a:xfrm>
+            <a:off x="365760" y="3337560"/>
+            <a:ext cx="11430000" cy="365760"/>
+          </a:xfrm>
+          <a:prstGeom prst="rect">
+            <a:avLst/>
+          </a:prstGeom>
+          <a:solidFill>
+            <a:srgbClr val="0078D7"/>
+          </a:solidFill>
+          <a:ln>
+            <a:noFill/>
+          </a:ln>
+        </p:spPr>
+        <p:style>
+          <a:lnRef idx="1">
+            <a:schemeClr val="accent1"/>
+          </a:lnRef>
+          <a:fillRef idx="3">
+            <a:schemeClr val="accent1"/>
+          </a:fillRef>
+          <a:effectRef idx="2">
+            <a:schemeClr val="accent1"/>
+          </a:effectRef>
+          <a:fontRef idx="minor">
+            <a:schemeClr val="lt1"/>
+          </a:fontRef>
+        </p:style>
+        <p:txBody>
+          <a:bodyPr rtlCol="0" anchor="ctr"/>
+          <a:lstStyle/>
+          <a:p>
+            <a:pPr algn="ctr"/>
+          </a:p>
+        </p:txBody>
+      </p:sp>
+      <p:sp>
+        <p:nvSpPr>
+          <p:cNvPr id="16" name="TextBox 15"/>
+          <p:cNvSpPr txBox="1"/>
+          <p:nvPr/>
+        </p:nvSpPr>
+        <p:spPr>
+          <a:xfrm>
+            <a:off x="548640" y="3383279"/>
+            <a:ext cx="10972800" cy="274320"/>
+          </a:xfrm>
+          <a:prstGeom prst="rect">
+            <a:avLst/>
+          </a:prstGeom>
+          <a:noFill/>
+        </p:spPr>
+        <p:txBody>
+          <a:bodyPr wrap="none">
+            <a:spAutoFit/>
+          </a:bodyPr>
+          <a:lstStyle/>
+          <a:p>
+            <a:pPr>
+              <a:defRPr sz="2000" b="1">
+                <a:solidFill>
+                  <a:srgbClr val="FFFFFF"/>
+                </a:solidFill>
+              </a:defRPr>
+            </a:pPr>
+            <a:r>
+              <a:t>Unpacking:</a:t>
+            </a:r>
+          </a:p>
+        </p:txBody>
+      </p:sp>
+      <p:sp>
+        <p:nvSpPr>
+          <p:cNvPr id="17" name="Rectangle 16"/>
+          <p:cNvSpPr/>
+          <p:nvPr/>
+        </p:nvSpPr>
+        <p:spPr>
+          <a:xfrm>
+            <a:off x="640080" y="3794759"/>
+            <a:ext cx="10789920" cy="640080"/>
+          </a:xfrm>
+          <a:prstGeom prst="rect">
+            <a:avLst/>
+          </a:prstGeom>
+          <a:solidFill>
+            <a:srgbClr val="282C34"/>
+          </a:solidFill>
+          <a:ln>
+            <a:noFill/>
+          </a:ln>
+        </p:spPr>
+        <p:style>
+          <a:lnRef idx="1">
+            <a:schemeClr val="accent1"/>
+          </a:lnRef>
+          <a:fillRef idx="3">
+            <a:schemeClr val="accent1"/>
+          </a:fillRef>
+          <a:effectRef idx="2">
+            <a:schemeClr val="accent1"/>
+          </a:effectRef>
+          <a:fontRef idx="minor">
+            <a:schemeClr val="lt1"/>
+          </a:fontRef>
+        </p:style>
+        <p:txBody>
+          <a:bodyPr rtlCol="0" anchor="ctr"/>
+          <a:lstStyle/>
+          <a:p>
+            <a:pPr algn="ctr"/>
+          </a:p>
+        </p:txBody>
+      </p:sp>
+      <p:sp>
+        <p:nvSpPr>
+          <p:cNvPr id="18" name="Rectangle 17"/>
+          <p:cNvSpPr/>
+          <p:nvPr/>
+        </p:nvSpPr>
+        <p:spPr>
+          <a:xfrm>
+            <a:off x="640080" y="3794759"/>
+            <a:ext cx="73152" cy="640080"/>
+          </a:xfrm>
+          <a:prstGeom prst="rect">
+            <a:avLst/>
+          </a:prstGeom>
+          <a:solidFill>
+            <a:srgbClr val="61AFEF"/>
+          </a:solidFill>
+          <a:ln>
+            <a:noFill/>
+          </a:ln>
+        </p:spPr>
+        <p:style>
+          <a:lnRef idx="1">
+            <a:schemeClr val="accent1"/>
+          </a:lnRef>
+          <a:fillRef idx="3">
+            <a:schemeClr val="accent1"/>
+          </a:fillRef>
+          <a:effectRef idx="2">
+            <a:schemeClr val="accent1"/>
+          </a:effectRef>
+          <a:fontRef idx="minor">
+            <a:schemeClr val="lt1"/>
+          </a:fontRef>
+        </p:style>
+        <p:txBody>
+          <a:bodyPr rtlCol="0" anchor="ctr"/>
+          <a:lstStyle/>
+          <a:p>
+            <a:pPr algn="ctr"/>
+          </a:p>
+        </p:txBody>
+      </p:sp>
+      <p:sp>
+        <p:nvSpPr>
+          <p:cNvPr id="19" name="TextBox 18"/>
+          <p:cNvSpPr txBox="1"/>
+          <p:nvPr/>
+        </p:nvSpPr>
+        <p:spPr>
+          <a:xfrm>
+            <a:off x="914400" y="3840479"/>
+            <a:ext cx="10241280" cy="548640"/>
+          </a:xfrm>
+          <a:prstGeom prst="rect">
+            <a:avLst/>
+          </a:prstGeom>
+          <a:noFill/>
+        </p:spPr>
+        <p:txBody>
+          <a:bodyPr wrap="none">
+            <a:spAutoFit/>
+          </a:bodyPr>
+          <a:lstStyle/>
           <a:p>
             <a:pPr>
               <a:spcAft>
-                <a:spcPts val="600"/>
+                <a:spcPts val="200"/>
               </a:spcAft>
-              <a:defRPr sz="1600">
-                <a:solidFill>
-                  <a:srgbClr val="333333"/>
-                </a:solidFill>
+              <a:defRPr sz="1400">
+                <a:solidFill>
+                  <a:srgbClr val="ABB2BF"/>
+                </a:solidFill>
+                <a:latin typeface="Consolas"/>
               </a:defRPr>
             </a:pPr>
             <a:r>
-              <a:t>point[0]  # 10</a:t>
+              <a:t>x, y, z = point</a:t>
             </a:r>
           </a:p>
           <a:p>
             <a:pPr>
               <a:spcAft>
-                <a:spcPts val="600"/>
+                <a:spcPts val="200"/>
               </a:spcAft>
-              <a:defRPr sz="1600">
+              <a:defRPr sz="1400">
+                <a:solidFill>
+                  <a:srgbClr val="ABB2BF"/>
+                </a:solidFill>
+                <a:latin typeface="Consolas"/>
+              </a:defRPr>
+            </a:pPr>
+            <a:r>
+              <a:t>first, *rest = (1, 2, 3, 4)</a:t>
+            </a:r>
+          </a:p>
+        </p:txBody>
+      </p:sp>
+      <p:sp>
+        <p:nvSpPr>
+          <p:cNvPr id="20" name="Rectangle 19"/>
+          <p:cNvSpPr/>
+          <p:nvPr/>
+        </p:nvSpPr>
+        <p:spPr>
+          <a:xfrm>
+            <a:off x="365760" y="4572000"/>
+            <a:ext cx="11430000" cy="365760"/>
+          </a:xfrm>
+          <a:prstGeom prst="rect">
+            <a:avLst/>
+          </a:prstGeom>
+          <a:solidFill>
+            <a:srgbClr val="0078D7"/>
+          </a:solidFill>
+          <a:ln>
+            <a:noFill/>
+          </a:ln>
+        </p:spPr>
+        <p:style>
+          <a:lnRef idx="1">
+            <a:schemeClr val="accent1"/>
+          </a:lnRef>
+          <a:fillRef idx="3">
+            <a:schemeClr val="accent1"/>
+          </a:fillRef>
+          <a:effectRef idx="2">
+            <a:schemeClr val="accent1"/>
+          </a:effectRef>
+          <a:fontRef idx="minor">
+            <a:schemeClr val="lt1"/>
+          </a:fontRef>
+        </p:style>
+        <p:txBody>
+          <a:bodyPr rtlCol="0" anchor="ctr"/>
+          <a:lstStyle/>
+          <a:p>
+            <a:pPr algn="ctr"/>
+          </a:p>
+        </p:txBody>
+      </p:sp>
+      <p:sp>
+        <p:nvSpPr>
+          <p:cNvPr id="21" name="TextBox 20"/>
+          <p:cNvSpPr txBox="1"/>
+          <p:nvPr/>
+        </p:nvSpPr>
+        <p:spPr>
+          <a:xfrm>
+            <a:off x="548640" y="4617720"/>
+            <a:ext cx="10972800" cy="274320"/>
+          </a:xfrm>
+          <a:prstGeom prst="rect">
+            <a:avLst/>
+          </a:prstGeom>
+          <a:noFill/>
+        </p:spPr>
+        <p:txBody>
+          <a:bodyPr wrap="none">
+            <a:spAutoFit/>
+          </a:bodyPr>
+          <a:lstStyle/>
+          <a:p>
+            <a:pPr>
+              <a:defRPr sz="2000" b="1">
+                <a:solidFill>
+                  <a:srgbClr val="FFFFFF"/>
+                </a:solidFill>
+              </a:defRPr>
+            </a:pPr>
+            <a:r>
+              <a:t>Operations:</a:t>
+            </a:r>
+          </a:p>
+        </p:txBody>
+      </p:sp>
+      <p:sp>
+        <p:nvSpPr>
+          <p:cNvPr id="22" name="TextBox 21"/>
+          <p:cNvSpPr txBox="1"/>
+          <p:nvPr/>
+        </p:nvSpPr>
+        <p:spPr>
+          <a:xfrm>
+            <a:off x="457200" y="5074920"/>
+            <a:ext cx="11247120" cy="320040"/>
+          </a:xfrm>
+          <a:prstGeom prst="rect">
+            <a:avLst/>
+          </a:prstGeom>
+          <a:noFill/>
+        </p:spPr>
+        <p:txBody>
+          <a:bodyPr wrap="none">
+            <a:spAutoFit/>
+          </a:bodyPr>
+          <a:lstStyle/>
+          <a:p>
+            <a:pPr>
+              <a:defRPr sz="1700">
                 <a:solidFill>
                   <a:srgbClr val="333333"/>
                 </a:solidFill>
               </a:defRPr>
             </a:pPr>
             <a:r>
-              <a:t>point[-1]  # 30</a:t>
-            </a:r>
-          </a:p>
+              <a:t>len(point)  # 3</a:t>
+            </a:r>
+          </a:p>
+        </p:txBody>
+      </p:sp>
+      <p:sp>
+        <p:nvSpPr>
+          <p:cNvPr id="23" name="TextBox 22"/>
+          <p:cNvSpPr txBox="1"/>
+          <p:nvPr/>
+        </p:nvSpPr>
+        <p:spPr>
+          <a:xfrm>
+            <a:off x="457200" y="5349240"/>
+            <a:ext cx="11247120" cy="320040"/>
+          </a:xfrm>
+          <a:prstGeom prst="rect">
+            <a:avLst/>
+          </a:prstGeom>
+          <a:noFill/>
+        </p:spPr>
+        <p:txBody>
+          <a:bodyPr wrap="none">
+            <a:spAutoFit/>
+          </a:bodyPr>
+          <a:lstStyle/>
           <a:p>
             <a:pPr>
-              <a:spcAft>
-                <a:spcPts val="600"/>
-              </a:spcAft>
-              <a:defRPr b="1" sz="2000">
+              <a:defRPr sz="1700">
                 <a:solidFill>
                   <a:srgbClr val="333333"/>
                 </a:solidFill>
               </a:defRPr>
             </a:pPr>
             <a:r>
-              <a:t>point[0:2]  # (10, 20)</a:t>
-            </a:r>
-          </a:p>
+              <a:t>20 in point  # True</a:t>
+            </a:r>
+          </a:p>
+        </p:txBody>
+      </p:sp>
+      <p:sp>
+        <p:nvSpPr>
+          <p:cNvPr id="24" name="TextBox 23"/>
+          <p:cNvSpPr txBox="1"/>
+          <p:nvPr/>
+        </p:nvSpPr>
+        <p:spPr>
+          <a:xfrm>
+            <a:off x="457200" y="5623559"/>
+            <a:ext cx="11247120" cy="320040"/>
+          </a:xfrm>
+          <a:prstGeom prst="rect">
+            <a:avLst/>
+          </a:prstGeom>
+          <a:noFill/>
+        </p:spPr>
+        <p:txBody>
+          <a:bodyPr wrap="none">
+            <a:spAutoFit/>
+          </a:bodyPr>
+          <a:lstStyle/>
           <a:p>
             <a:pPr>
-              <a:spcAft>
-                <a:spcPts val="600"/>
-              </a:spcAft>
-              <a:defRPr b="1" sz="2000">
+              <a:defRPr sz="1700">
                 <a:solidFill>
                   <a:srgbClr val="333333"/>
                 </a:solidFill>
               </a:defRPr>
             </a:pPr>
             <a:r>
-              <a:t>Unpacking:</a:t>
-            </a:r>
-          </a:p>
+              <a:t>(1, 2) + (3, 4)  # (1, 2, 3, 4)</a:t>
+            </a:r>
+          </a:p>
+        </p:txBody>
+      </p:sp>
+      <p:sp>
+        <p:nvSpPr>
+          <p:cNvPr id="25" name="TextBox 24"/>
+          <p:cNvSpPr txBox="1"/>
+          <p:nvPr/>
+        </p:nvSpPr>
+        <p:spPr>
+          <a:xfrm>
+            <a:off x="457200" y="5897879"/>
+            <a:ext cx="11247120" cy="320040"/>
+          </a:xfrm>
+          <a:prstGeom prst="rect">
+            <a:avLst/>
+          </a:prstGeom>
+          <a:noFill/>
+        </p:spPr>
+        <p:txBody>
+          <a:bodyPr wrap="none">
+            <a:spAutoFit/>
+          </a:bodyPr>
+          <a:lstStyle/>
           <a:p>
             <a:pPr>
-              <a:spcAft>
-                <a:spcPts val="600"/>
-              </a:spcAft>
-              <a:defRPr sz="1600">
+              <a:defRPr sz="1700">
                 <a:solidFill>
                   <a:srgbClr val="333333"/>
                 </a:solidFill>
               </a:defRPr>
             </a:pPr>
             <a:r>
-              <a:t>x, y, z = point</a:t>
-            </a:r>
-          </a:p>
+              <a:t>(1, 2) * 3  # (1, 2, 1, 2, 1, 2)</a:t>
+            </a:r>
+          </a:p>
+        </p:txBody>
+      </p:sp>
+      <p:sp>
+        <p:nvSpPr>
+          <p:cNvPr id="26" name="Rectangle 25"/>
+          <p:cNvSpPr/>
+          <p:nvPr/>
+        </p:nvSpPr>
+        <p:spPr>
+          <a:xfrm>
+            <a:off x="365760" y="6126479"/>
+            <a:ext cx="11430000" cy="365760"/>
+          </a:xfrm>
+          <a:prstGeom prst="rect">
+            <a:avLst/>
+          </a:prstGeom>
+          <a:solidFill>
+            <a:srgbClr val="0078D7"/>
+          </a:solidFill>
+          <a:ln>
+            <a:noFill/>
+          </a:ln>
+        </p:spPr>
+        <p:style>
+          <a:lnRef idx="1">
+            <a:schemeClr val="accent1"/>
+          </a:lnRef>
+          <a:fillRef idx="3">
+            <a:schemeClr val="accent1"/>
+          </a:fillRef>
+          <a:effectRef idx="2">
+            <a:schemeClr val="accent1"/>
+          </a:effectRef>
+          <a:fontRef idx="minor">
+            <a:schemeClr val="lt1"/>
+          </a:fontRef>
+        </p:style>
+        <p:txBody>
+          <a:bodyPr rtlCol="0" anchor="ctr"/>
+          <a:lstStyle/>
+          <a:p>
+            <a:pPr algn="ctr"/>
+          </a:p>
+        </p:txBody>
+      </p:sp>
+      <p:sp>
+        <p:nvSpPr>
+          <p:cNvPr id="27" name="TextBox 26"/>
+          <p:cNvSpPr txBox="1"/>
+          <p:nvPr/>
+        </p:nvSpPr>
+        <p:spPr>
+          <a:xfrm>
+            <a:off x="548640" y="6172199"/>
+            <a:ext cx="10972800" cy="274320"/>
+          </a:xfrm>
+          <a:prstGeom prst="rect">
+            <a:avLst/>
+          </a:prstGeom>
+          <a:noFill/>
+        </p:spPr>
+        <p:txBody>
+          <a:bodyPr wrap="none">
+            <a:spAutoFit/>
+          </a:bodyPr>
+          <a:lstStyle/>
           <a:p>
             <a:pPr>
-              <a:spcAft>
-                <a:spcPts val="600"/>
-              </a:spcAft>
-              <a:defRPr sz="1600">
-                <a:solidFill>
-                  <a:srgbClr val="333333"/>
+              <a:defRPr sz="2000" b="1">
+                <a:solidFill>
+                  <a:srgbClr val="FFFFFF"/>
                 </a:solidFill>
               </a:defRPr>
             </a:pPr>
             <a:r>
-              <a:t>first, *rest = (1, 2, 3, 4)</a:t>
-            </a:r>
-          </a:p>
-          <a:p>
-            <a:pPr>
-              <a:spcAft>
-                <a:spcPts val="600"/>
-              </a:spcAft>
-              <a:defRPr b="1" sz="2000">
-                <a:solidFill>
-                  <a:srgbClr val="333333"/>
-                </a:solidFill>
-              </a:defRPr>
-            </a:pPr>
-            <a:r>
-              <a:t>Operations:</a:t>
-            </a:r>
-          </a:p>
-          <a:p>
-            <a:pPr>
-              <a:spcAft>
-                <a:spcPts val="600"/>
-              </a:spcAft>
-              <a:defRPr sz="1600">
-                <a:solidFill>
-                  <a:srgbClr val="333333"/>
-                </a:solidFill>
-              </a:defRPr>
-            </a:pPr>
-            <a:r>
-              <a:t>len(point)  # 3</a:t>
-            </a:r>
-          </a:p>
-          <a:p>
-            <a:pPr>
-              <a:spcAft>
-                <a:spcPts val="600"/>
-              </a:spcAft>
-              <a:defRPr sz="1600">
-                <a:solidFill>
-                  <a:srgbClr val="333333"/>
-                </a:solidFill>
-              </a:defRPr>
-            </a:pPr>
-            <a:r>
-              <a:t>20 in point  # True</a:t>
-            </a:r>
-          </a:p>
-          <a:p>
-            <a:pPr>
-              <a:spcAft>
-                <a:spcPts val="600"/>
-              </a:spcAft>
-              <a:defRPr sz="1600">
-                <a:solidFill>
-                  <a:srgbClr val="333333"/>
-                </a:solidFill>
-              </a:defRPr>
-            </a:pPr>
-            <a:r>
-              <a:t>(1, 2) + (3, 4)  # (1, 2, 3, 4)</a:t>
-            </a:r>
-          </a:p>
-          <a:p>
-            <a:pPr>
-              <a:spcAft>
-                <a:spcPts val="600"/>
-              </a:spcAft>
-              <a:defRPr sz="1600">
-                <a:solidFill>
-                  <a:srgbClr val="333333"/>
-                </a:solidFill>
-              </a:defRPr>
-            </a:pPr>
-            <a:r>
-              <a:t>(1, 2) * 3  # (1, 2, 1, 2, 1, 2)</a:t>
-            </a:r>
-          </a:p>
-          <a:p>
-            <a:pPr>
-              <a:spcAft>
-                <a:spcPts val="600"/>
-              </a:spcAft>
-              <a:defRPr b="1" sz="2000">
-                <a:solidFill>
-                  <a:srgbClr val="333333"/>
-                </a:solidFill>
-              </a:defRPr>
-            </a:pPr>
-            <a:r>
               <a:t>Methods:</a:t>
-            </a:r>
-          </a:p>
-          <a:p>
-            <a:pPr>
-              <a:spcAft>
-                <a:spcPts val="600"/>
-              </a:spcAft>
-              <a:defRPr sz="1600">
-                <a:solidFill>
-                  <a:srgbClr val="333333"/>
-                </a:solidFill>
-              </a:defRPr>
-            </a:pPr>
-            <a:r>
-              <a:t>point.count(10)</a:t>
-            </a:r>
-          </a:p>
-          <a:p>
-            <a:pPr>
-              <a:spcAft>
-                <a:spcPts val="600"/>
-              </a:spcAft>
-              <a:defRPr sz="1600">
-                <a:solidFill>
-                  <a:srgbClr val="333333"/>
-                </a:solidFill>
-              </a:defRPr>
-            </a:pPr>
-            <a:r>
-              <a:t>point.index(20)</a:t>
-            </a:r>
-          </a:p>
-          <a:p>
-            <a:pPr>
-              <a:spcAft>
-                <a:spcPts val="600"/>
-              </a:spcAft>
-              <a:defRPr b="1" sz="2000">
-                <a:solidFill>
-                  <a:srgbClr val="333333"/>
-                </a:solidFill>
-              </a:defRPr>
-            </a:pPr>
-            <a:r>
-              <a:t>Cannot Modify:</a:t>
-            </a:r>
-          </a:p>
-          <a:p>
-            <a:pPr>
-              <a:spcAft>
-                <a:spcPts val="600"/>
-              </a:spcAft>
-              <a:defRPr sz="1600">
-                <a:solidFill>
-                  <a:srgbClr val="333333"/>
-                </a:solidFill>
-              </a:defRPr>
-            </a:pPr>
-            <a:r>
-              <a:t>point[0] = 15  # ERROR!</a:t>
             </a:r>
           </a:p>
         </p:txBody>
@@ -4074,7 +5237,7 @@
             <a:avLst/>
           </a:prstGeom>
           <a:solidFill>
-            <a:srgbClr val="FFFFFF"/>
+            <a:srgbClr val="FAFAFA"/>
           </a:solidFill>
           <a:ln>
             <a:noFill/>
@@ -4111,7 +5274,7 @@
         <p:spPr>
           <a:xfrm>
             <a:off x="0" y="0"/>
-            <a:ext cx="12191695" cy="137160"/>
+            <a:ext cx="12191695" cy="1097280"/>
           </a:xfrm>
           <a:prstGeom prst="rect">
             <a:avLst/>
@@ -4147,13 +5310,56 @@
       </p:sp>
       <p:sp>
         <p:nvSpPr>
-          <p:cNvPr id="4" name="TextBox 3"/>
+          <p:cNvPr id="4" name="Rectangle 3"/>
+          <p:cNvSpPr/>
+          <p:nvPr/>
+        </p:nvSpPr>
+        <p:spPr>
+          <a:xfrm>
+            <a:off x="0" y="1097280"/>
+            <a:ext cx="137160" cy="5760720"/>
+          </a:xfrm>
+          <a:prstGeom prst="rect">
+            <a:avLst/>
+          </a:prstGeom>
+          <a:solidFill>
+            <a:srgbClr val="FFBB33"/>
+          </a:solidFill>
+          <a:ln>
+            <a:noFill/>
+          </a:ln>
+        </p:spPr>
+        <p:style>
+          <a:lnRef idx="1">
+            <a:schemeClr val="accent1"/>
+          </a:lnRef>
+          <a:fillRef idx="3">
+            <a:schemeClr val="accent1"/>
+          </a:fillRef>
+          <a:effectRef idx="2">
+            <a:schemeClr val="accent1"/>
+          </a:effectRef>
+          <a:fontRef idx="minor">
+            <a:schemeClr val="lt1"/>
+          </a:fontRef>
+        </p:style>
+        <p:txBody>
+          <a:bodyPr rtlCol="0" anchor="ctr"/>
+          <a:lstStyle/>
+          <a:p>
+            <a:pPr algn="ctr"/>
+          </a:p>
+        </p:txBody>
+      </p:sp>
+      <p:sp>
+        <p:nvSpPr>
+          <p:cNvPr id="5" name="TextBox 4"/>
           <p:cNvSpPr txBox="1"/>
           <p:nvPr/>
         </p:nvSpPr>
         <p:spPr>
           <a:xfrm>
-            <a:off x="457200" y="320040"/>
+            <a:off x="365760" y="274320"/>
             <a:ext cx="10972800" cy="640080"/>
           </a:xfrm>
           <a:prstGeom prst="rect">
@@ -4170,7 +5376,7 @@
             <a:pPr>
               <a:defRPr sz="3600" b="1">
                 <a:solidFill>
-                  <a:srgbClr val="003366"/>
+                  <a:srgbClr val="FFFFFF"/>
                 </a:solidFill>
               </a:defRPr>
             </a:pPr>
@@ -4182,14 +5388,14 @@
       </p:sp>
       <p:sp>
         <p:nvSpPr>
-          <p:cNvPr id="5" name="TextBox 4"/>
+          <p:cNvPr id="6" name="TextBox 5"/>
           <p:cNvSpPr txBox="1"/>
           <p:nvPr/>
         </p:nvSpPr>
         <p:spPr>
           <a:xfrm>
-            <a:off x="640080" y="1188720"/>
-            <a:ext cx="10789920" cy="5303520"/>
+            <a:off x="457200" y="1371600"/>
+            <a:ext cx="11247120" cy="320040"/>
           </a:xfrm>
           <a:prstGeom prst="rect">
             <a:avLst/>
@@ -4197,15 +5403,47 @@
           <a:noFill/>
         </p:spPr>
         <p:txBody>
-          <a:bodyPr wrap="square">
+          <a:bodyPr wrap="none">
             <a:spAutoFit/>
           </a:bodyPr>
           <a:lstStyle/>
           <a:p>
             <a:pPr>
-              <a:spcAft>
-                <a:spcPts val="600"/>
-              </a:spcAft>
+              <a:defRPr sz="1700">
+                <a:solidFill>
+                  <a:srgbClr val="333333"/>
+                </a:solidFill>
+              </a:defRPr>
+            </a:pPr>
+            <a:r>
+              <a:t>What Are Sets?</a:t>
+            </a:r>
+          </a:p>
+        </p:txBody>
+      </p:sp>
+      <p:sp>
+        <p:nvSpPr>
+          <p:cNvPr id="7" name="TextBox 6"/>
+          <p:cNvSpPr txBox="1"/>
+          <p:nvPr/>
+        </p:nvSpPr>
+        <p:spPr>
+          <a:xfrm>
+            <a:off x="457200" y="1645920"/>
+            <a:ext cx="11247120" cy="320040"/>
+          </a:xfrm>
+          <a:prstGeom prst="rect">
+            <a:avLst/>
+          </a:prstGeom>
+          <a:noFill/>
+        </p:spPr>
+        <p:txBody>
+          <a:bodyPr wrap="none">
+            <a:spAutoFit/>
+          </a:bodyPr>
+          <a:lstStyle/>
+          <a:p>
+            <a:pPr lvl="1">
               <a:defRPr sz="1600">
                 <a:solidFill>
                   <a:srgbClr val="333333"/>
@@ -4213,14 +5451,34 @@
               </a:defRPr>
             </a:pPr>
             <a:r>
-              <a:t>What Are Sets?</a:t>
-            </a:r>
-          </a:p>
+              <a:t>• Unordered collections</a:t>
+            </a:r>
+          </a:p>
+        </p:txBody>
+      </p:sp>
+      <p:sp>
+        <p:nvSpPr>
+          <p:cNvPr id="8" name="TextBox 7"/>
+          <p:cNvSpPr txBox="1"/>
+          <p:nvPr/>
+        </p:nvSpPr>
+        <p:spPr>
+          <a:xfrm>
+            <a:off x="457200" y="1920240"/>
+            <a:ext cx="11247120" cy="320040"/>
+          </a:xfrm>
+          <a:prstGeom prst="rect">
+            <a:avLst/>
+          </a:prstGeom>
+          <a:noFill/>
+        </p:spPr>
+        <p:txBody>
+          <a:bodyPr wrap="none">
+            <a:spAutoFit/>
+          </a:bodyPr>
+          <a:lstStyle/>
           <a:p>
             <a:pPr lvl="1">
-              <a:spcAft>
-                <a:spcPts val="400"/>
-              </a:spcAft>
               <a:defRPr sz="1600">
                 <a:solidFill>
                   <a:srgbClr val="333333"/>
@@ -4228,14 +5486,34 @@
               </a:defRPr>
             </a:pPr>
             <a:r>
-              <a:t>• Unordered collections</a:t>
-            </a:r>
-          </a:p>
+              <a:t>• No duplicates</a:t>
+            </a:r>
+          </a:p>
+        </p:txBody>
+      </p:sp>
+      <p:sp>
+        <p:nvSpPr>
+          <p:cNvPr id="9" name="TextBox 8"/>
+          <p:cNvSpPr txBox="1"/>
+          <p:nvPr/>
+        </p:nvSpPr>
+        <p:spPr>
+          <a:xfrm>
+            <a:off x="457200" y="2194560"/>
+            <a:ext cx="11247120" cy="320040"/>
+          </a:xfrm>
+          <a:prstGeom prst="rect">
+            <a:avLst/>
+          </a:prstGeom>
+          <a:noFill/>
+        </p:spPr>
+        <p:txBody>
+          <a:bodyPr wrap="none">
+            <a:spAutoFit/>
+          </a:bodyPr>
+          <a:lstStyle/>
           <a:p>
             <a:pPr lvl="1">
-              <a:spcAft>
-                <a:spcPts val="400"/>
-              </a:spcAft>
               <a:defRPr sz="1600">
                 <a:solidFill>
                   <a:srgbClr val="333333"/>
@@ -4243,14 +5521,34 @@
               </a:defRPr>
             </a:pPr>
             <a:r>
-              <a:t>• No duplicates</a:t>
-            </a:r>
-          </a:p>
+              <a:t>• Mutable</a:t>
+            </a:r>
+          </a:p>
+        </p:txBody>
+      </p:sp>
+      <p:sp>
+        <p:nvSpPr>
+          <p:cNvPr id="10" name="TextBox 9"/>
+          <p:cNvSpPr txBox="1"/>
+          <p:nvPr/>
+        </p:nvSpPr>
+        <p:spPr>
+          <a:xfrm>
+            <a:off x="457200" y="2468879"/>
+            <a:ext cx="11247120" cy="320040"/>
+          </a:xfrm>
+          <a:prstGeom prst="rect">
+            <a:avLst/>
+          </a:prstGeom>
+          <a:noFill/>
+        </p:spPr>
+        <p:txBody>
+          <a:bodyPr wrap="none">
+            <a:spAutoFit/>
+          </a:bodyPr>
+          <a:lstStyle/>
           <a:p>
             <a:pPr lvl="1">
-              <a:spcAft>
-                <a:spcPts val="400"/>
-              </a:spcAft>
               <a:defRPr sz="1600">
                 <a:solidFill>
                   <a:srgbClr val="333333"/>
@@ -4258,59 +5556,304 @@
               </a:defRPr>
             </a:pPr>
             <a:r>
-              <a:t>• Mutable</a:t>
-            </a:r>
-          </a:p>
-          <a:p>
-            <a:pPr lvl="1">
-              <a:spcAft>
-                <a:spcPts val="400"/>
-              </a:spcAft>
-              <a:defRPr sz="1600">
-                <a:solidFill>
-                  <a:srgbClr val="333333"/>
+              <a:t>• No indexing</a:t>
+            </a:r>
+          </a:p>
+        </p:txBody>
+      </p:sp>
+      <p:sp>
+        <p:nvSpPr>
+          <p:cNvPr id="11" name="Rectangle 10"/>
+          <p:cNvSpPr/>
+          <p:nvPr/>
+        </p:nvSpPr>
+        <p:spPr>
+          <a:xfrm>
+            <a:off x="365760" y="2697479"/>
+            <a:ext cx="11430000" cy="365760"/>
+          </a:xfrm>
+          <a:prstGeom prst="rect">
+            <a:avLst/>
+          </a:prstGeom>
+          <a:solidFill>
+            <a:srgbClr val="0078D7"/>
+          </a:solidFill>
+          <a:ln>
+            <a:noFill/>
+          </a:ln>
+        </p:spPr>
+        <p:style>
+          <a:lnRef idx="1">
+            <a:schemeClr val="accent1"/>
+          </a:lnRef>
+          <a:fillRef idx="3">
+            <a:schemeClr val="accent1"/>
+          </a:fillRef>
+          <a:effectRef idx="2">
+            <a:schemeClr val="accent1"/>
+          </a:effectRef>
+          <a:fontRef idx="minor">
+            <a:schemeClr val="lt1"/>
+          </a:fontRef>
+        </p:style>
+        <p:txBody>
+          <a:bodyPr rtlCol="0" anchor="ctr"/>
+          <a:lstStyle/>
+          <a:p>
+            <a:pPr algn="ctr"/>
+          </a:p>
+        </p:txBody>
+      </p:sp>
+      <p:sp>
+        <p:nvSpPr>
+          <p:cNvPr id="12" name="TextBox 11"/>
+          <p:cNvSpPr txBox="1"/>
+          <p:nvPr/>
+        </p:nvSpPr>
+        <p:spPr>
+          <a:xfrm>
+            <a:off x="548640" y="2743199"/>
+            <a:ext cx="10972800" cy="274320"/>
+          </a:xfrm>
+          <a:prstGeom prst="rect">
+            <a:avLst/>
+          </a:prstGeom>
+          <a:noFill/>
+        </p:spPr>
+        <p:txBody>
+          <a:bodyPr wrap="none">
+            <a:spAutoFit/>
+          </a:bodyPr>
+          <a:lstStyle/>
+          <a:p>
+            <a:pPr>
+              <a:defRPr sz="2000" b="1">
+                <a:solidFill>
+                  <a:srgbClr val="FFFFFF"/>
                 </a:solidFill>
               </a:defRPr>
             </a:pPr>
             <a:r>
-              <a:t>• No indexing</a:t>
-            </a:r>
-          </a:p>
+              <a:t>Creating:</a:t>
+            </a:r>
+          </a:p>
+        </p:txBody>
+      </p:sp>
+      <p:sp>
+        <p:nvSpPr>
+          <p:cNvPr id="13" name="Rectangle 12"/>
+          <p:cNvSpPr/>
+          <p:nvPr/>
+        </p:nvSpPr>
+        <p:spPr>
+          <a:xfrm>
+            <a:off x="640080" y="3154679"/>
+            <a:ext cx="10789920" cy="868680"/>
+          </a:xfrm>
+          <a:prstGeom prst="rect">
+            <a:avLst/>
+          </a:prstGeom>
+          <a:solidFill>
+            <a:srgbClr val="282C34"/>
+          </a:solidFill>
+          <a:ln>
+            <a:noFill/>
+          </a:ln>
+        </p:spPr>
+        <p:style>
+          <a:lnRef idx="1">
+            <a:schemeClr val="accent1"/>
+          </a:lnRef>
+          <a:fillRef idx="3">
+            <a:schemeClr val="accent1"/>
+          </a:fillRef>
+          <a:effectRef idx="2">
+            <a:schemeClr val="accent1"/>
+          </a:effectRef>
+          <a:fontRef idx="minor">
+            <a:schemeClr val="lt1"/>
+          </a:fontRef>
+        </p:style>
+        <p:txBody>
+          <a:bodyPr rtlCol="0" anchor="ctr"/>
+          <a:lstStyle/>
+          <a:p>
+            <a:pPr algn="ctr"/>
+          </a:p>
+        </p:txBody>
+      </p:sp>
+      <p:sp>
+        <p:nvSpPr>
+          <p:cNvPr id="14" name="Rectangle 13"/>
+          <p:cNvSpPr/>
+          <p:nvPr/>
+        </p:nvSpPr>
+        <p:spPr>
+          <a:xfrm>
+            <a:off x="640080" y="3154679"/>
+            <a:ext cx="73152" cy="868680"/>
+          </a:xfrm>
+          <a:prstGeom prst="rect">
+            <a:avLst/>
+          </a:prstGeom>
+          <a:solidFill>
+            <a:srgbClr val="61AFEF"/>
+          </a:solidFill>
+          <a:ln>
+            <a:noFill/>
+          </a:ln>
+        </p:spPr>
+        <p:style>
+          <a:lnRef idx="1">
+            <a:schemeClr val="accent1"/>
+          </a:lnRef>
+          <a:fillRef idx="3">
+            <a:schemeClr val="accent1"/>
+          </a:fillRef>
+          <a:effectRef idx="2">
+            <a:schemeClr val="accent1"/>
+          </a:effectRef>
+          <a:fontRef idx="minor">
+            <a:schemeClr val="lt1"/>
+          </a:fontRef>
+        </p:style>
+        <p:txBody>
+          <a:bodyPr rtlCol="0" anchor="ctr"/>
+          <a:lstStyle/>
+          <a:p>
+            <a:pPr algn="ctr"/>
+          </a:p>
+        </p:txBody>
+      </p:sp>
+      <p:sp>
+        <p:nvSpPr>
+          <p:cNvPr id="15" name="TextBox 14"/>
+          <p:cNvSpPr txBox="1"/>
+          <p:nvPr/>
+        </p:nvSpPr>
+        <p:spPr>
+          <a:xfrm>
+            <a:off x="914400" y="3200399"/>
+            <a:ext cx="10241280" cy="777240"/>
+          </a:xfrm>
+          <a:prstGeom prst="rect">
+            <a:avLst/>
+          </a:prstGeom>
+          <a:noFill/>
+        </p:spPr>
+        <p:txBody>
+          <a:bodyPr wrap="none">
+            <a:spAutoFit/>
+          </a:bodyPr>
+          <a:lstStyle/>
           <a:p>
             <a:pPr>
               <a:spcAft>
-                <a:spcPts val="600"/>
+                <a:spcPts val="200"/>
               </a:spcAft>
-              <a:defRPr b="1" sz="2000">
-                <a:solidFill>
-                  <a:srgbClr val="333333"/>
-                </a:solidFill>
+              <a:defRPr sz="1400">
+                <a:solidFill>
+                  <a:srgbClr val="ABB2BF"/>
+                </a:solidFill>
+                <a:latin typeface="Consolas"/>
               </a:defRPr>
             </a:pPr>
             <a:r>
-              <a:t>Creating:</a:t>
+              <a:t>numbers = {1, 2, 3, 4, 5}</a:t>
             </a:r>
           </a:p>
           <a:p>
             <a:pPr>
               <a:spcAft>
-                <a:spcPts val="600"/>
+                <a:spcPts val="200"/>
               </a:spcAft>
-              <a:defRPr sz="1600">
-                <a:solidFill>
-                  <a:srgbClr val="333333"/>
-                </a:solidFill>
+              <a:defRPr sz="1400">
+                <a:solidFill>
+                  <a:srgbClr val="ABB2BF"/>
+                </a:solidFill>
+                <a:latin typeface="Consolas"/>
               </a:defRPr>
             </a:pPr>
             <a:r>
-              <a:t>numbers = {1, 2, 3, 4, 5}</a:t>
+              <a:t>empty = set()  # NOT {}</a:t>
             </a:r>
           </a:p>
           <a:p>
             <a:pPr>
               <a:spcAft>
-                <a:spcPts val="600"/>
+                <a:spcPts val="200"/>
               </a:spcAft>
+              <a:defRPr sz="1400">
+                <a:solidFill>
+                  <a:srgbClr val="ABB2BF"/>
+                </a:solidFill>
+                <a:latin typeface="Consolas"/>
+              </a:defRPr>
+            </a:pPr>
+            <a:r>
+              <a:t>from_list = set([1, 2, 2, 3])  # {1, 2, 3}</a:t>
+            </a:r>
+          </a:p>
+        </p:txBody>
+      </p:sp>
+      <p:sp>
+        <p:nvSpPr>
+          <p:cNvPr id="16" name="TextBox 15"/>
+          <p:cNvSpPr txBox="1"/>
+          <p:nvPr/>
+        </p:nvSpPr>
+        <p:spPr>
+          <a:xfrm>
+            <a:off x="457200" y="4206240"/>
+            <a:ext cx="11247120" cy="320040"/>
+          </a:xfrm>
+          <a:prstGeom prst="rect">
+            <a:avLst/>
+          </a:prstGeom>
+          <a:noFill/>
+        </p:spPr>
+        <p:txBody>
+          <a:bodyPr wrap="none">
+            <a:spAutoFit/>
+          </a:bodyPr>
+          <a:lstStyle/>
+          <a:p>
+            <a:pPr>
+              <a:defRPr sz="1700">
+                <a:solidFill>
+                  <a:srgbClr val="333333"/>
+                </a:solidFill>
+              </a:defRPr>
+            </a:pPr>
+            <a:r>
+              <a:t>Why Use Sets?</a:t>
+            </a:r>
+          </a:p>
+        </p:txBody>
+      </p:sp>
+      <p:sp>
+        <p:nvSpPr>
+          <p:cNvPr id="17" name="TextBox 16"/>
+          <p:cNvSpPr txBox="1"/>
+          <p:nvPr/>
+        </p:nvSpPr>
+        <p:spPr>
+          <a:xfrm>
+            <a:off x="457200" y="4480559"/>
+            <a:ext cx="11247120" cy="320040"/>
+          </a:xfrm>
+          <a:prstGeom prst="rect">
+            <a:avLst/>
+          </a:prstGeom>
+          <a:noFill/>
+        </p:spPr>
+        <p:txBody>
+          <a:bodyPr wrap="none">
+            <a:spAutoFit/>
+          </a:bodyPr>
+          <a:lstStyle/>
+          <a:p>
+            <a:pPr lvl="1">
               <a:defRPr sz="1600">
                 <a:solidFill>
                   <a:srgbClr val="333333"/>
@@ -4318,14 +5861,34 @@
               </a:defRPr>
             </a:pPr>
             <a:r>
-              <a:t>empty = set()  # NOT {}</a:t>
-            </a:r>
-          </a:p>
-          <a:p>
-            <a:pPr>
-              <a:spcAft>
-                <a:spcPts val="600"/>
-              </a:spcAft>
+              <a:t>• Remove duplicates</a:t>
+            </a:r>
+          </a:p>
+        </p:txBody>
+      </p:sp>
+      <p:sp>
+        <p:nvSpPr>
+          <p:cNvPr id="18" name="TextBox 17"/>
+          <p:cNvSpPr txBox="1"/>
+          <p:nvPr/>
+        </p:nvSpPr>
+        <p:spPr>
+          <a:xfrm>
+            <a:off x="457200" y="4754879"/>
+            <a:ext cx="11247120" cy="320040"/>
+          </a:xfrm>
+          <a:prstGeom prst="rect">
+            <a:avLst/>
+          </a:prstGeom>
+          <a:noFill/>
+        </p:spPr>
+        <p:txBody>
+          <a:bodyPr wrap="none">
+            <a:spAutoFit/>
+          </a:bodyPr>
+          <a:lstStyle/>
+          <a:p>
+            <a:pPr lvl="1">
               <a:defRPr sz="1600">
                 <a:solidFill>
                   <a:srgbClr val="333333"/>
@@ -4333,14 +5896,34 @@
               </a:defRPr>
             </a:pPr>
             <a:r>
-              <a:t>from_list = set([1, 2, 2, 3])  # {1, 2, 3}</a:t>
-            </a:r>
-          </a:p>
-          <a:p>
-            <a:pPr>
-              <a:spcAft>
-                <a:spcPts val="600"/>
-              </a:spcAft>
+              <a:t>• Fast membership testing</a:t>
+            </a:r>
+          </a:p>
+        </p:txBody>
+      </p:sp>
+      <p:sp>
+        <p:nvSpPr>
+          <p:cNvPr id="19" name="TextBox 18"/>
+          <p:cNvSpPr txBox="1"/>
+          <p:nvPr/>
+        </p:nvSpPr>
+        <p:spPr>
+          <a:xfrm>
+            <a:off x="457200" y="5029199"/>
+            <a:ext cx="11247120" cy="320040"/>
+          </a:xfrm>
+          <a:prstGeom prst="rect">
+            <a:avLst/>
+          </a:prstGeom>
+          <a:noFill/>
+        </p:spPr>
+        <p:txBody>
+          <a:bodyPr wrap="none">
+            <a:spAutoFit/>
+          </a:bodyPr>
+          <a:lstStyle/>
+          <a:p>
+            <a:pPr lvl="1">
               <a:defRPr sz="1600">
                 <a:solidFill>
                   <a:srgbClr val="333333"/>
@@ -4348,59 +5931,34 @@
               </a:defRPr>
             </a:pPr>
             <a:r>
-              <a:t>Why Use Sets?</a:t>
-            </a:r>
-          </a:p>
+              <a:t>• Mathematical set operations</a:t>
+            </a:r>
+          </a:p>
+        </p:txBody>
+      </p:sp>
+      <p:sp>
+        <p:nvSpPr>
+          <p:cNvPr id="20" name="TextBox 19"/>
+          <p:cNvSpPr txBox="1"/>
+          <p:nvPr/>
+        </p:nvSpPr>
+        <p:spPr>
+          <a:xfrm>
+            <a:off x="457200" y="5303519"/>
+            <a:ext cx="11247120" cy="320040"/>
+          </a:xfrm>
+          <a:prstGeom prst="rect">
+            <a:avLst/>
+          </a:prstGeom>
+          <a:noFill/>
+        </p:spPr>
+        <p:txBody>
+          <a:bodyPr wrap="none">
+            <a:spAutoFit/>
+          </a:bodyPr>
+          <a:lstStyle/>
           <a:p>
             <a:pPr lvl="1">
-              <a:spcAft>
-                <a:spcPts val="400"/>
-              </a:spcAft>
-              <a:defRPr sz="1600">
-                <a:solidFill>
-                  <a:srgbClr val="333333"/>
-                </a:solidFill>
-              </a:defRPr>
-            </a:pPr>
-            <a:r>
-              <a:t>• Remove duplicates</a:t>
-            </a:r>
-          </a:p>
-          <a:p>
-            <a:pPr lvl="1">
-              <a:spcAft>
-                <a:spcPts val="400"/>
-              </a:spcAft>
-              <a:defRPr sz="1600">
-                <a:solidFill>
-                  <a:srgbClr val="333333"/>
-                </a:solidFill>
-              </a:defRPr>
-            </a:pPr>
-            <a:r>
-              <a:t>• Fast membership testing</a:t>
-            </a:r>
-          </a:p>
-          <a:p>
-            <a:pPr lvl="1">
-              <a:spcAft>
-                <a:spcPts val="400"/>
-              </a:spcAft>
-              <a:defRPr sz="1600">
-                <a:solidFill>
-                  <a:srgbClr val="333333"/>
-                </a:solidFill>
-              </a:defRPr>
-            </a:pPr>
-            <a:r>
-              <a:t>• Mathematical set operations</a:t>
-            </a:r>
-          </a:p>
-          <a:p>
-            <a:pPr lvl="1">
-              <a:spcAft>
-                <a:spcPts val="400"/>
-              </a:spcAft>
               <a:defRPr sz="1600">
                 <a:solidFill>
                   <a:srgbClr val="333333"/>
@@ -4446,7 +6004,7 @@
             <a:avLst/>
           </a:prstGeom>
           <a:solidFill>
-            <a:srgbClr val="FFFFFF"/>
+            <a:srgbClr val="FAFAFA"/>
           </a:solidFill>
           <a:ln>
             <a:noFill/>
@@ -4483,7 +6041,7 @@
         <p:spPr>
           <a:xfrm>
             <a:off x="0" y="0"/>
-            <a:ext cx="12191695" cy="137160"/>
+            <a:ext cx="12191695" cy="1097280"/>
           </a:xfrm>
           <a:prstGeom prst="rect">
             <a:avLst/>
@@ -4519,13 +6077,56 @@
       </p:sp>
       <p:sp>
         <p:nvSpPr>
-          <p:cNvPr id="4" name="TextBox 3"/>
+          <p:cNvPr id="4" name="Rectangle 3"/>
+          <p:cNvSpPr/>
+          <p:nvPr/>
+        </p:nvSpPr>
+        <p:spPr>
+          <a:xfrm>
+            <a:off x="0" y="1097280"/>
+            <a:ext cx="137160" cy="5760720"/>
+          </a:xfrm>
+          <a:prstGeom prst="rect">
+            <a:avLst/>
+          </a:prstGeom>
+          <a:solidFill>
+            <a:srgbClr val="FFBB33"/>
+          </a:solidFill>
+          <a:ln>
+            <a:noFill/>
+          </a:ln>
+        </p:spPr>
+        <p:style>
+          <a:lnRef idx="1">
+            <a:schemeClr val="accent1"/>
+          </a:lnRef>
+          <a:fillRef idx="3">
+            <a:schemeClr val="accent1"/>
+          </a:fillRef>
+          <a:effectRef idx="2">
+            <a:schemeClr val="accent1"/>
+          </a:effectRef>
+          <a:fontRef idx="minor">
+            <a:schemeClr val="lt1"/>
+          </a:fontRef>
+        </p:style>
+        <p:txBody>
+          <a:bodyPr rtlCol="0" anchor="ctr"/>
+          <a:lstStyle/>
+          <a:p>
+            <a:pPr algn="ctr"/>
+          </a:p>
+        </p:txBody>
+      </p:sp>
+      <p:sp>
+        <p:nvSpPr>
+          <p:cNvPr id="5" name="TextBox 4"/>
           <p:cNvSpPr txBox="1"/>
           <p:nvPr/>
         </p:nvSpPr>
         <p:spPr>
           <a:xfrm>
-            <a:off x="457200" y="320040"/>
+            <a:off x="365760" y="274320"/>
             <a:ext cx="10972800" cy="640080"/>
           </a:xfrm>
           <a:prstGeom prst="rect">
@@ -4542,7 +6143,7 @@
             <a:pPr>
               <a:defRPr sz="3600" b="1">
                 <a:solidFill>
-                  <a:srgbClr val="003366"/>
+                  <a:srgbClr val="FFFFFF"/>
                 </a:solidFill>
               </a:defRPr>
             </a:pPr>
@@ -4554,14 +6155,57 @@
       </p:sp>
       <p:sp>
         <p:nvSpPr>
-          <p:cNvPr id="5" name="TextBox 4"/>
+          <p:cNvPr id="6" name="Rectangle 5"/>
+          <p:cNvSpPr/>
+          <p:nvPr/>
+        </p:nvSpPr>
+        <p:spPr>
+          <a:xfrm>
+            <a:off x="365760" y="1325880"/>
+            <a:ext cx="11430000" cy="365760"/>
+          </a:xfrm>
+          <a:prstGeom prst="rect">
+            <a:avLst/>
+          </a:prstGeom>
+          <a:solidFill>
+            <a:srgbClr val="0078D7"/>
+          </a:solidFill>
+          <a:ln>
+            <a:noFill/>
+          </a:ln>
+        </p:spPr>
+        <p:style>
+          <a:lnRef idx="1">
+            <a:schemeClr val="accent1"/>
+          </a:lnRef>
+          <a:fillRef idx="3">
+            <a:schemeClr val="accent1"/>
+          </a:fillRef>
+          <a:effectRef idx="2">
+            <a:schemeClr val="accent1"/>
+          </a:effectRef>
+          <a:fontRef idx="minor">
+            <a:schemeClr val="lt1"/>
+          </a:fontRef>
+        </p:style>
+        <p:txBody>
+          <a:bodyPr rtlCol="0" anchor="ctr"/>
+          <a:lstStyle/>
+          <a:p>
+            <a:pPr algn="ctr"/>
+          </a:p>
+        </p:txBody>
+      </p:sp>
+      <p:sp>
+        <p:nvSpPr>
+          <p:cNvPr id="7" name="TextBox 6"/>
           <p:cNvSpPr txBox="1"/>
           <p:nvPr/>
         </p:nvSpPr>
         <p:spPr>
           <a:xfrm>
-            <a:off x="640080" y="1188720"/>
-            <a:ext cx="10789920" cy="5303520"/>
+            <a:off x="548640" y="1371600"/>
+            <a:ext cx="10972800" cy="274320"/>
           </a:xfrm>
           <a:prstGeom prst="rect">
             <a:avLst/>
@@ -4569,18 +6213,15 @@
           <a:noFill/>
         </p:spPr>
         <p:txBody>
-          <a:bodyPr wrap="square">
+          <a:bodyPr wrap="none">
             <a:spAutoFit/>
           </a:bodyPr>
           <a:lstStyle/>
           <a:p>
             <a:pPr>
-              <a:spcAft>
-                <a:spcPts val="600"/>
-              </a:spcAft>
-              <a:defRPr b="1" sz="2000">
-                <a:solidFill>
-                  <a:srgbClr val="333333"/>
+              <a:defRPr sz="2000" b="1">
+                <a:solidFill>
+                  <a:srgbClr val="FFFFFF"/>
                 </a:solidFill>
               </a:defRPr>
             </a:pPr>
@@ -4588,214 +6229,847 @@
               <a:t>Basic Operations:</a:t>
             </a:r>
           </a:p>
+        </p:txBody>
+      </p:sp>
+      <p:sp>
+        <p:nvSpPr>
+          <p:cNvPr id="8" name="Rectangle 7"/>
+          <p:cNvSpPr/>
+          <p:nvPr/>
+        </p:nvSpPr>
+        <p:spPr>
+          <a:xfrm>
+            <a:off x="640080" y="1783080"/>
+            <a:ext cx="10789920" cy="411480"/>
+          </a:xfrm>
+          <a:prstGeom prst="rect">
+            <a:avLst/>
+          </a:prstGeom>
+          <a:solidFill>
+            <a:srgbClr val="282C34"/>
+          </a:solidFill>
+          <a:ln>
+            <a:noFill/>
+          </a:ln>
+        </p:spPr>
+        <p:style>
+          <a:lnRef idx="1">
+            <a:schemeClr val="accent1"/>
+          </a:lnRef>
+          <a:fillRef idx="3">
+            <a:schemeClr val="accent1"/>
+          </a:fillRef>
+          <a:effectRef idx="2">
+            <a:schemeClr val="accent1"/>
+          </a:effectRef>
+          <a:fontRef idx="minor">
+            <a:schemeClr val="lt1"/>
+          </a:fontRef>
+        </p:style>
+        <p:txBody>
+          <a:bodyPr rtlCol="0" anchor="ctr"/>
+          <a:lstStyle/>
+          <a:p>
+            <a:pPr algn="ctr"/>
+          </a:p>
+        </p:txBody>
+      </p:sp>
+      <p:sp>
+        <p:nvSpPr>
+          <p:cNvPr id="9" name="Rectangle 8"/>
+          <p:cNvSpPr/>
+          <p:nvPr/>
+        </p:nvSpPr>
+        <p:spPr>
+          <a:xfrm>
+            <a:off x="640080" y="1783080"/>
+            <a:ext cx="73152" cy="411480"/>
+          </a:xfrm>
+          <a:prstGeom prst="rect">
+            <a:avLst/>
+          </a:prstGeom>
+          <a:solidFill>
+            <a:srgbClr val="61AFEF"/>
+          </a:solidFill>
+          <a:ln>
+            <a:noFill/>
+          </a:ln>
+        </p:spPr>
+        <p:style>
+          <a:lnRef idx="1">
+            <a:schemeClr val="accent1"/>
+          </a:lnRef>
+          <a:fillRef idx="3">
+            <a:schemeClr val="accent1"/>
+          </a:fillRef>
+          <a:effectRef idx="2">
+            <a:schemeClr val="accent1"/>
+          </a:effectRef>
+          <a:fontRef idx="minor">
+            <a:schemeClr val="lt1"/>
+          </a:fontRef>
+        </p:style>
+        <p:txBody>
+          <a:bodyPr rtlCol="0" anchor="ctr"/>
+          <a:lstStyle/>
+          <a:p>
+            <a:pPr algn="ctr"/>
+          </a:p>
+        </p:txBody>
+      </p:sp>
+      <p:sp>
+        <p:nvSpPr>
+          <p:cNvPr id="10" name="TextBox 9"/>
+          <p:cNvSpPr txBox="1"/>
+          <p:nvPr/>
+        </p:nvSpPr>
+        <p:spPr>
+          <a:xfrm>
+            <a:off x="914400" y="1828800"/>
+            <a:ext cx="10241280" cy="320040"/>
+          </a:xfrm>
+          <a:prstGeom prst="rect">
+            <a:avLst/>
+          </a:prstGeom>
+          <a:noFill/>
+        </p:spPr>
+        <p:txBody>
+          <a:bodyPr wrap="none">
+            <a:spAutoFit/>
+          </a:bodyPr>
+          <a:lstStyle/>
           <a:p>
             <a:pPr>
               <a:spcAft>
-                <a:spcPts val="600"/>
+                <a:spcPts val="200"/>
               </a:spcAft>
-              <a:defRPr sz="1600">
+              <a:defRPr sz="1400">
+                <a:solidFill>
+                  <a:srgbClr val="ABB2BF"/>
+                </a:solidFill>
+                <a:latin typeface="Consolas"/>
+              </a:defRPr>
+            </a:pPr>
+            <a:r>
+              <a:t>numbers = {1, 2, 3}</a:t>
+            </a:r>
+          </a:p>
+        </p:txBody>
+      </p:sp>
+      <p:sp>
+        <p:nvSpPr>
+          <p:cNvPr id="11" name="TextBox 10"/>
+          <p:cNvSpPr txBox="1"/>
+          <p:nvPr/>
+        </p:nvSpPr>
+        <p:spPr>
+          <a:xfrm>
+            <a:off x="457200" y="2377440"/>
+            <a:ext cx="11247120" cy="320040"/>
+          </a:xfrm>
+          <a:prstGeom prst="rect">
+            <a:avLst/>
+          </a:prstGeom>
+          <a:noFill/>
+        </p:spPr>
+        <p:txBody>
+          <a:bodyPr wrap="none">
+            <a:spAutoFit/>
+          </a:bodyPr>
+          <a:lstStyle/>
+          <a:p>
+            <a:pPr>
+              <a:defRPr sz="1700">
                 <a:solidFill>
                   <a:srgbClr val="333333"/>
                 </a:solidFill>
               </a:defRPr>
             </a:pPr>
             <a:r>
-              <a:t>numbers = {1, 2, 3}</a:t>
-            </a:r>
-          </a:p>
+              <a:t>numbers.add(4)</a:t>
+            </a:r>
+          </a:p>
+        </p:txBody>
+      </p:sp>
+      <p:sp>
+        <p:nvSpPr>
+          <p:cNvPr id="12" name="Rectangle 11"/>
+          <p:cNvSpPr/>
+          <p:nvPr/>
+        </p:nvSpPr>
+        <p:spPr>
+          <a:xfrm>
+            <a:off x="640080" y="2606040"/>
+            <a:ext cx="10789920" cy="411480"/>
+          </a:xfrm>
+          <a:prstGeom prst="rect">
+            <a:avLst/>
+          </a:prstGeom>
+          <a:solidFill>
+            <a:srgbClr val="282C34"/>
+          </a:solidFill>
+          <a:ln>
+            <a:noFill/>
+          </a:ln>
+        </p:spPr>
+        <p:style>
+          <a:lnRef idx="1">
+            <a:schemeClr val="accent1"/>
+          </a:lnRef>
+          <a:fillRef idx="3">
+            <a:schemeClr val="accent1"/>
+          </a:fillRef>
+          <a:effectRef idx="2">
+            <a:schemeClr val="accent1"/>
+          </a:effectRef>
+          <a:fontRef idx="minor">
+            <a:schemeClr val="lt1"/>
+          </a:fontRef>
+        </p:style>
+        <p:txBody>
+          <a:bodyPr rtlCol="0" anchor="ctr"/>
+          <a:lstStyle/>
+          <a:p>
+            <a:pPr algn="ctr"/>
+          </a:p>
+        </p:txBody>
+      </p:sp>
+      <p:sp>
+        <p:nvSpPr>
+          <p:cNvPr id="13" name="Rectangle 12"/>
+          <p:cNvSpPr/>
+          <p:nvPr/>
+        </p:nvSpPr>
+        <p:spPr>
+          <a:xfrm>
+            <a:off x="640080" y="2606040"/>
+            <a:ext cx="73152" cy="411480"/>
+          </a:xfrm>
+          <a:prstGeom prst="rect">
+            <a:avLst/>
+          </a:prstGeom>
+          <a:solidFill>
+            <a:srgbClr val="61AFEF"/>
+          </a:solidFill>
+          <a:ln>
+            <a:noFill/>
+          </a:ln>
+        </p:spPr>
+        <p:style>
+          <a:lnRef idx="1">
+            <a:schemeClr val="accent1"/>
+          </a:lnRef>
+          <a:fillRef idx="3">
+            <a:schemeClr val="accent1"/>
+          </a:fillRef>
+          <a:effectRef idx="2">
+            <a:schemeClr val="accent1"/>
+          </a:effectRef>
+          <a:fontRef idx="minor">
+            <a:schemeClr val="lt1"/>
+          </a:fontRef>
+        </p:style>
+        <p:txBody>
+          <a:bodyPr rtlCol="0" anchor="ctr"/>
+          <a:lstStyle/>
+          <a:p>
+            <a:pPr algn="ctr"/>
+          </a:p>
+        </p:txBody>
+      </p:sp>
+      <p:sp>
+        <p:nvSpPr>
+          <p:cNvPr id="14" name="TextBox 13"/>
+          <p:cNvSpPr txBox="1"/>
+          <p:nvPr/>
+        </p:nvSpPr>
+        <p:spPr>
+          <a:xfrm>
+            <a:off x="914400" y="2651760"/>
+            <a:ext cx="10241280" cy="320040"/>
+          </a:xfrm>
+          <a:prstGeom prst="rect">
+            <a:avLst/>
+          </a:prstGeom>
+          <a:noFill/>
+        </p:spPr>
+        <p:txBody>
+          <a:bodyPr wrap="none">
+            <a:spAutoFit/>
+          </a:bodyPr>
+          <a:lstStyle/>
           <a:p>
             <a:pPr>
               <a:spcAft>
-                <a:spcPts val="600"/>
+                <a:spcPts val="200"/>
               </a:spcAft>
-              <a:defRPr sz="1600">
+              <a:defRPr sz="1400">
+                <a:solidFill>
+                  <a:srgbClr val="ABB2BF"/>
+                </a:solidFill>
+                <a:latin typeface="Consolas"/>
+              </a:defRPr>
+            </a:pPr>
+            <a:r>
+              <a:t>numbers.remove(2)  # Error if not found</a:t>
+            </a:r>
+          </a:p>
+        </p:txBody>
+      </p:sp>
+      <p:sp>
+        <p:nvSpPr>
+          <p:cNvPr id="15" name="TextBox 14"/>
+          <p:cNvSpPr txBox="1"/>
+          <p:nvPr/>
+        </p:nvSpPr>
+        <p:spPr>
+          <a:xfrm>
+            <a:off x="457200" y="3200400"/>
+            <a:ext cx="11247120" cy="320040"/>
+          </a:xfrm>
+          <a:prstGeom prst="rect">
+            <a:avLst/>
+          </a:prstGeom>
+          <a:noFill/>
+        </p:spPr>
+        <p:txBody>
+          <a:bodyPr wrap="none">
+            <a:spAutoFit/>
+          </a:bodyPr>
+          <a:lstStyle/>
+          <a:p>
+            <a:pPr>
+              <a:defRPr sz="1700">
                 <a:solidFill>
                   <a:srgbClr val="333333"/>
                 </a:solidFill>
               </a:defRPr>
             </a:pPr>
             <a:r>
-              <a:t>numbers.add(4)</a:t>
-            </a:r>
-          </a:p>
+              <a:t>numbers.discard(2)  # No error</a:t>
+            </a:r>
+          </a:p>
+        </p:txBody>
+      </p:sp>
+      <p:sp>
+        <p:nvSpPr>
+          <p:cNvPr id="16" name="TextBox 15"/>
+          <p:cNvSpPr txBox="1"/>
+          <p:nvPr/>
+        </p:nvSpPr>
+        <p:spPr>
+          <a:xfrm>
+            <a:off x="457200" y="3474720"/>
+            <a:ext cx="11247120" cy="320040"/>
+          </a:xfrm>
+          <a:prstGeom prst="rect">
+            <a:avLst/>
+          </a:prstGeom>
+          <a:noFill/>
+        </p:spPr>
+        <p:txBody>
+          <a:bodyPr wrap="none">
+            <a:spAutoFit/>
+          </a:bodyPr>
+          <a:lstStyle/>
+          <a:p>
+            <a:pPr>
+              <a:defRPr sz="1700">
+                <a:solidFill>
+                  <a:srgbClr val="333333"/>
+                </a:solidFill>
+              </a:defRPr>
+            </a:pPr>
+            <a:r>
+              <a:t>numbers.pop()  # Remove arbitrary</a:t>
+            </a:r>
+          </a:p>
+        </p:txBody>
+      </p:sp>
+      <p:sp>
+        <p:nvSpPr>
+          <p:cNvPr id="17" name="Rectangle 16"/>
+          <p:cNvSpPr/>
+          <p:nvPr/>
+        </p:nvSpPr>
+        <p:spPr>
+          <a:xfrm>
+            <a:off x="365760" y="3703320"/>
+            <a:ext cx="11430000" cy="365760"/>
+          </a:xfrm>
+          <a:prstGeom prst="rect">
+            <a:avLst/>
+          </a:prstGeom>
+          <a:solidFill>
+            <a:srgbClr val="0078D7"/>
+          </a:solidFill>
+          <a:ln>
+            <a:noFill/>
+          </a:ln>
+        </p:spPr>
+        <p:style>
+          <a:lnRef idx="1">
+            <a:schemeClr val="accent1"/>
+          </a:lnRef>
+          <a:fillRef idx="3">
+            <a:schemeClr val="accent1"/>
+          </a:fillRef>
+          <a:effectRef idx="2">
+            <a:schemeClr val="accent1"/>
+          </a:effectRef>
+          <a:fontRef idx="minor">
+            <a:schemeClr val="lt1"/>
+          </a:fontRef>
+        </p:style>
+        <p:txBody>
+          <a:bodyPr rtlCol="0" anchor="ctr"/>
+          <a:lstStyle/>
+          <a:p>
+            <a:pPr algn="ctr"/>
+          </a:p>
+        </p:txBody>
+      </p:sp>
+      <p:sp>
+        <p:nvSpPr>
+          <p:cNvPr id="18" name="TextBox 17"/>
+          <p:cNvSpPr txBox="1"/>
+          <p:nvPr/>
+        </p:nvSpPr>
+        <p:spPr>
+          <a:xfrm>
+            <a:off x="548640" y="3749039"/>
+            <a:ext cx="10972800" cy="274320"/>
+          </a:xfrm>
+          <a:prstGeom prst="rect">
+            <a:avLst/>
+          </a:prstGeom>
+          <a:noFill/>
+        </p:spPr>
+        <p:txBody>
+          <a:bodyPr wrap="none">
+            <a:spAutoFit/>
+          </a:bodyPr>
+          <a:lstStyle/>
+          <a:p>
+            <a:pPr>
+              <a:defRPr sz="2000" b="1">
+                <a:solidFill>
+                  <a:srgbClr val="FFFFFF"/>
+                </a:solidFill>
+              </a:defRPr>
+            </a:pPr>
+            <a:r>
+              <a:t>Membership:</a:t>
+            </a:r>
+          </a:p>
+        </p:txBody>
+      </p:sp>
+      <p:sp>
+        <p:nvSpPr>
+          <p:cNvPr id="19" name="TextBox 18"/>
+          <p:cNvSpPr txBox="1"/>
+          <p:nvPr/>
+        </p:nvSpPr>
+        <p:spPr>
+          <a:xfrm>
+            <a:off x="457200" y="4206240"/>
+            <a:ext cx="11247120" cy="320040"/>
+          </a:xfrm>
+          <a:prstGeom prst="rect">
+            <a:avLst/>
+          </a:prstGeom>
+          <a:noFill/>
+        </p:spPr>
+        <p:txBody>
+          <a:bodyPr wrap="none">
+            <a:spAutoFit/>
+          </a:bodyPr>
+          <a:lstStyle/>
+          <a:p>
+            <a:pPr>
+              <a:defRPr sz="1700">
+                <a:solidFill>
+                  <a:srgbClr val="333333"/>
+                </a:solidFill>
+              </a:defRPr>
+            </a:pPr>
+            <a:r>
+              <a:t>3 in numbers  # O(1) - very fast!</a:t>
+            </a:r>
+          </a:p>
+        </p:txBody>
+      </p:sp>
+      <p:sp>
+        <p:nvSpPr>
+          <p:cNvPr id="20" name="Rectangle 19"/>
+          <p:cNvSpPr/>
+          <p:nvPr/>
+        </p:nvSpPr>
+        <p:spPr>
+          <a:xfrm>
+            <a:off x="365760" y="4434840"/>
+            <a:ext cx="11430000" cy="365760"/>
+          </a:xfrm>
+          <a:prstGeom prst="rect">
+            <a:avLst/>
+          </a:prstGeom>
+          <a:solidFill>
+            <a:srgbClr val="0078D7"/>
+          </a:solidFill>
+          <a:ln>
+            <a:noFill/>
+          </a:ln>
+        </p:spPr>
+        <p:style>
+          <a:lnRef idx="1">
+            <a:schemeClr val="accent1"/>
+          </a:lnRef>
+          <a:fillRef idx="3">
+            <a:schemeClr val="accent1"/>
+          </a:fillRef>
+          <a:effectRef idx="2">
+            <a:schemeClr val="accent1"/>
+          </a:effectRef>
+          <a:fontRef idx="minor">
+            <a:schemeClr val="lt1"/>
+          </a:fontRef>
+        </p:style>
+        <p:txBody>
+          <a:bodyPr rtlCol="0" anchor="ctr"/>
+          <a:lstStyle/>
+          <a:p>
+            <a:pPr algn="ctr"/>
+          </a:p>
+        </p:txBody>
+      </p:sp>
+      <p:sp>
+        <p:nvSpPr>
+          <p:cNvPr id="21" name="TextBox 20"/>
+          <p:cNvSpPr txBox="1"/>
+          <p:nvPr/>
+        </p:nvSpPr>
+        <p:spPr>
+          <a:xfrm>
+            <a:off x="548640" y="4480559"/>
+            <a:ext cx="10972800" cy="274320"/>
+          </a:xfrm>
+          <a:prstGeom prst="rect">
+            <a:avLst/>
+          </a:prstGeom>
+          <a:noFill/>
+        </p:spPr>
+        <p:txBody>
+          <a:bodyPr wrap="none">
+            <a:spAutoFit/>
+          </a:bodyPr>
+          <a:lstStyle/>
+          <a:p>
+            <a:pPr>
+              <a:defRPr sz="2000" b="1">
+                <a:solidFill>
+                  <a:srgbClr val="FFFFFF"/>
+                </a:solidFill>
+              </a:defRPr>
+            </a:pPr>
+            <a:r>
+              <a:t>Set Math:</a:t>
+            </a:r>
+          </a:p>
+        </p:txBody>
+      </p:sp>
+      <p:sp>
+        <p:nvSpPr>
+          <p:cNvPr id="22" name="Rectangle 21"/>
+          <p:cNvSpPr/>
+          <p:nvPr/>
+        </p:nvSpPr>
+        <p:spPr>
+          <a:xfrm>
+            <a:off x="640080" y="4892040"/>
+            <a:ext cx="10789920" cy="640080"/>
+          </a:xfrm>
+          <a:prstGeom prst="rect">
+            <a:avLst/>
+          </a:prstGeom>
+          <a:solidFill>
+            <a:srgbClr val="282C34"/>
+          </a:solidFill>
+          <a:ln>
+            <a:noFill/>
+          </a:ln>
+        </p:spPr>
+        <p:style>
+          <a:lnRef idx="1">
+            <a:schemeClr val="accent1"/>
+          </a:lnRef>
+          <a:fillRef idx="3">
+            <a:schemeClr val="accent1"/>
+          </a:fillRef>
+          <a:effectRef idx="2">
+            <a:schemeClr val="accent1"/>
+          </a:effectRef>
+          <a:fontRef idx="minor">
+            <a:schemeClr val="lt1"/>
+          </a:fontRef>
+        </p:style>
+        <p:txBody>
+          <a:bodyPr rtlCol="0" anchor="ctr"/>
+          <a:lstStyle/>
+          <a:p>
+            <a:pPr algn="ctr"/>
+          </a:p>
+        </p:txBody>
+      </p:sp>
+      <p:sp>
+        <p:nvSpPr>
+          <p:cNvPr id="23" name="Rectangle 22"/>
+          <p:cNvSpPr/>
+          <p:nvPr/>
+        </p:nvSpPr>
+        <p:spPr>
+          <a:xfrm>
+            <a:off x="640080" y="4892040"/>
+            <a:ext cx="73152" cy="640080"/>
+          </a:xfrm>
+          <a:prstGeom prst="rect">
+            <a:avLst/>
+          </a:prstGeom>
+          <a:solidFill>
+            <a:srgbClr val="61AFEF"/>
+          </a:solidFill>
+          <a:ln>
+            <a:noFill/>
+          </a:ln>
+        </p:spPr>
+        <p:style>
+          <a:lnRef idx="1">
+            <a:schemeClr val="accent1"/>
+          </a:lnRef>
+          <a:fillRef idx="3">
+            <a:schemeClr val="accent1"/>
+          </a:fillRef>
+          <a:effectRef idx="2">
+            <a:schemeClr val="accent1"/>
+          </a:effectRef>
+          <a:fontRef idx="minor">
+            <a:schemeClr val="lt1"/>
+          </a:fontRef>
+        </p:style>
+        <p:txBody>
+          <a:bodyPr rtlCol="0" anchor="ctr"/>
+          <a:lstStyle/>
+          <a:p>
+            <a:pPr algn="ctr"/>
+          </a:p>
+        </p:txBody>
+      </p:sp>
+      <p:sp>
+        <p:nvSpPr>
+          <p:cNvPr id="24" name="TextBox 23"/>
+          <p:cNvSpPr txBox="1"/>
+          <p:nvPr/>
+        </p:nvSpPr>
+        <p:spPr>
+          <a:xfrm>
+            <a:off x="914400" y="4937759"/>
+            <a:ext cx="10241280" cy="548640"/>
+          </a:xfrm>
+          <a:prstGeom prst="rect">
+            <a:avLst/>
+          </a:prstGeom>
+          <a:noFill/>
+        </p:spPr>
+        <p:txBody>
+          <a:bodyPr wrap="none">
+            <a:spAutoFit/>
+          </a:bodyPr>
+          <a:lstStyle/>
           <a:p>
             <a:pPr>
               <a:spcAft>
-                <a:spcPts val="600"/>
+                <a:spcPts val="200"/>
               </a:spcAft>
-              <a:defRPr sz="1600">
-                <a:solidFill>
-                  <a:srgbClr val="333333"/>
-                </a:solidFill>
+              <a:defRPr sz="1400">
+                <a:solidFill>
+                  <a:srgbClr val="ABB2BF"/>
+                </a:solidFill>
+                <a:latin typeface="Consolas"/>
               </a:defRPr>
             </a:pPr>
             <a:r>
-              <a:t>numbers.remove(2)  # Error if not found</a:t>
+              <a:t>a = {1, 2, 3}</a:t>
             </a:r>
           </a:p>
           <a:p>
             <a:pPr>
               <a:spcAft>
-                <a:spcPts val="600"/>
+                <a:spcPts val="200"/>
               </a:spcAft>
-              <a:defRPr sz="1600">
-                <a:solidFill>
-                  <a:srgbClr val="333333"/>
-                </a:solidFill>
+              <a:defRPr sz="1400">
+                <a:solidFill>
+                  <a:srgbClr val="ABB2BF"/>
+                </a:solidFill>
+                <a:latin typeface="Consolas"/>
               </a:defRPr>
             </a:pPr>
             <a:r>
-              <a:t>numbers.discard(2)  # No error</a:t>
-            </a:r>
-          </a:p>
+              <a:t>b = {3, 4, 5}</a:t>
+            </a:r>
+          </a:p>
+        </p:txBody>
+      </p:sp>
+      <p:sp>
+        <p:nvSpPr>
+          <p:cNvPr id="25" name="Rectangle 24"/>
+          <p:cNvSpPr/>
+          <p:nvPr/>
+        </p:nvSpPr>
+        <p:spPr>
+          <a:xfrm>
+            <a:off x="365760" y="5669280"/>
+            <a:ext cx="11430000" cy="365760"/>
+          </a:xfrm>
+          <a:prstGeom prst="rect">
+            <a:avLst/>
+          </a:prstGeom>
+          <a:solidFill>
+            <a:srgbClr val="0078D7"/>
+          </a:solidFill>
+          <a:ln>
+            <a:noFill/>
+          </a:ln>
+        </p:spPr>
+        <p:style>
+          <a:lnRef idx="1">
+            <a:schemeClr val="accent1"/>
+          </a:lnRef>
+          <a:fillRef idx="3">
+            <a:schemeClr val="accent1"/>
+          </a:fillRef>
+          <a:effectRef idx="2">
+            <a:schemeClr val="accent1"/>
+          </a:effectRef>
+          <a:fontRef idx="minor">
+            <a:schemeClr val="lt1"/>
+          </a:fontRef>
+        </p:style>
+        <p:txBody>
+          <a:bodyPr rtlCol="0" anchor="ctr"/>
+          <a:lstStyle/>
+          <a:p>
+            <a:pPr algn="ctr"/>
+          </a:p>
+        </p:txBody>
+      </p:sp>
+      <p:sp>
+        <p:nvSpPr>
+          <p:cNvPr id="26" name="TextBox 25"/>
+          <p:cNvSpPr txBox="1"/>
+          <p:nvPr/>
+        </p:nvSpPr>
+        <p:spPr>
+          <a:xfrm>
+            <a:off x="548640" y="5715000"/>
+            <a:ext cx="10972800" cy="274320"/>
+          </a:xfrm>
+          <a:prstGeom prst="rect">
+            <a:avLst/>
+          </a:prstGeom>
+          <a:noFill/>
+        </p:spPr>
+        <p:txBody>
+          <a:bodyPr wrap="none">
+            <a:spAutoFit/>
+          </a:bodyPr>
+          <a:lstStyle/>
           <a:p>
             <a:pPr>
-              <a:spcAft>
-                <a:spcPts val="600"/>
-              </a:spcAft>
-              <a:defRPr sz="1600">
-                <a:solidFill>
-                  <a:srgbClr val="333333"/>
+              <a:defRPr sz="2000" b="1">
+                <a:solidFill>
+                  <a:srgbClr val="FFFFFF"/>
                 </a:solidFill>
               </a:defRPr>
             </a:pPr>
             <a:r>
-              <a:t>numbers.pop()  # Remove arbitrary</a:t>
-            </a:r>
-          </a:p>
+              <a:t>a | b  # Union: {1, 2, 3, 4, 5}</a:t>
+            </a:r>
+          </a:p>
+        </p:txBody>
+      </p:sp>
+      <p:sp>
+        <p:nvSpPr>
+          <p:cNvPr id="27" name="Rectangle 26"/>
+          <p:cNvSpPr/>
+          <p:nvPr/>
+        </p:nvSpPr>
+        <p:spPr>
+          <a:xfrm>
+            <a:off x="365760" y="6126480"/>
+            <a:ext cx="11430000" cy="365760"/>
+          </a:xfrm>
+          <a:prstGeom prst="rect">
+            <a:avLst/>
+          </a:prstGeom>
+          <a:solidFill>
+            <a:srgbClr val="0078D7"/>
+          </a:solidFill>
+          <a:ln>
+            <a:noFill/>
+          </a:ln>
+        </p:spPr>
+        <p:style>
+          <a:lnRef idx="1">
+            <a:schemeClr val="accent1"/>
+          </a:lnRef>
+          <a:fillRef idx="3">
+            <a:schemeClr val="accent1"/>
+          </a:fillRef>
+          <a:effectRef idx="2">
+            <a:schemeClr val="accent1"/>
+          </a:effectRef>
+          <a:fontRef idx="minor">
+            <a:schemeClr val="lt1"/>
+          </a:fontRef>
+        </p:style>
+        <p:txBody>
+          <a:bodyPr rtlCol="0" anchor="ctr"/>
+          <a:lstStyle/>
+          <a:p>
+            <a:pPr algn="ctr"/>
+          </a:p>
+        </p:txBody>
+      </p:sp>
+      <p:sp>
+        <p:nvSpPr>
+          <p:cNvPr id="28" name="TextBox 27"/>
+          <p:cNvSpPr txBox="1"/>
+          <p:nvPr/>
+        </p:nvSpPr>
+        <p:spPr>
+          <a:xfrm>
+            <a:off x="548640" y="6172200"/>
+            <a:ext cx="10972800" cy="274320"/>
+          </a:xfrm>
+          <a:prstGeom prst="rect">
+            <a:avLst/>
+          </a:prstGeom>
+          <a:noFill/>
+        </p:spPr>
+        <p:txBody>
+          <a:bodyPr wrap="none">
+            <a:spAutoFit/>
+          </a:bodyPr>
+          <a:lstStyle/>
           <a:p>
             <a:pPr>
-              <a:spcAft>
-                <a:spcPts val="600"/>
-              </a:spcAft>
-              <a:defRPr b="1" sz="2000">
-                <a:solidFill>
-                  <a:srgbClr val="333333"/>
+              <a:defRPr sz="2000" b="1">
+                <a:solidFill>
+                  <a:srgbClr val="FFFFFF"/>
                 </a:solidFill>
               </a:defRPr>
             </a:pPr>
             <a:r>
-              <a:t>Membership:</a:t>
-            </a:r>
-          </a:p>
-          <a:p>
-            <a:pPr>
-              <a:spcAft>
-                <a:spcPts val="600"/>
-              </a:spcAft>
-              <a:defRPr sz="1600">
-                <a:solidFill>
-                  <a:srgbClr val="333333"/>
-                </a:solidFill>
-              </a:defRPr>
-            </a:pPr>
-            <a:r>
-              <a:t>3 in numbers  # O(1) - very fast!</a:t>
-            </a:r>
-          </a:p>
-          <a:p>
-            <a:pPr>
-              <a:spcAft>
-                <a:spcPts val="600"/>
-              </a:spcAft>
-              <a:defRPr b="1" sz="2000">
-                <a:solidFill>
-                  <a:srgbClr val="333333"/>
-                </a:solidFill>
-              </a:defRPr>
-            </a:pPr>
-            <a:r>
-              <a:t>Set Math:</a:t>
-            </a:r>
-          </a:p>
-          <a:p>
-            <a:pPr>
-              <a:spcAft>
-                <a:spcPts val="600"/>
-              </a:spcAft>
-              <a:defRPr sz="1600">
-                <a:solidFill>
-                  <a:srgbClr val="333333"/>
-                </a:solidFill>
-              </a:defRPr>
-            </a:pPr>
-            <a:r>
-              <a:t>a = {1, 2, 3}</a:t>
-            </a:r>
-          </a:p>
-          <a:p>
-            <a:pPr>
-              <a:spcAft>
-                <a:spcPts val="600"/>
-              </a:spcAft>
-              <a:defRPr sz="1600">
-                <a:solidFill>
-                  <a:srgbClr val="333333"/>
-                </a:solidFill>
-              </a:defRPr>
-            </a:pPr>
-            <a:r>
-              <a:t>b = {3, 4, 5}</a:t>
-            </a:r>
-          </a:p>
-          <a:p>
-            <a:pPr>
-              <a:spcAft>
-                <a:spcPts val="600"/>
-              </a:spcAft>
-              <a:defRPr b="1" sz="2000">
-                <a:solidFill>
-                  <a:srgbClr val="333333"/>
-                </a:solidFill>
-              </a:defRPr>
-            </a:pPr>
-            <a:r>
-              <a:t>a | b  # Union: {1, 2, 3, 4, 5}</a:t>
-            </a:r>
-          </a:p>
-          <a:p>
-            <a:pPr>
-              <a:spcAft>
-                <a:spcPts val="600"/>
-              </a:spcAft>
-              <a:defRPr b="1" sz="2000">
-                <a:solidFill>
-                  <a:srgbClr val="333333"/>
-                </a:solidFill>
-              </a:defRPr>
-            </a:pPr>
-            <a:r>
               <a:t>a &amp; b  # Intersection: {3}</a:t>
-            </a:r>
-          </a:p>
-          <a:p>
-            <a:pPr>
-              <a:spcAft>
-                <a:spcPts val="600"/>
-              </a:spcAft>
-              <a:defRPr b="1" sz="2000">
-                <a:solidFill>
-                  <a:srgbClr val="333333"/>
-                </a:solidFill>
-              </a:defRPr>
-            </a:pPr>
-            <a:r>
-              <a:t>a - b  # Difference: {1, 2}</a:t>
-            </a:r>
-          </a:p>
-          <a:p>
-            <a:pPr>
-              <a:spcAft>
-                <a:spcPts val="600"/>
-              </a:spcAft>
-              <a:defRPr b="1" sz="2000">
-                <a:solidFill>
-                  <a:srgbClr val="333333"/>
-                </a:solidFill>
-              </a:defRPr>
-            </a:pPr>
-            <a:r>
-              <a:t>a ^ b  # Symmetric diff: {1, 2, 4, 5}</a:t>
             </a:r>
           </a:p>
         </p:txBody>
@@ -4833,7 +7107,7 @@
             <a:avLst/>
           </a:prstGeom>
           <a:solidFill>
-            <a:srgbClr val="FFFFFF"/>
+            <a:srgbClr val="0066CC"/>
           </a:solidFill>
           <a:ln>
             <a:noFill/>
@@ -4869,14 +7143,14 @@
         </p:nvSpPr>
         <p:spPr>
           <a:xfrm>
-            <a:off x="0" y="0"/>
-            <a:ext cx="12191695" cy="137160"/>
+            <a:off x="0" y="2743200"/>
+            <a:ext cx="3657600" cy="137160"/>
           </a:xfrm>
           <a:prstGeom prst="rect">
             <a:avLst/>
           </a:prstGeom>
           <a:solidFill>
-            <a:srgbClr val="0066CC"/>
+            <a:srgbClr val="FFBB33"/>
           </a:solidFill>
           <a:ln>
             <a:noFill/>
@@ -4906,14 +7180,57 @@
       </p:sp>
       <p:sp>
         <p:nvSpPr>
-          <p:cNvPr id="4" name="TextBox 3"/>
+          <p:cNvPr id="4" name="Rectangle 3"/>
+          <p:cNvSpPr/>
+          <p:nvPr/>
+        </p:nvSpPr>
+        <p:spPr>
+          <a:xfrm>
+            <a:off x="8531352" y="4114800"/>
+            <a:ext cx="3657600" cy="137160"/>
+          </a:xfrm>
+          <a:prstGeom prst="rect">
+            <a:avLst/>
+          </a:prstGeom>
+          <a:solidFill>
+            <a:srgbClr val="FFBB33"/>
+          </a:solidFill>
+          <a:ln>
+            <a:noFill/>
+          </a:ln>
+        </p:spPr>
+        <p:style>
+          <a:lnRef idx="1">
+            <a:schemeClr val="accent1"/>
+          </a:lnRef>
+          <a:fillRef idx="3">
+            <a:schemeClr val="accent1"/>
+          </a:fillRef>
+          <a:effectRef idx="2">
+            <a:schemeClr val="accent1"/>
+          </a:effectRef>
+          <a:fontRef idx="minor">
+            <a:schemeClr val="lt1"/>
+          </a:fontRef>
+        </p:style>
+        <p:txBody>
+          <a:bodyPr rtlCol="0" anchor="ctr"/>
+          <a:lstStyle/>
+          <a:p>
+            <a:pPr algn="ctr"/>
+          </a:p>
+        </p:txBody>
+      </p:sp>
+      <p:sp>
+        <p:nvSpPr>
+          <p:cNvPr id="5" name="TextBox 4"/>
           <p:cNvSpPr txBox="1"/>
           <p:nvPr/>
         </p:nvSpPr>
         <p:spPr>
           <a:xfrm>
-            <a:off x="457200" y="320040"/>
-            <a:ext cx="10972800" cy="640080"/>
+            <a:off x="914400" y="2560320"/>
+            <a:ext cx="10360152" cy="1371600"/>
           </a:xfrm>
           <a:prstGeom prst="rect">
             <a:avLst/>
@@ -4926,308 +7243,15 @@
           </a:bodyPr>
           <a:lstStyle/>
           <a:p>
-            <a:pPr>
-              <a:defRPr sz="3600" b="1">
-                <a:solidFill>
-                  <a:srgbClr val="003366"/>
+            <a:pPr algn="ctr">
+              <a:defRPr sz="4800" b="1">
+                <a:solidFill>
+                  <a:srgbClr val="FFFFFF"/>
                 </a:solidFill>
               </a:defRPr>
             </a:pPr>
             <a:r>
               <a:t>When to Use Each</a:t>
-            </a:r>
-          </a:p>
-        </p:txBody>
-      </p:sp>
-      <p:sp>
-        <p:nvSpPr>
-          <p:cNvPr id="5" name="TextBox 4"/>
-          <p:cNvSpPr txBox="1"/>
-          <p:nvPr/>
-        </p:nvSpPr>
-        <p:spPr>
-          <a:xfrm>
-            <a:off x="640080" y="1188720"/>
-            <a:ext cx="10789920" cy="5303520"/>
-          </a:xfrm>
-          <a:prstGeom prst="rect">
-            <a:avLst/>
-          </a:prstGeom>
-          <a:noFill/>
-        </p:spPr>
-        <p:txBody>
-          <a:bodyPr wrap="square">
-            <a:spAutoFit/>
-          </a:bodyPr>
-          <a:lstStyle/>
-          <a:p>
-            <a:pPr>
-              <a:spcAft>
-                <a:spcPts val="600"/>
-              </a:spcAft>
-              <a:defRPr b="1" sz="2000">
-                <a:solidFill>
-                  <a:srgbClr val="333333"/>
-                </a:solidFill>
-              </a:defRPr>
-            </a:pPr>
-            <a:r>
-              <a:t>Use Tuple When:</a:t>
-            </a:r>
-          </a:p>
-          <a:p>
-            <a:pPr lvl="1">
-              <a:spcAft>
-                <a:spcPts val="400"/>
-              </a:spcAft>
-              <a:defRPr sz="1600">
-                <a:solidFill>
-                  <a:srgbClr val="333333"/>
-                </a:solidFill>
-              </a:defRPr>
-            </a:pPr>
-            <a:r>
-              <a:t>• Data shouldn't change</a:t>
-            </a:r>
-          </a:p>
-          <a:p>
-            <a:pPr lvl="1">
-              <a:spcAft>
-                <a:spcPts val="400"/>
-              </a:spcAft>
-              <a:defRPr sz="1600">
-                <a:solidFill>
-                  <a:srgbClr val="333333"/>
-                </a:solidFill>
-              </a:defRPr>
-            </a:pPr>
-            <a:r>
-              <a:t>• Need hashable type</a:t>
-            </a:r>
-          </a:p>
-          <a:p>
-            <a:pPr lvl="1">
-              <a:spcAft>
-                <a:spcPts val="400"/>
-              </a:spcAft>
-              <a:defRPr sz="1600">
-                <a:solidFill>
-                  <a:srgbClr val="333333"/>
-                </a:solidFill>
-              </a:defRPr>
-            </a:pPr>
-            <a:r>
-              <a:t>• Return multiple values</a:t>
-            </a:r>
-          </a:p>
-          <a:p>
-            <a:pPr lvl="1">
-              <a:spcAft>
-                <a:spcPts val="400"/>
-              </a:spcAft>
-              <a:defRPr sz="1600">
-                <a:solidFill>
-                  <a:srgbClr val="333333"/>
-                </a:solidFill>
-              </a:defRPr>
-            </a:pPr>
-            <a:r>
-              <a:t>• Represent fixed structure</a:t>
-            </a:r>
-          </a:p>
-          <a:p>
-            <a:pPr>
-              <a:spcAft>
-                <a:spcPts val="600"/>
-              </a:spcAft>
-              <a:defRPr b="1" sz="2000">
-                <a:solidFill>
-                  <a:srgbClr val="333333"/>
-                </a:solidFill>
-              </a:defRPr>
-            </a:pPr>
-            <a:r>
-              <a:t>Examples:</a:t>
-            </a:r>
-          </a:p>
-          <a:p>
-            <a:pPr>
-              <a:spcAft>
-                <a:spcPts val="600"/>
-              </a:spcAft>
-              <a:defRPr sz="1600">
-                <a:solidFill>
-                  <a:srgbClr val="333333"/>
-                </a:solidFill>
-              </a:defRPr>
-            </a:pPr>
-            <a:r>
-              <a:t>coordinates = (x, y)</a:t>
-            </a:r>
-          </a:p>
-          <a:p>
-            <a:pPr>
-              <a:spcAft>
-                <a:spcPts val="600"/>
-              </a:spcAft>
-              <a:defRPr sz="1600">
-                <a:solidFill>
-                  <a:srgbClr val="333333"/>
-                </a:solidFill>
-              </a:defRPr>
-            </a:pPr>
-            <a:r>
-              <a:t>rgb_color = (255, 0, 128)</a:t>
-            </a:r>
-          </a:p>
-          <a:p>
-            <a:pPr>
-              <a:spcAft>
-                <a:spcPts val="600"/>
-              </a:spcAft>
-              <a:defRPr sz="1600">
-                <a:solidFill>
-                  <a:srgbClr val="333333"/>
-                </a:solidFill>
-              </a:defRPr>
-            </a:pPr>
-            <a:r>
-              <a:t>date = (2025, 1, 24)</a:t>
-            </a:r>
-          </a:p>
-          <a:p>
-            <a:pPr>
-              <a:spcAft>
-                <a:spcPts val="600"/>
-              </a:spcAft>
-              <a:defRPr b="1" sz="2000">
-                <a:solidFill>
-                  <a:srgbClr val="333333"/>
-                </a:solidFill>
-              </a:defRPr>
-            </a:pPr>
-            <a:r>
-              <a:t>Use Set When:</a:t>
-            </a:r>
-          </a:p>
-          <a:p>
-            <a:pPr lvl="1">
-              <a:spcAft>
-                <a:spcPts val="400"/>
-              </a:spcAft>
-              <a:defRPr sz="1600">
-                <a:solidFill>
-                  <a:srgbClr val="333333"/>
-                </a:solidFill>
-              </a:defRPr>
-            </a:pPr>
-            <a:r>
-              <a:t>• Need unique elements</a:t>
-            </a:r>
-          </a:p>
-          <a:p>
-            <a:pPr lvl="1">
-              <a:spcAft>
-                <a:spcPts val="400"/>
-              </a:spcAft>
-              <a:defRPr sz="1600">
-                <a:solidFill>
-                  <a:srgbClr val="333333"/>
-                </a:solidFill>
-              </a:defRPr>
-            </a:pPr>
-            <a:r>
-              <a:t>• Fast membership tests</a:t>
-            </a:r>
-          </a:p>
-          <a:p>
-            <a:pPr lvl="1">
-              <a:spcAft>
-                <a:spcPts val="400"/>
-              </a:spcAft>
-              <a:defRPr sz="1600">
-                <a:solidFill>
-                  <a:srgbClr val="333333"/>
-                </a:solidFill>
-              </a:defRPr>
-            </a:pPr>
-            <a:r>
-              <a:t>• Set operations needed</a:t>
-            </a:r>
-          </a:p>
-          <a:p>
-            <a:pPr lvl="1">
-              <a:spcAft>
-                <a:spcPts val="400"/>
-              </a:spcAft>
-              <a:defRPr sz="1600">
-                <a:solidFill>
-                  <a:srgbClr val="333333"/>
-                </a:solidFill>
-              </a:defRPr>
-            </a:pPr>
-            <a:r>
-              <a:t>• Order doesn't matter</a:t>
-            </a:r>
-          </a:p>
-          <a:p>
-            <a:pPr>
-              <a:spcAft>
-                <a:spcPts val="600"/>
-              </a:spcAft>
-              <a:defRPr b="1" sz="2000">
-                <a:solidFill>
-                  <a:srgbClr val="333333"/>
-                </a:solidFill>
-              </a:defRPr>
-            </a:pPr>
-            <a:r>
-              <a:t>Examples:</a:t>
-            </a:r>
-          </a:p>
-          <a:p>
-            <a:pPr>
-              <a:spcAft>
-                <a:spcPts val="600"/>
-              </a:spcAft>
-              <a:defRPr sz="1600">
-                <a:solidFill>
-                  <a:srgbClr val="333333"/>
-                </a:solidFill>
-              </a:defRPr>
-            </a:pPr>
-            <a:r>
-              <a:t>unique_ids = {101, 102, 103}</a:t>
-            </a:r>
-          </a:p>
-          <a:p>
-            <a:pPr>
-              <a:spcAft>
-                <a:spcPts val="600"/>
-              </a:spcAft>
-              <a:defRPr sz="1600">
-                <a:solidFill>
-                  <a:srgbClr val="333333"/>
-                </a:solidFill>
-              </a:defRPr>
-            </a:pPr>
-            <a:r>
-              <a:t>tags = {"python", "coding"}</a:t>
-            </a:r>
-          </a:p>
-          <a:p>
-            <a:pPr>
-              <a:spcAft>
-                <a:spcPts val="600"/>
-              </a:spcAft>
-              <a:defRPr sz="1600">
-                <a:solidFill>
-                  <a:srgbClr val="333333"/>
-                </a:solidFill>
-              </a:defRPr>
-            </a:pPr>
-            <a:r>
-              <a:t>visited_pages = set()</a:t>
             </a:r>
           </a:p>
         </p:txBody>
@@ -5265,7 +7289,7 @@
             <a:avLst/>
           </a:prstGeom>
           <a:solidFill>
-            <a:srgbClr val="FFFFFF"/>
+            <a:srgbClr val="FAFAFA"/>
           </a:solidFill>
           <a:ln>
             <a:noFill/>
@@ -5302,7 +7326,7 @@
         <p:spPr>
           <a:xfrm>
             <a:off x="0" y="0"/>
-            <a:ext cx="12191695" cy="137160"/>
+            <a:ext cx="12191695" cy="1097280"/>
           </a:xfrm>
           <a:prstGeom prst="rect">
             <a:avLst/>
@@ -5338,13 +7362,56 @@
       </p:sp>
       <p:sp>
         <p:nvSpPr>
-          <p:cNvPr id="4" name="TextBox 3"/>
+          <p:cNvPr id="4" name="Rectangle 3"/>
+          <p:cNvSpPr/>
+          <p:nvPr/>
+        </p:nvSpPr>
+        <p:spPr>
+          <a:xfrm>
+            <a:off x="0" y="1097280"/>
+            <a:ext cx="137160" cy="5760720"/>
+          </a:xfrm>
+          <a:prstGeom prst="rect">
+            <a:avLst/>
+          </a:prstGeom>
+          <a:solidFill>
+            <a:srgbClr val="FFBB33"/>
+          </a:solidFill>
+          <a:ln>
+            <a:noFill/>
+          </a:ln>
+        </p:spPr>
+        <p:style>
+          <a:lnRef idx="1">
+            <a:schemeClr val="accent1"/>
+          </a:lnRef>
+          <a:fillRef idx="3">
+            <a:schemeClr val="accent1"/>
+          </a:fillRef>
+          <a:effectRef idx="2">
+            <a:schemeClr val="accent1"/>
+          </a:effectRef>
+          <a:fontRef idx="minor">
+            <a:schemeClr val="lt1"/>
+          </a:fontRef>
+        </p:style>
+        <p:txBody>
+          <a:bodyPr rtlCol="0" anchor="ctr"/>
+          <a:lstStyle/>
+          <a:p>
+            <a:pPr algn="ctr"/>
+          </a:p>
+        </p:txBody>
+      </p:sp>
+      <p:sp>
+        <p:nvSpPr>
+          <p:cNvPr id="5" name="TextBox 4"/>
           <p:cNvSpPr txBox="1"/>
           <p:nvPr/>
         </p:nvSpPr>
         <p:spPr>
           <a:xfrm>
-            <a:off x="457200" y="320040"/>
+            <a:off x="365760" y="274320"/>
             <a:ext cx="10972800" cy="640080"/>
           </a:xfrm>
           <a:prstGeom prst="rect">
@@ -5361,13 +7428,909 @@
             <a:pPr>
               <a:defRPr sz="3600" b="1">
                 <a:solidFill>
-                  <a:srgbClr val="003366"/>
+                  <a:srgbClr val="FFFFFF"/>
                 </a:solidFill>
               </a:defRPr>
             </a:pPr>
             <a:r>
-              <a:t>Practical Examples</a:t>
-            </a:r>
+              <a:t>When to Use Each</a:t>
+            </a:r>
+          </a:p>
+        </p:txBody>
+      </p:sp>
+      <p:sp>
+        <p:nvSpPr>
+          <p:cNvPr id="6" name="Rectangle 5"/>
+          <p:cNvSpPr/>
+          <p:nvPr/>
+        </p:nvSpPr>
+        <p:spPr>
+          <a:xfrm>
+            <a:off x="365760" y="1325880"/>
+            <a:ext cx="11430000" cy="365760"/>
+          </a:xfrm>
+          <a:prstGeom prst="rect">
+            <a:avLst/>
+          </a:prstGeom>
+          <a:solidFill>
+            <a:srgbClr val="0078D7"/>
+          </a:solidFill>
+          <a:ln>
+            <a:noFill/>
+          </a:ln>
+        </p:spPr>
+        <p:style>
+          <a:lnRef idx="1">
+            <a:schemeClr val="accent1"/>
+          </a:lnRef>
+          <a:fillRef idx="3">
+            <a:schemeClr val="accent1"/>
+          </a:fillRef>
+          <a:effectRef idx="2">
+            <a:schemeClr val="accent1"/>
+          </a:effectRef>
+          <a:fontRef idx="minor">
+            <a:schemeClr val="lt1"/>
+          </a:fontRef>
+        </p:style>
+        <p:txBody>
+          <a:bodyPr rtlCol="0" anchor="ctr"/>
+          <a:lstStyle/>
+          <a:p>
+            <a:pPr algn="ctr"/>
+          </a:p>
+        </p:txBody>
+      </p:sp>
+      <p:sp>
+        <p:nvSpPr>
+          <p:cNvPr id="7" name="TextBox 6"/>
+          <p:cNvSpPr txBox="1"/>
+          <p:nvPr/>
+        </p:nvSpPr>
+        <p:spPr>
+          <a:xfrm>
+            <a:off x="548640" y="1371600"/>
+            <a:ext cx="10972800" cy="274320"/>
+          </a:xfrm>
+          <a:prstGeom prst="rect">
+            <a:avLst/>
+          </a:prstGeom>
+          <a:noFill/>
+        </p:spPr>
+        <p:txBody>
+          <a:bodyPr wrap="none">
+            <a:spAutoFit/>
+          </a:bodyPr>
+          <a:lstStyle/>
+          <a:p>
+            <a:pPr>
+              <a:defRPr sz="2000" b="1">
+                <a:solidFill>
+                  <a:srgbClr val="FFFFFF"/>
+                </a:solidFill>
+              </a:defRPr>
+            </a:pPr>
+            <a:r>
+              <a:t>Use Tuple When:</a:t>
+            </a:r>
+          </a:p>
+        </p:txBody>
+      </p:sp>
+      <p:sp>
+        <p:nvSpPr>
+          <p:cNvPr id="8" name="TextBox 7"/>
+          <p:cNvSpPr txBox="1"/>
+          <p:nvPr/>
+        </p:nvSpPr>
+        <p:spPr>
+          <a:xfrm>
+            <a:off x="457200" y="1828800"/>
+            <a:ext cx="11247120" cy="320040"/>
+          </a:xfrm>
+          <a:prstGeom prst="rect">
+            <a:avLst/>
+          </a:prstGeom>
+          <a:noFill/>
+        </p:spPr>
+        <p:txBody>
+          <a:bodyPr wrap="none">
+            <a:spAutoFit/>
+          </a:bodyPr>
+          <a:lstStyle/>
+          <a:p>
+            <a:pPr lvl="1">
+              <a:defRPr sz="1600">
+                <a:solidFill>
+                  <a:srgbClr val="333333"/>
+                </a:solidFill>
+              </a:defRPr>
+            </a:pPr>
+            <a:r>
+              <a:t>• Data shouldn't change</a:t>
+            </a:r>
+          </a:p>
+        </p:txBody>
+      </p:sp>
+      <p:sp>
+        <p:nvSpPr>
+          <p:cNvPr id="9" name="TextBox 8"/>
+          <p:cNvSpPr txBox="1"/>
+          <p:nvPr/>
+        </p:nvSpPr>
+        <p:spPr>
+          <a:xfrm>
+            <a:off x="457200" y="2103120"/>
+            <a:ext cx="11247120" cy="320040"/>
+          </a:xfrm>
+          <a:prstGeom prst="rect">
+            <a:avLst/>
+          </a:prstGeom>
+          <a:noFill/>
+        </p:spPr>
+        <p:txBody>
+          <a:bodyPr wrap="none">
+            <a:spAutoFit/>
+          </a:bodyPr>
+          <a:lstStyle/>
+          <a:p>
+            <a:pPr lvl="1">
+              <a:defRPr sz="1600">
+                <a:solidFill>
+                  <a:srgbClr val="333333"/>
+                </a:solidFill>
+              </a:defRPr>
+            </a:pPr>
+            <a:r>
+              <a:t>• Need hashable type</a:t>
+            </a:r>
+          </a:p>
+        </p:txBody>
+      </p:sp>
+      <p:sp>
+        <p:nvSpPr>
+          <p:cNvPr id="10" name="TextBox 9"/>
+          <p:cNvSpPr txBox="1"/>
+          <p:nvPr/>
+        </p:nvSpPr>
+        <p:spPr>
+          <a:xfrm>
+            <a:off x="457200" y="2377439"/>
+            <a:ext cx="11247120" cy="320040"/>
+          </a:xfrm>
+          <a:prstGeom prst="rect">
+            <a:avLst/>
+          </a:prstGeom>
+          <a:noFill/>
+        </p:spPr>
+        <p:txBody>
+          <a:bodyPr wrap="none">
+            <a:spAutoFit/>
+          </a:bodyPr>
+          <a:lstStyle/>
+          <a:p>
+            <a:pPr lvl="1">
+              <a:defRPr sz="1600">
+                <a:solidFill>
+                  <a:srgbClr val="333333"/>
+                </a:solidFill>
+              </a:defRPr>
+            </a:pPr>
+            <a:r>
+              <a:t>• Return multiple values</a:t>
+            </a:r>
+          </a:p>
+        </p:txBody>
+      </p:sp>
+      <p:sp>
+        <p:nvSpPr>
+          <p:cNvPr id="11" name="TextBox 10"/>
+          <p:cNvSpPr txBox="1"/>
+          <p:nvPr/>
+        </p:nvSpPr>
+        <p:spPr>
+          <a:xfrm>
+            <a:off x="457200" y="2651759"/>
+            <a:ext cx="11247120" cy="320040"/>
+          </a:xfrm>
+          <a:prstGeom prst="rect">
+            <a:avLst/>
+          </a:prstGeom>
+          <a:noFill/>
+        </p:spPr>
+        <p:txBody>
+          <a:bodyPr wrap="none">
+            <a:spAutoFit/>
+          </a:bodyPr>
+          <a:lstStyle/>
+          <a:p>
+            <a:pPr lvl="1">
+              <a:defRPr sz="1600">
+                <a:solidFill>
+                  <a:srgbClr val="333333"/>
+                </a:solidFill>
+              </a:defRPr>
+            </a:pPr>
+            <a:r>
+              <a:t>• Represent fixed structure</a:t>
+            </a:r>
+          </a:p>
+        </p:txBody>
+      </p:sp>
+      <p:sp>
+        <p:nvSpPr>
+          <p:cNvPr id="12" name="Rectangle 11"/>
+          <p:cNvSpPr/>
+          <p:nvPr/>
+        </p:nvSpPr>
+        <p:spPr>
+          <a:xfrm>
+            <a:off x="365760" y="2880359"/>
+            <a:ext cx="11430000" cy="365760"/>
+          </a:xfrm>
+          <a:prstGeom prst="rect">
+            <a:avLst/>
+          </a:prstGeom>
+          <a:solidFill>
+            <a:srgbClr val="0078D7"/>
+          </a:solidFill>
+          <a:ln>
+            <a:noFill/>
+          </a:ln>
+        </p:spPr>
+        <p:style>
+          <a:lnRef idx="1">
+            <a:schemeClr val="accent1"/>
+          </a:lnRef>
+          <a:fillRef idx="3">
+            <a:schemeClr val="accent1"/>
+          </a:fillRef>
+          <a:effectRef idx="2">
+            <a:schemeClr val="accent1"/>
+          </a:effectRef>
+          <a:fontRef idx="minor">
+            <a:schemeClr val="lt1"/>
+          </a:fontRef>
+        </p:style>
+        <p:txBody>
+          <a:bodyPr rtlCol="0" anchor="ctr"/>
+          <a:lstStyle/>
+          <a:p>
+            <a:pPr algn="ctr"/>
+          </a:p>
+        </p:txBody>
+      </p:sp>
+      <p:sp>
+        <p:nvSpPr>
+          <p:cNvPr id="13" name="TextBox 12"/>
+          <p:cNvSpPr txBox="1"/>
+          <p:nvPr/>
+        </p:nvSpPr>
+        <p:spPr>
+          <a:xfrm>
+            <a:off x="548640" y="2926079"/>
+            <a:ext cx="10972800" cy="274320"/>
+          </a:xfrm>
+          <a:prstGeom prst="rect">
+            <a:avLst/>
+          </a:prstGeom>
+          <a:noFill/>
+        </p:spPr>
+        <p:txBody>
+          <a:bodyPr wrap="none">
+            <a:spAutoFit/>
+          </a:bodyPr>
+          <a:lstStyle/>
+          <a:p>
+            <a:pPr>
+              <a:defRPr sz="2000" b="1">
+                <a:solidFill>
+                  <a:srgbClr val="FFFFFF"/>
+                </a:solidFill>
+              </a:defRPr>
+            </a:pPr>
+            <a:r>
+              <a:t>Examples:</a:t>
+            </a:r>
+          </a:p>
+        </p:txBody>
+      </p:sp>
+      <p:sp>
+        <p:nvSpPr>
+          <p:cNvPr id="14" name="Rectangle 13"/>
+          <p:cNvSpPr/>
+          <p:nvPr/>
+        </p:nvSpPr>
+        <p:spPr>
+          <a:xfrm>
+            <a:off x="640080" y="3337559"/>
+            <a:ext cx="10789920" cy="868680"/>
+          </a:xfrm>
+          <a:prstGeom prst="rect">
+            <a:avLst/>
+          </a:prstGeom>
+          <a:solidFill>
+            <a:srgbClr val="282C34"/>
+          </a:solidFill>
+          <a:ln>
+            <a:noFill/>
+          </a:ln>
+        </p:spPr>
+        <p:style>
+          <a:lnRef idx="1">
+            <a:schemeClr val="accent1"/>
+          </a:lnRef>
+          <a:fillRef idx="3">
+            <a:schemeClr val="accent1"/>
+          </a:fillRef>
+          <a:effectRef idx="2">
+            <a:schemeClr val="accent1"/>
+          </a:effectRef>
+          <a:fontRef idx="minor">
+            <a:schemeClr val="lt1"/>
+          </a:fontRef>
+        </p:style>
+        <p:txBody>
+          <a:bodyPr rtlCol="0" anchor="ctr"/>
+          <a:lstStyle/>
+          <a:p>
+            <a:pPr algn="ctr"/>
+          </a:p>
+        </p:txBody>
+      </p:sp>
+      <p:sp>
+        <p:nvSpPr>
+          <p:cNvPr id="15" name="Rectangle 14"/>
+          <p:cNvSpPr/>
+          <p:nvPr/>
+        </p:nvSpPr>
+        <p:spPr>
+          <a:xfrm>
+            <a:off x="640080" y="3337559"/>
+            <a:ext cx="73152" cy="868680"/>
+          </a:xfrm>
+          <a:prstGeom prst="rect">
+            <a:avLst/>
+          </a:prstGeom>
+          <a:solidFill>
+            <a:srgbClr val="61AFEF"/>
+          </a:solidFill>
+          <a:ln>
+            <a:noFill/>
+          </a:ln>
+        </p:spPr>
+        <p:style>
+          <a:lnRef idx="1">
+            <a:schemeClr val="accent1"/>
+          </a:lnRef>
+          <a:fillRef idx="3">
+            <a:schemeClr val="accent1"/>
+          </a:fillRef>
+          <a:effectRef idx="2">
+            <a:schemeClr val="accent1"/>
+          </a:effectRef>
+          <a:fontRef idx="minor">
+            <a:schemeClr val="lt1"/>
+          </a:fontRef>
+        </p:style>
+        <p:txBody>
+          <a:bodyPr rtlCol="0" anchor="ctr"/>
+          <a:lstStyle/>
+          <a:p>
+            <a:pPr algn="ctr"/>
+          </a:p>
+        </p:txBody>
+      </p:sp>
+      <p:sp>
+        <p:nvSpPr>
+          <p:cNvPr id="16" name="TextBox 15"/>
+          <p:cNvSpPr txBox="1"/>
+          <p:nvPr/>
+        </p:nvSpPr>
+        <p:spPr>
+          <a:xfrm>
+            <a:off x="914400" y="3383279"/>
+            <a:ext cx="10241280" cy="777240"/>
+          </a:xfrm>
+          <a:prstGeom prst="rect">
+            <a:avLst/>
+          </a:prstGeom>
+          <a:noFill/>
+        </p:spPr>
+        <p:txBody>
+          <a:bodyPr wrap="none">
+            <a:spAutoFit/>
+          </a:bodyPr>
+          <a:lstStyle/>
+          <a:p>
+            <a:pPr>
+              <a:spcAft>
+                <a:spcPts val="200"/>
+              </a:spcAft>
+              <a:defRPr sz="1400">
+                <a:solidFill>
+                  <a:srgbClr val="ABB2BF"/>
+                </a:solidFill>
+                <a:latin typeface="Consolas"/>
+              </a:defRPr>
+            </a:pPr>
+            <a:r>
+              <a:t>coordinates = (x, y)</a:t>
+            </a:r>
+          </a:p>
+          <a:p>
+            <a:pPr>
+              <a:spcAft>
+                <a:spcPts val="200"/>
+              </a:spcAft>
+              <a:defRPr sz="1400">
+                <a:solidFill>
+                  <a:srgbClr val="ABB2BF"/>
+                </a:solidFill>
+                <a:latin typeface="Consolas"/>
+              </a:defRPr>
+            </a:pPr>
+            <a:r>
+              <a:t>rgb_color = (255, 0, 128)</a:t>
+            </a:r>
+          </a:p>
+          <a:p>
+            <a:pPr>
+              <a:spcAft>
+                <a:spcPts val="200"/>
+              </a:spcAft>
+              <a:defRPr sz="1400">
+                <a:solidFill>
+                  <a:srgbClr val="ABB2BF"/>
+                </a:solidFill>
+                <a:latin typeface="Consolas"/>
+              </a:defRPr>
+            </a:pPr>
+            <a:r>
+              <a:t>date = (2025, 1, 24)</a:t>
+            </a:r>
+          </a:p>
+        </p:txBody>
+      </p:sp>
+      <p:sp>
+        <p:nvSpPr>
+          <p:cNvPr id="17" name="Rectangle 16"/>
+          <p:cNvSpPr/>
+          <p:nvPr/>
+        </p:nvSpPr>
+        <p:spPr>
+          <a:xfrm>
+            <a:off x="365760" y="4343400"/>
+            <a:ext cx="11430000" cy="365760"/>
+          </a:xfrm>
+          <a:prstGeom prst="rect">
+            <a:avLst/>
+          </a:prstGeom>
+          <a:solidFill>
+            <a:srgbClr val="0078D7"/>
+          </a:solidFill>
+          <a:ln>
+            <a:noFill/>
+          </a:ln>
+        </p:spPr>
+        <p:style>
+          <a:lnRef idx="1">
+            <a:schemeClr val="accent1"/>
+          </a:lnRef>
+          <a:fillRef idx="3">
+            <a:schemeClr val="accent1"/>
+          </a:fillRef>
+          <a:effectRef idx="2">
+            <a:schemeClr val="accent1"/>
+          </a:effectRef>
+          <a:fontRef idx="minor">
+            <a:schemeClr val="lt1"/>
+          </a:fontRef>
+        </p:style>
+        <p:txBody>
+          <a:bodyPr rtlCol="0" anchor="ctr"/>
+          <a:lstStyle/>
+          <a:p>
+            <a:pPr algn="ctr"/>
+          </a:p>
+        </p:txBody>
+      </p:sp>
+      <p:sp>
+        <p:nvSpPr>
+          <p:cNvPr id="18" name="TextBox 17"/>
+          <p:cNvSpPr txBox="1"/>
+          <p:nvPr/>
+        </p:nvSpPr>
+        <p:spPr>
+          <a:xfrm>
+            <a:off x="548640" y="4389120"/>
+            <a:ext cx="10972800" cy="274320"/>
+          </a:xfrm>
+          <a:prstGeom prst="rect">
+            <a:avLst/>
+          </a:prstGeom>
+          <a:noFill/>
+        </p:spPr>
+        <p:txBody>
+          <a:bodyPr wrap="none">
+            <a:spAutoFit/>
+          </a:bodyPr>
+          <a:lstStyle/>
+          <a:p>
+            <a:pPr>
+              <a:defRPr sz="2000" b="1">
+                <a:solidFill>
+                  <a:srgbClr val="FFFFFF"/>
+                </a:solidFill>
+              </a:defRPr>
+            </a:pPr>
+            <a:r>
+              <a:t>Use Set When:</a:t>
+            </a:r>
+          </a:p>
+        </p:txBody>
+      </p:sp>
+      <p:sp>
+        <p:nvSpPr>
+          <p:cNvPr id="19" name="TextBox 18"/>
+          <p:cNvSpPr txBox="1"/>
+          <p:nvPr/>
+        </p:nvSpPr>
+        <p:spPr>
+          <a:xfrm>
+            <a:off x="457200" y="4846320"/>
+            <a:ext cx="11247120" cy="320040"/>
+          </a:xfrm>
+          <a:prstGeom prst="rect">
+            <a:avLst/>
+          </a:prstGeom>
+          <a:noFill/>
+        </p:spPr>
+        <p:txBody>
+          <a:bodyPr wrap="none">
+            <a:spAutoFit/>
+          </a:bodyPr>
+          <a:lstStyle/>
+          <a:p>
+            <a:pPr lvl="1">
+              <a:defRPr sz="1600">
+                <a:solidFill>
+                  <a:srgbClr val="333333"/>
+                </a:solidFill>
+              </a:defRPr>
+            </a:pPr>
+            <a:r>
+              <a:t>• Need unique elements</a:t>
+            </a:r>
+          </a:p>
+        </p:txBody>
+      </p:sp>
+      <p:sp>
+        <p:nvSpPr>
+          <p:cNvPr id="20" name="TextBox 19"/>
+          <p:cNvSpPr txBox="1"/>
+          <p:nvPr/>
+        </p:nvSpPr>
+        <p:spPr>
+          <a:xfrm>
+            <a:off x="457200" y="5120640"/>
+            <a:ext cx="11247120" cy="320040"/>
+          </a:xfrm>
+          <a:prstGeom prst="rect">
+            <a:avLst/>
+          </a:prstGeom>
+          <a:noFill/>
+        </p:spPr>
+        <p:txBody>
+          <a:bodyPr wrap="none">
+            <a:spAutoFit/>
+          </a:bodyPr>
+          <a:lstStyle/>
+          <a:p>
+            <a:pPr lvl="1">
+              <a:defRPr sz="1600">
+                <a:solidFill>
+                  <a:srgbClr val="333333"/>
+                </a:solidFill>
+              </a:defRPr>
+            </a:pPr>
+            <a:r>
+              <a:t>• Fast membership tests</a:t>
+            </a:r>
+          </a:p>
+        </p:txBody>
+      </p:sp>
+      <p:sp>
+        <p:nvSpPr>
+          <p:cNvPr id="21" name="TextBox 20"/>
+          <p:cNvSpPr txBox="1"/>
+          <p:nvPr/>
+        </p:nvSpPr>
+        <p:spPr>
+          <a:xfrm>
+            <a:off x="457200" y="5394959"/>
+            <a:ext cx="11247120" cy="320040"/>
+          </a:xfrm>
+          <a:prstGeom prst="rect">
+            <a:avLst/>
+          </a:prstGeom>
+          <a:noFill/>
+        </p:spPr>
+        <p:txBody>
+          <a:bodyPr wrap="none">
+            <a:spAutoFit/>
+          </a:bodyPr>
+          <a:lstStyle/>
+          <a:p>
+            <a:pPr lvl="1">
+              <a:defRPr sz="1600">
+                <a:solidFill>
+                  <a:srgbClr val="333333"/>
+                </a:solidFill>
+              </a:defRPr>
+            </a:pPr>
+            <a:r>
+              <a:t>• Set operations needed</a:t>
+            </a:r>
+          </a:p>
+        </p:txBody>
+      </p:sp>
+      <p:sp>
+        <p:nvSpPr>
+          <p:cNvPr id="22" name="TextBox 21"/>
+          <p:cNvSpPr txBox="1"/>
+          <p:nvPr/>
+        </p:nvSpPr>
+        <p:spPr>
+          <a:xfrm>
+            <a:off x="457200" y="5669279"/>
+            <a:ext cx="11247120" cy="320040"/>
+          </a:xfrm>
+          <a:prstGeom prst="rect">
+            <a:avLst/>
+          </a:prstGeom>
+          <a:noFill/>
+        </p:spPr>
+        <p:txBody>
+          <a:bodyPr wrap="none">
+            <a:spAutoFit/>
+          </a:bodyPr>
+          <a:lstStyle/>
+          <a:p>
+            <a:pPr lvl="1">
+              <a:defRPr sz="1600">
+                <a:solidFill>
+                  <a:srgbClr val="333333"/>
+                </a:solidFill>
+              </a:defRPr>
+            </a:pPr>
+            <a:r>
+              <a:t>• Order doesn't matter</a:t>
+            </a:r>
+          </a:p>
+        </p:txBody>
+      </p:sp>
+      <p:sp>
+        <p:nvSpPr>
+          <p:cNvPr id="23" name="Rectangle 22"/>
+          <p:cNvSpPr/>
+          <p:nvPr/>
+        </p:nvSpPr>
+        <p:spPr>
+          <a:xfrm>
+            <a:off x="365760" y="5897879"/>
+            <a:ext cx="11430000" cy="365760"/>
+          </a:xfrm>
+          <a:prstGeom prst="rect">
+            <a:avLst/>
+          </a:prstGeom>
+          <a:solidFill>
+            <a:srgbClr val="0078D7"/>
+          </a:solidFill>
+          <a:ln>
+            <a:noFill/>
+          </a:ln>
+        </p:spPr>
+        <p:style>
+          <a:lnRef idx="1">
+            <a:schemeClr val="accent1"/>
+          </a:lnRef>
+          <a:fillRef idx="3">
+            <a:schemeClr val="accent1"/>
+          </a:fillRef>
+          <a:effectRef idx="2">
+            <a:schemeClr val="accent1"/>
+          </a:effectRef>
+          <a:fontRef idx="minor">
+            <a:schemeClr val="lt1"/>
+          </a:fontRef>
+        </p:style>
+        <p:txBody>
+          <a:bodyPr rtlCol="0" anchor="ctr"/>
+          <a:lstStyle/>
+          <a:p>
+            <a:pPr algn="ctr"/>
+          </a:p>
+        </p:txBody>
+      </p:sp>
+      <p:sp>
+        <p:nvSpPr>
+          <p:cNvPr id="24" name="TextBox 23"/>
+          <p:cNvSpPr txBox="1"/>
+          <p:nvPr/>
+        </p:nvSpPr>
+        <p:spPr>
+          <a:xfrm>
+            <a:off x="548640" y="5943599"/>
+            <a:ext cx="10972800" cy="274320"/>
+          </a:xfrm>
+          <a:prstGeom prst="rect">
+            <a:avLst/>
+          </a:prstGeom>
+          <a:noFill/>
+        </p:spPr>
+        <p:txBody>
+          <a:bodyPr wrap="none">
+            <a:spAutoFit/>
+          </a:bodyPr>
+          <a:lstStyle/>
+          <a:p>
+            <a:pPr>
+              <a:defRPr sz="2000" b="1">
+                <a:solidFill>
+                  <a:srgbClr val="FFFFFF"/>
+                </a:solidFill>
+              </a:defRPr>
+            </a:pPr>
+            <a:r>
+              <a:t>Examples:</a:t>
+            </a:r>
+          </a:p>
+        </p:txBody>
+      </p:sp>
+    </p:spTree>
+  </p:cSld>
+  <p:clrMapOvr>
+    <a:masterClrMapping/>
+  </p:clrMapOvr>
+</p:sld>
+</file>
+
+<file path=ppt/slides/slide8.xml><?xml version="1.0" encoding="utf-8"?>
+<p:sld xmlns:a="http://schemas.openxmlformats.org/drawingml/2006/main" xmlns:p="http://schemas.openxmlformats.org/presentationml/2006/main" xmlns:r="http://schemas.openxmlformats.org/officeDocument/2006/relationships">
+  <p:cSld>
+    <p:spTree>
+      <p:nvGrpSpPr>
+        <p:cNvPr id="1" name=""/>
+        <p:cNvGrpSpPr/>
+        <p:nvPr/>
+      </p:nvGrpSpPr>
+      <p:grpSpPr/>
+      <p:sp>
+        <p:nvSpPr>
+          <p:cNvPr id="2" name="Rectangle 1"/>
+          <p:cNvSpPr/>
+          <p:nvPr/>
+        </p:nvSpPr>
+        <p:spPr>
+          <a:xfrm>
+            <a:off x="0" y="0"/>
+            <a:ext cx="12191695" cy="6858000"/>
+          </a:xfrm>
+          <a:prstGeom prst="rect">
+            <a:avLst/>
+          </a:prstGeom>
+          <a:solidFill>
+            <a:srgbClr val="FAFAFA"/>
+          </a:solidFill>
+          <a:ln>
+            <a:noFill/>
+          </a:ln>
+        </p:spPr>
+        <p:style>
+          <a:lnRef idx="1">
+            <a:schemeClr val="accent1"/>
+          </a:lnRef>
+          <a:fillRef idx="3">
+            <a:schemeClr val="accent1"/>
+          </a:fillRef>
+          <a:effectRef idx="2">
+            <a:schemeClr val="accent1"/>
+          </a:effectRef>
+          <a:fontRef idx="minor">
+            <a:schemeClr val="lt1"/>
+          </a:fontRef>
+        </p:style>
+        <p:txBody>
+          <a:bodyPr rtlCol="0" anchor="ctr"/>
+          <a:lstStyle/>
+          <a:p>
+            <a:pPr algn="ctr"/>
+          </a:p>
+        </p:txBody>
+      </p:sp>
+      <p:sp>
+        <p:nvSpPr>
+          <p:cNvPr id="3" name="Rectangle 2"/>
+          <p:cNvSpPr/>
+          <p:nvPr/>
+        </p:nvSpPr>
+        <p:spPr>
+          <a:xfrm>
+            <a:off x="0" y="0"/>
+            <a:ext cx="12191695" cy="1097280"/>
+          </a:xfrm>
+          <a:prstGeom prst="rect">
+            <a:avLst/>
+          </a:prstGeom>
+          <a:solidFill>
+            <a:srgbClr val="0066CC"/>
+          </a:solidFill>
+          <a:ln>
+            <a:noFill/>
+          </a:ln>
+        </p:spPr>
+        <p:style>
+          <a:lnRef idx="1">
+            <a:schemeClr val="accent1"/>
+          </a:lnRef>
+          <a:fillRef idx="3">
+            <a:schemeClr val="accent1"/>
+          </a:fillRef>
+          <a:effectRef idx="2">
+            <a:schemeClr val="accent1"/>
+          </a:effectRef>
+          <a:fontRef idx="minor">
+            <a:schemeClr val="lt1"/>
+          </a:fontRef>
+        </p:style>
+        <p:txBody>
+          <a:bodyPr rtlCol="0" anchor="ctr"/>
+          <a:lstStyle/>
+          <a:p>
+            <a:pPr algn="ctr"/>
+          </a:p>
+        </p:txBody>
+      </p:sp>
+      <p:sp>
+        <p:nvSpPr>
+          <p:cNvPr id="4" name="Rectangle 3"/>
+          <p:cNvSpPr/>
+          <p:nvPr/>
+        </p:nvSpPr>
+        <p:spPr>
+          <a:xfrm>
+            <a:off x="0" y="1097280"/>
+            <a:ext cx="137160" cy="5760720"/>
+          </a:xfrm>
+          <a:prstGeom prst="rect">
+            <a:avLst/>
+          </a:prstGeom>
+          <a:solidFill>
+            <a:srgbClr val="FFBB33"/>
+          </a:solidFill>
+          <a:ln>
+            <a:noFill/>
+          </a:ln>
+        </p:spPr>
+        <p:style>
+          <a:lnRef idx="1">
+            <a:schemeClr val="accent1"/>
+          </a:lnRef>
+          <a:fillRef idx="3">
+            <a:schemeClr val="accent1"/>
+          </a:fillRef>
+          <a:effectRef idx="2">
+            <a:schemeClr val="accent1"/>
+          </a:effectRef>
+          <a:fontRef idx="minor">
+            <a:schemeClr val="lt1"/>
+          </a:fontRef>
+        </p:style>
+        <p:txBody>
+          <a:bodyPr rtlCol="0" anchor="ctr"/>
+          <a:lstStyle/>
+          <a:p>
+            <a:pPr algn="ctr"/>
           </a:p>
         </p:txBody>
       </p:sp>
@@ -5379,8 +8342,8 @@
         </p:nvSpPr>
         <p:spPr>
           <a:xfrm>
-            <a:off x="640080" y="1188720"/>
-            <a:ext cx="10789920" cy="5303520"/>
+            <a:off x="365760" y="274320"/>
+            <a:ext cx="10972800" cy="640080"/>
           </a:xfrm>
           <a:prstGeom prst="rect">
             <a:avLst/>
@@ -5388,34 +8351,219 @@
           <a:noFill/>
         </p:spPr>
         <p:txBody>
-          <a:bodyPr wrap="square">
+          <a:bodyPr wrap="none">
             <a:spAutoFit/>
           </a:bodyPr>
           <a:lstStyle/>
           <a:p>
             <a:pPr>
-              <a:spcAft>
-                <a:spcPts val="600"/>
-              </a:spcAft>
-              <a:defRPr b="1" sz="2000">
-                <a:solidFill>
-                  <a:srgbClr val="333333"/>
+              <a:defRPr sz="3600" b="1">
+                <a:solidFill>
+                  <a:srgbClr val="FFFFFF"/>
                 </a:solidFill>
               </a:defRPr>
             </a:pPr>
             <a:r>
+              <a:t>Practical Examples</a:t>
+            </a:r>
+          </a:p>
+        </p:txBody>
+      </p:sp>
+      <p:sp>
+        <p:nvSpPr>
+          <p:cNvPr id="6" name="Rectangle 5"/>
+          <p:cNvSpPr/>
+          <p:nvPr/>
+        </p:nvSpPr>
+        <p:spPr>
+          <a:xfrm>
+            <a:off x="365760" y="1325880"/>
+            <a:ext cx="11430000" cy="365760"/>
+          </a:xfrm>
+          <a:prstGeom prst="rect">
+            <a:avLst/>
+          </a:prstGeom>
+          <a:solidFill>
+            <a:srgbClr val="0078D7"/>
+          </a:solidFill>
+          <a:ln>
+            <a:noFill/>
+          </a:ln>
+        </p:spPr>
+        <p:style>
+          <a:lnRef idx="1">
+            <a:schemeClr val="accent1"/>
+          </a:lnRef>
+          <a:fillRef idx="3">
+            <a:schemeClr val="accent1"/>
+          </a:fillRef>
+          <a:effectRef idx="2">
+            <a:schemeClr val="accent1"/>
+          </a:effectRef>
+          <a:fontRef idx="minor">
+            <a:schemeClr val="lt1"/>
+          </a:fontRef>
+        </p:style>
+        <p:txBody>
+          <a:bodyPr rtlCol="0" anchor="ctr"/>
+          <a:lstStyle/>
+          <a:p>
+            <a:pPr algn="ctr"/>
+          </a:p>
+        </p:txBody>
+      </p:sp>
+      <p:sp>
+        <p:nvSpPr>
+          <p:cNvPr id="7" name="TextBox 6"/>
+          <p:cNvSpPr txBox="1"/>
+          <p:nvPr/>
+        </p:nvSpPr>
+        <p:spPr>
+          <a:xfrm>
+            <a:off x="548640" y="1371600"/>
+            <a:ext cx="10972800" cy="274320"/>
+          </a:xfrm>
+          <a:prstGeom prst="rect">
+            <a:avLst/>
+          </a:prstGeom>
+          <a:noFill/>
+        </p:spPr>
+        <p:txBody>
+          <a:bodyPr wrap="none">
+            <a:spAutoFit/>
+          </a:bodyPr>
+          <a:lstStyle/>
+          <a:p>
+            <a:pPr>
+              <a:defRPr sz="2000" b="1">
+                <a:solidFill>
+                  <a:srgbClr val="FFFFFF"/>
+                </a:solidFill>
+              </a:defRPr>
+            </a:pPr>
+            <a:r>
               <a:t>Remove Duplicates:</a:t>
             </a:r>
           </a:p>
+        </p:txBody>
+      </p:sp>
+      <p:sp>
+        <p:nvSpPr>
+          <p:cNvPr id="8" name="Rectangle 7"/>
+          <p:cNvSpPr/>
+          <p:nvPr/>
+        </p:nvSpPr>
+        <p:spPr>
+          <a:xfrm>
+            <a:off x="640080" y="1783080"/>
+            <a:ext cx="10789920" cy="640080"/>
+          </a:xfrm>
+          <a:prstGeom prst="rect">
+            <a:avLst/>
+          </a:prstGeom>
+          <a:solidFill>
+            <a:srgbClr val="282C34"/>
+          </a:solidFill>
+          <a:ln>
+            <a:noFill/>
+          </a:ln>
+        </p:spPr>
+        <p:style>
+          <a:lnRef idx="1">
+            <a:schemeClr val="accent1"/>
+          </a:lnRef>
+          <a:fillRef idx="3">
+            <a:schemeClr val="accent1"/>
+          </a:fillRef>
+          <a:effectRef idx="2">
+            <a:schemeClr val="accent1"/>
+          </a:effectRef>
+          <a:fontRef idx="minor">
+            <a:schemeClr val="lt1"/>
+          </a:fontRef>
+        </p:style>
+        <p:txBody>
+          <a:bodyPr rtlCol="0" anchor="ctr"/>
+          <a:lstStyle/>
+          <a:p>
+            <a:pPr algn="ctr"/>
+          </a:p>
+        </p:txBody>
+      </p:sp>
+      <p:sp>
+        <p:nvSpPr>
+          <p:cNvPr id="9" name="Rectangle 8"/>
+          <p:cNvSpPr/>
+          <p:nvPr/>
+        </p:nvSpPr>
+        <p:spPr>
+          <a:xfrm>
+            <a:off x="640080" y="1783080"/>
+            <a:ext cx="73152" cy="640080"/>
+          </a:xfrm>
+          <a:prstGeom prst="rect">
+            <a:avLst/>
+          </a:prstGeom>
+          <a:solidFill>
+            <a:srgbClr val="61AFEF"/>
+          </a:solidFill>
+          <a:ln>
+            <a:noFill/>
+          </a:ln>
+        </p:spPr>
+        <p:style>
+          <a:lnRef idx="1">
+            <a:schemeClr val="accent1"/>
+          </a:lnRef>
+          <a:fillRef idx="3">
+            <a:schemeClr val="accent1"/>
+          </a:fillRef>
+          <a:effectRef idx="2">
+            <a:schemeClr val="accent1"/>
+          </a:effectRef>
+          <a:fontRef idx="minor">
+            <a:schemeClr val="lt1"/>
+          </a:fontRef>
+        </p:style>
+        <p:txBody>
+          <a:bodyPr rtlCol="0" anchor="ctr"/>
+          <a:lstStyle/>
+          <a:p>
+            <a:pPr algn="ctr"/>
+          </a:p>
+        </p:txBody>
+      </p:sp>
+      <p:sp>
+        <p:nvSpPr>
+          <p:cNvPr id="10" name="TextBox 9"/>
+          <p:cNvSpPr txBox="1"/>
+          <p:nvPr/>
+        </p:nvSpPr>
+        <p:spPr>
+          <a:xfrm>
+            <a:off x="914400" y="1828800"/>
+            <a:ext cx="10241280" cy="548640"/>
+          </a:xfrm>
+          <a:prstGeom prst="rect">
+            <a:avLst/>
+          </a:prstGeom>
+          <a:noFill/>
+        </p:spPr>
+        <p:txBody>
+          <a:bodyPr wrap="none">
+            <a:spAutoFit/>
+          </a:bodyPr>
+          <a:lstStyle/>
           <a:p>
             <a:pPr>
               <a:spcAft>
-                <a:spcPts val="600"/>
+                <a:spcPts val="200"/>
               </a:spcAft>
-              <a:defRPr sz="1600">
-                <a:solidFill>
-                  <a:srgbClr val="333333"/>
-                </a:solidFill>
+              <a:defRPr sz="1400">
+                <a:solidFill>
+                  <a:srgbClr val="ABB2BF"/>
+                </a:solidFill>
+                <a:latin typeface="Consolas"/>
               </a:defRPr>
             </a:pPr>
             <a:r>
@@ -5425,196 +8573,782 @@
           <a:p>
             <a:pPr>
               <a:spcAft>
-                <a:spcPts val="600"/>
+                <a:spcPts val="200"/>
               </a:spcAft>
-              <a:defRPr sz="1600">
-                <a:solidFill>
-                  <a:srgbClr val="333333"/>
-                </a:solidFill>
+              <a:defRPr sz="1400">
+                <a:solidFill>
+                  <a:srgbClr val="ABB2BF"/>
+                </a:solidFill>
+                <a:latin typeface="Consolas"/>
               </a:defRPr>
             </a:pPr>
             <a:r>
               <a:t>unique = list(set(numbers))</a:t>
             </a:r>
           </a:p>
+        </p:txBody>
+      </p:sp>
+      <p:sp>
+        <p:nvSpPr>
+          <p:cNvPr id="11" name="Rectangle 10"/>
+          <p:cNvSpPr/>
+          <p:nvPr/>
+        </p:nvSpPr>
+        <p:spPr>
+          <a:xfrm>
+            <a:off x="365760" y="2560320"/>
+            <a:ext cx="11430000" cy="365760"/>
+          </a:xfrm>
+          <a:prstGeom prst="rect">
+            <a:avLst/>
+          </a:prstGeom>
+          <a:solidFill>
+            <a:srgbClr val="0078D7"/>
+          </a:solidFill>
+          <a:ln>
+            <a:noFill/>
+          </a:ln>
+        </p:spPr>
+        <p:style>
+          <a:lnRef idx="1">
+            <a:schemeClr val="accent1"/>
+          </a:lnRef>
+          <a:fillRef idx="3">
+            <a:schemeClr val="accent1"/>
+          </a:fillRef>
+          <a:effectRef idx="2">
+            <a:schemeClr val="accent1"/>
+          </a:effectRef>
+          <a:fontRef idx="minor">
+            <a:schemeClr val="lt1"/>
+          </a:fontRef>
+        </p:style>
+        <p:txBody>
+          <a:bodyPr rtlCol="0" anchor="ctr"/>
+          <a:lstStyle/>
+          <a:p>
+            <a:pPr algn="ctr"/>
+          </a:p>
+        </p:txBody>
+      </p:sp>
+      <p:sp>
+        <p:nvSpPr>
+          <p:cNvPr id="12" name="TextBox 11"/>
+          <p:cNvSpPr txBox="1"/>
+          <p:nvPr/>
+        </p:nvSpPr>
+        <p:spPr>
+          <a:xfrm>
+            <a:off x="548640" y="2606040"/>
+            <a:ext cx="10972800" cy="274320"/>
+          </a:xfrm>
+          <a:prstGeom prst="rect">
+            <a:avLst/>
+          </a:prstGeom>
+          <a:noFill/>
+        </p:spPr>
+        <p:txBody>
+          <a:bodyPr wrap="none">
+            <a:spAutoFit/>
+          </a:bodyPr>
+          <a:lstStyle/>
+          <a:p>
+            <a:pPr>
+              <a:defRPr sz="2000" b="1">
+                <a:solidFill>
+                  <a:srgbClr val="FFFFFF"/>
+                </a:solidFill>
+              </a:defRPr>
+            </a:pPr>
+            <a:r>
+              <a:t>Find Common Elements:</a:t>
+            </a:r>
+          </a:p>
+        </p:txBody>
+      </p:sp>
+      <p:sp>
+        <p:nvSpPr>
+          <p:cNvPr id="13" name="Rectangle 12"/>
+          <p:cNvSpPr/>
+          <p:nvPr/>
+        </p:nvSpPr>
+        <p:spPr>
+          <a:xfrm>
+            <a:off x="640080" y="3017520"/>
+            <a:ext cx="10789920" cy="868680"/>
+          </a:xfrm>
+          <a:prstGeom prst="rect">
+            <a:avLst/>
+          </a:prstGeom>
+          <a:solidFill>
+            <a:srgbClr val="282C34"/>
+          </a:solidFill>
+          <a:ln>
+            <a:noFill/>
+          </a:ln>
+        </p:spPr>
+        <p:style>
+          <a:lnRef idx="1">
+            <a:schemeClr val="accent1"/>
+          </a:lnRef>
+          <a:fillRef idx="3">
+            <a:schemeClr val="accent1"/>
+          </a:fillRef>
+          <a:effectRef idx="2">
+            <a:schemeClr val="accent1"/>
+          </a:effectRef>
+          <a:fontRef idx="minor">
+            <a:schemeClr val="lt1"/>
+          </a:fontRef>
+        </p:style>
+        <p:txBody>
+          <a:bodyPr rtlCol="0" anchor="ctr"/>
+          <a:lstStyle/>
+          <a:p>
+            <a:pPr algn="ctr"/>
+          </a:p>
+        </p:txBody>
+      </p:sp>
+      <p:sp>
+        <p:nvSpPr>
+          <p:cNvPr id="14" name="Rectangle 13"/>
+          <p:cNvSpPr/>
+          <p:nvPr/>
+        </p:nvSpPr>
+        <p:spPr>
+          <a:xfrm>
+            <a:off x="640080" y="3017520"/>
+            <a:ext cx="73152" cy="868680"/>
+          </a:xfrm>
+          <a:prstGeom prst="rect">
+            <a:avLst/>
+          </a:prstGeom>
+          <a:solidFill>
+            <a:srgbClr val="61AFEF"/>
+          </a:solidFill>
+          <a:ln>
+            <a:noFill/>
+          </a:ln>
+        </p:spPr>
+        <p:style>
+          <a:lnRef idx="1">
+            <a:schemeClr val="accent1"/>
+          </a:lnRef>
+          <a:fillRef idx="3">
+            <a:schemeClr val="accent1"/>
+          </a:fillRef>
+          <a:effectRef idx="2">
+            <a:schemeClr val="accent1"/>
+          </a:effectRef>
+          <a:fontRef idx="minor">
+            <a:schemeClr val="lt1"/>
+          </a:fontRef>
+        </p:style>
+        <p:txBody>
+          <a:bodyPr rtlCol="0" anchor="ctr"/>
+          <a:lstStyle/>
+          <a:p>
+            <a:pPr algn="ctr"/>
+          </a:p>
+        </p:txBody>
+      </p:sp>
+      <p:sp>
+        <p:nvSpPr>
+          <p:cNvPr id="15" name="TextBox 14"/>
+          <p:cNvSpPr txBox="1"/>
+          <p:nvPr/>
+        </p:nvSpPr>
+        <p:spPr>
+          <a:xfrm>
+            <a:off x="914400" y="3063240"/>
+            <a:ext cx="10241280" cy="777240"/>
+          </a:xfrm>
+          <a:prstGeom prst="rect">
+            <a:avLst/>
+          </a:prstGeom>
+          <a:noFill/>
+        </p:spPr>
+        <p:txBody>
+          <a:bodyPr wrap="none">
+            <a:spAutoFit/>
+          </a:bodyPr>
+          <a:lstStyle/>
           <a:p>
             <a:pPr>
               <a:spcAft>
-                <a:spcPts val="600"/>
+                <a:spcPts val="200"/>
               </a:spcAft>
-              <a:defRPr b="1" sz="2000">
-                <a:solidFill>
-                  <a:srgbClr val="333333"/>
-                </a:solidFill>
+              <a:defRPr sz="1400">
+                <a:solidFill>
+                  <a:srgbClr val="ABB2BF"/>
+                </a:solidFill>
+                <a:latin typeface="Consolas"/>
               </a:defRPr>
             </a:pPr>
             <a:r>
-              <a:t>Find Common Elements:</a:t>
+              <a:t>list1 = [1, 2, 3, 4]</a:t>
             </a:r>
           </a:p>
           <a:p>
             <a:pPr>
               <a:spcAft>
-                <a:spcPts val="600"/>
+                <a:spcPts val="200"/>
               </a:spcAft>
-              <a:defRPr sz="1600">
-                <a:solidFill>
-                  <a:srgbClr val="333333"/>
-                </a:solidFill>
+              <a:defRPr sz="1400">
+                <a:solidFill>
+                  <a:srgbClr val="ABB2BF"/>
+                </a:solidFill>
+                <a:latin typeface="Consolas"/>
               </a:defRPr>
             </a:pPr>
             <a:r>
-              <a:t>list1 = [1, 2, 3, 4]</a:t>
+              <a:t>list2 = [3, 4, 5, 6]</a:t>
             </a:r>
           </a:p>
           <a:p>
             <a:pPr>
               <a:spcAft>
-                <a:spcPts val="600"/>
+                <a:spcPts val="200"/>
               </a:spcAft>
-              <a:defRPr sz="1600">
-                <a:solidFill>
-                  <a:srgbClr val="333333"/>
-                </a:solidFill>
+              <a:defRPr sz="1400">
+                <a:solidFill>
+                  <a:srgbClr val="ABB2BF"/>
+                </a:solidFill>
+                <a:latin typeface="Consolas"/>
               </a:defRPr>
             </a:pPr>
             <a:r>
-              <a:t>list2 = [3, 4, 5, 6]</a:t>
-            </a:r>
-          </a:p>
+              <a:t>common = set(list1) &amp; set(list2)</a:t>
+            </a:r>
+          </a:p>
+        </p:txBody>
+      </p:sp>
+      <p:sp>
+        <p:nvSpPr>
+          <p:cNvPr id="16" name="Rectangle 15"/>
+          <p:cNvSpPr/>
+          <p:nvPr/>
+        </p:nvSpPr>
+        <p:spPr>
+          <a:xfrm>
+            <a:off x="365760" y="4023360"/>
+            <a:ext cx="11430000" cy="365760"/>
+          </a:xfrm>
+          <a:prstGeom prst="rect">
+            <a:avLst/>
+          </a:prstGeom>
+          <a:solidFill>
+            <a:srgbClr val="0078D7"/>
+          </a:solidFill>
+          <a:ln>
+            <a:noFill/>
+          </a:ln>
+        </p:spPr>
+        <p:style>
+          <a:lnRef idx="1">
+            <a:schemeClr val="accent1"/>
+          </a:lnRef>
+          <a:fillRef idx="3">
+            <a:schemeClr val="accent1"/>
+          </a:fillRef>
+          <a:effectRef idx="2">
+            <a:schemeClr val="accent1"/>
+          </a:effectRef>
+          <a:fontRef idx="minor">
+            <a:schemeClr val="lt1"/>
+          </a:fontRef>
+        </p:style>
+        <p:txBody>
+          <a:bodyPr rtlCol="0" anchor="ctr"/>
+          <a:lstStyle/>
+          <a:p>
+            <a:pPr algn="ctr"/>
+          </a:p>
+        </p:txBody>
+      </p:sp>
+      <p:sp>
+        <p:nvSpPr>
+          <p:cNvPr id="17" name="TextBox 16"/>
+          <p:cNvSpPr txBox="1"/>
+          <p:nvPr/>
+        </p:nvSpPr>
+        <p:spPr>
+          <a:xfrm>
+            <a:off x="548640" y="4069080"/>
+            <a:ext cx="10972800" cy="274320"/>
+          </a:xfrm>
+          <a:prstGeom prst="rect">
+            <a:avLst/>
+          </a:prstGeom>
+          <a:noFill/>
+        </p:spPr>
+        <p:txBody>
+          <a:bodyPr wrap="none">
+            <a:spAutoFit/>
+          </a:bodyPr>
+          <a:lstStyle/>
+          <a:p>
+            <a:pPr>
+              <a:defRPr sz="2000" b="1">
+                <a:solidFill>
+                  <a:srgbClr val="FFFFFF"/>
+                </a:solidFill>
+              </a:defRPr>
+            </a:pPr>
+            <a:r>
+              <a:t>Multiple Return Values:</a:t>
+            </a:r>
+          </a:p>
+        </p:txBody>
+      </p:sp>
+      <p:sp>
+        <p:nvSpPr>
+          <p:cNvPr id="18" name="Rectangle 17"/>
+          <p:cNvSpPr/>
+          <p:nvPr/>
+        </p:nvSpPr>
+        <p:spPr>
+          <a:xfrm>
+            <a:off x="640080" y="4480560"/>
+            <a:ext cx="10789920" cy="868680"/>
+          </a:xfrm>
+          <a:prstGeom prst="rect">
+            <a:avLst/>
+          </a:prstGeom>
+          <a:solidFill>
+            <a:srgbClr val="282C34"/>
+          </a:solidFill>
+          <a:ln>
+            <a:noFill/>
+          </a:ln>
+        </p:spPr>
+        <p:style>
+          <a:lnRef idx="1">
+            <a:schemeClr val="accent1"/>
+          </a:lnRef>
+          <a:fillRef idx="3">
+            <a:schemeClr val="accent1"/>
+          </a:fillRef>
+          <a:effectRef idx="2">
+            <a:schemeClr val="accent1"/>
+          </a:effectRef>
+          <a:fontRef idx="minor">
+            <a:schemeClr val="lt1"/>
+          </a:fontRef>
+        </p:style>
+        <p:txBody>
+          <a:bodyPr rtlCol="0" anchor="ctr"/>
+          <a:lstStyle/>
+          <a:p>
+            <a:pPr algn="ctr"/>
+          </a:p>
+        </p:txBody>
+      </p:sp>
+      <p:sp>
+        <p:nvSpPr>
+          <p:cNvPr id="19" name="Rectangle 18"/>
+          <p:cNvSpPr/>
+          <p:nvPr/>
+        </p:nvSpPr>
+        <p:spPr>
+          <a:xfrm>
+            <a:off x="640080" y="4480560"/>
+            <a:ext cx="73152" cy="868680"/>
+          </a:xfrm>
+          <a:prstGeom prst="rect">
+            <a:avLst/>
+          </a:prstGeom>
+          <a:solidFill>
+            <a:srgbClr val="61AFEF"/>
+          </a:solidFill>
+          <a:ln>
+            <a:noFill/>
+          </a:ln>
+        </p:spPr>
+        <p:style>
+          <a:lnRef idx="1">
+            <a:schemeClr val="accent1"/>
+          </a:lnRef>
+          <a:fillRef idx="3">
+            <a:schemeClr val="accent1"/>
+          </a:fillRef>
+          <a:effectRef idx="2">
+            <a:schemeClr val="accent1"/>
+          </a:effectRef>
+          <a:fontRef idx="minor">
+            <a:schemeClr val="lt1"/>
+          </a:fontRef>
+        </p:style>
+        <p:txBody>
+          <a:bodyPr rtlCol="0" anchor="ctr"/>
+          <a:lstStyle/>
+          <a:p>
+            <a:pPr algn="ctr"/>
+          </a:p>
+        </p:txBody>
+      </p:sp>
+      <p:sp>
+        <p:nvSpPr>
+          <p:cNvPr id="20" name="TextBox 19"/>
+          <p:cNvSpPr txBox="1"/>
+          <p:nvPr/>
+        </p:nvSpPr>
+        <p:spPr>
+          <a:xfrm>
+            <a:off x="914400" y="4526280"/>
+            <a:ext cx="10241280" cy="777240"/>
+          </a:xfrm>
+          <a:prstGeom prst="rect">
+            <a:avLst/>
+          </a:prstGeom>
+          <a:noFill/>
+        </p:spPr>
+        <p:txBody>
+          <a:bodyPr wrap="none">
+            <a:spAutoFit/>
+          </a:bodyPr>
+          <a:lstStyle/>
           <a:p>
             <a:pPr>
               <a:spcAft>
-                <a:spcPts val="600"/>
+                <a:spcPts val="200"/>
               </a:spcAft>
-              <a:defRPr sz="1600">
-                <a:solidFill>
-                  <a:srgbClr val="333333"/>
-                </a:solidFill>
+              <a:defRPr sz="1400">
+                <a:solidFill>
+                  <a:srgbClr val="ABB2BF"/>
+                </a:solidFill>
+                <a:latin typeface="Consolas"/>
               </a:defRPr>
             </a:pPr>
             <a:r>
-              <a:t>common = set(list1) &amp; set(list2)</a:t>
+              <a:t>def get_stats(data):</a:t>
             </a:r>
           </a:p>
           <a:p>
             <a:pPr>
               <a:spcAft>
-                <a:spcPts val="600"/>
+                <a:spcPts val="200"/>
               </a:spcAft>
-              <a:defRPr b="1" sz="2000">
-                <a:solidFill>
-                  <a:srgbClr val="333333"/>
-                </a:solidFill>
+              <a:defRPr sz="1400">
+                <a:solidFill>
+                  <a:srgbClr val="ABB2BF"/>
+                </a:solidFill>
+                <a:latin typeface="Consolas"/>
               </a:defRPr>
             </a:pPr>
             <a:r>
-              <a:t>Multiple Return Values:</a:t>
+              <a:t>    return min(data), max(data), len(data)</a:t>
             </a:r>
           </a:p>
           <a:p>
             <a:pPr>
               <a:spcAft>
-                <a:spcPts val="600"/>
+                <a:spcPts val="200"/>
               </a:spcAft>
-              <a:defRPr b="1" sz="2000">
-                <a:solidFill>
-                  <a:srgbClr val="333333"/>
-                </a:solidFill>
+              <a:defRPr sz="1400">
+                <a:solidFill>
+                  <a:srgbClr val="ABB2BF"/>
+                </a:solidFill>
+                <a:latin typeface="Consolas"/>
               </a:defRPr>
             </a:pPr>
             <a:r>
-              <a:t>def get_stats(data):</a:t>
-            </a:r>
-          </a:p>
+              <a:t>min_val, max_val, count = get_stats([1,2,3])</a:t>
+            </a:r>
+          </a:p>
+        </p:txBody>
+      </p:sp>
+      <p:sp>
+        <p:nvSpPr>
+          <p:cNvPr id="21" name="Rectangle 20"/>
+          <p:cNvSpPr/>
+          <p:nvPr/>
+        </p:nvSpPr>
+        <p:spPr>
+          <a:xfrm>
+            <a:off x="365760" y="5486400"/>
+            <a:ext cx="11430000" cy="365760"/>
+          </a:xfrm>
+          <a:prstGeom prst="rect">
+            <a:avLst/>
+          </a:prstGeom>
+          <a:solidFill>
+            <a:srgbClr val="0078D7"/>
+          </a:solidFill>
+          <a:ln>
+            <a:noFill/>
+          </a:ln>
+        </p:spPr>
+        <p:style>
+          <a:lnRef idx="1">
+            <a:schemeClr val="accent1"/>
+          </a:lnRef>
+          <a:fillRef idx="3">
+            <a:schemeClr val="accent1"/>
+          </a:fillRef>
+          <a:effectRef idx="2">
+            <a:schemeClr val="accent1"/>
+          </a:effectRef>
+          <a:fontRef idx="minor">
+            <a:schemeClr val="lt1"/>
+          </a:fontRef>
+        </p:style>
+        <p:txBody>
+          <a:bodyPr rtlCol="0" anchor="ctr"/>
+          <a:lstStyle/>
+          <a:p>
+            <a:pPr algn="ctr"/>
+          </a:p>
+        </p:txBody>
+      </p:sp>
+      <p:sp>
+        <p:nvSpPr>
+          <p:cNvPr id="22" name="TextBox 21"/>
+          <p:cNvSpPr txBox="1"/>
+          <p:nvPr/>
+        </p:nvSpPr>
+        <p:spPr>
+          <a:xfrm>
+            <a:off x="548640" y="5532120"/>
+            <a:ext cx="10972800" cy="274320"/>
+          </a:xfrm>
+          <a:prstGeom prst="rect">
+            <a:avLst/>
+          </a:prstGeom>
+          <a:noFill/>
+        </p:spPr>
+        <p:txBody>
+          <a:bodyPr wrap="none">
+            <a:spAutoFit/>
+          </a:bodyPr>
+          <a:lstStyle/>
           <a:p>
             <a:pPr>
-              <a:spcAft>
-                <a:spcPts val="600"/>
-              </a:spcAft>
-              <a:defRPr sz="1600">
-                <a:solidFill>
-                  <a:srgbClr val="333333"/>
+              <a:defRPr sz="2000" b="1">
+                <a:solidFill>
+                  <a:srgbClr val="FFFFFF"/>
                 </a:solidFill>
               </a:defRPr>
             </a:pPr>
             <a:r>
-              <a:t>    return min(data), max(data), len(data)</a:t>
-            </a:r>
-          </a:p>
-          <a:p>
-            <a:pPr>
-              <a:spcAft>
-                <a:spcPts val="600"/>
-              </a:spcAft>
-              <a:defRPr sz="1600">
-                <a:solidFill>
-                  <a:srgbClr val="333333"/>
+              <a:t>Coordinate Pairs:</a:t>
+            </a:r>
+          </a:p>
+        </p:txBody>
+      </p:sp>
+    </p:spTree>
+  </p:cSld>
+  <p:clrMapOvr>
+    <a:masterClrMapping/>
+  </p:clrMapOvr>
+</p:sld>
+</file>
+
+<file path=ppt/slides/slide9.xml><?xml version="1.0" encoding="utf-8"?>
+<p:sld xmlns:a="http://schemas.openxmlformats.org/drawingml/2006/main" xmlns:p="http://schemas.openxmlformats.org/presentationml/2006/main" xmlns:r="http://schemas.openxmlformats.org/officeDocument/2006/relationships">
+  <p:cSld>
+    <p:spTree>
+      <p:nvGrpSpPr>
+        <p:cNvPr id="1" name=""/>
+        <p:cNvGrpSpPr/>
+        <p:nvPr/>
+      </p:nvGrpSpPr>
+      <p:grpSpPr/>
+      <p:sp>
+        <p:nvSpPr>
+          <p:cNvPr id="2" name="Rectangle 1"/>
+          <p:cNvSpPr/>
+          <p:nvPr/>
+        </p:nvSpPr>
+        <p:spPr>
+          <a:xfrm>
+            <a:off x="0" y="0"/>
+            <a:ext cx="12191695" cy="6858000"/>
+          </a:xfrm>
+          <a:prstGeom prst="rect">
+            <a:avLst/>
+          </a:prstGeom>
+          <a:solidFill>
+            <a:srgbClr val="0066CC"/>
+          </a:solidFill>
+          <a:ln>
+            <a:noFill/>
+          </a:ln>
+        </p:spPr>
+        <p:style>
+          <a:lnRef idx="1">
+            <a:schemeClr val="accent1"/>
+          </a:lnRef>
+          <a:fillRef idx="3">
+            <a:schemeClr val="accent1"/>
+          </a:fillRef>
+          <a:effectRef idx="2">
+            <a:schemeClr val="accent1"/>
+          </a:effectRef>
+          <a:fontRef idx="minor">
+            <a:schemeClr val="lt1"/>
+          </a:fontRef>
+        </p:style>
+        <p:txBody>
+          <a:bodyPr rtlCol="0" anchor="ctr"/>
+          <a:lstStyle/>
+          <a:p>
+            <a:pPr algn="ctr"/>
+          </a:p>
+        </p:txBody>
+      </p:sp>
+      <p:sp>
+        <p:nvSpPr>
+          <p:cNvPr id="3" name="Rectangle 2"/>
+          <p:cNvSpPr/>
+          <p:nvPr/>
+        </p:nvSpPr>
+        <p:spPr>
+          <a:xfrm>
+            <a:off x="0" y="2743200"/>
+            <a:ext cx="3657600" cy="137160"/>
+          </a:xfrm>
+          <a:prstGeom prst="rect">
+            <a:avLst/>
+          </a:prstGeom>
+          <a:solidFill>
+            <a:srgbClr val="FFBB33"/>
+          </a:solidFill>
+          <a:ln>
+            <a:noFill/>
+          </a:ln>
+        </p:spPr>
+        <p:style>
+          <a:lnRef idx="1">
+            <a:schemeClr val="accent1"/>
+          </a:lnRef>
+          <a:fillRef idx="3">
+            <a:schemeClr val="accent1"/>
+          </a:fillRef>
+          <a:effectRef idx="2">
+            <a:schemeClr val="accent1"/>
+          </a:effectRef>
+          <a:fontRef idx="minor">
+            <a:schemeClr val="lt1"/>
+          </a:fontRef>
+        </p:style>
+        <p:txBody>
+          <a:bodyPr rtlCol="0" anchor="ctr"/>
+          <a:lstStyle/>
+          <a:p>
+            <a:pPr algn="ctr"/>
+          </a:p>
+        </p:txBody>
+      </p:sp>
+      <p:sp>
+        <p:nvSpPr>
+          <p:cNvPr id="4" name="Rectangle 3"/>
+          <p:cNvSpPr/>
+          <p:nvPr/>
+        </p:nvSpPr>
+        <p:spPr>
+          <a:xfrm>
+            <a:off x="8531352" y="4114800"/>
+            <a:ext cx="3657600" cy="137160"/>
+          </a:xfrm>
+          <a:prstGeom prst="rect">
+            <a:avLst/>
+          </a:prstGeom>
+          <a:solidFill>
+            <a:srgbClr val="FFBB33"/>
+          </a:solidFill>
+          <a:ln>
+            <a:noFill/>
+          </a:ln>
+        </p:spPr>
+        <p:style>
+          <a:lnRef idx="1">
+            <a:schemeClr val="accent1"/>
+          </a:lnRef>
+          <a:fillRef idx="3">
+            <a:schemeClr val="accent1"/>
+          </a:fillRef>
+          <a:effectRef idx="2">
+            <a:schemeClr val="accent1"/>
+          </a:effectRef>
+          <a:fontRef idx="minor">
+            <a:schemeClr val="lt1"/>
+          </a:fontRef>
+        </p:style>
+        <p:txBody>
+          <a:bodyPr rtlCol="0" anchor="ctr"/>
+          <a:lstStyle/>
+          <a:p>
+            <a:pPr algn="ctr"/>
+          </a:p>
+        </p:txBody>
+      </p:sp>
+      <p:sp>
+        <p:nvSpPr>
+          <p:cNvPr id="5" name="TextBox 4"/>
+          <p:cNvSpPr txBox="1"/>
+          <p:nvPr/>
+        </p:nvSpPr>
+        <p:spPr>
+          <a:xfrm>
+            <a:off x="914400" y="2560320"/>
+            <a:ext cx="10360152" cy="1371600"/>
+          </a:xfrm>
+          <a:prstGeom prst="rect">
+            <a:avLst/>
+          </a:prstGeom>
+          <a:noFill/>
+        </p:spPr>
+        <p:txBody>
+          <a:bodyPr wrap="none">
+            <a:spAutoFit/>
+          </a:bodyPr>
+          <a:lstStyle/>
+          <a:p>
+            <a:pPr algn="ctr">
+              <a:defRPr sz="4800" b="1">
+                <a:solidFill>
+                  <a:srgbClr val="FFFFFF"/>
                 </a:solidFill>
               </a:defRPr>
             </a:pPr>
             <a:r>
-              <a:t>min_val, max_val, count = get_stats([1,2,3])</a:t>
-            </a:r>
-          </a:p>
-          <a:p>
-            <a:pPr>
-              <a:spcAft>
-                <a:spcPts val="600"/>
-              </a:spcAft>
-              <a:defRPr b="1" sz="2000">
-                <a:solidFill>
-                  <a:srgbClr val="333333"/>
+              <a:t>Time to Practice!</a:t>
+            </a:r>
+          </a:p>
+        </p:txBody>
+      </p:sp>
+      <p:sp>
+        <p:nvSpPr>
+          <p:cNvPr id="6" name="TextBox 5"/>
+          <p:cNvSpPr txBox="1"/>
+          <p:nvPr/>
+        </p:nvSpPr>
+        <p:spPr>
+          <a:xfrm>
+            <a:off x="1828800" y="4389120"/>
+            <a:ext cx="8531352" cy="914400"/>
+          </a:xfrm>
+          <a:prstGeom prst="rect">
+            <a:avLst/>
+          </a:prstGeom>
+          <a:noFill/>
+        </p:spPr>
+        <p:txBody>
+          <a:bodyPr wrap="none">
+            <a:spAutoFit/>
+          </a:bodyPr>
+          <a:lstStyle/>
+          <a:p>
+            <a:pPr algn="ctr">
+              <a:defRPr sz="2400">
+                <a:solidFill>
+                  <a:srgbClr val="FFFFFF"/>
                 </a:solidFill>
               </a:defRPr>
             </a:pPr>
             <a:r>
-              <a:t>Coordinate Pairs:</a:t>
-            </a:r>
-          </a:p>
-          <a:p>
-            <a:pPr>
-              <a:spcAft>
-                <a:spcPts val="600"/>
-              </a:spcAft>
-              <a:defRPr sz="1600">
-                <a:solidFill>
-                  <a:srgbClr val="333333"/>
-                </a:solidFill>
-              </a:defRPr>
-            </a:pPr>
-            <a:r>
-              <a:t>positions = {(0, 0), (1, 1), (2, 2)}</a:t>
-            </a:r>
-          </a:p>
-          <a:p>
-            <a:pPr>
-              <a:spcAft>
-                <a:spcPts val="600"/>
-              </a:spcAft>
-              <a:defRPr b="1" sz="2000">
-                <a:solidFill>
-                  <a:srgbClr val="333333"/>
-                </a:solidFill>
-              </a:defRPr>
-            </a:pPr>
-            <a:r>
-              <a:t>if (x, y) in positions:</a:t>
-            </a:r>
-          </a:p>
-          <a:p>
-            <a:pPr>
-              <a:spcAft>
-                <a:spcPts val="600"/>
-              </a:spcAft>
-              <a:defRPr sz="1600">
-                <a:solidFill>
-                  <a:srgbClr val="333333"/>
-                </a:solidFill>
-              </a:defRPr>
-            </a:pPr>
-            <a:r>
-              <a:t>    print("Occupied")</a:t>
+              <a:t>Chapter 8 Exercises</a:t>
             </a:r>
           </a:p>
         </p:txBody>

--- a/python_course/chapter_08_tuples_and_sets/tuples_and_sets.pptx
+++ b/python_course/chapter_08_tuples_and_sets/tuples_and_sets.pptx
@@ -14,6 +14,8 @@
     <p:sldId id="262" r:id="rId13"/>
     <p:sldId id="263" r:id="rId14"/>
     <p:sldId id="264" r:id="rId15"/>
+    <p:sldId id="265" r:id="rId16"/>
+    <p:sldId id="266" r:id="rId17"/>
   </p:sldIdLst>
   <p:sldSz cx="12191695" cy="6858000" type="screen4x3"/>
   <p:notesSz cx="6858000" cy="9144000"/>
@@ -3346,6 +3348,1329 @@
 </p:sld>
 </file>
 
+<file path=ppt/slides/slide10.xml><?xml version="1.0" encoding="utf-8"?>
+<p:sld xmlns:a="http://schemas.openxmlformats.org/drawingml/2006/main" xmlns:p="http://schemas.openxmlformats.org/presentationml/2006/main" xmlns:r="http://schemas.openxmlformats.org/officeDocument/2006/relationships">
+  <p:cSld>
+    <p:spTree>
+      <p:nvGrpSpPr>
+        <p:cNvPr id="1" name=""/>
+        <p:cNvGrpSpPr/>
+        <p:nvPr/>
+      </p:nvGrpSpPr>
+      <p:grpSpPr/>
+      <p:sp>
+        <p:nvSpPr>
+          <p:cNvPr id="2" name="Rectangle 1"/>
+          <p:cNvSpPr/>
+          <p:nvPr/>
+        </p:nvSpPr>
+        <p:spPr>
+          <a:xfrm>
+            <a:off x="0" y="0"/>
+            <a:ext cx="12191695" cy="6858000"/>
+          </a:xfrm>
+          <a:prstGeom prst="rect">
+            <a:avLst/>
+          </a:prstGeom>
+          <a:solidFill>
+            <a:srgbClr val="FAFAFA"/>
+          </a:solidFill>
+          <a:ln>
+            <a:noFill/>
+          </a:ln>
+        </p:spPr>
+        <p:style>
+          <a:lnRef idx="1">
+            <a:schemeClr val="accent1"/>
+          </a:lnRef>
+          <a:fillRef idx="3">
+            <a:schemeClr val="accent1"/>
+          </a:fillRef>
+          <a:effectRef idx="2">
+            <a:schemeClr val="accent1"/>
+          </a:effectRef>
+          <a:fontRef idx="minor">
+            <a:schemeClr val="lt1"/>
+          </a:fontRef>
+        </p:style>
+        <p:txBody>
+          <a:bodyPr rtlCol="0" anchor="ctr"/>
+          <a:lstStyle/>
+          <a:p>
+            <a:pPr algn="ctr"/>
+          </a:p>
+        </p:txBody>
+      </p:sp>
+      <p:sp>
+        <p:nvSpPr>
+          <p:cNvPr id="3" name="Rectangle 2"/>
+          <p:cNvSpPr/>
+          <p:nvPr/>
+        </p:nvSpPr>
+        <p:spPr>
+          <a:xfrm>
+            <a:off x="0" y="0"/>
+            <a:ext cx="12191695" cy="1097280"/>
+          </a:xfrm>
+          <a:prstGeom prst="rect">
+            <a:avLst/>
+          </a:prstGeom>
+          <a:solidFill>
+            <a:srgbClr val="0066CC"/>
+          </a:solidFill>
+          <a:ln>
+            <a:noFill/>
+          </a:ln>
+        </p:spPr>
+        <p:style>
+          <a:lnRef idx="1">
+            <a:schemeClr val="accent1"/>
+          </a:lnRef>
+          <a:fillRef idx="3">
+            <a:schemeClr val="accent1"/>
+          </a:fillRef>
+          <a:effectRef idx="2">
+            <a:schemeClr val="accent1"/>
+          </a:effectRef>
+          <a:fontRef idx="minor">
+            <a:schemeClr val="lt1"/>
+          </a:fontRef>
+        </p:style>
+        <p:txBody>
+          <a:bodyPr rtlCol="0" anchor="ctr"/>
+          <a:lstStyle/>
+          <a:p>
+            <a:pPr algn="ctr"/>
+          </a:p>
+        </p:txBody>
+      </p:sp>
+      <p:sp>
+        <p:nvSpPr>
+          <p:cNvPr id="4" name="Rectangle 3"/>
+          <p:cNvSpPr/>
+          <p:nvPr/>
+        </p:nvSpPr>
+        <p:spPr>
+          <a:xfrm>
+            <a:off x="0" y="1097280"/>
+            <a:ext cx="137160" cy="5760720"/>
+          </a:xfrm>
+          <a:prstGeom prst="rect">
+            <a:avLst/>
+          </a:prstGeom>
+          <a:solidFill>
+            <a:srgbClr val="FFBB33"/>
+          </a:solidFill>
+          <a:ln>
+            <a:noFill/>
+          </a:ln>
+        </p:spPr>
+        <p:style>
+          <a:lnRef idx="1">
+            <a:schemeClr val="accent1"/>
+          </a:lnRef>
+          <a:fillRef idx="3">
+            <a:schemeClr val="accent1"/>
+          </a:fillRef>
+          <a:effectRef idx="2">
+            <a:schemeClr val="accent1"/>
+          </a:effectRef>
+          <a:fontRef idx="minor">
+            <a:schemeClr val="lt1"/>
+          </a:fontRef>
+        </p:style>
+        <p:txBody>
+          <a:bodyPr rtlCol="0" anchor="ctr"/>
+          <a:lstStyle/>
+          <a:p>
+            <a:pPr algn="ctr"/>
+          </a:p>
+        </p:txBody>
+      </p:sp>
+      <p:sp>
+        <p:nvSpPr>
+          <p:cNvPr id="5" name="TextBox 4"/>
+          <p:cNvSpPr txBox="1"/>
+          <p:nvPr/>
+        </p:nvSpPr>
+        <p:spPr>
+          <a:xfrm>
+            <a:off x="365760" y="274320"/>
+            <a:ext cx="10972800" cy="640080"/>
+          </a:xfrm>
+          <a:prstGeom prst="rect">
+            <a:avLst/>
+          </a:prstGeom>
+          <a:noFill/>
+        </p:spPr>
+        <p:txBody>
+          <a:bodyPr wrap="none">
+            <a:spAutoFit/>
+          </a:bodyPr>
+          <a:lstStyle/>
+          <a:p>
+            <a:pPr>
+              <a:defRPr sz="3600" b="1">
+                <a:solidFill>
+                  <a:srgbClr val="FFFFFF"/>
+                </a:solidFill>
+              </a:defRPr>
+            </a:pPr>
+            <a:r>
+              <a:t>Practical Examples</a:t>
+            </a:r>
+          </a:p>
+        </p:txBody>
+      </p:sp>
+      <p:sp>
+        <p:nvSpPr>
+          <p:cNvPr id="6" name="Rectangle 5"/>
+          <p:cNvSpPr/>
+          <p:nvPr/>
+        </p:nvSpPr>
+        <p:spPr>
+          <a:xfrm>
+            <a:off x="365760" y="1325880"/>
+            <a:ext cx="11430000" cy="365760"/>
+          </a:xfrm>
+          <a:prstGeom prst="rect">
+            <a:avLst/>
+          </a:prstGeom>
+          <a:solidFill>
+            <a:srgbClr val="0078D7"/>
+          </a:solidFill>
+          <a:ln>
+            <a:noFill/>
+          </a:ln>
+        </p:spPr>
+        <p:style>
+          <a:lnRef idx="1">
+            <a:schemeClr val="accent1"/>
+          </a:lnRef>
+          <a:fillRef idx="3">
+            <a:schemeClr val="accent1"/>
+          </a:fillRef>
+          <a:effectRef idx="2">
+            <a:schemeClr val="accent1"/>
+          </a:effectRef>
+          <a:fontRef idx="minor">
+            <a:schemeClr val="lt1"/>
+          </a:fontRef>
+        </p:style>
+        <p:txBody>
+          <a:bodyPr rtlCol="0" anchor="ctr"/>
+          <a:lstStyle/>
+          <a:p>
+            <a:pPr algn="ctr"/>
+          </a:p>
+        </p:txBody>
+      </p:sp>
+      <p:sp>
+        <p:nvSpPr>
+          <p:cNvPr id="7" name="TextBox 6"/>
+          <p:cNvSpPr txBox="1"/>
+          <p:nvPr/>
+        </p:nvSpPr>
+        <p:spPr>
+          <a:xfrm>
+            <a:off x="548640" y="1371600"/>
+            <a:ext cx="10972800" cy="274320"/>
+          </a:xfrm>
+          <a:prstGeom prst="rect">
+            <a:avLst/>
+          </a:prstGeom>
+          <a:noFill/>
+        </p:spPr>
+        <p:txBody>
+          <a:bodyPr wrap="none">
+            <a:spAutoFit/>
+          </a:bodyPr>
+          <a:lstStyle/>
+          <a:p>
+            <a:pPr>
+              <a:defRPr sz="2000" b="1">
+                <a:solidFill>
+                  <a:srgbClr val="FFFFFF"/>
+                </a:solidFill>
+              </a:defRPr>
+            </a:pPr>
+            <a:r>
+              <a:t>Remove Duplicates:</a:t>
+            </a:r>
+          </a:p>
+        </p:txBody>
+      </p:sp>
+      <p:sp>
+        <p:nvSpPr>
+          <p:cNvPr id="8" name="Rectangle 7"/>
+          <p:cNvSpPr/>
+          <p:nvPr/>
+        </p:nvSpPr>
+        <p:spPr>
+          <a:xfrm>
+            <a:off x="640080" y="1783080"/>
+            <a:ext cx="10789920" cy="640080"/>
+          </a:xfrm>
+          <a:prstGeom prst="rect">
+            <a:avLst/>
+          </a:prstGeom>
+          <a:solidFill>
+            <a:srgbClr val="282C34"/>
+          </a:solidFill>
+          <a:ln>
+            <a:noFill/>
+          </a:ln>
+        </p:spPr>
+        <p:style>
+          <a:lnRef idx="1">
+            <a:schemeClr val="accent1"/>
+          </a:lnRef>
+          <a:fillRef idx="3">
+            <a:schemeClr val="accent1"/>
+          </a:fillRef>
+          <a:effectRef idx="2">
+            <a:schemeClr val="accent1"/>
+          </a:effectRef>
+          <a:fontRef idx="minor">
+            <a:schemeClr val="lt1"/>
+          </a:fontRef>
+        </p:style>
+        <p:txBody>
+          <a:bodyPr rtlCol="0" anchor="ctr"/>
+          <a:lstStyle/>
+          <a:p>
+            <a:pPr algn="ctr"/>
+          </a:p>
+        </p:txBody>
+      </p:sp>
+      <p:sp>
+        <p:nvSpPr>
+          <p:cNvPr id="9" name="Rectangle 8"/>
+          <p:cNvSpPr/>
+          <p:nvPr/>
+        </p:nvSpPr>
+        <p:spPr>
+          <a:xfrm>
+            <a:off x="640080" y="1783080"/>
+            <a:ext cx="73152" cy="640080"/>
+          </a:xfrm>
+          <a:prstGeom prst="rect">
+            <a:avLst/>
+          </a:prstGeom>
+          <a:solidFill>
+            <a:srgbClr val="61AFEF"/>
+          </a:solidFill>
+          <a:ln>
+            <a:noFill/>
+          </a:ln>
+        </p:spPr>
+        <p:style>
+          <a:lnRef idx="1">
+            <a:schemeClr val="accent1"/>
+          </a:lnRef>
+          <a:fillRef idx="3">
+            <a:schemeClr val="accent1"/>
+          </a:fillRef>
+          <a:effectRef idx="2">
+            <a:schemeClr val="accent1"/>
+          </a:effectRef>
+          <a:fontRef idx="minor">
+            <a:schemeClr val="lt1"/>
+          </a:fontRef>
+        </p:style>
+        <p:txBody>
+          <a:bodyPr rtlCol="0" anchor="ctr"/>
+          <a:lstStyle/>
+          <a:p>
+            <a:pPr algn="ctr"/>
+          </a:p>
+        </p:txBody>
+      </p:sp>
+      <p:sp>
+        <p:nvSpPr>
+          <p:cNvPr id="10" name="TextBox 9"/>
+          <p:cNvSpPr txBox="1"/>
+          <p:nvPr/>
+        </p:nvSpPr>
+        <p:spPr>
+          <a:xfrm>
+            <a:off x="914400" y="1828800"/>
+            <a:ext cx="10241280" cy="548640"/>
+          </a:xfrm>
+          <a:prstGeom prst="rect">
+            <a:avLst/>
+          </a:prstGeom>
+          <a:noFill/>
+        </p:spPr>
+        <p:txBody>
+          <a:bodyPr wrap="none">
+            <a:spAutoFit/>
+          </a:bodyPr>
+          <a:lstStyle/>
+          <a:p>
+            <a:pPr>
+              <a:spcAft>
+                <a:spcPts val="200"/>
+              </a:spcAft>
+              <a:defRPr sz="1400">
+                <a:solidFill>
+                  <a:srgbClr val="ABB2BF"/>
+                </a:solidFill>
+                <a:latin typeface="Consolas"/>
+              </a:defRPr>
+            </a:pPr>
+            <a:r>
+              <a:t>numbers = [1, 2, 2, 3, 3, 3]</a:t>
+            </a:r>
+          </a:p>
+          <a:p>
+            <a:pPr>
+              <a:spcAft>
+                <a:spcPts val="200"/>
+              </a:spcAft>
+              <a:defRPr sz="1400">
+                <a:solidFill>
+                  <a:srgbClr val="ABB2BF"/>
+                </a:solidFill>
+                <a:latin typeface="Consolas"/>
+              </a:defRPr>
+            </a:pPr>
+            <a:r>
+              <a:t>unique = list(set(numbers))</a:t>
+            </a:r>
+          </a:p>
+        </p:txBody>
+      </p:sp>
+      <p:sp>
+        <p:nvSpPr>
+          <p:cNvPr id="11" name="Rectangle 10"/>
+          <p:cNvSpPr/>
+          <p:nvPr/>
+        </p:nvSpPr>
+        <p:spPr>
+          <a:xfrm>
+            <a:off x="365760" y="2560320"/>
+            <a:ext cx="11430000" cy="365760"/>
+          </a:xfrm>
+          <a:prstGeom prst="rect">
+            <a:avLst/>
+          </a:prstGeom>
+          <a:solidFill>
+            <a:srgbClr val="0078D7"/>
+          </a:solidFill>
+          <a:ln>
+            <a:noFill/>
+          </a:ln>
+        </p:spPr>
+        <p:style>
+          <a:lnRef idx="1">
+            <a:schemeClr val="accent1"/>
+          </a:lnRef>
+          <a:fillRef idx="3">
+            <a:schemeClr val="accent1"/>
+          </a:fillRef>
+          <a:effectRef idx="2">
+            <a:schemeClr val="accent1"/>
+          </a:effectRef>
+          <a:fontRef idx="minor">
+            <a:schemeClr val="lt1"/>
+          </a:fontRef>
+        </p:style>
+        <p:txBody>
+          <a:bodyPr rtlCol="0" anchor="ctr"/>
+          <a:lstStyle/>
+          <a:p>
+            <a:pPr algn="ctr"/>
+          </a:p>
+        </p:txBody>
+      </p:sp>
+      <p:sp>
+        <p:nvSpPr>
+          <p:cNvPr id="12" name="TextBox 11"/>
+          <p:cNvSpPr txBox="1"/>
+          <p:nvPr/>
+        </p:nvSpPr>
+        <p:spPr>
+          <a:xfrm>
+            <a:off x="548640" y="2606040"/>
+            <a:ext cx="10972800" cy="274320"/>
+          </a:xfrm>
+          <a:prstGeom prst="rect">
+            <a:avLst/>
+          </a:prstGeom>
+          <a:noFill/>
+        </p:spPr>
+        <p:txBody>
+          <a:bodyPr wrap="none">
+            <a:spAutoFit/>
+          </a:bodyPr>
+          <a:lstStyle/>
+          <a:p>
+            <a:pPr>
+              <a:defRPr sz="2000" b="1">
+                <a:solidFill>
+                  <a:srgbClr val="FFFFFF"/>
+                </a:solidFill>
+              </a:defRPr>
+            </a:pPr>
+            <a:r>
+              <a:t>Find Common Elements:</a:t>
+            </a:r>
+          </a:p>
+        </p:txBody>
+      </p:sp>
+      <p:sp>
+        <p:nvSpPr>
+          <p:cNvPr id="13" name="Rectangle 12"/>
+          <p:cNvSpPr/>
+          <p:nvPr/>
+        </p:nvSpPr>
+        <p:spPr>
+          <a:xfrm>
+            <a:off x="640080" y="3017520"/>
+            <a:ext cx="10789920" cy="868680"/>
+          </a:xfrm>
+          <a:prstGeom prst="rect">
+            <a:avLst/>
+          </a:prstGeom>
+          <a:solidFill>
+            <a:srgbClr val="282C34"/>
+          </a:solidFill>
+          <a:ln>
+            <a:noFill/>
+          </a:ln>
+        </p:spPr>
+        <p:style>
+          <a:lnRef idx="1">
+            <a:schemeClr val="accent1"/>
+          </a:lnRef>
+          <a:fillRef idx="3">
+            <a:schemeClr val="accent1"/>
+          </a:fillRef>
+          <a:effectRef idx="2">
+            <a:schemeClr val="accent1"/>
+          </a:effectRef>
+          <a:fontRef idx="minor">
+            <a:schemeClr val="lt1"/>
+          </a:fontRef>
+        </p:style>
+        <p:txBody>
+          <a:bodyPr rtlCol="0" anchor="ctr"/>
+          <a:lstStyle/>
+          <a:p>
+            <a:pPr algn="ctr"/>
+          </a:p>
+        </p:txBody>
+      </p:sp>
+      <p:sp>
+        <p:nvSpPr>
+          <p:cNvPr id="14" name="Rectangle 13"/>
+          <p:cNvSpPr/>
+          <p:nvPr/>
+        </p:nvSpPr>
+        <p:spPr>
+          <a:xfrm>
+            <a:off x="640080" y="3017520"/>
+            <a:ext cx="73152" cy="868680"/>
+          </a:xfrm>
+          <a:prstGeom prst="rect">
+            <a:avLst/>
+          </a:prstGeom>
+          <a:solidFill>
+            <a:srgbClr val="61AFEF"/>
+          </a:solidFill>
+          <a:ln>
+            <a:noFill/>
+          </a:ln>
+        </p:spPr>
+        <p:style>
+          <a:lnRef idx="1">
+            <a:schemeClr val="accent1"/>
+          </a:lnRef>
+          <a:fillRef idx="3">
+            <a:schemeClr val="accent1"/>
+          </a:fillRef>
+          <a:effectRef idx="2">
+            <a:schemeClr val="accent1"/>
+          </a:effectRef>
+          <a:fontRef idx="minor">
+            <a:schemeClr val="lt1"/>
+          </a:fontRef>
+        </p:style>
+        <p:txBody>
+          <a:bodyPr rtlCol="0" anchor="ctr"/>
+          <a:lstStyle/>
+          <a:p>
+            <a:pPr algn="ctr"/>
+          </a:p>
+        </p:txBody>
+      </p:sp>
+      <p:sp>
+        <p:nvSpPr>
+          <p:cNvPr id="15" name="TextBox 14"/>
+          <p:cNvSpPr txBox="1"/>
+          <p:nvPr/>
+        </p:nvSpPr>
+        <p:spPr>
+          <a:xfrm>
+            <a:off x="914400" y="3063240"/>
+            <a:ext cx="10241280" cy="777240"/>
+          </a:xfrm>
+          <a:prstGeom prst="rect">
+            <a:avLst/>
+          </a:prstGeom>
+          <a:noFill/>
+        </p:spPr>
+        <p:txBody>
+          <a:bodyPr wrap="none">
+            <a:spAutoFit/>
+          </a:bodyPr>
+          <a:lstStyle/>
+          <a:p>
+            <a:pPr>
+              <a:spcAft>
+                <a:spcPts val="200"/>
+              </a:spcAft>
+              <a:defRPr sz="1400">
+                <a:solidFill>
+                  <a:srgbClr val="ABB2BF"/>
+                </a:solidFill>
+                <a:latin typeface="Consolas"/>
+              </a:defRPr>
+            </a:pPr>
+            <a:r>
+              <a:t>list1 = [1, 2, 3, 4]</a:t>
+            </a:r>
+          </a:p>
+          <a:p>
+            <a:pPr>
+              <a:spcAft>
+                <a:spcPts val="200"/>
+              </a:spcAft>
+              <a:defRPr sz="1400">
+                <a:solidFill>
+                  <a:srgbClr val="ABB2BF"/>
+                </a:solidFill>
+                <a:latin typeface="Consolas"/>
+              </a:defRPr>
+            </a:pPr>
+            <a:r>
+              <a:t>list2 = [3, 4, 5, 6]</a:t>
+            </a:r>
+          </a:p>
+          <a:p>
+            <a:pPr>
+              <a:spcAft>
+                <a:spcPts val="200"/>
+              </a:spcAft>
+              <a:defRPr sz="1400">
+                <a:solidFill>
+                  <a:srgbClr val="ABB2BF"/>
+                </a:solidFill>
+                <a:latin typeface="Consolas"/>
+              </a:defRPr>
+            </a:pPr>
+            <a:r>
+              <a:t>common = set(list1) &amp; set(list2)</a:t>
+            </a:r>
+          </a:p>
+        </p:txBody>
+      </p:sp>
+      <p:sp>
+        <p:nvSpPr>
+          <p:cNvPr id="16" name="Rectangle 15"/>
+          <p:cNvSpPr/>
+          <p:nvPr/>
+        </p:nvSpPr>
+        <p:spPr>
+          <a:xfrm>
+            <a:off x="365760" y="4023360"/>
+            <a:ext cx="11430000" cy="365760"/>
+          </a:xfrm>
+          <a:prstGeom prst="rect">
+            <a:avLst/>
+          </a:prstGeom>
+          <a:solidFill>
+            <a:srgbClr val="0078D7"/>
+          </a:solidFill>
+          <a:ln>
+            <a:noFill/>
+          </a:ln>
+        </p:spPr>
+        <p:style>
+          <a:lnRef idx="1">
+            <a:schemeClr val="accent1"/>
+          </a:lnRef>
+          <a:fillRef idx="3">
+            <a:schemeClr val="accent1"/>
+          </a:fillRef>
+          <a:effectRef idx="2">
+            <a:schemeClr val="accent1"/>
+          </a:effectRef>
+          <a:fontRef idx="minor">
+            <a:schemeClr val="lt1"/>
+          </a:fontRef>
+        </p:style>
+        <p:txBody>
+          <a:bodyPr rtlCol="0" anchor="ctr"/>
+          <a:lstStyle/>
+          <a:p>
+            <a:pPr algn="ctr"/>
+          </a:p>
+        </p:txBody>
+      </p:sp>
+      <p:sp>
+        <p:nvSpPr>
+          <p:cNvPr id="17" name="TextBox 16"/>
+          <p:cNvSpPr txBox="1"/>
+          <p:nvPr/>
+        </p:nvSpPr>
+        <p:spPr>
+          <a:xfrm>
+            <a:off x="548640" y="4069080"/>
+            <a:ext cx="10972800" cy="274320"/>
+          </a:xfrm>
+          <a:prstGeom prst="rect">
+            <a:avLst/>
+          </a:prstGeom>
+          <a:noFill/>
+        </p:spPr>
+        <p:txBody>
+          <a:bodyPr wrap="none">
+            <a:spAutoFit/>
+          </a:bodyPr>
+          <a:lstStyle/>
+          <a:p>
+            <a:pPr>
+              <a:defRPr sz="2000" b="1">
+                <a:solidFill>
+                  <a:srgbClr val="FFFFFF"/>
+                </a:solidFill>
+              </a:defRPr>
+            </a:pPr>
+            <a:r>
+              <a:t>Multiple Return Values:</a:t>
+            </a:r>
+          </a:p>
+        </p:txBody>
+      </p:sp>
+      <p:sp>
+        <p:nvSpPr>
+          <p:cNvPr id="18" name="Rectangle 17"/>
+          <p:cNvSpPr/>
+          <p:nvPr/>
+        </p:nvSpPr>
+        <p:spPr>
+          <a:xfrm>
+            <a:off x="640080" y="4480560"/>
+            <a:ext cx="10789920" cy="868680"/>
+          </a:xfrm>
+          <a:prstGeom prst="rect">
+            <a:avLst/>
+          </a:prstGeom>
+          <a:solidFill>
+            <a:srgbClr val="282C34"/>
+          </a:solidFill>
+          <a:ln>
+            <a:noFill/>
+          </a:ln>
+        </p:spPr>
+        <p:style>
+          <a:lnRef idx="1">
+            <a:schemeClr val="accent1"/>
+          </a:lnRef>
+          <a:fillRef idx="3">
+            <a:schemeClr val="accent1"/>
+          </a:fillRef>
+          <a:effectRef idx="2">
+            <a:schemeClr val="accent1"/>
+          </a:effectRef>
+          <a:fontRef idx="minor">
+            <a:schemeClr val="lt1"/>
+          </a:fontRef>
+        </p:style>
+        <p:txBody>
+          <a:bodyPr rtlCol="0" anchor="ctr"/>
+          <a:lstStyle/>
+          <a:p>
+            <a:pPr algn="ctr"/>
+          </a:p>
+        </p:txBody>
+      </p:sp>
+      <p:sp>
+        <p:nvSpPr>
+          <p:cNvPr id="19" name="Rectangle 18"/>
+          <p:cNvSpPr/>
+          <p:nvPr/>
+        </p:nvSpPr>
+        <p:spPr>
+          <a:xfrm>
+            <a:off x="640080" y="4480560"/>
+            <a:ext cx="73152" cy="868680"/>
+          </a:xfrm>
+          <a:prstGeom prst="rect">
+            <a:avLst/>
+          </a:prstGeom>
+          <a:solidFill>
+            <a:srgbClr val="61AFEF"/>
+          </a:solidFill>
+          <a:ln>
+            <a:noFill/>
+          </a:ln>
+        </p:spPr>
+        <p:style>
+          <a:lnRef idx="1">
+            <a:schemeClr val="accent1"/>
+          </a:lnRef>
+          <a:fillRef idx="3">
+            <a:schemeClr val="accent1"/>
+          </a:fillRef>
+          <a:effectRef idx="2">
+            <a:schemeClr val="accent1"/>
+          </a:effectRef>
+          <a:fontRef idx="minor">
+            <a:schemeClr val="lt1"/>
+          </a:fontRef>
+        </p:style>
+        <p:txBody>
+          <a:bodyPr rtlCol="0" anchor="ctr"/>
+          <a:lstStyle/>
+          <a:p>
+            <a:pPr algn="ctr"/>
+          </a:p>
+        </p:txBody>
+      </p:sp>
+      <p:sp>
+        <p:nvSpPr>
+          <p:cNvPr id="20" name="TextBox 19"/>
+          <p:cNvSpPr txBox="1"/>
+          <p:nvPr/>
+        </p:nvSpPr>
+        <p:spPr>
+          <a:xfrm>
+            <a:off x="914400" y="4526280"/>
+            <a:ext cx="10241280" cy="777240"/>
+          </a:xfrm>
+          <a:prstGeom prst="rect">
+            <a:avLst/>
+          </a:prstGeom>
+          <a:noFill/>
+        </p:spPr>
+        <p:txBody>
+          <a:bodyPr wrap="none">
+            <a:spAutoFit/>
+          </a:bodyPr>
+          <a:lstStyle/>
+          <a:p>
+            <a:pPr>
+              <a:spcAft>
+                <a:spcPts val="200"/>
+              </a:spcAft>
+              <a:defRPr sz="1400">
+                <a:solidFill>
+                  <a:srgbClr val="ABB2BF"/>
+                </a:solidFill>
+                <a:latin typeface="Consolas"/>
+              </a:defRPr>
+            </a:pPr>
+            <a:r>
+              <a:t>def get_stats(data):</a:t>
+            </a:r>
+          </a:p>
+          <a:p>
+            <a:pPr>
+              <a:spcAft>
+                <a:spcPts val="200"/>
+              </a:spcAft>
+              <a:defRPr sz="1400">
+                <a:solidFill>
+                  <a:srgbClr val="ABB2BF"/>
+                </a:solidFill>
+                <a:latin typeface="Consolas"/>
+              </a:defRPr>
+            </a:pPr>
+            <a:r>
+              <a:t>    return min(data), max(data), len(data)</a:t>
+            </a:r>
+          </a:p>
+          <a:p>
+            <a:pPr>
+              <a:spcAft>
+                <a:spcPts val="200"/>
+              </a:spcAft>
+              <a:defRPr sz="1400">
+                <a:solidFill>
+                  <a:srgbClr val="ABB2BF"/>
+                </a:solidFill>
+                <a:latin typeface="Consolas"/>
+              </a:defRPr>
+            </a:pPr>
+            <a:r>
+              <a:t>min_val, max_val, count = get_stats([1,2,3])</a:t>
+            </a:r>
+          </a:p>
+        </p:txBody>
+      </p:sp>
+      <p:sp>
+        <p:nvSpPr>
+          <p:cNvPr id="21" name="Rectangle 20"/>
+          <p:cNvSpPr/>
+          <p:nvPr/>
+        </p:nvSpPr>
+        <p:spPr>
+          <a:xfrm>
+            <a:off x="365760" y="5486400"/>
+            <a:ext cx="11430000" cy="365760"/>
+          </a:xfrm>
+          <a:prstGeom prst="rect">
+            <a:avLst/>
+          </a:prstGeom>
+          <a:solidFill>
+            <a:srgbClr val="0078D7"/>
+          </a:solidFill>
+          <a:ln>
+            <a:noFill/>
+          </a:ln>
+        </p:spPr>
+        <p:style>
+          <a:lnRef idx="1">
+            <a:schemeClr val="accent1"/>
+          </a:lnRef>
+          <a:fillRef idx="3">
+            <a:schemeClr val="accent1"/>
+          </a:fillRef>
+          <a:effectRef idx="2">
+            <a:schemeClr val="accent1"/>
+          </a:effectRef>
+          <a:fontRef idx="minor">
+            <a:schemeClr val="lt1"/>
+          </a:fontRef>
+        </p:style>
+        <p:txBody>
+          <a:bodyPr rtlCol="0" anchor="ctr"/>
+          <a:lstStyle/>
+          <a:p>
+            <a:pPr algn="ctr"/>
+          </a:p>
+        </p:txBody>
+      </p:sp>
+      <p:sp>
+        <p:nvSpPr>
+          <p:cNvPr id="22" name="TextBox 21"/>
+          <p:cNvSpPr txBox="1"/>
+          <p:nvPr/>
+        </p:nvSpPr>
+        <p:spPr>
+          <a:xfrm>
+            <a:off x="548640" y="5532120"/>
+            <a:ext cx="10972800" cy="274320"/>
+          </a:xfrm>
+          <a:prstGeom prst="rect">
+            <a:avLst/>
+          </a:prstGeom>
+          <a:noFill/>
+        </p:spPr>
+        <p:txBody>
+          <a:bodyPr wrap="none">
+            <a:spAutoFit/>
+          </a:bodyPr>
+          <a:lstStyle/>
+          <a:p>
+            <a:pPr>
+              <a:defRPr sz="2000" b="1">
+                <a:solidFill>
+                  <a:srgbClr val="FFFFFF"/>
+                </a:solidFill>
+              </a:defRPr>
+            </a:pPr>
+            <a:r>
+              <a:t>Coordinate Pairs:</a:t>
+            </a:r>
+          </a:p>
+        </p:txBody>
+      </p:sp>
+      <p:sp>
+        <p:nvSpPr>
+          <p:cNvPr id="23" name="Rectangle 22"/>
+          <p:cNvSpPr/>
+          <p:nvPr/>
+        </p:nvSpPr>
+        <p:spPr>
+          <a:xfrm>
+            <a:off x="640080" y="5943600"/>
+            <a:ext cx="10789920" cy="868680"/>
+          </a:xfrm>
+          <a:prstGeom prst="rect">
+            <a:avLst/>
+          </a:prstGeom>
+          <a:solidFill>
+            <a:srgbClr val="282C34"/>
+          </a:solidFill>
+          <a:ln>
+            <a:noFill/>
+          </a:ln>
+        </p:spPr>
+        <p:style>
+          <a:lnRef idx="1">
+            <a:schemeClr val="accent1"/>
+          </a:lnRef>
+          <a:fillRef idx="3">
+            <a:schemeClr val="accent1"/>
+          </a:fillRef>
+          <a:effectRef idx="2">
+            <a:schemeClr val="accent1"/>
+          </a:effectRef>
+          <a:fontRef idx="minor">
+            <a:schemeClr val="lt1"/>
+          </a:fontRef>
+        </p:style>
+        <p:txBody>
+          <a:bodyPr rtlCol="0" anchor="ctr"/>
+          <a:lstStyle/>
+          <a:p>
+            <a:pPr algn="ctr"/>
+          </a:p>
+        </p:txBody>
+      </p:sp>
+      <p:sp>
+        <p:nvSpPr>
+          <p:cNvPr id="24" name="Rectangle 23"/>
+          <p:cNvSpPr/>
+          <p:nvPr/>
+        </p:nvSpPr>
+        <p:spPr>
+          <a:xfrm>
+            <a:off x="640080" y="5943600"/>
+            <a:ext cx="73152" cy="868680"/>
+          </a:xfrm>
+          <a:prstGeom prst="rect">
+            <a:avLst/>
+          </a:prstGeom>
+          <a:solidFill>
+            <a:srgbClr val="61AFEF"/>
+          </a:solidFill>
+          <a:ln>
+            <a:noFill/>
+          </a:ln>
+        </p:spPr>
+        <p:style>
+          <a:lnRef idx="1">
+            <a:schemeClr val="accent1"/>
+          </a:lnRef>
+          <a:fillRef idx="3">
+            <a:schemeClr val="accent1"/>
+          </a:fillRef>
+          <a:effectRef idx="2">
+            <a:schemeClr val="accent1"/>
+          </a:effectRef>
+          <a:fontRef idx="minor">
+            <a:schemeClr val="lt1"/>
+          </a:fontRef>
+        </p:style>
+        <p:txBody>
+          <a:bodyPr rtlCol="0" anchor="ctr"/>
+          <a:lstStyle/>
+          <a:p>
+            <a:pPr algn="ctr"/>
+          </a:p>
+        </p:txBody>
+      </p:sp>
+      <p:sp>
+        <p:nvSpPr>
+          <p:cNvPr id="25" name="TextBox 24"/>
+          <p:cNvSpPr txBox="1"/>
+          <p:nvPr/>
+        </p:nvSpPr>
+        <p:spPr>
+          <a:xfrm>
+            <a:off x="914400" y="5989320"/>
+            <a:ext cx="10241280" cy="777240"/>
+          </a:xfrm>
+          <a:prstGeom prst="rect">
+            <a:avLst/>
+          </a:prstGeom>
+          <a:noFill/>
+        </p:spPr>
+        <p:txBody>
+          <a:bodyPr wrap="none">
+            <a:spAutoFit/>
+          </a:bodyPr>
+          <a:lstStyle/>
+          <a:p>
+            <a:pPr>
+              <a:spcAft>
+                <a:spcPts val="200"/>
+              </a:spcAft>
+              <a:defRPr sz="1400">
+                <a:solidFill>
+                  <a:srgbClr val="ABB2BF"/>
+                </a:solidFill>
+                <a:latin typeface="Consolas"/>
+              </a:defRPr>
+            </a:pPr>
+            <a:r>
+              <a:t>positions = {(0, 0), (1, 1), (2, 2)}</a:t>
+            </a:r>
+          </a:p>
+          <a:p>
+            <a:pPr>
+              <a:spcAft>
+                <a:spcPts val="200"/>
+              </a:spcAft>
+              <a:defRPr sz="1400">
+                <a:solidFill>
+                  <a:srgbClr val="ABB2BF"/>
+                </a:solidFill>
+                <a:latin typeface="Consolas"/>
+              </a:defRPr>
+            </a:pPr>
+            <a:r>
+              <a:t>if (x, y) in positions:</a:t>
+            </a:r>
+          </a:p>
+          <a:p>
+            <a:pPr>
+              <a:spcAft>
+                <a:spcPts val="200"/>
+              </a:spcAft>
+              <a:defRPr sz="1400">
+                <a:solidFill>
+                  <a:srgbClr val="ABB2BF"/>
+                </a:solidFill>
+                <a:latin typeface="Consolas"/>
+              </a:defRPr>
+            </a:pPr>
+            <a:r>
+              <a:t>    print("Occupied")</a:t>
+            </a:r>
+          </a:p>
+        </p:txBody>
+      </p:sp>
+    </p:spTree>
+  </p:cSld>
+  <p:clrMapOvr>
+    <a:masterClrMapping/>
+  </p:clrMapOvr>
+</p:sld>
+</file>
+
+<file path=ppt/slides/slide11.xml><?xml version="1.0" encoding="utf-8"?>
+<p:sld xmlns:a="http://schemas.openxmlformats.org/drawingml/2006/main" xmlns:p="http://schemas.openxmlformats.org/presentationml/2006/main" xmlns:r="http://schemas.openxmlformats.org/officeDocument/2006/relationships">
+  <p:cSld>
+    <p:spTree>
+      <p:nvGrpSpPr>
+        <p:cNvPr id="1" name=""/>
+        <p:cNvGrpSpPr/>
+        <p:nvPr/>
+      </p:nvGrpSpPr>
+      <p:grpSpPr/>
+      <p:sp>
+        <p:nvSpPr>
+          <p:cNvPr id="2" name="Rectangle 1"/>
+          <p:cNvSpPr/>
+          <p:nvPr/>
+        </p:nvSpPr>
+        <p:spPr>
+          <a:xfrm>
+            <a:off x="0" y="0"/>
+            <a:ext cx="12191695" cy="6858000"/>
+          </a:xfrm>
+          <a:prstGeom prst="rect">
+            <a:avLst/>
+          </a:prstGeom>
+          <a:solidFill>
+            <a:srgbClr val="0066CC"/>
+          </a:solidFill>
+          <a:ln>
+            <a:noFill/>
+          </a:ln>
+        </p:spPr>
+        <p:style>
+          <a:lnRef idx="1">
+            <a:schemeClr val="accent1"/>
+          </a:lnRef>
+          <a:fillRef idx="3">
+            <a:schemeClr val="accent1"/>
+          </a:fillRef>
+          <a:effectRef idx="2">
+            <a:schemeClr val="accent1"/>
+          </a:effectRef>
+          <a:fontRef idx="minor">
+            <a:schemeClr val="lt1"/>
+          </a:fontRef>
+        </p:style>
+        <p:txBody>
+          <a:bodyPr rtlCol="0" anchor="ctr"/>
+          <a:lstStyle/>
+          <a:p>
+            <a:pPr algn="ctr"/>
+          </a:p>
+        </p:txBody>
+      </p:sp>
+      <p:sp>
+        <p:nvSpPr>
+          <p:cNvPr id="3" name="Rectangle 2"/>
+          <p:cNvSpPr/>
+          <p:nvPr/>
+        </p:nvSpPr>
+        <p:spPr>
+          <a:xfrm>
+            <a:off x="0" y="2743200"/>
+            <a:ext cx="3657600" cy="137160"/>
+          </a:xfrm>
+          <a:prstGeom prst="rect">
+            <a:avLst/>
+          </a:prstGeom>
+          <a:solidFill>
+            <a:srgbClr val="FFBB33"/>
+          </a:solidFill>
+          <a:ln>
+            <a:noFill/>
+          </a:ln>
+        </p:spPr>
+        <p:style>
+          <a:lnRef idx="1">
+            <a:schemeClr val="accent1"/>
+          </a:lnRef>
+          <a:fillRef idx="3">
+            <a:schemeClr val="accent1"/>
+          </a:fillRef>
+          <a:effectRef idx="2">
+            <a:schemeClr val="accent1"/>
+          </a:effectRef>
+          <a:fontRef idx="minor">
+            <a:schemeClr val="lt1"/>
+          </a:fontRef>
+        </p:style>
+        <p:txBody>
+          <a:bodyPr rtlCol="0" anchor="ctr"/>
+          <a:lstStyle/>
+          <a:p>
+            <a:pPr algn="ctr"/>
+          </a:p>
+        </p:txBody>
+      </p:sp>
+      <p:sp>
+        <p:nvSpPr>
+          <p:cNvPr id="4" name="Rectangle 3"/>
+          <p:cNvSpPr/>
+          <p:nvPr/>
+        </p:nvSpPr>
+        <p:spPr>
+          <a:xfrm>
+            <a:off x="8531352" y="4114800"/>
+            <a:ext cx="3657600" cy="137160"/>
+          </a:xfrm>
+          <a:prstGeom prst="rect">
+            <a:avLst/>
+          </a:prstGeom>
+          <a:solidFill>
+            <a:srgbClr val="FFBB33"/>
+          </a:solidFill>
+          <a:ln>
+            <a:noFill/>
+          </a:ln>
+        </p:spPr>
+        <p:style>
+          <a:lnRef idx="1">
+            <a:schemeClr val="accent1"/>
+          </a:lnRef>
+          <a:fillRef idx="3">
+            <a:schemeClr val="accent1"/>
+          </a:fillRef>
+          <a:effectRef idx="2">
+            <a:schemeClr val="accent1"/>
+          </a:effectRef>
+          <a:fontRef idx="minor">
+            <a:schemeClr val="lt1"/>
+          </a:fontRef>
+        </p:style>
+        <p:txBody>
+          <a:bodyPr rtlCol="0" anchor="ctr"/>
+          <a:lstStyle/>
+          <a:p>
+            <a:pPr algn="ctr"/>
+          </a:p>
+        </p:txBody>
+      </p:sp>
+      <p:sp>
+        <p:nvSpPr>
+          <p:cNvPr id="5" name="TextBox 4"/>
+          <p:cNvSpPr txBox="1"/>
+          <p:nvPr/>
+        </p:nvSpPr>
+        <p:spPr>
+          <a:xfrm>
+            <a:off x="914400" y="2560320"/>
+            <a:ext cx="10360152" cy="1371600"/>
+          </a:xfrm>
+          <a:prstGeom prst="rect">
+            <a:avLst/>
+          </a:prstGeom>
+          <a:noFill/>
+        </p:spPr>
+        <p:txBody>
+          <a:bodyPr wrap="none">
+            <a:spAutoFit/>
+          </a:bodyPr>
+          <a:lstStyle/>
+          <a:p>
+            <a:pPr algn="ctr">
+              <a:defRPr sz="4800" b="1">
+                <a:solidFill>
+                  <a:srgbClr val="FFFFFF"/>
+                </a:solidFill>
+              </a:defRPr>
+            </a:pPr>
+            <a:r>
+              <a:t>Time to Practice!</a:t>
+            </a:r>
+          </a:p>
+        </p:txBody>
+      </p:sp>
+      <p:sp>
+        <p:nvSpPr>
+          <p:cNvPr id="6" name="TextBox 5"/>
+          <p:cNvSpPr txBox="1"/>
+          <p:nvPr/>
+        </p:nvSpPr>
+        <p:spPr>
+          <a:xfrm>
+            <a:off x="1828800" y="4389120"/>
+            <a:ext cx="8531352" cy="914400"/>
+          </a:xfrm>
+          <a:prstGeom prst="rect">
+            <a:avLst/>
+          </a:prstGeom>
+          <a:noFill/>
+        </p:spPr>
+        <p:txBody>
+          <a:bodyPr wrap="none">
+            <a:spAutoFit/>
+          </a:bodyPr>
+          <a:lstStyle/>
+          <a:p>
+            <a:pPr algn="ctr">
+              <a:defRPr sz="2400">
+                <a:solidFill>
+                  <a:srgbClr val="FFFFFF"/>
+                </a:solidFill>
+              </a:defRPr>
+            </a:pPr>
+            <a:r>
+              <a:t>Chapter 8 Exercises</a:t>
+            </a:r>
+          </a:p>
+        </p:txBody>
+      </p:sp>
+    </p:spTree>
+  </p:cSld>
+  <p:clrMapOvr>
+    <a:masterClrMapping/>
+  </p:clrMapOvr>
+</p:sld>
+</file>
+
 <file path=ppt/slides/slide2.xml><?xml version="1.0" encoding="utf-8"?>
 <p:sld xmlns:a="http://schemas.openxmlformats.org/drawingml/2006/main" xmlns:p="http://schemas.openxmlformats.org/presentationml/2006/main" xmlns:r="http://schemas.openxmlformats.org/officeDocument/2006/relationships">
   <p:cSld>
@@ -5126,84 +6451,6 @@
           </a:p>
         </p:txBody>
       </p:sp>
-      <p:sp>
-        <p:nvSpPr>
-          <p:cNvPr id="26" name="Rectangle 25"/>
-          <p:cNvSpPr/>
-          <p:nvPr/>
-        </p:nvSpPr>
-        <p:spPr>
-          <a:xfrm>
-            <a:off x="365760" y="6126479"/>
-            <a:ext cx="11430000" cy="365760"/>
-          </a:xfrm>
-          <a:prstGeom prst="rect">
-            <a:avLst/>
-          </a:prstGeom>
-          <a:solidFill>
-            <a:srgbClr val="0078D7"/>
-          </a:solidFill>
-          <a:ln>
-            <a:noFill/>
-          </a:ln>
-        </p:spPr>
-        <p:style>
-          <a:lnRef idx="1">
-            <a:schemeClr val="accent1"/>
-          </a:lnRef>
-          <a:fillRef idx="3">
-            <a:schemeClr val="accent1"/>
-          </a:fillRef>
-          <a:effectRef idx="2">
-            <a:schemeClr val="accent1"/>
-          </a:effectRef>
-          <a:fontRef idx="minor">
-            <a:schemeClr val="lt1"/>
-          </a:fontRef>
-        </p:style>
-        <p:txBody>
-          <a:bodyPr rtlCol="0" anchor="ctr"/>
-          <a:lstStyle/>
-          <a:p>
-            <a:pPr algn="ctr"/>
-          </a:p>
-        </p:txBody>
-      </p:sp>
-      <p:sp>
-        <p:nvSpPr>
-          <p:cNvPr id="27" name="TextBox 26"/>
-          <p:cNvSpPr txBox="1"/>
-          <p:nvPr/>
-        </p:nvSpPr>
-        <p:spPr>
-          <a:xfrm>
-            <a:off x="548640" y="6172199"/>
-            <a:ext cx="10972800" cy="274320"/>
-          </a:xfrm>
-          <a:prstGeom prst="rect">
-            <a:avLst/>
-          </a:prstGeom>
-          <a:noFill/>
-        </p:spPr>
-        <p:txBody>
-          <a:bodyPr wrap="none">
-            <a:spAutoFit/>
-          </a:bodyPr>
-          <a:lstStyle/>
-          <a:p>
-            <a:pPr>
-              <a:defRPr sz="2000" b="1">
-                <a:solidFill>
-                  <a:srgbClr val="FFFFFF"/>
-                </a:solidFill>
-              </a:defRPr>
-            </a:pPr>
-            <a:r>
-              <a:t>Methods:</a:t>
-            </a:r>
-          </a:p>
-        </p:txBody>
-      </p:sp>
     </p:spTree>
   </p:cSld>
   <p:clrMapOvr>
@@ -5381,195 +6628,20 @@
               </a:defRPr>
             </a:pPr>
             <a:r>
-              <a:t>Sets: Unique Collections</a:t>
-            </a:r>
-          </a:p>
-        </p:txBody>
-      </p:sp>
-      <p:sp>
-        <p:nvSpPr>
-          <p:cNvPr id="6" name="TextBox 5"/>
-          <p:cNvSpPr txBox="1"/>
-          <p:nvPr/>
-        </p:nvSpPr>
-        <p:spPr>
-          <a:xfrm>
-            <a:off x="457200" y="1371600"/>
-            <a:ext cx="11247120" cy="320040"/>
-          </a:xfrm>
-          <a:prstGeom prst="rect">
-            <a:avLst/>
-          </a:prstGeom>
-          <a:noFill/>
-        </p:spPr>
-        <p:txBody>
-          <a:bodyPr wrap="none">
-            <a:spAutoFit/>
-          </a:bodyPr>
-          <a:lstStyle/>
-          <a:p>
-            <a:pPr>
-              <a:defRPr sz="1700">
-                <a:solidFill>
-                  <a:srgbClr val="333333"/>
-                </a:solidFill>
-              </a:defRPr>
-            </a:pPr>
-            <a:r>
-              <a:t>What Are Sets?</a:t>
-            </a:r>
-          </a:p>
-        </p:txBody>
-      </p:sp>
-      <p:sp>
-        <p:nvSpPr>
-          <p:cNvPr id="7" name="TextBox 6"/>
-          <p:cNvSpPr txBox="1"/>
-          <p:nvPr/>
-        </p:nvSpPr>
-        <p:spPr>
-          <a:xfrm>
-            <a:off x="457200" y="1645920"/>
-            <a:ext cx="11247120" cy="320040"/>
-          </a:xfrm>
-          <a:prstGeom prst="rect">
-            <a:avLst/>
-          </a:prstGeom>
-          <a:noFill/>
-        </p:spPr>
-        <p:txBody>
-          <a:bodyPr wrap="none">
-            <a:spAutoFit/>
-          </a:bodyPr>
-          <a:lstStyle/>
-          <a:p>
-            <a:pPr lvl="1">
-              <a:defRPr sz="1600">
-                <a:solidFill>
-                  <a:srgbClr val="333333"/>
-                </a:solidFill>
-              </a:defRPr>
-            </a:pPr>
-            <a:r>
-              <a:t>• Unordered collections</a:t>
-            </a:r>
-          </a:p>
-        </p:txBody>
-      </p:sp>
-      <p:sp>
-        <p:nvSpPr>
-          <p:cNvPr id="8" name="TextBox 7"/>
-          <p:cNvSpPr txBox="1"/>
-          <p:nvPr/>
-        </p:nvSpPr>
-        <p:spPr>
-          <a:xfrm>
-            <a:off x="457200" y="1920240"/>
-            <a:ext cx="11247120" cy="320040"/>
-          </a:xfrm>
-          <a:prstGeom prst="rect">
-            <a:avLst/>
-          </a:prstGeom>
-          <a:noFill/>
-        </p:spPr>
-        <p:txBody>
-          <a:bodyPr wrap="none">
-            <a:spAutoFit/>
-          </a:bodyPr>
-          <a:lstStyle/>
-          <a:p>
-            <a:pPr lvl="1">
-              <a:defRPr sz="1600">
-                <a:solidFill>
-                  <a:srgbClr val="333333"/>
-                </a:solidFill>
-              </a:defRPr>
-            </a:pPr>
-            <a:r>
-              <a:t>• No duplicates</a:t>
-            </a:r>
-          </a:p>
-        </p:txBody>
-      </p:sp>
-      <p:sp>
-        <p:nvSpPr>
-          <p:cNvPr id="9" name="TextBox 8"/>
-          <p:cNvSpPr txBox="1"/>
-          <p:nvPr/>
-        </p:nvSpPr>
-        <p:spPr>
-          <a:xfrm>
-            <a:off x="457200" y="2194560"/>
-            <a:ext cx="11247120" cy="320040"/>
-          </a:xfrm>
-          <a:prstGeom prst="rect">
-            <a:avLst/>
-          </a:prstGeom>
-          <a:noFill/>
-        </p:spPr>
-        <p:txBody>
-          <a:bodyPr wrap="none">
-            <a:spAutoFit/>
-          </a:bodyPr>
-          <a:lstStyle/>
-          <a:p>
-            <a:pPr lvl="1">
-              <a:defRPr sz="1600">
-                <a:solidFill>
-                  <a:srgbClr val="333333"/>
-                </a:solidFill>
-              </a:defRPr>
-            </a:pPr>
-            <a:r>
-              <a:t>• Mutable</a:t>
-            </a:r>
-          </a:p>
-        </p:txBody>
-      </p:sp>
-      <p:sp>
-        <p:nvSpPr>
-          <p:cNvPr id="10" name="TextBox 9"/>
-          <p:cNvSpPr txBox="1"/>
-          <p:nvPr/>
-        </p:nvSpPr>
-        <p:spPr>
-          <a:xfrm>
-            <a:off x="457200" y="2468879"/>
-            <a:ext cx="11247120" cy="320040"/>
-          </a:xfrm>
-          <a:prstGeom prst="rect">
-            <a:avLst/>
-          </a:prstGeom>
-          <a:noFill/>
-        </p:spPr>
-        <p:txBody>
-          <a:bodyPr wrap="none">
-            <a:spAutoFit/>
-          </a:bodyPr>
-          <a:lstStyle/>
-          <a:p>
-            <a:pPr lvl="1">
-              <a:defRPr sz="1600">
-                <a:solidFill>
-                  <a:srgbClr val="333333"/>
-                </a:solidFill>
-              </a:defRPr>
-            </a:pPr>
-            <a:r>
-              <a:t>• No indexing</a:t>
-            </a:r>
-          </a:p>
-        </p:txBody>
-      </p:sp>
-      <p:sp>
-        <p:nvSpPr>
-          <p:cNvPr id="11" name="Rectangle 10"/>
+              <a:t>Working with Tuples (continued)</a:t>
+            </a:r>
+          </a:p>
+        </p:txBody>
+      </p:sp>
+      <p:sp>
+        <p:nvSpPr>
+          <p:cNvPr id="6" name="Rectangle 5"/>
           <p:cNvSpPr/>
           <p:nvPr/>
         </p:nvSpPr>
         <p:spPr>
           <a:xfrm>
-            <a:off x="365760" y="2697479"/>
+            <a:off x="365760" y="1325880"/>
             <a:ext cx="11430000" cy="365760"/>
           </a:xfrm>
           <a:prstGeom prst="rect">
@@ -5606,13 +6678,13 @@
       </p:sp>
       <p:sp>
         <p:nvSpPr>
-          <p:cNvPr id="12" name="TextBox 11"/>
+          <p:cNvPr id="7" name="TextBox 6"/>
           <p:cNvSpPr txBox="1"/>
           <p:nvPr/>
         </p:nvSpPr>
         <p:spPr>
           <a:xfrm>
-            <a:off x="548640" y="2743199"/>
+            <a:off x="548640" y="1371600"/>
             <a:ext cx="10972800" cy="274320"/>
           </a:xfrm>
           <a:prstGeom prst="rect">
@@ -5634,21 +6706,169 @@
               </a:defRPr>
             </a:pPr>
             <a:r>
-              <a:t>Creating:</a:t>
-            </a:r>
-          </a:p>
-        </p:txBody>
-      </p:sp>
-      <p:sp>
-        <p:nvSpPr>
-          <p:cNvPr id="13" name="Rectangle 12"/>
+              <a:t>Methods:</a:t>
+            </a:r>
+          </a:p>
+        </p:txBody>
+      </p:sp>
+      <p:sp>
+        <p:nvSpPr>
+          <p:cNvPr id="8" name="TextBox 7"/>
+          <p:cNvSpPr txBox="1"/>
+          <p:nvPr/>
+        </p:nvSpPr>
+        <p:spPr>
+          <a:xfrm>
+            <a:off x="457200" y="1828800"/>
+            <a:ext cx="11247120" cy="320040"/>
+          </a:xfrm>
+          <a:prstGeom prst="rect">
+            <a:avLst/>
+          </a:prstGeom>
+          <a:noFill/>
+        </p:spPr>
+        <p:txBody>
+          <a:bodyPr wrap="none">
+            <a:spAutoFit/>
+          </a:bodyPr>
+          <a:lstStyle/>
+          <a:p>
+            <a:pPr>
+              <a:defRPr sz="1700">
+                <a:solidFill>
+                  <a:srgbClr val="333333"/>
+                </a:solidFill>
+              </a:defRPr>
+            </a:pPr>
+            <a:r>
+              <a:t>point.count(10)</a:t>
+            </a:r>
+          </a:p>
+        </p:txBody>
+      </p:sp>
+      <p:sp>
+        <p:nvSpPr>
+          <p:cNvPr id="9" name="TextBox 8"/>
+          <p:cNvSpPr txBox="1"/>
+          <p:nvPr/>
+        </p:nvSpPr>
+        <p:spPr>
+          <a:xfrm>
+            <a:off x="457200" y="2103120"/>
+            <a:ext cx="11247120" cy="320040"/>
+          </a:xfrm>
+          <a:prstGeom prst="rect">
+            <a:avLst/>
+          </a:prstGeom>
+          <a:noFill/>
+        </p:spPr>
+        <p:txBody>
+          <a:bodyPr wrap="none">
+            <a:spAutoFit/>
+          </a:bodyPr>
+          <a:lstStyle/>
+          <a:p>
+            <a:pPr>
+              <a:defRPr sz="1700">
+                <a:solidFill>
+                  <a:srgbClr val="333333"/>
+                </a:solidFill>
+              </a:defRPr>
+            </a:pPr>
+            <a:r>
+              <a:t>point.index(20)</a:t>
+            </a:r>
+          </a:p>
+        </p:txBody>
+      </p:sp>
+      <p:sp>
+        <p:nvSpPr>
+          <p:cNvPr id="10" name="Rectangle 9"/>
           <p:cNvSpPr/>
           <p:nvPr/>
         </p:nvSpPr>
         <p:spPr>
           <a:xfrm>
-            <a:off x="640080" y="3154679"/>
-            <a:ext cx="10789920" cy="868680"/>
+            <a:off x="365760" y="2331720"/>
+            <a:ext cx="11430000" cy="365760"/>
+          </a:xfrm>
+          <a:prstGeom prst="rect">
+            <a:avLst/>
+          </a:prstGeom>
+          <a:solidFill>
+            <a:srgbClr val="0078D7"/>
+          </a:solidFill>
+          <a:ln>
+            <a:noFill/>
+          </a:ln>
+        </p:spPr>
+        <p:style>
+          <a:lnRef idx="1">
+            <a:schemeClr val="accent1"/>
+          </a:lnRef>
+          <a:fillRef idx="3">
+            <a:schemeClr val="accent1"/>
+          </a:fillRef>
+          <a:effectRef idx="2">
+            <a:schemeClr val="accent1"/>
+          </a:effectRef>
+          <a:fontRef idx="minor">
+            <a:schemeClr val="lt1"/>
+          </a:fontRef>
+        </p:style>
+        <p:txBody>
+          <a:bodyPr rtlCol="0" anchor="ctr"/>
+          <a:lstStyle/>
+          <a:p>
+            <a:pPr algn="ctr"/>
+          </a:p>
+        </p:txBody>
+      </p:sp>
+      <p:sp>
+        <p:nvSpPr>
+          <p:cNvPr id="11" name="TextBox 10"/>
+          <p:cNvSpPr txBox="1"/>
+          <p:nvPr/>
+        </p:nvSpPr>
+        <p:spPr>
+          <a:xfrm>
+            <a:off x="548640" y="2377439"/>
+            <a:ext cx="10972800" cy="274320"/>
+          </a:xfrm>
+          <a:prstGeom prst="rect">
+            <a:avLst/>
+          </a:prstGeom>
+          <a:noFill/>
+        </p:spPr>
+        <p:txBody>
+          <a:bodyPr wrap="none">
+            <a:spAutoFit/>
+          </a:bodyPr>
+          <a:lstStyle/>
+          <a:p>
+            <a:pPr>
+              <a:defRPr sz="2000" b="1">
+                <a:solidFill>
+                  <a:srgbClr val="FFFFFF"/>
+                </a:solidFill>
+              </a:defRPr>
+            </a:pPr>
+            <a:r>
+              <a:t>Cannot Modify:</a:t>
+            </a:r>
+          </a:p>
+        </p:txBody>
+      </p:sp>
+      <p:sp>
+        <p:nvSpPr>
+          <p:cNvPr id="12" name="Rectangle 11"/>
+          <p:cNvSpPr/>
+          <p:nvPr/>
+        </p:nvSpPr>
+        <p:spPr>
+          <a:xfrm>
+            <a:off x="640080" y="2788920"/>
+            <a:ext cx="10789920" cy="411480"/>
           </a:xfrm>
           <a:prstGeom prst="rect">
             <a:avLst/>
@@ -5684,14 +6904,14 @@
       </p:sp>
       <p:sp>
         <p:nvSpPr>
-          <p:cNvPr id="14" name="Rectangle 13"/>
+          <p:cNvPr id="13" name="Rectangle 12"/>
           <p:cNvSpPr/>
           <p:nvPr/>
         </p:nvSpPr>
         <p:spPr>
           <a:xfrm>
-            <a:off x="640080" y="3154679"/>
-            <a:ext cx="73152" cy="868680"/>
+            <a:off x="640080" y="2788920"/>
+            <a:ext cx="73152" cy="411480"/>
           </a:xfrm>
           <a:prstGeom prst="rect">
             <a:avLst/>
@@ -5727,14 +6947,14 @@
       </p:sp>
       <p:sp>
         <p:nvSpPr>
-          <p:cNvPr id="15" name="TextBox 14"/>
+          <p:cNvPr id="14" name="TextBox 13"/>
           <p:cNvSpPr txBox="1"/>
           <p:nvPr/>
         </p:nvSpPr>
         <p:spPr>
           <a:xfrm>
-            <a:off x="914400" y="3200399"/>
-            <a:ext cx="10241280" cy="777240"/>
+            <a:off x="914400" y="2834639"/>
+            <a:ext cx="10241280" cy="320040"/>
           </a:xfrm>
           <a:prstGeom prst="rect">
             <a:avLst/>
@@ -5759,214 +6979,7 @@
               </a:defRPr>
             </a:pPr>
             <a:r>
-              <a:t>numbers = {1, 2, 3, 4, 5}</a:t>
-            </a:r>
-          </a:p>
-          <a:p>
-            <a:pPr>
-              <a:spcAft>
-                <a:spcPts val="200"/>
-              </a:spcAft>
-              <a:defRPr sz="1400">
-                <a:solidFill>
-                  <a:srgbClr val="ABB2BF"/>
-                </a:solidFill>
-                <a:latin typeface="Consolas"/>
-              </a:defRPr>
-            </a:pPr>
-            <a:r>
-              <a:t>empty = set()  # NOT {}</a:t>
-            </a:r>
-          </a:p>
-          <a:p>
-            <a:pPr>
-              <a:spcAft>
-                <a:spcPts val="200"/>
-              </a:spcAft>
-              <a:defRPr sz="1400">
-                <a:solidFill>
-                  <a:srgbClr val="ABB2BF"/>
-                </a:solidFill>
-                <a:latin typeface="Consolas"/>
-              </a:defRPr>
-            </a:pPr>
-            <a:r>
-              <a:t>from_list = set([1, 2, 2, 3])  # {1, 2, 3}</a:t>
-            </a:r>
-          </a:p>
-        </p:txBody>
-      </p:sp>
-      <p:sp>
-        <p:nvSpPr>
-          <p:cNvPr id="16" name="TextBox 15"/>
-          <p:cNvSpPr txBox="1"/>
-          <p:nvPr/>
-        </p:nvSpPr>
-        <p:spPr>
-          <a:xfrm>
-            <a:off x="457200" y="4206240"/>
-            <a:ext cx="11247120" cy="320040"/>
-          </a:xfrm>
-          <a:prstGeom prst="rect">
-            <a:avLst/>
-          </a:prstGeom>
-          <a:noFill/>
-        </p:spPr>
-        <p:txBody>
-          <a:bodyPr wrap="none">
-            <a:spAutoFit/>
-          </a:bodyPr>
-          <a:lstStyle/>
-          <a:p>
-            <a:pPr>
-              <a:defRPr sz="1700">
-                <a:solidFill>
-                  <a:srgbClr val="333333"/>
-                </a:solidFill>
-              </a:defRPr>
-            </a:pPr>
-            <a:r>
-              <a:t>Why Use Sets?</a:t>
-            </a:r>
-          </a:p>
-        </p:txBody>
-      </p:sp>
-      <p:sp>
-        <p:nvSpPr>
-          <p:cNvPr id="17" name="TextBox 16"/>
-          <p:cNvSpPr txBox="1"/>
-          <p:nvPr/>
-        </p:nvSpPr>
-        <p:spPr>
-          <a:xfrm>
-            <a:off x="457200" y="4480559"/>
-            <a:ext cx="11247120" cy="320040"/>
-          </a:xfrm>
-          <a:prstGeom prst="rect">
-            <a:avLst/>
-          </a:prstGeom>
-          <a:noFill/>
-        </p:spPr>
-        <p:txBody>
-          <a:bodyPr wrap="none">
-            <a:spAutoFit/>
-          </a:bodyPr>
-          <a:lstStyle/>
-          <a:p>
-            <a:pPr lvl="1">
-              <a:defRPr sz="1600">
-                <a:solidFill>
-                  <a:srgbClr val="333333"/>
-                </a:solidFill>
-              </a:defRPr>
-            </a:pPr>
-            <a:r>
-              <a:t>• Remove duplicates</a:t>
-            </a:r>
-          </a:p>
-        </p:txBody>
-      </p:sp>
-      <p:sp>
-        <p:nvSpPr>
-          <p:cNvPr id="18" name="TextBox 17"/>
-          <p:cNvSpPr txBox="1"/>
-          <p:nvPr/>
-        </p:nvSpPr>
-        <p:spPr>
-          <a:xfrm>
-            <a:off x="457200" y="4754879"/>
-            <a:ext cx="11247120" cy="320040"/>
-          </a:xfrm>
-          <a:prstGeom prst="rect">
-            <a:avLst/>
-          </a:prstGeom>
-          <a:noFill/>
-        </p:spPr>
-        <p:txBody>
-          <a:bodyPr wrap="none">
-            <a:spAutoFit/>
-          </a:bodyPr>
-          <a:lstStyle/>
-          <a:p>
-            <a:pPr lvl="1">
-              <a:defRPr sz="1600">
-                <a:solidFill>
-                  <a:srgbClr val="333333"/>
-                </a:solidFill>
-              </a:defRPr>
-            </a:pPr>
-            <a:r>
-              <a:t>• Fast membership testing</a:t>
-            </a:r>
-          </a:p>
-        </p:txBody>
-      </p:sp>
-      <p:sp>
-        <p:nvSpPr>
-          <p:cNvPr id="19" name="TextBox 18"/>
-          <p:cNvSpPr txBox="1"/>
-          <p:nvPr/>
-        </p:nvSpPr>
-        <p:spPr>
-          <a:xfrm>
-            <a:off x="457200" y="5029199"/>
-            <a:ext cx="11247120" cy="320040"/>
-          </a:xfrm>
-          <a:prstGeom prst="rect">
-            <a:avLst/>
-          </a:prstGeom>
-          <a:noFill/>
-        </p:spPr>
-        <p:txBody>
-          <a:bodyPr wrap="none">
-            <a:spAutoFit/>
-          </a:bodyPr>
-          <a:lstStyle/>
-          <a:p>
-            <a:pPr lvl="1">
-              <a:defRPr sz="1600">
-                <a:solidFill>
-                  <a:srgbClr val="333333"/>
-                </a:solidFill>
-              </a:defRPr>
-            </a:pPr>
-            <a:r>
-              <a:t>• Mathematical set operations</a:t>
-            </a:r>
-          </a:p>
-        </p:txBody>
-      </p:sp>
-      <p:sp>
-        <p:nvSpPr>
-          <p:cNvPr id="20" name="TextBox 19"/>
-          <p:cNvSpPr txBox="1"/>
-          <p:nvPr/>
-        </p:nvSpPr>
-        <p:spPr>
-          <a:xfrm>
-            <a:off x="457200" y="5303519"/>
-            <a:ext cx="11247120" cy="320040"/>
-          </a:xfrm>
-          <a:prstGeom prst="rect">
-            <a:avLst/>
-          </a:prstGeom>
-          <a:noFill/>
-        </p:spPr>
-        <p:txBody>
-          <a:bodyPr wrap="none">
-            <a:spAutoFit/>
-          </a:bodyPr>
-          <a:lstStyle/>
-          <a:p>
-            <a:pPr lvl="1">
-              <a:defRPr sz="1600">
-                <a:solidFill>
-                  <a:srgbClr val="333333"/>
-                </a:solidFill>
-              </a:defRPr>
-            </a:pPr>
-            <a:r>
-              <a:t>• Track unique items</a:t>
+              <a:t>point[0] = 15  # ERROR!</a:t>
             </a:r>
           </a:p>
         </p:txBody>
@@ -6148,20 +7161,195 @@
               </a:defRPr>
             </a:pPr>
             <a:r>
-              <a:t>Set Operations</a:t>
-            </a:r>
-          </a:p>
-        </p:txBody>
-      </p:sp>
-      <p:sp>
-        <p:nvSpPr>
-          <p:cNvPr id="6" name="Rectangle 5"/>
+              <a:t>Sets: Unique Collections</a:t>
+            </a:r>
+          </a:p>
+        </p:txBody>
+      </p:sp>
+      <p:sp>
+        <p:nvSpPr>
+          <p:cNvPr id="6" name="TextBox 5"/>
+          <p:cNvSpPr txBox="1"/>
+          <p:nvPr/>
+        </p:nvSpPr>
+        <p:spPr>
+          <a:xfrm>
+            <a:off x="457200" y="1371600"/>
+            <a:ext cx="11247120" cy="320040"/>
+          </a:xfrm>
+          <a:prstGeom prst="rect">
+            <a:avLst/>
+          </a:prstGeom>
+          <a:noFill/>
+        </p:spPr>
+        <p:txBody>
+          <a:bodyPr wrap="none">
+            <a:spAutoFit/>
+          </a:bodyPr>
+          <a:lstStyle/>
+          <a:p>
+            <a:pPr>
+              <a:defRPr sz="1700">
+                <a:solidFill>
+                  <a:srgbClr val="333333"/>
+                </a:solidFill>
+              </a:defRPr>
+            </a:pPr>
+            <a:r>
+              <a:t>What Are Sets?</a:t>
+            </a:r>
+          </a:p>
+        </p:txBody>
+      </p:sp>
+      <p:sp>
+        <p:nvSpPr>
+          <p:cNvPr id="7" name="TextBox 6"/>
+          <p:cNvSpPr txBox="1"/>
+          <p:nvPr/>
+        </p:nvSpPr>
+        <p:spPr>
+          <a:xfrm>
+            <a:off x="457200" y="1645920"/>
+            <a:ext cx="11247120" cy="320040"/>
+          </a:xfrm>
+          <a:prstGeom prst="rect">
+            <a:avLst/>
+          </a:prstGeom>
+          <a:noFill/>
+        </p:spPr>
+        <p:txBody>
+          <a:bodyPr wrap="none">
+            <a:spAutoFit/>
+          </a:bodyPr>
+          <a:lstStyle/>
+          <a:p>
+            <a:pPr lvl="1">
+              <a:defRPr sz="1600">
+                <a:solidFill>
+                  <a:srgbClr val="333333"/>
+                </a:solidFill>
+              </a:defRPr>
+            </a:pPr>
+            <a:r>
+              <a:t>• Unordered collections</a:t>
+            </a:r>
+          </a:p>
+        </p:txBody>
+      </p:sp>
+      <p:sp>
+        <p:nvSpPr>
+          <p:cNvPr id="8" name="TextBox 7"/>
+          <p:cNvSpPr txBox="1"/>
+          <p:nvPr/>
+        </p:nvSpPr>
+        <p:spPr>
+          <a:xfrm>
+            <a:off x="457200" y="1920240"/>
+            <a:ext cx="11247120" cy="320040"/>
+          </a:xfrm>
+          <a:prstGeom prst="rect">
+            <a:avLst/>
+          </a:prstGeom>
+          <a:noFill/>
+        </p:spPr>
+        <p:txBody>
+          <a:bodyPr wrap="none">
+            <a:spAutoFit/>
+          </a:bodyPr>
+          <a:lstStyle/>
+          <a:p>
+            <a:pPr lvl="1">
+              <a:defRPr sz="1600">
+                <a:solidFill>
+                  <a:srgbClr val="333333"/>
+                </a:solidFill>
+              </a:defRPr>
+            </a:pPr>
+            <a:r>
+              <a:t>• No duplicates</a:t>
+            </a:r>
+          </a:p>
+        </p:txBody>
+      </p:sp>
+      <p:sp>
+        <p:nvSpPr>
+          <p:cNvPr id="9" name="TextBox 8"/>
+          <p:cNvSpPr txBox="1"/>
+          <p:nvPr/>
+        </p:nvSpPr>
+        <p:spPr>
+          <a:xfrm>
+            <a:off x="457200" y="2194560"/>
+            <a:ext cx="11247120" cy="320040"/>
+          </a:xfrm>
+          <a:prstGeom prst="rect">
+            <a:avLst/>
+          </a:prstGeom>
+          <a:noFill/>
+        </p:spPr>
+        <p:txBody>
+          <a:bodyPr wrap="none">
+            <a:spAutoFit/>
+          </a:bodyPr>
+          <a:lstStyle/>
+          <a:p>
+            <a:pPr lvl="1">
+              <a:defRPr sz="1600">
+                <a:solidFill>
+                  <a:srgbClr val="333333"/>
+                </a:solidFill>
+              </a:defRPr>
+            </a:pPr>
+            <a:r>
+              <a:t>• Mutable</a:t>
+            </a:r>
+          </a:p>
+        </p:txBody>
+      </p:sp>
+      <p:sp>
+        <p:nvSpPr>
+          <p:cNvPr id="10" name="TextBox 9"/>
+          <p:cNvSpPr txBox="1"/>
+          <p:nvPr/>
+        </p:nvSpPr>
+        <p:spPr>
+          <a:xfrm>
+            <a:off x="457200" y="2468879"/>
+            <a:ext cx="11247120" cy="320040"/>
+          </a:xfrm>
+          <a:prstGeom prst="rect">
+            <a:avLst/>
+          </a:prstGeom>
+          <a:noFill/>
+        </p:spPr>
+        <p:txBody>
+          <a:bodyPr wrap="none">
+            <a:spAutoFit/>
+          </a:bodyPr>
+          <a:lstStyle/>
+          <a:p>
+            <a:pPr lvl="1">
+              <a:defRPr sz="1600">
+                <a:solidFill>
+                  <a:srgbClr val="333333"/>
+                </a:solidFill>
+              </a:defRPr>
+            </a:pPr>
+            <a:r>
+              <a:t>• No indexing</a:t>
+            </a:r>
+          </a:p>
+        </p:txBody>
+      </p:sp>
+      <p:sp>
+        <p:nvSpPr>
+          <p:cNvPr id="11" name="Rectangle 10"/>
           <p:cNvSpPr/>
           <p:nvPr/>
         </p:nvSpPr>
         <p:spPr>
           <a:xfrm>
-            <a:off x="365760" y="1325880"/>
+            <a:off x="365760" y="2697479"/>
             <a:ext cx="11430000" cy="365760"/>
           </a:xfrm>
           <a:prstGeom prst="rect">
@@ -6198,13 +7386,13 @@
       </p:sp>
       <p:sp>
         <p:nvSpPr>
-          <p:cNvPr id="7" name="TextBox 6"/>
+          <p:cNvPr id="12" name="TextBox 11"/>
           <p:cNvSpPr txBox="1"/>
           <p:nvPr/>
         </p:nvSpPr>
         <p:spPr>
           <a:xfrm>
-            <a:off x="548640" y="1371600"/>
+            <a:off x="548640" y="2743199"/>
             <a:ext cx="10972800" cy="274320"/>
           </a:xfrm>
           <a:prstGeom prst="rect">
@@ -6226,21 +7414,21 @@
               </a:defRPr>
             </a:pPr>
             <a:r>
-              <a:t>Basic Operations:</a:t>
-            </a:r>
-          </a:p>
-        </p:txBody>
-      </p:sp>
-      <p:sp>
-        <p:nvSpPr>
-          <p:cNvPr id="8" name="Rectangle 7"/>
+              <a:t>Creating:</a:t>
+            </a:r>
+          </a:p>
+        </p:txBody>
+      </p:sp>
+      <p:sp>
+        <p:nvSpPr>
+          <p:cNvPr id="13" name="Rectangle 12"/>
           <p:cNvSpPr/>
           <p:nvPr/>
         </p:nvSpPr>
         <p:spPr>
           <a:xfrm>
-            <a:off x="640080" y="1783080"/>
-            <a:ext cx="10789920" cy="411480"/>
+            <a:off x="640080" y="3154679"/>
+            <a:ext cx="10789920" cy="868680"/>
           </a:xfrm>
           <a:prstGeom prst="rect">
             <a:avLst/>
@@ -6276,14 +7464,14 @@
       </p:sp>
       <p:sp>
         <p:nvSpPr>
-          <p:cNvPr id="9" name="Rectangle 8"/>
+          <p:cNvPr id="14" name="Rectangle 13"/>
           <p:cNvSpPr/>
           <p:nvPr/>
         </p:nvSpPr>
         <p:spPr>
           <a:xfrm>
-            <a:off x="640080" y="1783080"/>
-            <a:ext cx="73152" cy="411480"/>
+            <a:off x="640080" y="3154679"/>
+            <a:ext cx="73152" cy="868680"/>
           </a:xfrm>
           <a:prstGeom prst="rect">
             <a:avLst/>
@@ -6319,14 +7507,14 @@
       </p:sp>
       <p:sp>
         <p:nvSpPr>
-          <p:cNvPr id="10" name="TextBox 9"/>
+          <p:cNvPr id="15" name="TextBox 14"/>
           <p:cNvSpPr txBox="1"/>
           <p:nvPr/>
         </p:nvSpPr>
         <p:spPr>
           <a:xfrm>
-            <a:off x="914400" y="1828800"/>
-            <a:ext cx="10241280" cy="320040"/>
+            <a:off x="914400" y="3200399"/>
+            <a:ext cx="10241280" cy="777240"/>
           </a:xfrm>
           <a:prstGeom prst="rect">
             <a:avLst/>
@@ -6351,153 +7539,9 @@
               </a:defRPr>
             </a:pPr>
             <a:r>
-              <a:t>numbers = {1, 2, 3}</a:t>
-            </a:r>
-          </a:p>
-        </p:txBody>
-      </p:sp>
-      <p:sp>
-        <p:nvSpPr>
-          <p:cNvPr id="11" name="TextBox 10"/>
-          <p:cNvSpPr txBox="1"/>
-          <p:nvPr/>
-        </p:nvSpPr>
-        <p:spPr>
-          <a:xfrm>
-            <a:off x="457200" y="2377440"/>
-            <a:ext cx="11247120" cy="320040"/>
-          </a:xfrm>
-          <a:prstGeom prst="rect">
-            <a:avLst/>
-          </a:prstGeom>
-          <a:noFill/>
-        </p:spPr>
-        <p:txBody>
-          <a:bodyPr wrap="none">
-            <a:spAutoFit/>
-          </a:bodyPr>
-          <a:lstStyle/>
-          <a:p>
-            <a:pPr>
-              <a:defRPr sz="1700">
-                <a:solidFill>
-                  <a:srgbClr val="333333"/>
-                </a:solidFill>
-              </a:defRPr>
-            </a:pPr>
-            <a:r>
-              <a:t>numbers.add(4)</a:t>
-            </a:r>
-          </a:p>
-        </p:txBody>
-      </p:sp>
-      <p:sp>
-        <p:nvSpPr>
-          <p:cNvPr id="12" name="Rectangle 11"/>
-          <p:cNvSpPr/>
-          <p:nvPr/>
-        </p:nvSpPr>
-        <p:spPr>
-          <a:xfrm>
-            <a:off x="640080" y="2606040"/>
-            <a:ext cx="10789920" cy="411480"/>
-          </a:xfrm>
-          <a:prstGeom prst="rect">
-            <a:avLst/>
-          </a:prstGeom>
-          <a:solidFill>
-            <a:srgbClr val="282C34"/>
-          </a:solidFill>
-          <a:ln>
-            <a:noFill/>
-          </a:ln>
-        </p:spPr>
-        <p:style>
-          <a:lnRef idx="1">
-            <a:schemeClr val="accent1"/>
-          </a:lnRef>
-          <a:fillRef idx="3">
-            <a:schemeClr val="accent1"/>
-          </a:fillRef>
-          <a:effectRef idx="2">
-            <a:schemeClr val="accent1"/>
-          </a:effectRef>
-          <a:fontRef idx="minor">
-            <a:schemeClr val="lt1"/>
-          </a:fontRef>
-        </p:style>
-        <p:txBody>
-          <a:bodyPr rtlCol="0" anchor="ctr"/>
-          <a:lstStyle/>
-          <a:p>
-            <a:pPr algn="ctr"/>
-          </a:p>
-        </p:txBody>
-      </p:sp>
-      <p:sp>
-        <p:nvSpPr>
-          <p:cNvPr id="13" name="Rectangle 12"/>
-          <p:cNvSpPr/>
-          <p:nvPr/>
-        </p:nvSpPr>
-        <p:spPr>
-          <a:xfrm>
-            <a:off x="640080" y="2606040"/>
-            <a:ext cx="73152" cy="411480"/>
-          </a:xfrm>
-          <a:prstGeom prst="rect">
-            <a:avLst/>
-          </a:prstGeom>
-          <a:solidFill>
-            <a:srgbClr val="61AFEF"/>
-          </a:solidFill>
-          <a:ln>
-            <a:noFill/>
-          </a:ln>
-        </p:spPr>
-        <p:style>
-          <a:lnRef idx="1">
-            <a:schemeClr val="accent1"/>
-          </a:lnRef>
-          <a:fillRef idx="3">
-            <a:schemeClr val="accent1"/>
-          </a:fillRef>
-          <a:effectRef idx="2">
-            <a:schemeClr val="accent1"/>
-          </a:effectRef>
-          <a:fontRef idx="minor">
-            <a:schemeClr val="lt1"/>
-          </a:fontRef>
-        </p:style>
-        <p:txBody>
-          <a:bodyPr rtlCol="0" anchor="ctr"/>
-          <a:lstStyle/>
-          <a:p>
-            <a:pPr algn="ctr"/>
-          </a:p>
-        </p:txBody>
-      </p:sp>
-      <p:sp>
-        <p:nvSpPr>
-          <p:cNvPr id="14" name="TextBox 13"/>
-          <p:cNvSpPr txBox="1"/>
-          <p:nvPr/>
-        </p:nvSpPr>
-        <p:spPr>
-          <a:xfrm>
-            <a:off x="914400" y="2651760"/>
-            <a:ext cx="10241280" cy="320040"/>
-          </a:xfrm>
-          <a:prstGeom prst="rect">
-            <a:avLst/>
-          </a:prstGeom>
-          <a:noFill/>
-        </p:spPr>
-        <p:txBody>
-          <a:bodyPr wrap="none">
-            <a:spAutoFit/>
-          </a:bodyPr>
-          <a:lstStyle/>
+              <a:t>numbers = {1, 2, 3, 4, 5}</a:t>
+            </a:r>
+          </a:p>
           <a:p>
             <a:pPr>
               <a:spcAft>
@@ -6511,379 +7555,9 @@
               </a:defRPr>
             </a:pPr>
             <a:r>
-              <a:t>numbers.remove(2)  # Error if not found</a:t>
-            </a:r>
-          </a:p>
-        </p:txBody>
-      </p:sp>
-      <p:sp>
-        <p:nvSpPr>
-          <p:cNvPr id="15" name="TextBox 14"/>
-          <p:cNvSpPr txBox="1"/>
-          <p:nvPr/>
-        </p:nvSpPr>
-        <p:spPr>
-          <a:xfrm>
-            <a:off x="457200" y="3200400"/>
-            <a:ext cx="11247120" cy="320040"/>
-          </a:xfrm>
-          <a:prstGeom prst="rect">
-            <a:avLst/>
-          </a:prstGeom>
-          <a:noFill/>
-        </p:spPr>
-        <p:txBody>
-          <a:bodyPr wrap="none">
-            <a:spAutoFit/>
-          </a:bodyPr>
-          <a:lstStyle/>
-          <a:p>
-            <a:pPr>
-              <a:defRPr sz="1700">
-                <a:solidFill>
-                  <a:srgbClr val="333333"/>
-                </a:solidFill>
-              </a:defRPr>
-            </a:pPr>
-            <a:r>
-              <a:t>numbers.discard(2)  # No error</a:t>
-            </a:r>
-          </a:p>
-        </p:txBody>
-      </p:sp>
-      <p:sp>
-        <p:nvSpPr>
-          <p:cNvPr id="16" name="TextBox 15"/>
-          <p:cNvSpPr txBox="1"/>
-          <p:nvPr/>
-        </p:nvSpPr>
-        <p:spPr>
-          <a:xfrm>
-            <a:off x="457200" y="3474720"/>
-            <a:ext cx="11247120" cy="320040"/>
-          </a:xfrm>
-          <a:prstGeom prst="rect">
-            <a:avLst/>
-          </a:prstGeom>
-          <a:noFill/>
-        </p:spPr>
-        <p:txBody>
-          <a:bodyPr wrap="none">
-            <a:spAutoFit/>
-          </a:bodyPr>
-          <a:lstStyle/>
-          <a:p>
-            <a:pPr>
-              <a:defRPr sz="1700">
-                <a:solidFill>
-                  <a:srgbClr val="333333"/>
-                </a:solidFill>
-              </a:defRPr>
-            </a:pPr>
-            <a:r>
-              <a:t>numbers.pop()  # Remove arbitrary</a:t>
-            </a:r>
-          </a:p>
-        </p:txBody>
-      </p:sp>
-      <p:sp>
-        <p:nvSpPr>
-          <p:cNvPr id="17" name="Rectangle 16"/>
-          <p:cNvSpPr/>
-          <p:nvPr/>
-        </p:nvSpPr>
-        <p:spPr>
-          <a:xfrm>
-            <a:off x="365760" y="3703320"/>
-            <a:ext cx="11430000" cy="365760"/>
-          </a:xfrm>
-          <a:prstGeom prst="rect">
-            <a:avLst/>
-          </a:prstGeom>
-          <a:solidFill>
-            <a:srgbClr val="0078D7"/>
-          </a:solidFill>
-          <a:ln>
-            <a:noFill/>
-          </a:ln>
-        </p:spPr>
-        <p:style>
-          <a:lnRef idx="1">
-            <a:schemeClr val="accent1"/>
-          </a:lnRef>
-          <a:fillRef idx="3">
-            <a:schemeClr val="accent1"/>
-          </a:fillRef>
-          <a:effectRef idx="2">
-            <a:schemeClr val="accent1"/>
-          </a:effectRef>
-          <a:fontRef idx="minor">
-            <a:schemeClr val="lt1"/>
-          </a:fontRef>
-        </p:style>
-        <p:txBody>
-          <a:bodyPr rtlCol="0" anchor="ctr"/>
-          <a:lstStyle/>
-          <a:p>
-            <a:pPr algn="ctr"/>
-          </a:p>
-        </p:txBody>
-      </p:sp>
-      <p:sp>
-        <p:nvSpPr>
-          <p:cNvPr id="18" name="TextBox 17"/>
-          <p:cNvSpPr txBox="1"/>
-          <p:nvPr/>
-        </p:nvSpPr>
-        <p:spPr>
-          <a:xfrm>
-            <a:off x="548640" y="3749039"/>
-            <a:ext cx="10972800" cy="274320"/>
-          </a:xfrm>
-          <a:prstGeom prst="rect">
-            <a:avLst/>
-          </a:prstGeom>
-          <a:noFill/>
-        </p:spPr>
-        <p:txBody>
-          <a:bodyPr wrap="none">
-            <a:spAutoFit/>
-          </a:bodyPr>
-          <a:lstStyle/>
-          <a:p>
-            <a:pPr>
-              <a:defRPr sz="2000" b="1">
-                <a:solidFill>
-                  <a:srgbClr val="FFFFFF"/>
-                </a:solidFill>
-              </a:defRPr>
-            </a:pPr>
-            <a:r>
-              <a:t>Membership:</a:t>
-            </a:r>
-          </a:p>
-        </p:txBody>
-      </p:sp>
-      <p:sp>
-        <p:nvSpPr>
-          <p:cNvPr id="19" name="TextBox 18"/>
-          <p:cNvSpPr txBox="1"/>
-          <p:nvPr/>
-        </p:nvSpPr>
-        <p:spPr>
-          <a:xfrm>
-            <a:off x="457200" y="4206240"/>
-            <a:ext cx="11247120" cy="320040"/>
-          </a:xfrm>
-          <a:prstGeom prst="rect">
-            <a:avLst/>
-          </a:prstGeom>
-          <a:noFill/>
-        </p:spPr>
-        <p:txBody>
-          <a:bodyPr wrap="none">
-            <a:spAutoFit/>
-          </a:bodyPr>
-          <a:lstStyle/>
-          <a:p>
-            <a:pPr>
-              <a:defRPr sz="1700">
-                <a:solidFill>
-                  <a:srgbClr val="333333"/>
-                </a:solidFill>
-              </a:defRPr>
-            </a:pPr>
-            <a:r>
-              <a:t>3 in numbers  # O(1) - very fast!</a:t>
-            </a:r>
-          </a:p>
-        </p:txBody>
-      </p:sp>
-      <p:sp>
-        <p:nvSpPr>
-          <p:cNvPr id="20" name="Rectangle 19"/>
-          <p:cNvSpPr/>
-          <p:nvPr/>
-        </p:nvSpPr>
-        <p:spPr>
-          <a:xfrm>
-            <a:off x="365760" y="4434840"/>
-            <a:ext cx="11430000" cy="365760"/>
-          </a:xfrm>
-          <a:prstGeom prst="rect">
-            <a:avLst/>
-          </a:prstGeom>
-          <a:solidFill>
-            <a:srgbClr val="0078D7"/>
-          </a:solidFill>
-          <a:ln>
-            <a:noFill/>
-          </a:ln>
-        </p:spPr>
-        <p:style>
-          <a:lnRef idx="1">
-            <a:schemeClr val="accent1"/>
-          </a:lnRef>
-          <a:fillRef idx="3">
-            <a:schemeClr val="accent1"/>
-          </a:fillRef>
-          <a:effectRef idx="2">
-            <a:schemeClr val="accent1"/>
-          </a:effectRef>
-          <a:fontRef idx="minor">
-            <a:schemeClr val="lt1"/>
-          </a:fontRef>
-        </p:style>
-        <p:txBody>
-          <a:bodyPr rtlCol="0" anchor="ctr"/>
-          <a:lstStyle/>
-          <a:p>
-            <a:pPr algn="ctr"/>
-          </a:p>
-        </p:txBody>
-      </p:sp>
-      <p:sp>
-        <p:nvSpPr>
-          <p:cNvPr id="21" name="TextBox 20"/>
-          <p:cNvSpPr txBox="1"/>
-          <p:nvPr/>
-        </p:nvSpPr>
-        <p:spPr>
-          <a:xfrm>
-            <a:off x="548640" y="4480559"/>
-            <a:ext cx="10972800" cy="274320"/>
-          </a:xfrm>
-          <a:prstGeom prst="rect">
-            <a:avLst/>
-          </a:prstGeom>
-          <a:noFill/>
-        </p:spPr>
-        <p:txBody>
-          <a:bodyPr wrap="none">
-            <a:spAutoFit/>
-          </a:bodyPr>
-          <a:lstStyle/>
-          <a:p>
-            <a:pPr>
-              <a:defRPr sz="2000" b="1">
-                <a:solidFill>
-                  <a:srgbClr val="FFFFFF"/>
-                </a:solidFill>
-              </a:defRPr>
-            </a:pPr>
-            <a:r>
-              <a:t>Set Math:</a:t>
-            </a:r>
-          </a:p>
-        </p:txBody>
-      </p:sp>
-      <p:sp>
-        <p:nvSpPr>
-          <p:cNvPr id="22" name="Rectangle 21"/>
-          <p:cNvSpPr/>
-          <p:nvPr/>
-        </p:nvSpPr>
-        <p:spPr>
-          <a:xfrm>
-            <a:off x="640080" y="4892040"/>
-            <a:ext cx="10789920" cy="640080"/>
-          </a:xfrm>
-          <a:prstGeom prst="rect">
-            <a:avLst/>
-          </a:prstGeom>
-          <a:solidFill>
-            <a:srgbClr val="282C34"/>
-          </a:solidFill>
-          <a:ln>
-            <a:noFill/>
-          </a:ln>
-        </p:spPr>
-        <p:style>
-          <a:lnRef idx="1">
-            <a:schemeClr val="accent1"/>
-          </a:lnRef>
-          <a:fillRef idx="3">
-            <a:schemeClr val="accent1"/>
-          </a:fillRef>
-          <a:effectRef idx="2">
-            <a:schemeClr val="accent1"/>
-          </a:effectRef>
-          <a:fontRef idx="minor">
-            <a:schemeClr val="lt1"/>
-          </a:fontRef>
-        </p:style>
-        <p:txBody>
-          <a:bodyPr rtlCol="0" anchor="ctr"/>
-          <a:lstStyle/>
-          <a:p>
-            <a:pPr algn="ctr"/>
-          </a:p>
-        </p:txBody>
-      </p:sp>
-      <p:sp>
-        <p:nvSpPr>
-          <p:cNvPr id="23" name="Rectangle 22"/>
-          <p:cNvSpPr/>
-          <p:nvPr/>
-        </p:nvSpPr>
-        <p:spPr>
-          <a:xfrm>
-            <a:off x="640080" y="4892040"/>
-            <a:ext cx="73152" cy="640080"/>
-          </a:xfrm>
-          <a:prstGeom prst="rect">
-            <a:avLst/>
-          </a:prstGeom>
-          <a:solidFill>
-            <a:srgbClr val="61AFEF"/>
-          </a:solidFill>
-          <a:ln>
-            <a:noFill/>
-          </a:ln>
-        </p:spPr>
-        <p:style>
-          <a:lnRef idx="1">
-            <a:schemeClr val="accent1"/>
-          </a:lnRef>
-          <a:fillRef idx="3">
-            <a:schemeClr val="accent1"/>
-          </a:fillRef>
-          <a:effectRef idx="2">
-            <a:schemeClr val="accent1"/>
-          </a:effectRef>
-          <a:fontRef idx="minor">
-            <a:schemeClr val="lt1"/>
-          </a:fontRef>
-        </p:style>
-        <p:txBody>
-          <a:bodyPr rtlCol="0" anchor="ctr"/>
-          <a:lstStyle/>
-          <a:p>
-            <a:pPr algn="ctr"/>
-          </a:p>
-        </p:txBody>
-      </p:sp>
-      <p:sp>
-        <p:nvSpPr>
-          <p:cNvPr id="24" name="TextBox 23"/>
-          <p:cNvSpPr txBox="1"/>
-          <p:nvPr/>
-        </p:nvSpPr>
-        <p:spPr>
-          <a:xfrm>
-            <a:off x="914400" y="4937759"/>
-            <a:ext cx="10241280" cy="548640"/>
-          </a:xfrm>
-          <a:prstGeom prst="rect">
-            <a:avLst/>
-          </a:prstGeom>
-          <a:noFill/>
-        </p:spPr>
-        <p:txBody>
-          <a:bodyPr wrap="none">
-            <a:spAutoFit/>
-          </a:bodyPr>
-          <a:lstStyle/>
+              <a:t>empty = set()  # NOT {}</a:t>
+            </a:r>
+          </a:p>
           <a:p>
             <a:pPr>
               <a:spcAft>
@@ -6897,80 +7571,21 @@
               </a:defRPr>
             </a:pPr>
             <a:r>
-              <a:t>a = {1, 2, 3}</a:t>
-            </a:r>
-          </a:p>
-          <a:p>
-            <a:pPr>
-              <a:spcAft>
-                <a:spcPts val="200"/>
-              </a:spcAft>
-              <a:defRPr sz="1400">
-                <a:solidFill>
-                  <a:srgbClr val="ABB2BF"/>
-                </a:solidFill>
-                <a:latin typeface="Consolas"/>
-              </a:defRPr>
-            </a:pPr>
-            <a:r>
-              <a:t>b = {3, 4, 5}</a:t>
-            </a:r>
-          </a:p>
-        </p:txBody>
-      </p:sp>
-      <p:sp>
-        <p:nvSpPr>
-          <p:cNvPr id="25" name="Rectangle 24"/>
-          <p:cNvSpPr/>
-          <p:nvPr/>
-        </p:nvSpPr>
-        <p:spPr>
-          <a:xfrm>
-            <a:off x="365760" y="5669280"/>
-            <a:ext cx="11430000" cy="365760"/>
-          </a:xfrm>
-          <a:prstGeom prst="rect">
-            <a:avLst/>
-          </a:prstGeom>
-          <a:solidFill>
-            <a:srgbClr val="0078D7"/>
-          </a:solidFill>
-          <a:ln>
-            <a:noFill/>
-          </a:ln>
-        </p:spPr>
-        <p:style>
-          <a:lnRef idx="1">
-            <a:schemeClr val="accent1"/>
-          </a:lnRef>
-          <a:fillRef idx="3">
-            <a:schemeClr val="accent1"/>
-          </a:fillRef>
-          <a:effectRef idx="2">
-            <a:schemeClr val="accent1"/>
-          </a:effectRef>
-          <a:fontRef idx="minor">
-            <a:schemeClr val="lt1"/>
-          </a:fontRef>
-        </p:style>
-        <p:txBody>
-          <a:bodyPr rtlCol="0" anchor="ctr"/>
-          <a:lstStyle/>
-          <a:p>
-            <a:pPr algn="ctr"/>
-          </a:p>
-        </p:txBody>
-      </p:sp>
-      <p:sp>
-        <p:nvSpPr>
-          <p:cNvPr id="26" name="TextBox 25"/>
+              <a:t>from_list = set([1, 2, 2, 3])  # {1, 2, 3}</a:t>
+            </a:r>
+          </a:p>
+        </p:txBody>
+      </p:sp>
+      <p:sp>
+        <p:nvSpPr>
+          <p:cNvPr id="16" name="TextBox 15"/>
           <p:cNvSpPr txBox="1"/>
           <p:nvPr/>
         </p:nvSpPr>
         <p:spPr>
           <a:xfrm>
-            <a:off x="548640" y="5715000"/>
-            <a:ext cx="10972800" cy="274320"/>
+            <a:off x="457200" y="4206240"/>
+            <a:ext cx="11247120" cy="320040"/>
           </a:xfrm>
           <a:prstGeom prst="rect">
             <a:avLst/>
@@ -6984,71 +7599,28 @@
           <a:lstStyle/>
           <a:p>
             <a:pPr>
-              <a:defRPr sz="2000" b="1">
-                <a:solidFill>
-                  <a:srgbClr val="FFFFFF"/>
-                </a:solidFill>
-              </a:defRPr>
-            </a:pPr>
-            <a:r>
-              <a:t>a | b  # Union: {1, 2, 3, 4, 5}</a:t>
-            </a:r>
-          </a:p>
-        </p:txBody>
-      </p:sp>
-      <p:sp>
-        <p:nvSpPr>
-          <p:cNvPr id="27" name="Rectangle 26"/>
-          <p:cNvSpPr/>
-          <p:nvPr/>
-        </p:nvSpPr>
-        <p:spPr>
-          <a:xfrm>
-            <a:off x="365760" y="6126480"/>
-            <a:ext cx="11430000" cy="365760"/>
-          </a:xfrm>
-          <a:prstGeom prst="rect">
-            <a:avLst/>
-          </a:prstGeom>
-          <a:solidFill>
-            <a:srgbClr val="0078D7"/>
-          </a:solidFill>
-          <a:ln>
-            <a:noFill/>
-          </a:ln>
-        </p:spPr>
-        <p:style>
-          <a:lnRef idx="1">
-            <a:schemeClr val="accent1"/>
-          </a:lnRef>
-          <a:fillRef idx="3">
-            <a:schemeClr val="accent1"/>
-          </a:fillRef>
-          <a:effectRef idx="2">
-            <a:schemeClr val="accent1"/>
-          </a:effectRef>
-          <a:fontRef idx="minor">
-            <a:schemeClr val="lt1"/>
-          </a:fontRef>
-        </p:style>
-        <p:txBody>
-          <a:bodyPr rtlCol="0" anchor="ctr"/>
-          <a:lstStyle/>
-          <a:p>
-            <a:pPr algn="ctr"/>
-          </a:p>
-        </p:txBody>
-      </p:sp>
-      <p:sp>
-        <p:nvSpPr>
-          <p:cNvPr id="28" name="TextBox 27"/>
+              <a:defRPr sz="1700">
+                <a:solidFill>
+                  <a:srgbClr val="333333"/>
+                </a:solidFill>
+              </a:defRPr>
+            </a:pPr>
+            <a:r>
+              <a:t>Why Use Sets?</a:t>
+            </a:r>
+          </a:p>
+        </p:txBody>
+      </p:sp>
+      <p:sp>
+        <p:nvSpPr>
+          <p:cNvPr id="17" name="TextBox 16"/>
           <p:cNvSpPr txBox="1"/>
           <p:nvPr/>
         </p:nvSpPr>
         <p:spPr>
           <a:xfrm>
-            <a:off x="548640" y="6172200"/>
-            <a:ext cx="10972800" cy="274320"/>
+            <a:off x="457200" y="4480559"/>
+            <a:ext cx="11247120" cy="320040"/>
           </a:xfrm>
           <a:prstGeom prst="rect">
             <a:avLst/>
@@ -7061,15 +7633,120 @@
           </a:bodyPr>
           <a:lstStyle/>
           <a:p>
-            <a:pPr>
-              <a:defRPr sz="2000" b="1">
-                <a:solidFill>
-                  <a:srgbClr val="FFFFFF"/>
-                </a:solidFill>
-              </a:defRPr>
-            </a:pPr>
-            <a:r>
-              <a:t>a &amp; b  # Intersection: {3}</a:t>
+            <a:pPr lvl="1">
+              <a:defRPr sz="1600">
+                <a:solidFill>
+                  <a:srgbClr val="333333"/>
+                </a:solidFill>
+              </a:defRPr>
+            </a:pPr>
+            <a:r>
+              <a:t>• Remove duplicates</a:t>
+            </a:r>
+          </a:p>
+        </p:txBody>
+      </p:sp>
+      <p:sp>
+        <p:nvSpPr>
+          <p:cNvPr id="18" name="TextBox 17"/>
+          <p:cNvSpPr txBox="1"/>
+          <p:nvPr/>
+        </p:nvSpPr>
+        <p:spPr>
+          <a:xfrm>
+            <a:off x="457200" y="4754879"/>
+            <a:ext cx="11247120" cy="320040"/>
+          </a:xfrm>
+          <a:prstGeom prst="rect">
+            <a:avLst/>
+          </a:prstGeom>
+          <a:noFill/>
+        </p:spPr>
+        <p:txBody>
+          <a:bodyPr wrap="none">
+            <a:spAutoFit/>
+          </a:bodyPr>
+          <a:lstStyle/>
+          <a:p>
+            <a:pPr lvl="1">
+              <a:defRPr sz="1600">
+                <a:solidFill>
+                  <a:srgbClr val="333333"/>
+                </a:solidFill>
+              </a:defRPr>
+            </a:pPr>
+            <a:r>
+              <a:t>• Fast membership testing</a:t>
+            </a:r>
+          </a:p>
+        </p:txBody>
+      </p:sp>
+      <p:sp>
+        <p:nvSpPr>
+          <p:cNvPr id="19" name="TextBox 18"/>
+          <p:cNvSpPr txBox="1"/>
+          <p:nvPr/>
+        </p:nvSpPr>
+        <p:spPr>
+          <a:xfrm>
+            <a:off x="457200" y="5029199"/>
+            <a:ext cx="11247120" cy="320040"/>
+          </a:xfrm>
+          <a:prstGeom prst="rect">
+            <a:avLst/>
+          </a:prstGeom>
+          <a:noFill/>
+        </p:spPr>
+        <p:txBody>
+          <a:bodyPr wrap="none">
+            <a:spAutoFit/>
+          </a:bodyPr>
+          <a:lstStyle/>
+          <a:p>
+            <a:pPr lvl="1">
+              <a:defRPr sz="1600">
+                <a:solidFill>
+                  <a:srgbClr val="333333"/>
+                </a:solidFill>
+              </a:defRPr>
+            </a:pPr>
+            <a:r>
+              <a:t>• Mathematical set operations</a:t>
+            </a:r>
+          </a:p>
+        </p:txBody>
+      </p:sp>
+      <p:sp>
+        <p:nvSpPr>
+          <p:cNvPr id="20" name="TextBox 19"/>
+          <p:cNvSpPr txBox="1"/>
+          <p:nvPr/>
+        </p:nvSpPr>
+        <p:spPr>
+          <a:xfrm>
+            <a:off x="457200" y="5303519"/>
+            <a:ext cx="11247120" cy="320040"/>
+          </a:xfrm>
+          <a:prstGeom prst="rect">
+            <a:avLst/>
+          </a:prstGeom>
+          <a:noFill/>
+        </p:spPr>
+        <p:txBody>
+          <a:bodyPr wrap="none">
+            <a:spAutoFit/>
+          </a:bodyPr>
+          <a:lstStyle/>
+          <a:p>
+            <a:pPr lvl="1">
+              <a:defRPr sz="1600">
+                <a:solidFill>
+                  <a:srgbClr val="333333"/>
+                </a:solidFill>
+              </a:defRPr>
+            </a:pPr>
+            <a:r>
+              <a:t>• Track unique items</a:t>
             </a:r>
           </a:p>
         </p:txBody>
@@ -7107,6 +7784,49 @@
             <a:avLst/>
           </a:prstGeom>
           <a:solidFill>
+            <a:srgbClr val="FAFAFA"/>
+          </a:solidFill>
+          <a:ln>
+            <a:noFill/>
+          </a:ln>
+        </p:spPr>
+        <p:style>
+          <a:lnRef idx="1">
+            <a:schemeClr val="accent1"/>
+          </a:lnRef>
+          <a:fillRef idx="3">
+            <a:schemeClr val="accent1"/>
+          </a:fillRef>
+          <a:effectRef idx="2">
+            <a:schemeClr val="accent1"/>
+          </a:effectRef>
+          <a:fontRef idx="minor">
+            <a:schemeClr val="lt1"/>
+          </a:fontRef>
+        </p:style>
+        <p:txBody>
+          <a:bodyPr rtlCol="0" anchor="ctr"/>
+          <a:lstStyle/>
+          <a:p>
+            <a:pPr algn="ctr"/>
+          </a:p>
+        </p:txBody>
+      </p:sp>
+      <p:sp>
+        <p:nvSpPr>
+          <p:cNvPr id="3" name="Rectangle 2"/>
+          <p:cNvSpPr/>
+          <p:nvPr/>
+        </p:nvSpPr>
+        <p:spPr>
+          <a:xfrm>
+            <a:off x="0" y="0"/>
+            <a:ext cx="12191695" cy="1097280"/>
+          </a:xfrm>
+          <a:prstGeom prst="rect">
+            <a:avLst/>
+          </a:prstGeom>
+          <a:solidFill>
             <a:srgbClr val="0066CC"/>
           </a:solidFill>
           <a:ln>
@@ -7137,14 +7857,14 @@
       </p:sp>
       <p:sp>
         <p:nvSpPr>
-          <p:cNvPr id="3" name="Rectangle 2"/>
+          <p:cNvPr id="4" name="Rectangle 3"/>
           <p:cNvSpPr/>
           <p:nvPr/>
         </p:nvSpPr>
         <p:spPr>
           <a:xfrm>
-            <a:off x="0" y="2743200"/>
-            <a:ext cx="3657600" cy="137160"/>
+            <a:off x="0" y="1097280"/>
+            <a:ext cx="137160" cy="5760720"/>
           </a:xfrm>
           <a:prstGeom prst="rect">
             <a:avLst/>
@@ -7180,20 +7900,55 @@
       </p:sp>
       <p:sp>
         <p:nvSpPr>
-          <p:cNvPr id="4" name="Rectangle 3"/>
+          <p:cNvPr id="5" name="TextBox 4"/>
+          <p:cNvSpPr txBox="1"/>
+          <p:nvPr/>
+        </p:nvSpPr>
+        <p:spPr>
+          <a:xfrm>
+            <a:off x="365760" y="274320"/>
+            <a:ext cx="10972800" cy="640080"/>
+          </a:xfrm>
+          <a:prstGeom prst="rect">
+            <a:avLst/>
+          </a:prstGeom>
+          <a:noFill/>
+        </p:spPr>
+        <p:txBody>
+          <a:bodyPr wrap="none">
+            <a:spAutoFit/>
+          </a:bodyPr>
+          <a:lstStyle/>
+          <a:p>
+            <a:pPr>
+              <a:defRPr sz="3600" b="1">
+                <a:solidFill>
+                  <a:srgbClr val="FFFFFF"/>
+                </a:solidFill>
+              </a:defRPr>
+            </a:pPr>
+            <a:r>
+              <a:t>Set Operations</a:t>
+            </a:r>
+          </a:p>
+        </p:txBody>
+      </p:sp>
+      <p:sp>
+        <p:nvSpPr>
+          <p:cNvPr id="6" name="Rectangle 5"/>
           <p:cNvSpPr/>
           <p:nvPr/>
         </p:nvSpPr>
         <p:spPr>
           <a:xfrm>
-            <a:off x="8531352" y="4114800"/>
-            <a:ext cx="3657600" cy="137160"/>
+            <a:off x="365760" y="1325880"/>
+            <a:ext cx="11430000" cy="365760"/>
           </a:xfrm>
           <a:prstGeom prst="rect">
             <a:avLst/>
           </a:prstGeom>
           <a:solidFill>
-            <a:srgbClr val="FFBB33"/>
+            <a:srgbClr val="0078D7"/>
           </a:solidFill>
           <a:ln>
             <a:noFill/>
@@ -7223,14 +7978,14 @@
       </p:sp>
       <p:sp>
         <p:nvSpPr>
-          <p:cNvPr id="5" name="TextBox 4"/>
+          <p:cNvPr id="7" name="TextBox 6"/>
           <p:cNvSpPr txBox="1"/>
           <p:nvPr/>
         </p:nvSpPr>
         <p:spPr>
           <a:xfrm>
-            <a:off x="914400" y="2560320"/>
-            <a:ext cx="10360152" cy="1371600"/>
+            <a:off x="548640" y="1371600"/>
+            <a:ext cx="10972800" cy="274320"/>
           </a:xfrm>
           <a:prstGeom prst="rect">
             <a:avLst/>
@@ -7243,15 +7998,780 @@
           </a:bodyPr>
           <a:lstStyle/>
           <a:p>
-            <a:pPr algn="ctr">
-              <a:defRPr sz="4800" b="1">
+            <a:pPr>
+              <a:defRPr sz="2000" b="1">
                 <a:solidFill>
                   <a:srgbClr val="FFFFFF"/>
                 </a:solidFill>
               </a:defRPr>
             </a:pPr>
             <a:r>
-              <a:t>When to Use Each</a:t>
+              <a:t>Basic Operations:</a:t>
+            </a:r>
+          </a:p>
+        </p:txBody>
+      </p:sp>
+      <p:sp>
+        <p:nvSpPr>
+          <p:cNvPr id="8" name="Rectangle 7"/>
+          <p:cNvSpPr/>
+          <p:nvPr/>
+        </p:nvSpPr>
+        <p:spPr>
+          <a:xfrm>
+            <a:off x="640080" y="1783080"/>
+            <a:ext cx="10789920" cy="411480"/>
+          </a:xfrm>
+          <a:prstGeom prst="rect">
+            <a:avLst/>
+          </a:prstGeom>
+          <a:solidFill>
+            <a:srgbClr val="282C34"/>
+          </a:solidFill>
+          <a:ln>
+            <a:noFill/>
+          </a:ln>
+        </p:spPr>
+        <p:style>
+          <a:lnRef idx="1">
+            <a:schemeClr val="accent1"/>
+          </a:lnRef>
+          <a:fillRef idx="3">
+            <a:schemeClr val="accent1"/>
+          </a:fillRef>
+          <a:effectRef idx="2">
+            <a:schemeClr val="accent1"/>
+          </a:effectRef>
+          <a:fontRef idx="minor">
+            <a:schemeClr val="lt1"/>
+          </a:fontRef>
+        </p:style>
+        <p:txBody>
+          <a:bodyPr rtlCol="0" anchor="ctr"/>
+          <a:lstStyle/>
+          <a:p>
+            <a:pPr algn="ctr"/>
+          </a:p>
+        </p:txBody>
+      </p:sp>
+      <p:sp>
+        <p:nvSpPr>
+          <p:cNvPr id="9" name="Rectangle 8"/>
+          <p:cNvSpPr/>
+          <p:nvPr/>
+        </p:nvSpPr>
+        <p:spPr>
+          <a:xfrm>
+            <a:off x="640080" y="1783080"/>
+            <a:ext cx="73152" cy="411480"/>
+          </a:xfrm>
+          <a:prstGeom prst="rect">
+            <a:avLst/>
+          </a:prstGeom>
+          <a:solidFill>
+            <a:srgbClr val="61AFEF"/>
+          </a:solidFill>
+          <a:ln>
+            <a:noFill/>
+          </a:ln>
+        </p:spPr>
+        <p:style>
+          <a:lnRef idx="1">
+            <a:schemeClr val="accent1"/>
+          </a:lnRef>
+          <a:fillRef idx="3">
+            <a:schemeClr val="accent1"/>
+          </a:fillRef>
+          <a:effectRef idx="2">
+            <a:schemeClr val="accent1"/>
+          </a:effectRef>
+          <a:fontRef idx="minor">
+            <a:schemeClr val="lt1"/>
+          </a:fontRef>
+        </p:style>
+        <p:txBody>
+          <a:bodyPr rtlCol="0" anchor="ctr"/>
+          <a:lstStyle/>
+          <a:p>
+            <a:pPr algn="ctr"/>
+          </a:p>
+        </p:txBody>
+      </p:sp>
+      <p:sp>
+        <p:nvSpPr>
+          <p:cNvPr id="10" name="TextBox 9"/>
+          <p:cNvSpPr txBox="1"/>
+          <p:nvPr/>
+        </p:nvSpPr>
+        <p:spPr>
+          <a:xfrm>
+            <a:off x="914400" y="1828800"/>
+            <a:ext cx="10241280" cy="320040"/>
+          </a:xfrm>
+          <a:prstGeom prst="rect">
+            <a:avLst/>
+          </a:prstGeom>
+          <a:noFill/>
+        </p:spPr>
+        <p:txBody>
+          <a:bodyPr wrap="none">
+            <a:spAutoFit/>
+          </a:bodyPr>
+          <a:lstStyle/>
+          <a:p>
+            <a:pPr>
+              <a:spcAft>
+                <a:spcPts val="200"/>
+              </a:spcAft>
+              <a:defRPr sz="1400">
+                <a:solidFill>
+                  <a:srgbClr val="ABB2BF"/>
+                </a:solidFill>
+                <a:latin typeface="Consolas"/>
+              </a:defRPr>
+            </a:pPr>
+            <a:r>
+              <a:t>numbers = {1, 2, 3}</a:t>
+            </a:r>
+          </a:p>
+        </p:txBody>
+      </p:sp>
+      <p:sp>
+        <p:nvSpPr>
+          <p:cNvPr id="11" name="TextBox 10"/>
+          <p:cNvSpPr txBox="1"/>
+          <p:nvPr/>
+        </p:nvSpPr>
+        <p:spPr>
+          <a:xfrm>
+            <a:off x="457200" y="2377440"/>
+            <a:ext cx="11247120" cy="320040"/>
+          </a:xfrm>
+          <a:prstGeom prst="rect">
+            <a:avLst/>
+          </a:prstGeom>
+          <a:noFill/>
+        </p:spPr>
+        <p:txBody>
+          <a:bodyPr wrap="none">
+            <a:spAutoFit/>
+          </a:bodyPr>
+          <a:lstStyle/>
+          <a:p>
+            <a:pPr>
+              <a:defRPr sz="1700">
+                <a:solidFill>
+                  <a:srgbClr val="333333"/>
+                </a:solidFill>
+              </a:defRPr>
+            </a:pPr>
+            <a:r>
+              <a:t>numbers.add(4)</a:t>
+            </a:r>
+          </a:p>
+        </p:txBody>
+      </p:sp>
+      <p:sp>
+        <p:nvSpPr>
+          <p:cNvPr id="12" name="Rectangle 11"/>
+          <p:cNvSpPr/>
+          <p:nvPr/>
+        </p:nvSpPr>
+        <p:spPr>
+          <a:xfrm>
+            <a:off x="640080" y="2606040"/>
+            <a:ext cx="10789920" cy="411480"/>
+          </a:xfrm>
+          <a:prstGeom prst="rect">
+            <a:avLst/>
+          </a:prstGeom>
+          <a:solidFill>
+            <a:srgbClr val="282C34"/>
+          </a:solidFill>
+          <a:ln>
+            <a:noFill/>
+          </a:ln>
+        </p:spPr>
+        <p:style>
+          <a:lnRef idx="1">
+            <a:schemeClr val="accent1"/>
+          </a:lnRef>
+          <a:fillRef idx="3">
+            <a:schemeClr val="accent1"/>
+          </a:fillRef>
+          <a:effectRef idx="2">
+            <a:schemeClr val="accent1"/>
+          </a:effectRef>
+          <a:fontRef idx="minor">
+            <a:schemeClr val="lt1"/>
+          </a:fontRef>
+        </p:style>
+        <p:txBody>
+          <a:bodyPr rtlCol="0" anchor="ctr"/>
+          <a:lstStyle/>
+          <a:p>
+            <a:pPr algn="ctr"/>
+          </a:p>
+        </p:txBody>
+      </p:sp>
+      <p:sp>
+        <p:nvSpPr>
+          <p:cNvPr id="13" name="Rectangle 12"/>
+          <p:cNvSpPr/>
+          <p:nvPr/>
+        </p:nvSpPr>
+        <p:spPr>
+          <a:xfrm>
+            <a:off x="640080" y="2606040"/>
+            <a:ext cx="73152" cy="411480"/>
+          </a:xfrm>
+          <a:prstGeom prst="rect">
+            <a:avLst/>
+          </a:prstGeom>
+          <a:solidFill>
+            <a:srgbClr val="61AFEF"/>
+          </a:solidFill>
+          <a:ln>
+            <a:noFill/>
+          </a:ln>
+        </p:spPr>
+        <p:style>
+          <a:lnRef idx="1">
+            <a:schemeClr val="accent1"/>
+          </a:lnRef>
+          <a:fillRef idx="3">
+            <a:schemeClr val="accent1"/>
+          </a:fillRef>
+          <a:effectRef idx="2">
+            <a:schemeClr val="accent1"/>
+          </a:effectRef>
+          <a:fontRef idx="minor">
+            <a:schemeClr val="lt1"/>
+          </a:fontRef>
+        </p:style>
+        <p:txBody>
+          <a:bodyPr rtlCol="0" anchor="ctr"/>
+          <a:lstStyle/>
+          <a:p>
+            <a:pPr algn="ctr"/>
+          </a:p>
+        </p:txBody>
+      </p:sp>
+      <p:sp>
+        <p:nvSpPr>
+          <p:cNvPr id="14" name="TextBox 13"/>
+          <p:cNvSpPr txBox="1"/>
+          <p:nvPr/>
+        </p:nvSpPr>
+        <p:spPr>
+          <a:xfrm>
+            <a:off x="914400" y="2651760"/>
+            <a:ext cx="10241280" cy="320040"/>
+          </a:xfrm>
+          <a:prstGeom prst="rect">
+            <a:avLst/>
+          </a:prstGeom>
+          <a:noFill/>
+        </p:spPr>
+        <p:txBody>
+          <a:bodyPr wrap="none">
+            <a:spAutoFit/>
+          </a:bodyPr>
+          <a:lstStyle/>
+          <a:p>
+            <a:pPr>
+              <a:spcAft>
+                <a:spcPts val="200"/>
+              </a:spcAft>
+              <a:defRPr sz="1400">
+                <a:solidFill>
+                  <a:srgbClr val="ABB2BF"/>
+                </a:solidFill>
+                <a:latin typeface="Consolas"/>
+              </a:defRPr>
+            </a:pPr>
+            <a:r>
+              <a:t>numbers.remove(2)  # Error if not found</a:t>
+            </a:r>
+          </a:p>
+        </p:txBody>
+      </p:sp>
+      <p:sp>
+        <p:nvSpPr>
+          <p:cNvPr id="15" name="TextBox 14"/>
+          <p:cNvSpPr txBox="1"/>
+          <p:nvPr/>
+        </p:nvSpPr>
+        <p:spPr>
+          <a:xfrm>
+            <a:off x="457200" y="3200400"/>
+            <a:ext cx="11247120" cy="320040"/>
+          </a:xfrm>
+          <a:prstGeom prst="rect">
+            <a:avLst/>
+          </a:prstGeom>
+          <a:noFill/>
+        </p:spPr>
+        <p:txBody>
+          <a:bodyPr wrap="none">
+            <a:spAutoFit/>
+          </a:bodyPr>
+          <a:lstStyle/>
+          <a:p>
+            <a:pPr>
+              <a:defRPr sz="1700">
+                <a:solidFill>
+                  <a:srgbClr val="333333"/>
+                </a:solidFill>
+              </a:defRPr>
+            </a:pPr>
+            <a:r>
+              <a:t>numbers.discard(2)  # No error</a:t>
+            </a:r>
+          </a:p>
+        </p:txBody>
+      </p:sp>
+      <p:sp>
+        <p:nvSpPr>
+          <p:cNvPr id="16" name="TextBox 15"/>
+          <p:cNvSpPr txBox="1"/>
+          <p:nvPr/>
+        </p:nvSpPr>
+        <p:spPr>
+          <a:xfrm>
+            <a:off x="457200" y="3474720"/>
+            <a:ext cx="11247120" cy="320040"/>
+          </a:xfrm>
+          <a:prstGeom prst="rect">
+            <a:avLst/>
+          </a:prstGeom>
+          <a:noFill/>
+        </p:spPr>
+        <p:txBody>
+          <a:bodyPr wrap="none">
+            <a:spAutoFit/>
+          </a:bodyPr>
+          <a:lstStyle/>
+          <a:p>
+            <a:pPr>
+              <a:defRPr sz="1700">
+                <a:solidFill>
+                  <a:srgbClr val="333333"/>
+                </a:solidFill>
+              </a:defRPr>
+            </a:pPr>
+            <a:r>
+              <a:t>numbers.pop()  # Remove arbitrary</a:t>
+            </a:r>
+          </a:p>
+        </p:txBody>
+      </p:sp>
+      <p:sp>
+        <p:nvSpPr>
+          <p:cNvPr id="17" name="Rectangle 16"/>
+          <p:cNvSpPr/>
+          <p:nvPr/>
+        </p:nvSpPr>
+        <p:spPr>
+          <a:xfrm>
+            <a:off x="365760" y="3703320"/>
+            <a:ext cx="11430000" cy="365760"/>
+          </a:xfrm>
+          <a:prstGeom prst="rect">
+            <a:avLst/>
+          </a:prstGeom>
+          <a:solidFill>
+            <a:srgbClr val="0078D7"/>
+          </a:solidFill>
+          <a:ln>
+            <a:noFill/>
+          </a:ln>
+        </p:spPr>
+        <p:style>
+          <a:lnRef idx="1">
+            <a:schemeClr val="accent1"/>
+          </a:lnRef>
+          <a:fillRef idx="3">
+            <a:schemeClr val="accent1"/>
+          </a:fillRef>
+          <a:effectRef idx="2">
+            <a:schemeClr val="accent1"/>
+          </a:effectRef>
+          <a:fontRef idx="minor">
+            <a:schemeClr val="lt1"/>
+          </a:fontRef>
+        </p:style>
+        <p:txBody>
+          <a:bodyPr rtlCol="0" anchor="ctr"/>
+          <a:lstStyle/>
+          <a:p>
+            <a:pPr algn="ctr"/>
+          </a:p>
+        </p:txBody>
+      </p:sp>
+      <p:sp>
+        <p:nvSpPr>
+          <p:cNvPr id="18" name="TextBox 17"/>
+          <p:cNvSpPr txBox="1"/>
+          <p:nvPr/>
+        </p:nvSpPr>
+        <p:spPr>
+          <a:xfrm>
+            <a:off x="548640" y="3749039"/>
+            <a:ext cx="10972800" cy="274320"/>
+          </a:xfrm>
+          <a:prstGeom prst="rect">
+            <a:avLst/>
+          </a:prstGeom>
+          <a:noFill/>
+        </p:spPr>
+        <p:txBody>
+          <a:bodyPr wrap="none">
+            <a:spAutoFit/>
+          </a:bodyPr>
+          <a:lstStyle/>
+          <a:p>
+            <a:pPr>
+              <a:defRPr sz="2000" b="1">
+                <a:solidFill>
+                  <a:srgbClr val="FFFFFF"/>
+                </a:solidFill>
+              </a:defRPr>
+            </a:pPr>
+            <a:r>
+              <a:t>Membership:</a:t>
+            </a:r>
+          </a:p>
+        </p:txBody>
+      </p:sp>
+      <p:sp>
+        <p:nvSpPr>
+          <p:cNvPr id="19" name="TextBox 18"/>
+          <p:cNvSpPr txBox="1"/>
+          <p:nvPr/>
+        </p:nvSpPr>
+        <p:spPr>
+          <a:xfrm>
+            <a:off x="457200" y="4206240"/>
+            <a:ext cx="11247120" cy="320040"/>
+          </a:xfrm>
+          <a:prstGeom prst="rect">
+            <a:avLst/>
+          </a:prstGeom>
+          <a:noFill/>
+        </p:spPr>
+        <p:txBody>
+          <a:bodyPr wrap="none">
+            <a:spAutoFit/>
+          </a:bodyPr>
+          <a:lstStyle/>
+          <a:p>
+            <a:pPr>
+              <a:defRPr sz="1700">
+                <a:solidFill>
+                  <a:srgbClr val="333333"/>
+                </a:solidFill>
+              </a:defRPr>
+            </a:pPr>
+            <a:r>
+              <a:t>3 in numbers  # O(1) - very fast!</a:t>
+            </a:r>
+          </a:p>
+        </p:txBody>
+      </p:sp>
+      <p:sp>
+        <p:nvSpPr>
+          <p:cNvPr id="20" name="Rectangle 19"/>
+          <p:cNvSpPr/>
+          <p:nvPr/>
+        </p:nvSpPr>
+        <p:spPr>
+          <a:xfrm>
+            <a:off x="365760" y="4434840"/>
+            <a:ext cx="11430000" cy="365760"/>
+          </a:xfrm>
+          <a:prstGeom prst="rect">
+            <a:avLst/>
+          </a:prstGeom>
+          <a:solidFill>
+            <a:srgbClr val="0078D7"/>
+          </a:solidFill>
+          <a:ln>
+            <a:noFill/>
+          </a:ln>
+        </p:spPr>
+        <p:style>
+          <a:lnRef idx="1">
+            <a:schemeClr val="accent1"/>
+          </a:lnRef>
+          <a:fillRef idx="3">
+            <a:schemeClr val="accent1"/>
+          </a:fillRef>
+          <a:effectRef idx="2">
+            <a:schemeClr val="accent1"/>
+          </a:effectRef>
+          <a:fontRef idx="minor">
+            <a:schemeClr val="lt1"/>
+          </a:fontRef>
+        </p:style>
+        <p:txBody>
+          <a:bodyPr rtlCol="0" anchor="ctr"/>
+          <a:lstStyle/>
+          <a:p>
+            <a:pPr algn="ctr"/>
+          </a:p>
+        </p:txBody>
+      </p:sp>
+      <p:sp>
+        <p:nvSpPr>
+          <p:cNvPr id="21" name="TextBox 20"/>
+          <p:cNvSpPr txBox="1"/>
+          <p:nvPr/>
+        </p:nvSpPr>
+        <p:spPr>
+          <a:xfrm>
+            <a:off x="548640" y="4480559"/>
+            <a:ext cx="10972800" cy="274320"/>
+          </a:xfrm>
+          <a:prstGeom prst="rect">
+            <a:avLst/>
+          </a:prstGeom>
+          <a:noFill/>
+        </p:spPr>
+        <p:txBody>
+          <a:bodyPr wrap="none">
+            <a:spAutoFit/>
+          </a:bodyPr>
+          <a:lstStyle/>
+          <a:p>
+            <a:pPr>
+              <a:defRPr sz="2000" b="1">
+                <a:solidFill>
+                  <a:srgbClr val="FFFFFF"/>
+                </a:solidFill>
+              </a:defRPr>
+            </a:pPr>
+            <a:r>
+              <a:t>Set Math:</a:t>
+            </a:r>
+          </a:p>
+        </p:txBody>
+      </p:sp>
+      <p:sp>
+        <p:nvSpPr>
+          <p:cNvPr id="22" name="Rectangle 21"/>
+          <p:cNvSpPr/>
+          <p:nvPr/>
+        </p:nvSpPr>
+        <p:spPr>
+          <a:xfrm>
+            <a:off x="640080" y="4892040"/>
+            <a:ext cx="10789920" cy="640080"/>
+          </a:xfrm>
+          <a:prstGeom prst="rect">
+            <a:avLst/>
+          </a:prstGeom>
+          <a:solidFill>
+            <a:srgbClr val="282C34"/>
+          </a:solidFill>
+          <a:ln>
+            <a:noFill/>
+          </a:ln>
+        </p:spPr>
+        <p:style>
+          <a:lnRef idx="1">
+            <a:schemeClr val="accent1"/>
+          </a:lnRef>
+          <a:fillRef idx="3">
+            <a:schemeClr val="accent1"/>
+          </a:fillRef>
+          <a:effectRef idx="2">
+            <a:schemeClr val="accent1"/>
+          </a:effectRef>
+          <a:fontRef idx="minor">
+            <a:schemeClr val="lt1"/>
+          </a:fontRef>
+        </p:style>
+        <p:txBody>
+          <a:bodyPr rtlCol="0" anchor="ctr"/>
+          <a:lstStyle/>
+          <a:p>
+            <a:pPr algn="ctr"/>
+          </a:p>
+        </p:txBody>
+      </p:sp>
+      <p:sp>
+        <p:nvSpPr>
+          <p:cNvPr id="23" name="Rectangle 22"/>
+          <p:cNvSpPr/>
+          <p:nvPr/>
+        </p:nvSpPr>
+        <p:spPr>
+          <a:xfrm>
+            <a:off x="640080" y="4892040"/>
+            <a:ext cx="73152" cy="640080"/>
+          </a:xfrm>
+          <a:prstGeom prst="rect">
+            <a:avLst/>
+          </a:prstGeom>
+          <a:solidFill>
+            <a:srgbClr val="61AFEF"/>
+          </a:solidFill>
+          <a:ln>
+            <a:noFill/>
+          </a:ln>
+        </p:spPr>
+        <p:style>
+          <a:lnRef idx="1">
+            <a:schemeClr val="accent1"/>
+          </a:lnRef>
+          <a:fillRef idx="3">
+            <a:schemeClr val="accent1"/>
+          </a:fillRef>
+          <a:effectRef idx="2">
+            <a:schemeClr val="accent1"/>
+          </a:effectRef>
+          <a:fontRef idx="minor">
+            <a:schemeClr val="lt1"/>
+          </a:fontRef>
+        </p:style>
+        <p:txBody>
+          <a:bodyPr rtlCol="0" anchor="ctr"/>
+          <a:lstStyle/>
+          <a:p>
+            <a:pPr algn="ctr"/>
+          </a:p>
+        </p:txBody>
+      </p:sp>
+      <p:sp>
+        <p:nvSpPr>
+          <p:cNvPr id="24" name="TextBox 23"/>
+          <p:cNvSpPr txBox="1"/>
+          <p:nvPr/>
+        </p:nvSpPr>
+        <p:spPr>
+          <a:xfrm>
+            <a:off x="914400" y="4937759"/>
+            <a:ext cx="10241280" cy="548640"/>
+          </a:xfrm>
+          <a:prstGeom prst="rect">
+            <a:avLst/>
+          </a:prstGeom>
+          <a:noFill/>
+        </p:spPr>
+        <p:txBody>
+          <a:bodyPr wrap="none">
+            <a:spAutoFit/>
+          </a:bodyPr>
+          <a:lstStyle/>
+          <a:p>
+            <a:pPr>
+              <a:spcAft>
+                <a:spcPts val="200"/>
+              </a:spcAft>
+              <a:defRPr sz="1400">
+                <a:solidFill>
+                  <a:srgbClr val="ABB2BF"/>
+                </a:solidFill>
+                <a:latin typeface="Consolas"/>
+              </a:defRPr>
+            </a:pPr>
+            <a:r>
+              <a:t>a = {1, 2, 3}</a:t>
+            </a:r>
+          </a:p>
+          <a:p>
+            <a:pPr>
+              <a:spcAft>
+                <a:spcPts val="200"/>
+              </a:spcAft>
+              <a:defRPr sz="1400">
+                <a:solidFill>
+                  <a:srgbClr val="ABB2BF"/>
+                </a:solidFill>
+                <a:latin typeface="Consolas"/>
+              </a:defRPr>
+            </a:pPr>
+            <a:r>
+              <a:t>b = {3, 4, 5}</a:t>
+            </a:r>
+          </a:p>
+        </p:txBody>
+      </p:sp>
+      <p:sp>
+        <p:nvSpPr>
+          <p:cNvPr id="25" name="Rectangle 24"/>
+          <p:cNvSpPr/>
+          <p:nvPr/>
+        </p:nvSpPr>
+        <p:spPr>
+          <a:xfrm>
+            <a:off x="365760" y="5669280"/>
+            <a:ext cx="11430000" cy="365760"/>
+          </a:xfrm>
+          <a:prstGeom prst="rect">
+            <a:avLst/>
+          </a:prstGeom>
+          <a:solidFill>
+            <a:srgbClr val="0078D7"/>
+          </a:solidFill>
+          <a:ln>
+            <a:noFill/>
+          </a:ln>
+        </p:spPr>
+        <p:style>
+          <a:lnRef idx="1">
+            <a:schemeClr val="accent1"/>
+          </a:lnRef>
+          <a:fillRef idx="3">
+            <a:schemeClr val="accent1"/>
+          </a:fillRef>
+          <a:effectRef idx="2">
+            <a:schemeClr val="accent1"/>
+          </a:effectRef>
+          <a:fontRef idx="minor">
+            <a:schemeClr val="lt1"/>
+          </a:fontRef>
+        </p:style>
+        <p:txBody>
+          <a:bodyPr rtlCol="0" anchor="ctr"/>
+          <a:lstStyle/>
+          <a:p>
+            <a:pPr algn="ctr"/>
+          </a:p>
+        </p:txBody>
+      </p:sp>
+      <p:sp>
+        <p:nvSpPr>
+          <p:cNvPr id="26" name="TextBox 25"/>
+          <p:cNvSpPr txBox="1"/>
+          <p:nvPr/>
+        </p:nvSpPr>
+        <p:spPr>
+          <a:xfrm>
+            <a:off x="548640" y="5715000"/>
+            <a:ext cx="10972800" cy="274320"/>
+          </a:xfrm>
+          <a:prstGeom prst="rect">
+            <a:avLst/>
+          </a:prstGeom>
+          <a:noFill/>
+        </p:spPr>
+        <p:txBody>
+          <a:bodyPr wrap="none">
+            <a:spAutoFit/>
+          </a:bodyPr>
+          <a:lstStyle/>
+          <a:p>
+            <a:pPr>
+              <a:defRPr sz="2000" b="1">
+                <a:solidFill>
+                  <a:srgbClr val="FFFFFF"/>
+                </a:solidFill>
+              </a:defRPr>
+            </a:pPr>
+            <a:r>
+              <a:t>a | b  # Union: {1, 2, 3, 4, 5}</a:t>
             </a:r>
           </a:p>
         </p:txBody>
@@ -7433,7 +8953,7 @@
               </a:defRPr>
             </a:pPr>
             <a:r>
-              <a:t>When to Use Each</a:t>
+              <a:t>Set Operations (continued)</a:t>
             </a:r>
           </a:p>
         </p:txBody>
@@ -7511,160 +9031,20 @@
               </a:defRPr>
             </a:pPr>
             <a:r>
-              <a:t>Use Tuple When:</a:t>
-            </a:r>
-          </a:p>
-        </p:txBody>
-      </p:sp>
-      <p:sp>
-        <p:nvSpPr>
-          <p:cNvPr id="8" name="TextBox 7"/>
-          <p:cNvSpPr txBox="1"/>
-          <p:nvPr/>
-        </p:nvSpPr>
-        <p:spPr>
-          <a:xfrm>
-            <a:off x="457200" y="1828800"/>
-            <a:ext cx="11247120" cy="320040"/>
-          </a:xfrm>
-          <a:prstGeom prst="rect">
-            <a:avLst/>
-          </a:prstGeom>
-          <a:noFill/>
-        </p:spPr>
-        <p:txBody>
-          <a:bodyPr wrap="none">
-            <a:spAutoFit/>
-          </a:bodyPr>
-          <a:lstStyle/>
-          <a:p>
-            <a:pPr lvl="1">
-              <a:defRPr sz="1600">
-                <a:solidFill>
-                  <a:srgbClr val="333333"/>
-                </a:solidFill>
-              </a:defRPr>
-            </a:pPr>
-            <a:r>
-              <a:t>• Data shouldn't change</a:t>
-            </a:r>
-          </a:p>
-        </p:txBody>
-      </p:sp>
-      <p:sp>
-        <p:nvSpPr>
-          <p:cNvPr id="9" name="TextBox 8"/>
-          <p:cNvSpPr txBox="1"/>
-          <p:nvPr/>
-        </p:nvSpPr>
-        <p:spPr>
-          <a:xfrm>
-            <a:off x="457200" y="2103120"/>
-            <a:ext cx="11247120" cy="320040"/>
-          </a:xfrm>
-          <a:prstGeom prst="rect">
-            <a:avLst/>
-          </a:prstGeom>
-          <a:noFill/>
-        </p:spPr>
-        <p:txBody>
-          <a:bodyPr wrap="none">
-            <a:spAutoFit/>
-          </a:bodyPr>
-          <a:lstStyle/>
-          <a:p>
-            <a:pPr lvl="1">
-              <a:defRPr sz="1600">
-                <a:solidFill>
-                  <a:srgbClr val="333333"/>
-                </a:solidFill>
-              </a:defRPr>
-            </a:pPr>
-            <a:r>
-              <a:t>• Need hashable type</a:t>
-            </a:r>
-          </a:p>
-        </p:txBody>
-      </p:sp>
-      <p:sp>
-        <p:nvSpPr>
-          <p:cNvPr id="10" name="TextBox 9"/>
-          <p:cNvSpPr txBox="1"/>
-          <p:nvPr/>
-        </p:nvSpPr>
-        <p:spPr>
-          <a:xfrm>
-            <a:off x="457200" y="2377439"/>
-            <a:ext cx="11247120" cy="320040"/>
-          </a:xfrm>
-          <a:prstGeom prst="rect">
-            <a:avLst/>
-          </a:prstGeom>
-          <a:noFill/>
-        </p:spPr>
-        <p:txBody>
-          <a:bodyPr wrap="none">
-            <a:spAutoFit/>
-          </a:bodyPr>
-          <a:lstStyle/>
-          <a:p>
-            <a:pPr lvl="1">
-              <a:defRPr sz="1600">
-                <a:solidFill>
-                  <a:srgbClr val="333333"/>
-                </a:solidFill>
-              </a:defRPr>
-            </a:pPr>
-            <a:r>
-              <a:t>• Return multiple values</a:t>
-            </a:r>
-          </a:p>
-        </p:txBody>
-      </p:sp>
-      <p:sp>
-        <p:nvSpPr>
-          <p:cNvPr id="11" name="TextBox 10"/>
-          <p:cNvSpPr txBox="1"/>
-          <p:nvPr/>
-        </p:nvSpPr>
-        <p:spPr>
-          <a:xfrm>
-            <a:off x="457200" y="2651759"/>
-            <a:ext cx="11247120" cy="320040"/>
-          </a:xfrm>
-          <a:prstGeom prst="rect">
-            <a:avLst/>
-          </a:prstGeom>
-          <a:noFill/>
-        </p:spPr>
-        <p:txBody>
-          <a:bodyPr wrap="none">
-            <a:spAutoFit/>
-          </a:bodyPr>
-          <a:lstStyle/>
-          <a:p>
-            <a:pPr lvl="1">
-              <a:defRPr sz="1600">
-                <a:solidFill>
-                  <a:srgbClr val="333333"/>
-                </a:solidFill>
-              </a:defRPr>
-            </a:pPr>
-            <a:r>
-              <a:t>• Represent fixed structure</a:t>
-            </a:r>
-          </a:p>
-        </p:txBody>
-      </p:sp>
-      <p:sp>
-        <p:nvSpPr>
-          <p:cNvPr id="12" name="Rectangle 11"/>
+              <a:t>a &amp; b  # Intersection: {3}</a:t>
+            </a:r>
+          </a:p>
+        </p:txBody>
+      </p:sp>
+      <p:sp>
+        <p:nvSpPr>
+          <p:cNvPr id="8" name="Rectangle 7"/>
           <p:cNvSpPr/>
           <p:nvPr/>
         </p:nvSpPr>
         <p:spPr>
           <a:xfrm>
-            <a:off x="365760" y="2880359"/>
+            <a:off x="365760" y="1783080"/>
             <a:ext cx="11430000" cy="365760"/>
           </a:xfrm>
           <a:prstGeom prst="rect">
@@ -7701,13 +9081,13 @@
       </p:sp>
       <p:sp>
         <p:nvSpPr>
-          <p:cNvPr id="13" name="TextBox 12"/>
+          <p:cNvPr id="9" name="TextBox 8"/>
           <p:cNvSpPr txBox="1"/>
           <p:nvPr/>
         </p:nvSpPr>
         <p:spPr>
           <a:xfrm>
-            <a:off x="548640" y="2926079"/>
+            <a:off x="548640" y="1828800"/>
             <a:ext cx="10972800" cy="274320"/>
           </a:xfrm>
           <a:prstGeom prst="rect">
@@ -7729,177 +9109,20 @@
               </a:defRPr>
             </a:pPr>
             <a:r>
-              <a:t>Examples:</a:t>
-            </a:r>
-          </a:p>
-        </p:txBody>
-      </p:sp>
-      <p:sp>
-        <p:nvSpPr>
-          <p:cNvPr id="14" name="Rectangle 13"/>
+              <a:t>a - b  # Difference: {1, 2}</a:t>
+            </a:r>
+          </a:p>
+        </p:txBody>
+      </p:sp>
+      <p:sp>
+        <p:nvSpPr>
+          <p:cNvPr id="10" name="Rectangle 9"/>
           <p:cNvSpPr/>
           <p:nvPr/>
         </p:nvSpPr>
         <p:spPr>
           <a:xfrm>
-            <a:off x="640080" y="3337559"/>
-            <a:ext cx="10789920" cy="868680"/>
-          </a:xfrm>
-          <a:prstGeom prst="rect">
-            <a:avLst/>
-          </a:prstGeom>
-          <a:solidFill>
-            <a:srgbClr val="282C34"/>
-          </a:solidFill>
-          <a:ln>
-            <a:noFill/>
-          </a:ln>
-        </p:spPr>
-        <p:style>
-          <a:lnRef idx="1">
-            <a:schemeClr val="accent1"/>
-          </a:lnRef>
-          <a:fillRef idx="3">
-            <a:schemeClr val="accent1"/>
-          </a:fillRef>
-          <a:effectRef idx="2">
-            <a:schemeClr val="accent1"/>
-          </a:effectRef>
-          <a:fontRef idx="minor">
-            <a:schemeClr val="lt1"/>
-          </a:fontRef>
-        </p:style>
-        <p:txBody>
-          <a:bodyPr rtlCol="0" anchor="ctr"/>
-          <a:lstStyle/>
-          <a:p>
-            <a:pPr algn="ctr"/>
-          </a:p>
-        </p:txBody>
-      </p:sp>
-      <p:sp>
-        <p:nvSpPr>
-          <p:cNvPr id="15" name="Rectangle 14"/>
-          <p:cNvSpPr/>
-          <p:nvPr/>
-        </p:nvSpPr>
-        <p:spPr>
-          <a:xfrm>
-            <a:off x="640080" y="3337559"/>
-            <a:ext cx="73152" cy="868680"/>
-          </a:xfrm>
-          <a:prstGeom prst="rect">
-            <a:avLst/>
-          </a:prstGeom>
-          <a:solidFill>
-            <a:srgbClr val="61AFEF"/>
-          </a:solidFill>
-          <a:ln>
-            <a:noFill/>
-          </a:ln>
-        </p:spPr>
-        <p:style>
-          <a:lnRef idx="1">
-            <a:schemeClr val="accent1"/>
-          </a:lnRef>
-          <a:fillRef idx="3">
-            <a:schemeClr val="accent1"/>
-          </a:fillRef>
-          <a:effectRef idx="2">
-            <a:schemeClr val="accent1"/>
-          </a:effectRef>
-          <a:fontRef idx="minor">
-            <a:schemeClr val="lt1"/>
-          </a:fontRef>
-        </p:style>
-        <p:txBody>
-          <a:bodyPr rtlCol="0" anchor="ctr"/>
-          <a:lstStyle/>
-          <a:p>
-            <a:pPr algn="ctr"/>
-          </a:p>
-        </p:txBody>
-      </p:sp>
-      <p:sp>
-        <p:nvSpPr>
-          <p:cNvPr id="16" name="TextBox 15"/>
-          <p:cNvSpPr txBox="1"/>
-          <p:nvPr/>
-        </p:nvSpPr>
-        <p:spPr>
-          <a:xfrm>
-            <a:off x="914400" y="3383279"/>
-            <a:ext cx="10241280" cy="777240"/>
-          </a:xfrm>
-          <a:prstGeom prst="rect">
-            <a:avLst/>
-          </a:prstGeom>
-          <a:noFill/>
-        </p:spPr>
-        <p:txBody>
-          <a:bodyPr wrap="none">
-            <a:spAutoFit/>
-          </a:bodyPr>
-          <a:lstStyle/>
-          <a:p>
-            <a:pPr>
-              <a:spcAft>
-                <a:spcPts val="200"/>
-              </a:spcAft>
-              <a:defRPr sz="1400">
-                <a:solidFill>
-                  <a:srgbClr val="ABB2BF"/>
-                </a:solidFill>
-                <a:latin typeface="Consolas"/>
-              </a:defRPr>
-            </a:pPr>
-            <a:r>
-              <a:t>coordinates = (x, y)</a:t>
-            </a:r>
-          </a:p>
-          <a:p>
-            <a:pPr>
-              <a:spcAft>
-                <a:spcPts val="200"/>
-              </a:spcAft>
-              <a:defRPr sz="1400">
-                <a:solidFill>
-                  <a:srgbClr val="ABB2BF"/>
-                </a:solidFill>
-                <a:latin typeface="Consolas"/>
-              </a:defRPr>
-            </a:pPr>
-            <a:r>
-              <a:t>rgb_color = (255, 0, 128)</a:t>
-            </a:r>
-          </a:p>
-          <a:p>
-            <a:pPr>
-              <a:spcAft>
-                <a:spcPts val="200"/>
-              </a:spcAft>
-              <a:defRPr sz="1400">
-                <a:solidFill>
-                  <a:srgbClr val="ABB2BF"/>
-                </a:solidFill>
-                <a:latin typeface="Consolas"/>
-              </a:defRPr>
-            </a:pPr>
-            <a:r>
-              <a:t>date = (2025, 1, 24)</a:t>
-            </a:r>
-          </a:p>
-        </p:txBody>
-      </p:sp>
-      <p:sp>
-        <p:nvSpPr>
-          <p:cNvPr id="17" name="Rectangle 16"/>
-          <p:cNvSpPr/>
-          <p:nvPr/>
-        </p:nvSpPr>
-        <p:spPr>
-          <a:xfrm>
-            <a:off x="365760" y="4343400"/>
+            <a:off x="365760" y="2240280"/>
             <a:ext cx="11430000" cy="365760"/>
           </a:xfrm>
           <a:prstGeom prst="rect">
@@ -7936,13 +9159,13 @@
       </p:sp>
       <p:sp>
         <p:nvSpPr>
-          <p:cNvPr id="18" name="TextBox 17"/>
+          <p:cNvPr id="11" name="TextBox 10"/>
           <p:cNvSpPr txBox="1"/>
           <p:nvPr/>
         </p:nvSpPr>
         <p:spPr>
           <a:xfrm>
-            <a:off x="548640" y="4389120"/>
+            <a:off x="548640" y="2286000"/>
             <a:ext cx="10972800" cy="274320"/>
           </a:xfrm>
           <a:prstGeom prst="rect">
@@ -7964,225 +9187,7 @@
               </a:defRPr>
             </a:pPr>
             <a:r>
-              <a:t>Use Set When:</a:t>
-            </a:r>
-          </a:p>
-        </p:txBody>
-      </p:sp>
-      <p:sp>
-        <p:nvSpPr>
-          <p:cNvPr id="19" name="TextBox 18"/>
-          <p:cNvSpPr txBox="1"/>
-          <p:nvPr/>
-        </p:nvSpPr>
-        <p:spPr>
-          <a:xfrm>
-            <a:off x="457200" y="4846320"/>
-            <a:ext cx="11247120" cy="320040"/>
-          </a:xfrm>
-          <a:prstGeom prst="rect">
-            <a:avLst/>
-          </a:prstGeom>
-          <a:noFill/>
-        </p:spPr>
-        <p:txBody>
-          <a:bodyPr wrap="none">
-            <a:spAutoFit/>
-          </a:bodyPr>
-          <a:lstStyle/>
-          <a:p>
-            <a:pPr lvl="1">
-              <a:defRPr sz="1600">
-                <a:solidFill>
-                  <a:srgbClr val="333333"/>
-                </a:solidFill>
-              </a:defRPr>
-            </a:pPr>
-            <a:r>
-              <a:t>• Need unique elements</a:t>
-            </a:r>
-          </a:p>
-        </p:txBody>
-      </p:sp>
-      <p:sp>
-        <p:nvSpPr>
-          <p:cNvPr id="20" name="TextBox 19"/>
-          <p:cNvSpPr txBox="1"/>
-          <p:nvPr/>
-        </p:nvSpPr>
-        <p:spPr>
-          <a:xfrm>
-            <a:off x="457200" y="5120640"/>
-            <a:ext cx="11247120" cy="320040"/>
-          </a:xfrm>
-          <a:prstGeom prst="rect">
-            <a:avLst/>
-          </a:prstGeom>
-          <a:noFill/>
-        </p:spPr>
-        <p:txBody>
-          <a:bodyPr wrap="none">
-            <a:spAutoFit/>
-          </a:bodyPr>
-          <a:lstStyle/>
-          <a:p>
-            <a:pPr lvl="1">
-              <a:defRPr sz="1600">
-                <a:solidFill>
-                  <a:srgbClr val="333333"/>
-                </a:solidFill>
-              </a:defRPr>
-            </a:pPr>
-            <a:r>
-              <a:t>• Fast membership tests</a:t>
-            </a:r>
-          </a:p>
-        </p:txBody>
-      </p:sp>
-      <p:sp>
-        <p:nvSpPr>
-          <p:cNvPr id="21" name="TextBox 20"/>
-          <p:cNvSpPr txBox="1"/>
-          <p:nvPr/>
-        </p:nvSpPr>
-        <p:spPr>
-          <a:xfrm>
-            <a:off x="457200" y="5394959"/>
-            <a:ext cx="11247120" cy="320040"/>
-          </a:xfrm>
-          <a:prstGeom prst="rect">
-            <a:avLst/>
-          </a:prstGeom>
-          <a:noFill/>
-        </p:spPr>
-        <p:txBody>
-          <a:bodyPr wrap="none">
-            <a:spAutoFit/>
-          </a:bodyPr>
-          <a:lstStyle/>
-          <a:p>
-            <a:pPr lvl="1">
-              <a:defRPr sz="1600">
-                <a:solidFill>
-                  <a:srgbClr val="333333"/>
-                </a:solidFill>
-              </a:defRPr>
-            </a:pPr>
-            <a:r>
-              <a:t>• Set operations needed</a:t>
-            </a:r>
-          </a:p>
-        </p:txBody>
-      </p:sp>
-      <p:sp>
-        <p:nvSpPr>
-          <p:cNvPr id="22" name="TextBox 21"/>
-          <p:cNvSpPr txBox="1"/>
-          <p:nvPr/>
-        </p:nvSpPr>
-        <p:spPr>
-          <a:xfrm>
-            <a:off x="457200" y="5669279"/>
-            <a:ext cx="11247120" cy="320040"/>
-          </a:xfrm>
-          <a:prstGeom prst="rect">
-            <a:avLst/>
-          </a:prstGeom>
-          <a:noFill/>
-        </p:spPr>
-        <p:txBody>
-          <a:bodyPr wrap="none">
-            <a:spAutoFit/>
-          </a:bodyPr>
-          <a:lstStyle/>
-          <a:p>
-            <a:pPr lvl="1">
-              <a:defRPr sz="1600">
-                <a:solidFill>
-                  <a:srgbClr val="333333"/>
-                </a:solidFill>
-              </a:defRPr>
-            </a:pPr>
-            <a:r>
-              <a:t>• Order doesn't matter</a:t>
-            </a:r>
-          </a:p>
-        </p:txBody>
-      </p:sp>
-      <p:sp>
-        <p:nvSpPr>
-          <p:cNvPr id="23" name="Rectangle 22"/>
-          <p:cNvSpPr/>
-          <p:nvPr/>
-        </p:nvSpPr>
-        <p:spPr>
-          <a:xfrm>
-            <a:off x="365760" y="5897879"/>
-            <a:ext cx="11430000" cy="365760"/>
-          </a:xfrm>
-          <a:prstGeom prst="rect">
-            <a:avLst/>
-          </a:prstGeom>
-          <a:solidFill>
-            <a:srgbClr val="0078D7"/>
-          </a:solidFill>
-          <a:ln>
-            <a:noFill/>
-          </a:ln>
-        </p:spPr>
-        <p:style>
-          <a:lnRef idx="1">
-            <a:schemeClr val="accent1"/>
-          </a:lnRef>
-          <a:fillRef idx="3">
-            <a:schemeClr val="accent1"/>
-          </a:fillRef>
-          <a:effectRef idx="2">
-            <a:schemeClr val="accent1"/>
-          </a:effectRef>
-          <a:fontRef idx="minor">
-            <a:schemeClr val="lt1"/>
-          </a:fontRef>
-        </p:style>
-        <p:txBody>
-          <a:bodyPr rtlCol="0" anchor="ctr"/>
-          <a:lstStyle/>
-          <a:p>
-            <a:pPr algn="ctr"/>
-          </a:p>
-        </p:txBody>
-      </p:sp>
-      <p:sp>
-        <p:nvSpPr>
-          <p:cNvPr id="24" name="TextBox 23"/>
-          <p:cNvSpPr txBox="1"/>
-          <p:nvPr/>
-        </p:nvSpPr>
-        <p:spPr>
-          <a:xfrm>
-            <a:off x="548640" y="5943599"/>
-            <a:ext cx="10972800" cy="274320"/>
-          </a:xfrm>
-          <a:prstGeom prst="rect">
-            <a:avLst/>
-          </a:prstGeom>
-          <a:noFill/>
-        </p:spPr>
-        <p:txBody>
-          <a:bodyPr wrap="none">
-            <a:spAutoFit/>
-          </a:bodyPr>
-          <a:lstStyle/>
-          <a:p>
-            <a:pPr>
-              <a:defRPr sz="2000" b="1">
-                <a:solidFill>
-                  <a:srgbClr val="FFFFFF"/>
-                </a:solidFill>
-              </a:defRPr>
-            </a:pPr>
-            <a:r>
-              <a:t>Examples:</a:t>
+              <a:t>a ^ b  # Symmetric diff: {1, 2, 4, 5}</a:t>
             </a:r>
           </a:p>
         </p:txBody>
@@ -8364,7 +9369,7 @@
               </a:defRPr>
             </a:pPr>
             <a:r>
-              <a:t>Practical Examples</a:t>
+              <a:t>When to Use Each</a:t>
             </a:r>
           </a:p>
         </p:txBody>
@@ -8442,21 +9447,239 @@
               </a:defRPr>
             </a:pPr>
             <a:r>
-              <a:t>Remove Duplicates:</a:t>
-            </a:r>
-          </a:p>
-        </p:txBody>
-      </p:sp>
-      <p:sp>
-        <p:nvSpPr>
-          <p:cNvPr id="8" name="Rectangle 7"/>
+              <a:t>Use Tuple When:</a:t>
+            </a:r>
+          </a:p>
+        </p:txBody>
+      </p:sp>
+      <p:sp>
+        <p:nvSpPr>
+          <p:cNvPr id="8" name="TextBox 7"/>
+          <p:cNvSpPr txBox="1"/>
+          <p:nvPr/>
+        </p:nvSpPr>
+        <p:spPr>
+          <a:xfrm>
+            <a:off x="457200" y="1828800"/>
+            <a:ext cx="11247120" cy="320040"/>
+          </a:xfrm>
+          <a:prstGeom prst="rect">
+            <a:avLst/>
+          </a:prstGeom>
+          <a:noFill/>
+        </p:spPr>
+        <p:txBody>
+          <a:bodyPr wrap="none">
+            <a:spAutoFit/>
+          </a:bodyPr>
+          <a:lstStyle/>
+          <a:p>
+            <a:pPr lvl="1">
+              <a:defRPr sz="1600">
+                <a:solidFill>
+                  <a:srgbClr val="333333"/>
+                </a:solidFill>
+              </a:defRPr>
+            </a:pPr>
+            <a:r>
+              <a:t>• Data shouldn't change</a:t>
+            </a:r>
+          </a:p>
+        </p:txBody>
+      </p:sp>
+      <p:sp>
+        <p:nvSpPr>
+          <p:cNvPr id="9" name="TextBox 8"/>
+          <p:cNvSpPr txBox="1"/>
+          <p:nvPr/>
+        </p:nvSpPr>
+        <p:spPr>
+          <a:xfrm>
+            <a:off x="457200" y="2103120"/>
+            <a:ext cx="11247120" cy="320040"/>
+          </a:xfrm>
+          <a:prstGeom prst="rect">
+            <a:avLst/>
+          </a:prstGeom>
+          <a:noFill/>
+        </p:spPr>
+        <p:txBody>
+          <a:bodyPr wrap="none">
+            <a:spAutoFit/>
+          </a:bodyPr>
+          <a:lstStyle/>
+          <a:p>
+            <a:pPr lvl="1">
+              <a:defRPr sz="1600">
+                <a:solidFill>
+                  <a:srgbClr val="333333"/>
+                </a:solidFill>
+              </a:defRPr>
+            </a:pPr>
+            <a:r>
+              <a:t>• Need hashable type</a:t>
+            </a:r>
+          </a:p>
+        </p:txBody>
+      </p:sp>
+      <p:sp>
+        <p:nvSpPr>
+          <p:cNvPr id="10" name="TextBox 9"/>
+          <p:cNvSpPr txBox="1"/>
+          <p:nvPr/>
+        </p:nvSpPr>
+        <p:spPr>
+          <a:xfrm>
+            <a:off x="457200" y="2377439"/>
+            <a:ext cx="11247120" cy="320040"/>
+          </a:xfrm>
+          <a:prstGeom prst="rect">
+            <a:avLst/>
+          </a:prstGeom>
+          <a:noFill/>
+        </p:spPr>
+        <p:txBody>
+          <a:bodyPr wrap="none">
+            <a:spAutoFit/>
+          </a:bodyPr>
+          <a:lstStyle/>
+          <a:p>
+            <a:pPr lvl="1">
+              <a:defRPr sz="1600">
+                <a:solidFill>
+                  <a:srgbClr val="333333"/>
+                </a:solidFill>
+              </a:defRPr>
+            </a:pPr>
+            <a:r>
+              <a:t>• Return multiple values</a:t>
+            </a:r>
+          </a:p>
+        </p:txBody>
+      </p:sp>
+      <p:sp>
+        <p:nvSpPr>
+          <p:cNvPr id="11" name="TextBox 10"/>
+          <p:cNvSpPr txBox="1"/>
+          <p:nvPr/>
+        </p:nvSpPr>
+        <p:spPr>
+          <a:xfrm>
+            <a:off x="457200" y="2651759"/>
+            <a:ext cx="11247120" cy="320040"/>
+          </a:xfrm>
+          <a:prstGeom prst="rect">
+            <a:avLst/>
+          </a:prstGeom>
+          <a:noFill/>
+        </p:spPr>
+        <p:txBody>
+          <a:bodyPr wrap="none">
+            <a:spAutoFit/>
+          </a:bodyPr>
+          <a:lstStyle/>
+          <a:p>
+            <a:pPr lvl="1">
+              <a:defRPr sz="1600">
+                <a:solidFill>
+                  <a:srgbClr val="333333"/>
+                </a:solidFill>
+              </a:defRPr>
+            </a:pPr>
+            <a:r>
+              <a:t>• Represent fixed structure</a:t>
+            </a:r>
+          </a:p>
+        </p:txBody>
+      </p:sp>
+      <p:sp>
+        <p:nvSpPr>
+          <p:cNvPr id="12" name="Rectangle 11"/>
           <p:cNvSpPr/>
           <p:nvPr/>
         </p:nvSpPr>
         <p:spPr>
           <a:xfrm>
-            <a:off x="640080" y="1783080"/>
-            <a:ext cx="10789920" cy="640080"/>
+            <a:off x="365760" y="2880359"/>
+            <a:ext cx="11430000" cy="365760"/>
+          </a:xfrm>
+          <a:prstGeom prst="rect">
+            <a:avLst/>
+          </a:prstGeom>
+          <a:solidFill>
+            <a:srgbClr val="0078D7"/>
+          </a:solidFill>
+          <a:ln>
+            <a:noFill/>
+          </a:ln>
+        </p:spPr>
+        <p:style>
+          <a:lnRef idx="1">
+            <a:schemeClr val="accent1"/>
+          </a:lnRef>
+          <a:fillRef idx="3">
+            <a:schemeClr val="accent1"/>
+          </a:fillRef>
+          <a:effectRef idx="2">
+            <a:schemeClr val="accent1"/>
+          </a:effectRef>
+          <a:fontRef idx="minor">
+            <a:schemeClr val="lt1"/>
+          </a:fontRef>
+        </p:style>
+        <p:txBody>
+          <a:bodyPr rtlCol="0" anchor="ctr"/>
+          <a:lstStyle/>
+          <a:p>
+            <a:pPr algn="ctr"/>
+          </a:p>
+        </p:txBody>
+      </p:sp>
+      <p:sp>
+        <p:nvSpPr>
+          <p:cNvPr id="13" name="TextBox 12"/>
+          <p:cNvSpPr txBox="1"/>
+          <p:nvPr/>
+        </p:nvSpPr>
+        <p:spPr>
+          <a:xfrm>
+            <a:off x="548640" y="2926079"/>
+            <a:ext cx="10972800" cy="274320"/>
+          </a:xfrm>
+          <a:prstGeom prst="rect">
+            <a:avLst/>
+          </a:prstGeom>
+          <a:noFill/>
+        </p:spPr>
+        <p:txBody>
+          <a:bodyPr wrap="none">
+            <a:spAutoFit/>
+          </a:bodyPr>
+          <a:lstStyle/>
+          <a:p>
+            <a:pPr>
+              <a:defRPr sz="2000" b="1">
+                <a:solidFill>
+                  <a:srgbClr val="FFFFFF"/>
+                </a:solidFill>
+              </a:defRPr>
+            </a:pPr>
+            <a:r>
+              <a:t>Examples:</a:t>
+            </a:r>
+          </a:p>
+        </p:txBody>
+      </p:sp>
+      <p:sp>
+        <p:nvSpPr>
+          <p:cNvPr id="14" name="Rectangle 13"/>
+          <p:cNvSpPr/>
+          <p:nvPr/>
+        </p:nvSpPr>
+        <p:spPr>
+          <a:xfrm>
+            <a:off x="640080" y="3337559"/>
+            <a:ext cx="10789920" cy="868680"/>
           </a:xfrm>
           <a:prstGeom prst="rect">
             <a:avLst/>
@@ -8492,14 +9715,14 @@
       </p:sp>
       <p:sp>
         <p:nvSpPr>
-          <p:cNvPr id="9" name="Rectangle 8"/>
+          <p:cNvPr id="15" name="Rectangle 14"/>
           <p:cNvSpPr/>
           <p:nvPr/>
         </p:nvSpPr>
         <p:spPr>
           <a:xfrm>
-            <a:off x="640080" y="1783080"/>
-            <a:ext cx="73152" cy="640080"/>
+            <a:off x="640080" y="3337559"/>
+            <a:ext cx="73152" cy="868680"/>
           </a:xfrm>
           <a:prstGeom prst="rect">
             <a:avLst/>
@@ -8535,14 +9758,14 @@
       </p:sp>
       <p:sp>
         <p:nvSpPr>
-          <p:cNvPr id="10" name="TextBox 9"/>
+          <p:cNvPr id="16" name="TextBox 15"/>
           <p:cNvSpPr txBox="1"/>
           <p:nvPr/>
         </p:nvSpPr>
         <p:spPr>
           <a:xfrm>
-            <a:off x="914400" y="1828800"/>
-            <a:ext cx="10241280" cy="548640"/>
+            <a:off x="914400" y="3383279"/>
+            <a:ext cx="10241280" cy="777240"/>
           </a:xfrm>
           <a:prstGeom prst="rect">
             <a:avLst/>
@@ -8567,7 +9790,7 @@
               </a:defRPr>
             </a:pPr>
             <a:r>
-              <a:t>numbers = [1, 2, 2, 3, 3, 3]</a:t>
+              <a:t>coordinates = (x, y)</a:t>
             </a:r>
           </a:p>
           <a:p>
@@ -8583,20 +9806,36 @@
               </a:defRPr>
             </a:pPr>
             <a:r>
-              <a:t>unique = list(set(numbers))</a:t>
-            </a:r>
-          </a:p>
-        </p:txBody>
-      </p:sp>
-      <p:sp>
-        <p:nvSpPr>
-          <p:cNvPr id="11" name="Rectangle 10"/>
+              <a:t>rgb_color = (255, 0, 128)</a:t>
+            </a:r>
+          </a:p>
+          <a:p>
+            <a:pPr>
+              <a:spcAft>
+                <a:spcPts val="200"/>
+              </a:spcAft>
+              <a:defRPr sz="1400">
+                <a:solidFill>
+                  <a:srgbClr val="ABB2BF"/>
+                </a:solidFill>
+                <a:latin typeface="Consolas"/>
+              </a:defRPr>
+            </a:pPr>
+            <a:r>
+              <a:t>date = (2025, 1, 24)</a:t>
+            </a:r>
+          </a:p>
+        </p:txBody>
+      </p:sp>
+      <p:sp>
+        <p:nvSpPr>
+          <p:cNvPr id="17" name="Rectangle 16"/>
           <p:cNvSpPr/>
           <p:nvPr/>
         </p:nvSpPr>
         <p:spPr>
           <a:xfrm>
-            <a:off x="365760" y="2560320"/>
+            <a:off x="365760" y="4343400"/>
             <a:ext cx="11430000" cy="365760"/>
           </a:xfrm>
           <a:prstGeom prst="rect">
@@ -8633,13 +9872,13 @@
       </p:sp>
       <p:sp>
         <p:nvSpPr>
-          <p:cNvPr id="12" name="TextBox 11"/>
+          <p:cNvPr id="18" name="TextBox 17"/>
           <p:cNvSpPr txBox="1"/>
           <p:nvPr/>
         </p:nvSpPr>
         <p:spPr>
           <a:xfrm>
-            <a:off x="548640" y="2606040"/>
+            <a:off x="548640" y="4389120"/>
             <a:ext cx="10972800" cy="274320"/>
           </a:xfrm>
           <a:prstGeom prst="rect">
@@ -8661,107 +9900,21 @@
               </a:defRPr>
             </a:pPr>
             <a:r>
-              <a:t>Find Common Elements:</a:t>
-            </a:r>
-          </a:p>
-        </p:txBody>
-      </p:sp>
-      <p:sp>
-        <p:nvSpPr>
-          <p:cNvPr id="13" name="Rectangle 12"/>
-          <p:cNvSpPr/>
-          <p:nvPr/>
-        </p:nvSpPr>
-        <p:spPr>
-          <a:xfrm>
-            <a:off x="640080" y="3017520"/>
-            <a:ext cx="10789920" cy="868680"/>
-          </a:xfrm>
-          <a:prstGeom prst="rect">
-            <a:avLst/>
-          </a:prstGeom>
-          <a:solidFill>
-            <a:srgbClr val="282C34"/>
-          </a:solidFill>
-          <a:ln>
-            <a:noFill/>
-          </a:ln>
-        </p:spPr>
-        <p:style>
-          <a:lnRef idx="1">
-            <a:schemeClr val="accent1"/>
-          </a:lnRef>
-          <a:fillRef idx="3">
-            <a:schemeClr val="accent1"/>
-          </a:fillRef>
-          <a:effectRef idx="2">
-            <a:schemeClr val="accent1"/>
-          </a:effectRef>
-          <a:fontRef idx="minor">
-            <a:schemeClr val="lt1"/>
-          </a:fontRef>
-        </p:style>
-        <p:txBody>
-          <a:bodyPr rtlCol="0" anchor="ctr"/>
-          <a:lstStyle/>
-          <a:p>
-            <a:pPr algn="ctr"/>
-          </a:p>
-        </p:txBody>
-      </p:sp>
-      <p:sp>
-        <p:nvSpPr>
-          <p:cNvPr id="14" name="Rectangle 13"/>
-          <p:cNvSpPr/>
-          <p:nvPr/>
-        </p:nvSpPr>
-        <p:spPr>
-          <a:xfrm>
-            <a:off x="640080" y="3017520"/>
-            <a:ext cx="73152" cy="868680"/>
-          </a:xfrm>
-          <a:prstGeom prst="rect">
-            <a:avLst/>
-          </a:prstGeom>
-          <a:solidFill>
-            <a:srgbClr val="61AFEF"/>
-          </a:solidFill>
-          <a:ln>
-            <a:noFill/>
-          </a:ln>
-        </p:spPr>
-        <p:style>
-          <a:lnRef idx="1">
-            <a:schemeClr val="accent1"/>
-          </a:lnRef>
-          <a:fillRef idx="3">
-            <a:schemeClr val="accent1"/>
-          </a:fillRef>
-          <a:effectRef idx="2">
-            <a:schemeClr val="accent1"/>
-          </a:effectRef>
-          <a:fontRef idx="minor">
-            <a:schemeClr val="lt1"/>
-          </a:fontRef>
-        </p:style>
-        <p:txBody>
-          <a:bodyPr rtlCol="0" anchor="ctr"/>
-          <a:lstStyle/>
-          <a:p>
-            <a:pPr algn="ctr"/>
-          </a:p>
-        </p:txBody>
-      </p:sp>
-      <p:sp>
-        <p:nvSpPr>
-          <p:cNvPr id="15" name="TextBox 14"/>
+              <a:t>Use Set When:</a:t>
+            </a:r>
+          </a:p>
+        </p:txBody>
+      </p:sp>
+      <p:sp>
+        <p:nvSpPr>
+          <p:cNvPr id="19" name="TextBox 18"/>
           <p:cNvSpPr txBox="1"/>
           <p:nvPr/>
         </p:nvSpPr>
         <p:spPr>
           <a:xfrm>
-            <a:off x="914400" y="3063240"/>
-            <a:ext cx="10241280" cy="777240"/>
+            <a:off x="457200" y="4846320"/>
+            <a:ext cx="11247120" cy="320040"/>
           </a:xfrm>
           <a:prstGeom prst="rect">
             <a:avLst/>
@@ -8774,108 +9927,29 @@
           </a:bodyPr>
           <a:lstStyle/>
           <a:p>
-            <a:pPr>
-              <a:spcAft>
-                <a:spcPts val="200"/>
-              </a:spcAft>
-              <a:defRPr sz="1400">
-                <a:solidFill>
-                  <a:srgbClr val="ABB2BF"/>
-                </a:solidFill>
-                <a:latin typeface="Consolas"/>
-              </a:defRPr>
-            </a:pPr>
-            <a:r>
-              <a:t>list1 = [1, 2, 3, 4]</a:t>
-            </a:r>
-          </a:p>
-          <a:p>
-            <a:pPr>
-              <a:spcAft>
-                <a:spcPts val="200"/>
-              </a:spcAft>
-              <a:defRPr sz="1400">
-                <a:solidFill>
-                  <a:srgbClr val="ABB2BF"/>
-                </a:solidFill>
-                <a:latin typeface="Consolas"/>
-              </a:defRPr>
-            </a:pPr>
-            <a:r>
-              <a:t>list2 = [3, 4, 5, 6]</a:t>
-            </a:r>
-          </a:p>
-          <a:p>
-            <a:pPr>
-              <a:spcAft>
-                <a:spcPts val="200"/>
-              </a:spcAft>
-              <a:defRPr sz="1400">
-                <a:solidFill>
-                  <a:srgbClr val="ABB2BF"/>
-                </a:solidFill>
-                <a:latin typeface="Consolas"/>
-              </a:defRPr>
-            </a:pPr>
-            <a:r>
-              <a:t>common = set(list1) &amp; set(list2)</a:t>
-            </a:r>
-          </a:p>
-        </p:txBody>
-      </p:sp>
-      <p:sp>
-        <p:nvSpPr>
-          <p:cNvPr id="16" name="Rectangle 15"/>
-          <p:cNvSpPr/>
-          <p:nvPr/>
-        </p:nvSpPr>
-        <p:spPr>
-          <a:xfrm>
-            <a:off x="365760" y="4023360"/>
-            <a:ext cx="11430000" cy="365760"/>
-          </a:xfrm>
-          <a:prstGeom prst="rect">
-            <a:avLst/>
-          </a:prstGeom>
-          <a:solidFill>
-            <a:srgbClr val="0078D7"/>
-          </a:solidFill>
-          <a:ln>
-            <a:noFill/>
-          </a:ln>
-        </p:spPr>
-        <p:style>
-          <a:lnRef idx="1">
-            <a:schemeClr val="accent1"/>
-          </a:lnRef>
-          <a:fillRef idx="3">
-            <a:schemeClr val="accent1"/>
-          </a:fillRef>
-          <a:effectRef idx="2">
-            <a:schemeClr val="accent1"/>
-          </a:effectRef>
-          <a:fontRef idx="minor">
-            <a:schemeClr val="lt1"/>
-          </a:fontRef>
-        </p:style>
-        <p:txBody>
-          <a:bodyPr rtlCol="0" anchor="ctr"/>
-          <a:lstStyle/>
-          <a:p>
-            <a:pPr algn="ctr"/>
-          </a:p>
-        </p:txBody>
-      </p:sp>
-      <p:sp>
-        <p:nvSpPr>
-          <p:cNvPr id="17" name="TextBox 16"/>
+            <a:pPr lvl="1">
+              <a:defRPr sz="1600">
+                <a:solidFill>
+                  <a:srgbClr val="333333"/>
+                </a:solidFill>
+              </a:defRPr>
+            </a:pPr>
+            <a:r>
+              <a:t>• Need unique elements</a:t>
+            </a:r>
+          </a:p>
+        </p:txBody>
+      </p:sp>
+      <p:sp>
+        <p:nvSpPr>
+          <p:cNvPr id="20" name="TextBox 19"/>
           <p:cNvSpPr txBox="1"/>
           <p:nvPr/>
         </p:nvSpPr>
         <p:spPr>
           <a:xfrm>
-            <a:off x="548640" y="4069080"/>
-            <a:ext cx="10972800" cy="274320"/>
+            <a:off x="457200" y="5120640"/>
+            <a:ext cx="11247120" cy="320040"/>
           </a:xfrm>
           <a:prstGeom prst="rect">
             <a:avLst/>
@@ -8888,115 +9962,29 @@
           </a:bodyPr>
           <a:lstStyle/>
           <a:p>
-            <a:pPr>
-              <a:defRPr sz="2000" b="1">
-                <a:solidFill>
-                  <a:srgbClr val="FFFFFF"/>
-                </a:solidFill>
-              </a:defRPr>
-            </a:pPr>
-            <a:r>
-              <a:t>Multiple Return Values:</a:t>
-            </a:r>
-          </a:p>
-        </p:txBody>
-      </p:sp>
-      <p:sp>
-        <p:nvSpPr>
-          <p:cNvPr id="18" name="Rectangle 17"/>
-          <p:cNvSpPr/>
-          <p:nvPr/>
-        </p:nvSpPr>
-        <p:spPr>
-          <a:xfrm>
-            <a:off x="640080" y="4480560"/>
-            <a:ext cx="10789920" cy="868680"/>
-          </a:xfrm>
-          <a:prstGeom prst="rect">
-            <a:avLst/>
-          </a:prstGeom>
-          <a:solidFill>
-            <a:srgbClr val="282C34"/>
-          </a:solidFill>
-          <a:ln>
-            <a:noFill/>
-          </a:ln>
-        </p:spPr>
-        <p:style>
-          <a:lnRef idx="1">
-            <a:schemeClr val="accent1"/>
-          </a:lnRef>
-          <a:fillRef idx="3">
-            <a:schemeClr val="accent1"/>
-          </a:fillRef>
-          <a:effectRef idx="2">
-            <a:schemeClr val="accent1"/>
-          </a:effectRef>
-          <a:fontRef idx="minor">
-            <a:schemeClr val="lt1"/>
-          </a:fontRef>
-        </p:style>
-        <p:txBody>
-          <a:bodyPr rtlCol="0" anchor="ctr"/>
-          <a:lstStyle/>
-          <a:p>
-            <a:pPr algn="ctr"/>
-          </a:p>
-        </p:txBody>
-      </p:sp>
-      <p:sp>
-        <p:nvSpPr>
-          <p:cNvPr id="19" name="Rectangle 18"/>
-          <p:cNvSpPr/>
-          <p:nvPr/>
-        </p:nvSpPr>
-        <p:spPr>
-          <a:xfrm>
-            <a:off x="640080" y="4480560"/>
-            <a:ext cx="73152" cy="868680"/>
-          </a:xfrm>
-          <a:prstGeom prst="rect">
-            <a:avLst/>
-          </a:prstGeom>
-          <a:solidFill>
-            <a:srgbClr val="61AFEF"/>
-          </a:solidFill>
-          <a:ln>
-            <a:noFill/>
-          </a:ln>
-        </p:spPr>
-        <p:style>
-          <a:lnRef idx="1">
-            <a:schemeClr val="accent1"/>
-          </a:lnRef>
-          <a:fillRef idx="3">
-            <a:schemeClr val="accent1"/>
-          </a:fillRef>
-          <a:effectRef idx="2">
-            <a:schemeClr val="accent1"/>
-          </a:effectRef>
-          <a:fontRef idx="minor">
-            <a:schemeClr val="lt1"/>
-          </a:fontRef>
-        </p:style>
-        <p:txBody>
-          <a:bodyPr rtlCol="0" anchor="ctr"/>
-          <a:lstStyle/>
-          <a:p>
-            <a:pPr algn="ctr"/>
-          </a:p>
-        </p:txBody>
-      </p:sp>
-      <p:sp>
-        <p:nvSpPr>
-          <p:cNvPr id="20" name="TextBox 19"/>
+            <a:pPr lvl="1">
+              <a:defRPr sz="1600">
+                <a:solidFill>
+                  <a:srgbClr val="333333"/>
+                </a:solidFill>
+              </a:defRPr>
+            </a:pPr>
+            <a:r>
+              <a:t>• Fast membership tests</a:t>
+            </a:r>
+          </a:p>
+        </p:txBody>
+      </p:sp>
+      <p:sp>
+        <p:nvSpPr>
+          <p:cNvPr id="21" name="TextBox 20"/>
           <p:cNvSpPr txBox="1"/>
           <p:nvPr/>
         </p:nvSpPr>
         <p:spPr>
           <a:xfrm>
-            <a:off x="914400" y="4526280"/>
-            <a:ext cx="10241280" cy="777240"/>
+            <a:off x="457200" y="5394959"/>
+            <a:ext cx="11247120" cy="320040"/>
           </a:xfrm>
           <a:prstGeom prst="rect">
             <a:avLst/>
@@ -9009,95 +9997,16 @@
           </a:bodyPr>
           <a:lstStyle/>
           <a:p>
-            <a:pPr>
-              <a:spcAft>
-                <a:spcPts val="200"/>
-              </a:spcAft>
-              <a:defRPr sz="1400">
-                <a:solidFill>
-                  <a:srgbClr val="ABB2BF"/>
-                </a:solidFill>
-                <a:latin typeface="Consolas"/>
-              </a:defRPr>
-            </a:pPr>
-            <a:r>
-              <a:t>def get_stats(data):</a:t>
-            </a:r>
-          </a:p>
-          <a:p>
-            <a:pPr>
-              <a:spcAft>
-                <a:spcPts val="200"/>
-              </a:spcAft>
-              <a:defRPr sz="1400">
-                <a:solidFill>
-                  <a:srgbClr val="ABB2BF"/>
-                </a:solidFill>
-                <a:latin typeface="Consolas"/>
-              </a:defRPr>
-            </a:pPr>
-            <a:r>
-              <a:t>    return min(data), max(data), len(data)</a:t>
-            </a:r>
-          </a:p>
-          <a:p>
-            <a:pPr>
-              <a:spcAft>
-                <a:spcPts val="200"/>
-              </a:spcAft>
-              <a:defRPr sz="1400">
-                <a:solidFill>
-                  <a:srgbClr val="ABB2BF"/>
-                </a:solidFill>
-                <a:latin typeface="Consolas"/>
-              </a:defRPr>
-            </a:pPr>
-            <a:r>
-              <a:t>min_val, max_val, count = get_stats([1,2,3])</a:t>
-            </a:r>
-          </a:p>
-        </p:txBody>
-      </p:sp>
-      <p:sp>
-        <p:nvSpPr>
-          <p:cNvPr id="21" name="Rectangle 20"/>
-          <p:cNvSpPr/>
-          <p:nvPr/>
-        </p:nvSpPr>
-        <p:spPr>
-          <a:xfrm>
-            <a:off x="365760" y="5486400"/>
-            <a:ext cx="11430000" cy="365760"/>
-          </a:xfrm>
-          <a:prstGeom prst="rect">
-            <a:avLst/>
-          </a:prstGeom>
-          <a:solidFill>
-            <a:srgbClr val="0078D7"/>
-          </a:solidFill>
-          <a:ln>
-            <a:noFill/>
-          </a:ln>
-        </p:spPr>
-        <p:style>
-          <a:lnRef idx="1">
-            <a:schemeClr val="accent1"/>
-          </a:lnRef>
-          <a:fillRef idx="3">
-            <a:schemeClr val="accent1"/>
-          </a:fillRef>
-          <a:effectRef idx="2">
-            <a:schemeClr val="accent1"/>
-          </a:effectRef>
-          <a:fontRef idx="minor">
-            <a:schemeClr val="lt1"/>
-          </a:fontRef>
-        </p:style>
-        <p:txBody>
-          <a:bodyPr rtlCol="0" anchor="ctr"/>
-          <a:lstStyle/>
-          <a:p>
-            <a:pPr algn="ctr"/>
+            <a:pPr lvl="1">
+              <a:defRPr sz="1600">
+                <a:solidFill>
+                  <a:srgbClr val="333333"/>
+                </a:solidFill>
+              </a:defRPr>
+            </a:pPr>
+            <a:r>
+              <a:t>• Set operations needed</a:t>
+            </a:r>
           </a:p>
         </p:txBody>
       </p:sp>
@@ -9109,8 +10018,8 @@
         </p:nvSpPr>
         <p:spPr>
           <a:xfrm>
-            <a:off x="548640" y="5532120"/>
-            <a:ext cx="10972800" cy="274320"/>
+            <a:off x="457200" y="5669279"/>
+            <a:ext cx="11247120" cy="320040"/>
           </a:xfrm>
           <a:prstGeom prst="rect">
             <a:avLst/>
@@ -9123,15 +10032,15 @@
           </a:bodyPr>
           <a:lstStyle/>
           <a:p>
-            <a:pPr>
-              <a:defRPr sz="2000" b="1">
-                <a:solidFill>
-                  <a:srgbClr val="FFFFFF"/>
-                </a:solidFill>
-              </a:defRPr>
-            </a:pPr>
-            <a:r>
-              <a:t>Coordinate Pairs:</a:t>
+            <a:pPr lvl="1">
+              <a:defRPr sz="1600">
+                <a:solidFill>
+                  <a:srgbClr val="333333"/>
+                </a:solidFill>
+              </a:defRPr>
+            </a:pPr>
+            <a:r>
+              <a:t>• Order doesn't matter</a:t>
             </a:r>
           </a:p>
         </p:txBody>
@@ -9169,6 +10078,49 @@
             <a:avLst/>
           </a:prstGeom>
           <a:solidFill>
+            <a:srgbClr val="FAFAFA"/>
+          </a:solidFill>
+          <a:ln>
+            <a:noFill/>
+          </a:ln>
+        </p:spPr>
+        <p:style>
+          <a:lnRef idx="1">
+            <a:schemeClr val="accent1"/>
+          </a:lnRef>
+          <a:fillRef idx="3">
+            <a:schemeClr val="accent1"/>
+          </a:fillRef>
+          <a:effectRef idx="2">
+            <a:schemeClr val="accent1"/>
+          </a:effectRef>
+          <a:fontRef idx="minor">
+            <a:schemeClr val="lt1"/>
+          </a:fontRef>
+        </p:style>
+        <p:txBody>
+          <a:bodyPr rtlCol="0" anchor="ctr"/>
+          <a:lstStyle/>
+          <a:p>
+            <a:pPr algn="ctr"/>
+          </a:p>
+        </p:txBody>
+      </p:sp>
+      <p:sp>
+        <p:nvSpPr>
+          <p:cNvPr id="3" name="Rectangle 2"/>
+          <p:cNvSpPr/>
+          <p:nvPr/>
+        </p:nvSpPr>
+        <p:spPr>
+          <a:xfrm>
+            <a:off x="0" y="0"/>
+            <a:ext cx="12191695" cy="1097280"/>
+          </a:xfrm>
+          <a:prstGeom prst="rect">
+            <a:avLst/>
+          </a:prstGeom>
+          <a:solidFill>
             <a:srgbClr val="0066CC"/>
           </a:solidFill>
           <a:ln>
@@ -9199,14 +10151,14 @@
       </p:sp>
       <p:sp>
         <p:nvSpPr>
-          <p:cNvPr id="3" name="Rectangle 2"/>
+          <p:cNvPr id="4" name="Rectangle 3"/>
           <p:cNvSpPr/>
           <p:nvPr/>
         </p:nvSpPr>
         <p:spPr>
           <a:xfrm>
-            <a:off x="0" y="2743200"/>
-            <a:ext cx="3657600" cy="137160"/>
+            <a:off x="0" y="1097280"/>
+            <a:ext cx="137160" cy="5760720"/>
           </a:xfrm>
           <a:prstGeom prst="rect">
             <a:avLst/>
@@ -9242,20 +10194,55 @@
       </p:sp>
       <p:sp>
         <p:nvSpPr>
-          <p:cNvPr id="4" name="Rectangle 3"/>
+          <p:cNvPr id="5" name="TextBox 4"/>
+          <p:cNvSpPr txBox="1"/>
+          <p:nvPr/>
+        </p:nvSpPr>
+        <p:spPr>
+          <a:xfrm>
+            <a:off x="365760" y="274320"/>
+            <a:ext cx="10972800" cy="640080"/>
+          </a:xfrm>
+          <a:prstGeom prst="rect">
+            <a:avLst/>
+          </a:prstGeom>
+          <a:noFill/>
+        </p:spPr>
+        <p:txBody>
+          <a:bodyPr wrap="none">
+            <a:spAutoFit/>
+          </a:bodyPr>
+          <a:lstStyle/>
+          <a:p>
+            <a:pPr>
+              <a:defRPr sz="3600" b="1">
+                <a:solidFill>
+                  <a:srgbClr val="FFFFFF"/>
+                </a:solidFill>
+              </a:defRPr>
+            </a:pPr>
+            <a:r>
+              <a:t>When to Use Each (continued)</a:t>
+            </a:r>
+          </a:p>
+        </p:txBody>
+      </p:sp>
+      <p:sp>
+        <p:nvSpPr>
+          <p:cNvPr id="6" name="Rectangle 5"/>
           <p:cNvSpPr/>
           <p:nvPr/>
         </p:nvSpPr>
         <p:spPr>
           <a:xfrm>
-            <a:off x="8531352" y="4114800"/>
-            <a:ext cx="3657600" cy="137160"/>
+            <a:off x="365760" y="1325880"/>
+            <a:ext cx="11430000" cy="365760"/>
           </a:xfrm>
           <a:prstGeom prst="rect">
             <a:avLst/>
           </a:prstGeom>
           <a:solidFill>
-            <a:srgbClr val="FFBB33"/>
+            <a:srgbClr val="0078D7"/>
           </a:solidFill>
           <a:ln>
             <a:noFill/>
@@ -9285,14 +10272,14 @@
       </p:sp>
       <p:sp>
         <p:nvSpPr>
-          <p:cNvPr id="5" name="TextBox 4"/>
+          <p:cNvPr id="7" name="TextBox 6"/>
           <p:cNvSpPr txBox="1"/>
           <p:nvPr/>
         </p:nvSpPr>
         <p:spPr>
           <a:xfrm>
-            <a:off x="914400" y="2560320"/>
-            <a:ext cx="10360152" cy="1371600"/>
+            <a:off x="548640" y="1371600"/>
+            <a:ext cx="10972800" cy="274320"/>
           </a:xfrm>
           <a:prstGeom prst="rect">
             <a:avLst/>
@@ -9305,29 +10292,115 @@
           </a:bodyPr>
           <a:lstStyle/>
           <a:p>
-            <a:pPr algn="ctr">
-              <a:defRPr sz="4800" b="1">
+            <a:pPr>
+              <a:defRPr sz="2000" b="1">
                 <a:solidFill>
                   <a:srgbClr val="FFFFFF"/>
                 </a:solidFill>
               </a:defRPr>
             </a:pPr>
             <a:r>
-              <a:t>Time to Practice!</a:t>
-            </a:r>
-          </a:p>
-        </p:txBody>
-      </p:sp>
-      <p:sp>
-        <p:nvSpPr>
-          <p:cNvPr id="6" name="TextBox 5"/>
+              <a:t>Examples:</a:t>
+            </a:r>
+          </a:p>
+        </p:txBody>
+      </p:sp>
+      <p:sp>
+        <p:nvSpPr>
+          <p:cNvPr id="8" name="Rectangle 7"/>
+          <p:cNvSpPr/>
+          <p:nvPr/>
+        </p:nvSpPr>
+        <p:spPr>
+          <a:xfrm>
+            <a:off x="640080" y="1783080"/>
+            <a:ext cx="10789920" cy="868680"/>
+          </a:xfrm>
+          <a:prstGeom prst="rect">
+            <a:avLst/>
+          </a:prstGeom>
+          <a:solidFill>
+            <a:srgbClr val="282C34"/>
+          </a:solidFill>
+          <a:ln>
+            <a:noFill/>
+          </a:ln>
+        </p:spPr>
+        <p:style>
+          <a:lnRef idx="1">
+            <a:schemeClr val="accent1"/>
+          </a:lnRef>
+          <a:fillRef idx="3">
+            <a:schemeClr val="accent1"/>
+          </a:fillRef>
+          <a:effectRef idx="2">
+            <a:schemeClr val="accent1"/>
+          </a:effectRef>
+          <a:fontRef idx="minor">
+            <a:schemeClr val="lt1"/>
+          </a:fontRef>
+        </p:style>
+        <p:txBody>
+          <a:bodyPr rtlCol="0" anchor="ctr"/>
+          <a:lstStyle/>
+          <a:p>
+            <a:pPr algn="ctr"/>
+          </a:p>
+        </p:txBody>
+      </p:sp>
+      <p:sp>
+        <p:nvSpPr>
+          <p:cNvPr id="9" name="Rectangle 8"/>
+          <p:cNvSpPr/>
+          <p:nvPr/>
+        </p:nvSpPr>
+        <p:spPr>
+          <a:xfrm>
+            <a:off x="640080" y="1783080"/>
+            <a:ext cx="73152" cy="868680"/>
+          </a:xfrm>
+          <a:prstGeom prst="rect">
+            <a:avLst/>
+          </a:prstGeom>
+          <a:solidFill>
+            <a:srgbClr val="61AFEF"/>
+          </a:solidFill>
+          <a:ln>
+            <a:noFill/>
+          </a:ln>
+        </p:spPr>
+        <p:style>
+          <a:lnRef idx="1">
+            <a:schemeClr val="accent1"/>
+          </a:lnRef>
+          <a:fillRef idx="3">
+            <a:schemeClr val="accent1"/>
+          </a:fillRef>
+          <a:effectRef idx="2">
+            <a:schemeClr val="accent1"/>
+          </a:effectRef>
+          <a:fontRef idx="minor">
+            <a:schemeClr val="lt1"/>
+          </a:fontRef>
+        </p:style>
+        <p:txBody>
+          <a:bodyPr rtlCol="0" anchor="ctr"/>
+          <a:lstStyle/>
+          <a:p>
+            <a:pPr algn="ctr"/>
+          </a:p>
+        </p:txBody>
+      </p:sp>
+      <p:sp>
+        <p:nvSpPr>
+          <p:cNvPr id="10" name="TextBox 9"/>
           <p:cNvSpPr txBox="1"/>
           <p:nvPr/>
         </p:nvSpPr>
         <p:spPr>
           <a:xfrm>
-            <a:off x="1828800" y="4389120"/>
-            <a:ext cx="8531352" cy="914400"/>
+            <a:off x="914400" y="1828800"/>
+            <a:ext cx="10241280" cy="777240"/>
           </a:xfrm>
           <a:prstGeom prst="rect">
             <a:avLst/>
@@ -9340,15 +10413,51 @@
           </a:bodyPr>
           <a:lstStyle/>
           <a:p>
-            <a:pPr algn="ctr">
-              <a:defRPr sz="2400">
-                <a:solidFill>
-                  <a:srgbClr val="FFFFFF"/>
-                </a:solidFill>
-              </a:defRPr>
-            </a:pPr>
-            <a:r>
-              <a:t>Chapter 8 Exercises</a:t>
+            <a:pPr>
+              <a:spcAft>
+                <a:spcPts val="200"/>
+              </a:spcAft>
+              <a:defRPr sz="1400">
+                <a:solidFill>
+                  <a:srgbClr val="ABB2BF"/>
+                </a:solidFill>
+                <a:latin typeface="Consolas"/>
+              </a:defRPr>
+            </a:pPr>
+            <a:r>
+              <a:t>unique_ids = {101, 102, 103}</a:t>
+            </a:r>
+          </a:p>
+          <a:p>
+            <a:pPr>
+              <a:spcAft>
+                <a:spcPts val="200"/>
+              </a:spcAft>
+              <a:defRPr sz="1400">
+                <a:solidFill>
+                  <a:srgbClr val="ABB2BF"/>
+                </a:solidFill>
+                <a:latin typeface="Consolas"/>
+              </a:defRPr>
+            </a:pPr>
+            <a:r>
+              <a:t>tags = {"python", "coding"}</a:t>
+            </a:r>
+          </a:p>
+          <a:p>
+            <a:pPr>
+              <a:spcAft>
+                <a:spcPts val="200"/>
+              </a:spcAft>
+              <a:defRPr sz="1400">
+                <a:solidFill>
+                  <a:srgbClr val="ABB2BF"/>
+                </a:solidFill>
+                <a:latin typeface="Consolas"/>
+              </a:defRPr>
+            </a:pPr>
+            <a:r>
+              <a:t>visited_pages = set()</a:t>
             </a:r>
           </a:p>
         </p:txBody>
